--- a/build-reliable-claude-code-workflows.pptx
+++ b/build-reliable-claude-code-workflows.pptx
@@ -2,72 +2,72 @@
 <file path=ppt/presentation.xml><?xml version="1.0" encoding="utf-8"?>
 <p:presentation xmlns:p="http://schemas.openxmlformats.org/presentationml/2006/main">
   <p:sldMasterIdLst>
-    <p:sldMasterId xmlns:r="http://schemas.openxmlformats.org/officeDocument/2006/relationships" id="2147483648" r:id="Rd8e68759150f4740"/>
+    <p:sldMasterId xmlns:r="http://schemas.openxmlformats.org/officeDocument/2006/relationships" id="2147483648" r:id="Rd5029ae6e50e4150"/>
   </p:sldMasterIdLst>
   <p:notesMasterIdLst>
-    <p:notesMasterId xmlns:r="http://schemas.openxmlformats.org/officeDocument/2006/relationships" r:id="R6564423ae4ac4be6"/>
+    <p:notesMasterId xmlns:r="http://schemas.openxmlformats.org/officeDocument/2006/relationships" r:id="R97f4c96cbcb14a2e"/>
   </p:notesMasterIdLst>
   <p:sldIdLst>
-    <p:sldId xmlns:r="http://schemas.openxmlformats.org/officeDocument/2006/relationships" id="256" r:id="Rdf3521a8dfd044bd"/>
-    <p:sldId xmlns:r="http://schemas.openxmlformats.org/officeDocument/2006/relationships" id="257" r:id="Rdff3e7c77a1642cf"/>
-    <p:sldId xmlns:r="http://schemas.openxmlformats.org/officeDocument/2006/relationships" id="258" r:id="R6c136d7c38944d43"/>
-    <p:sldId xmlns:r="http://schemas.openxmlformats.org/officeDocument/2006/relationships" id="259" r:id="R0e2ff8f643454cdf"/>
-    <p:sldId xmlns:r="http://schemas.openxmlformats.org/officeDocument/2006/relationships" id="260" r:id="Rc6142249ed1c4d5b"/>
-    <p:sldId xmlns:r="http://schemas.openxmlformats.org/officeDocument/2006/relationships" id="261" r:id="R632483262f084bf5"/>
-    <p:sldId xmlns:r="http://schemas.openxmlformats.org/officeDocument/2006/relationships" id="262" r:id="Rae91e8c416ad4555"/>
-    <p:sldId xmlns:r="http://schemas.openxmlformats.org/officeDocument/2006/relationships" id="263" r:id="Rcdc6846ec5904c70"/>
-    <p:sldId xmlns:r="http://schemas.openxmlformats.org/officeDocument/2006/relationships" id="264" r:id="R9315fb82306a4127"/>
-    <p:sldId xmlns:r="http://schemas.openxmlformats.org/officeDocument/2006/relationships" id="265" r:id="Rc2400bffa6f1458f"/>
-    <p:sldId xmlns:r="http://schemas.openxmlformats.org/officeDocument/2006/relationships" id="266" r:id="Rc0d33dba47ae4168"/>
-    <p:sldId xmlns:r="http://schemas.openxmlformats.org/officeDocument/2006/relationships" id="267" r:id="Re16a330c9fee4f5a"/>
-    <p:sldId xmlns:r="http://schemas.openxmlformats.org/officeDocument/2006/relationships" id="268" r:id="Ra7d70d28620641b5"/>
-    <p:sldId xmlns:r="http://schemas.openxmlformats.org/officeDocument/2006/relationships" id="269" r:id="R5ac94f8465564f6c"/>
-    <p:sldId xmlns:r="http://schemas.openxmlformats.org/officeDocument/2006/relationships" id="270" r:id="R2100f168b9664a01"/>
-    <p:sldId xmlns:r="http://schemas.openxmlformats.org/officeDocument/2006/relationships" id="271" r:id="R4024a0ea624143d1"/>
-    <p:sldId xmlns:r="http://schemas.openxmlformats.org/officeDocument/2006/relationships" id="272" r:id="R53be40f1aa9d4583"/>
-    <p:sldId xmlns:r="http://schemas.openxmlformats.org/officeDocument/2006/relationships" id="273" r:id="R976694f10aa34796"/>
-    <p:sldId xmlns:r="http://schemas.openxmlformats.org/officeDocument/2006/relationships" id="274" r:id="R3ac6f2fdd9f24c96"/>
-    <p:sldId xmlns:r="http://schemas.openxmlformats.org/officeDocument/2006/relationships" id="275" r:id="Rda3a08c8792f4ceb"/>
-    <p:sldId xmlns:r="http://schemas.openxmlformats.org/officeDocument/2006/relationships" id="276" r:id="R2fa68d6d06ee41ef"/>
-    <p:sldId xmlns:r="http://schemas.openxmlformats.org/officeDocument/2006/relationships" id="277" r:id="R1dbf7b13a776465f"/>
-    <p:sldId xmlns:r="http://schemas.openxmlformats.org/officeDocument/2006/relationships" id="278" r:id="R0ee4639a957b4be3"/>
-    <p:sldId xmlns:r="http://schemas.openxmlformats.org/officeDocument/2006/relationships" id="279" r:id="R0687e51e084b4e30"/>
-    <p:sldId xmlns:r="http://schemas.openxmlformats.org/officeDocument/2006/relationships" id="280" r:id="R288a66b07aa3439e"/>
-    <p:sldId xmlns:r="http://schemas.openxmlformats.org/officeDocument/2006/relationships" id="281" r:id="R31f9e01acb054a97"/>
-    <p:sldId xmlns:r="http://schemas.openxmlformats.org/officeDocument/2006/relationships" id="282" r:id="R921dde3a22544a3c"/>
-    <p:sldId xmlns:r="http://schemas.openxmlformats.org/officeDocument/2006/relationships" id="283" r:id="Ra411f89cbf9a4127"/>
-    <p:sldId xmlns:r="http://schemas.openxmlformats.org/officeDocument/2006/relationships" id="284" r:id="R41ec15cf6c9a4f33"/>
-    <p:sldId xmlns:r="http://schemas.openxmlformats.org/officeDocument/2006/relationships" id="285" r:id="R7c7b680d46a34555"/>
-    <p:sldId xmlns:r="http://schemas.openxmlformats.org/officeDocument/2006/relationships" id="286" r:id="Re5e8537409784215"/>
-    <p:sldId xmlns:r="http://schemas.openxmlformats.org/officeDocument/2006/relationships" id="287" r:id="R8ecf8dfa80084b1e"/>
-    <p:sldId xmlns:r="http://schemas.openxmlformats.org/officeDocument/2006/relationships" id="288" r:id="R45d4c15bb5db4d49"/>
-    <p:sldId xmlns:r="http://schemas.openxmlformats.org/officeDocument/2006/relationships" id="289" r:id="R071103e2f34c4533"/>
-    <p:sldId xmlns:r="http://schemas.openxmlformats.org/officeDocument/2006/relationships" id="290" r:id="R249d9f973ea843da"/>
-    <p:sldId xmlns:r="http://schemas.openxmlformats.org/officeDocument/2006/relationships" id="291" r:id="R58efbce14f0d416a"/>
-    <p:sldId xmlns:r="http://schemas.openxmlformats.org/officeDocument/2006/relationships" id="292" r:id="R86b5f87c83ae4936"/>
-    <p:sldId xmlns:r="http://schemas.openxmlformats.org/officeDocument/2006/relationships" id="293" r:id="R1566eac906be4e17"/>
-    <p:sldId xmlns:r="http://schemas.openxmlformats.org/officeDocument/2006/relationships" id="294" r:id="R79a7372750ab438b"/>
-    <p:sldId xmlns:r="http://schemas.openxmlformats.org/officeDocument/2006/relationships" id="295" r:id="Rbf2c2bd0aa0a47bf"/>
-    <p:sldId xmlns:r="http://schemas.openxmlformats.org/officeDocument/2006/relationships" id="296" r:id="Re2496179ddad4dbe"/>
-    <p:sldId xmlns:r="http://schemas.openxmlformats.org/officeDocument/2006/relationships" id="297" r:id="R52b81df1e216465f"/>
-    <p:sldId xmlns:r="http://schemas.openxmlformats.org/officeDocument/2006/relationships" id="298" r:id="R05799560b80f43fc"/>
-    <p:sldId xmlns:r="http://schemas.openxmlformats.org/officeDocument/2006/relationships" id="299" r:id="R4e93c88c7724478d"/>
-    <p:sldId xmlns:r="http://schemas.openxmlformats.org/officeDocument/2006/relationships" id="300" r:id="Rc56153995b3744f2"/>
-    <p:sldId xmlns:r="http://schemas.openxmlformats.org/officeDocument/2006/relationships" id="301" r:id="R0813f5f1570746be"/>
-    <p:sldId xmlns:r="http://schemas.openxmlformats.org/officeDocument/2006/relationships" id="302" r:id="R3b0ea146e8474108"/>
-    <p:sldId xmlns:r="http://schemas.openxmlformats.org/officeDocument/2006/relationships" id="303" r:id="R253b7fd21cdd4ed1"/>
-    <p:sldId xmlns:r="http://schemas.openxmlformats.org/officeDocument/2006/relationships" id="304" r:id="Rd83488a975df459e"/>
-    <p:sldId xmlns:r="http://schemas.openxmlformats.org/officeDocument/2006/relationships" id="305" r:id="R06b0e42f1e5f4b71"/>
-    <p:sldId xmlns:r="http://schemas.openxmlformats.org/officeDocument/2006/relationships" id="306" r:id="Ra3f4c24e0c924ac5"/>
-    <p:sldId xmlns:r="http://schemas.openxmlformats.org/officeDocument/2006/relationships" id="307" r:id="Rcc2226c02ae9455b"/>
-    <p:sldId xmlns:r="http://schemas.openxmlformats.org/officeDocument/2006/relationships" id="308" r:id="R708975985d204401"/>
-    <p:sldId xmlns:r="http://schemas.openxmlformats.org/officeDocument/2006/relationships" id="309" r:id="R2da16d6aa9714d2e"/>
-    <p:sldId xmlns:r="http://schemas.openxmlformats.org/officeDocument/2006/relationships" id="310" r:id="Ra5f8da52248d4e20"/>
-    <p:sldId xmlns:r="http://schemas.openxmlformats.org/officeDocument/2006/relationships" id="311" r:id="R1ebf2e3db1fa4f72"/>
-    <p:sldId xmlns:r="http://schemas.openxmlformats.org/officeDocument/2006/relationships" id="312" r:id="Rc12eebaef03f4c45"/>
-    <p:sldId xmlns:r="http://schemas.openxmlformats.org/officeDocument/2006/relationships" id="313" r:id="R7da9d883e798425b"/>
-    <p:sldId xmlns:r="http://schemas.openxmlformats.org/officeDocument/2006/relationships" id="314" r:id="Rc01c05a503514796"/>
-    <p:sldId xmlns:r="http://schemas.openxmlformats.org/officeDocument/2006/relationships" id="315" r:id="R6ffa9456c9ba4cba"/>
+    <p:sldId xmlns:r="http://schemas.openxmlformats.org/officeDocument/2006/relationships" id="256" r:id="R7ae6c5f5200e4be8"/>
+    <p:sldId xmlns:r="http://schemas.openxmlformats.org/officeDocument/2006/relationships" id="257" r:id="R2a875e61afd34f92"/>
+    <p:sldId xmlns:r="http://schemas.openxmlformats.org/officeDocument/2006/relationships" id="258" r:id="Re7050f3cab214bac"/>
+    <p:sldId xmlns:r="http://schemas.openxmlformats.org/officeDocument/2006/relationships" id="259" r:id="R63260e4ff1094f19"/>
+    <p:sldId xmlns:r="http://schemas.openxmlformats.org/officeDocument/2006/relationships" id="260" r:id="R7481e760cc4f4368"/>
+    <p:sldId xmlns:r="http://schemas.openxmlformats.org/officeDocument/2006/relationships" id="261" r:id="Rbb18eadf0ddc4ea0"/>
+    <p:sldId xmlns:r="http://schemas.openxmlformats.org/officeDocument/2006/relationships" id="262" r:id="Re4bdb28713c94818"/>
+    <p:sldId xmlns:r="http://schemas.openxmlformats.org/officeDocument/2006/relationships" id="263" r:id="Rc1ad1c5b1a994547"/>
+    <p:sldId xmlns:r="http://schemas.openxmlformats.org/officeDocument/2006/relationships" id="264" r:id="Rf1b327cdfbe14bee"/>
+    <p:sldId xmlns:r="http://schemas.openxmlformats.org/officeDocument/2006/relationships" id="265" r:id="Rb1df2c534a23496c"/>
+    <p:sldId xmlns:r="http://schemas.openxmlformats.org/officeDocument/2006/relationships" id="266" r:id="R795c635080a94d47"/>
+    <p:sldId xmlns:r="http://schemas.openxmlformats.org/officeDocument/2006/relationships" id="267" r:id="R14238cb905ac43a0"/>
+    <p:sldId xmlns:r="http://schemas.openxmlformats.org/officeDocument/2006/relationships" id="268" r:id="R8c153ef3d07d4c93"/>
+    <p:sldId xmlns:r="http://schemas.openxmlformats.org/officeDocument/2006/relationships" id="269" r:id="R8d26237da3b44860"/>
+    <p:sldId xmlns:r="http://schemas.openxmlformats.org/officeDocument/2006/relationships" id="270" r:id="R4684f94802224f3d"/>
+    <p:sldId xmlns:r="http://schemas.openxmlformats.org/officeDocument/2006/relationships" id="271" r:id="R109fc0d741e04d3d"/>
+    <p:sldId xmlns:r="http://schemas.openxmlformats.org/officeDocument/2006/relationships" id="272" r:id="R72a3639bc13e4e17"/>
+    <p:sldId xmlns:r="http://schemas.openxmlformats.org/officeDocument/2006/relationships" id="273" r:id="R675886a05b9842e9"/>
+    <p:sldId xmlns:r="http://schemas.openxmlformats.org/officeDocument/2006/relationships" id="274" r:id="Rc21e1499a40849b6"/>
+    <p:sldId xmlns:r="http://schemas.openxmlformats.org/officeDocument/2006/relationships" id="275" r:id="R70c9001ae9fc4d85"/>
+    <p:sldId xmlns:r="http://schemas.openxmlformats.org/officeDocument/2006/relationships" id="276" r:id="R3593324e7b5a4005"/>
+    <p:sldId xmlns:r="http://schemas.openxmlformats.org/officeDocument/2006/relationships" id="277" r:id="R0ccdf30f7a98416e"/>
+    <p:sldId xmlns:r="http://schemas.openxmlformats.org/officeDocument/2006/relationships" id="278" r:id="R3a4721e2e03c4abc"/>
+    <p:sldId xmlns:r="http://schemas.openxmlformats.org/officeDocument/2006/relationships" id="279" r:id="R64619b5a47104a29"/>
+    <p:sldId xmlns:r="http://schemas.openxmlformats.org/officeDocument/2006/relationships" id="280" r:id="Rbd4757d7b7b84a8f"/>
+    <p:sldId xmlns:r="http://schemas.openxmlformats.org/officeDocument/2006/relationships" id="281" r:id="R280e2b26cd6c4979"/>
+    <p:sldId xmlns:r="http://schemas.openxmlformats.org/officeDocument/2006/relationships" id="282" r:id="R2e117b2ae0fe4c27"/>
+    <p:sldId xmlns:r="http://schemas.openxmlformats.org/officeDocument/2006/relationships" id="283" r:id="R7e9a8197c350414d"/>
+    <p:sldId xmlns:r="http://schemas.openxmlformats.org/officeDocument/2006/relationships" id="284" r:id="R33bf170d1c1b4bc2"/>
+    <p:sldId xmlns:r="http://schemas.openxmlformats.org/officeDocument/2006/relationships" id="285" r:id="R581aee702d224aec"/>
+    <p:sldId xmlns:r="http://schemas.openxmlformats.org/officeDocument/2006/relationships" id="286" r:id="R9698940dfb344929"/>
+    <p:sldId xmlns:r="http://schemas.openxmlformats.org/officeDocument/2006/relationships" id="287" r:id="R42e8b894e1274131"/>
+    <p:sldId xmlns:r="http://schemas.openxmlformats.org/officeDocument/2006/relationships" id="288" r:id="R76864a6beeff41e5"/>
+    <p:sldId xmlns:r="http://schemas.openxmlformats.org/officeDocument/2006/relationships" id="289" r:id="Rc693534436684a38"/>
+    <p:sldId xmlns:r="http://schemas.openxmlformats.org/officeDocument/2006/relationships" id="290" r:id="Rde463e535d0041b9"/>
+    <p:sldId xmlns:r="http://schemas.openxmlformats.org/officeDocument/2006/relationships" id="291" r:id="Rf6c6b5144eb04f6b"/>
+    <p:sldId xmlns:r="http://schemas.openxmlformats.org/officeDocument/2006/relationships" id="292" r:id="R1c8c0d00be484b02"/>
+    <p:sldId xmlns:r="http://schemas.openxmlformats.org/officeDocument/2006/relationships" id="293" r:id="R74d5876455fe4adb"/>
+    <p:sldId xmlns:r="http://schemas.openxmlformats.org/officeDocument/2006/relationships" id="294" r:id="Rce691780630f4e60"/>
+    <p:sldId xmlns:r="http://schemas.openxmlformats.org/officeDocument/2006/relationships" id="295" r:id="Ra4dc3890bedf45ec"/>
+    <p:sldId xmlns:r="http://schemas.openxmlformats.org/officeDocument/2006/relationships" id="296" r:id="Rab42e57877c94879"/>
+    <p:sldId xmlns:r="http://schemas.openxmlformats.org/officeDocument/2006/relationships" id="297" r:id="Rf0910ca893f04739"/>
+    <p:sldId xmlns:r="http://schemas.openxmlformats.org/officeDocument/2006/relationships" id="298" r:id="Rdc5621cd68024985"/>
+    <p:sldId xmlns:r="http://schemas.openxmlformats.org/officeDocument/2006/relationships" id="299" r:id="R2a71245068cd499f"/>
+    <p:sldId xmlns:r="http://schemas.openxmlformats.org/officeDocument/2006/relationships" id="300" r:id="R4afab023d4a14af0"/>
+    <p:sldId xmlns:r="http://schemas.openxmlformats.org/officeDocument/2006/relationships" id="301" r:id="R054472b089874c89"/>
+    <p:sldId xmlns:r="http://schemas.openxmlformats.org/officeDocument/2006/relationships" id="302" r:id="R0428270de4af42a5"/>
+    <p:sldId xmlns:r="http://schemas.openxmlformats.org/officeDocument/2006/relationships" id="303" r:id="R491712855a544475"/>
+    <p:sldId xmlns:r="http://schemas.openxmlformats.org/officeDocument/2006/relationships" id="304" r:id="R90fffe73f7614c63"/>
+    <p:sldId xmlns:r="http://schemas.openxmlformats.org/officeDocument/2006/relationships" id="305" r:id="R7826e0ae41d84d0c"/>
+    <p:sldId xmlns:r="http://schemas.openxmlformats.org/officeDocument/2006/relationships" id="306" r:id="Rc7eb4b09f3e6405a"/>
+    <p:sldId xmlns:r="http://schemas.openxmlformats.org/officeDocument/2006/relationships" id="307" r:id="Rc9f5a7865ea94a15"/>
+    <p:sldId xmlns:r="http://schemas.openxmlformats.org/officeDocument/2006/relationships" id="308" r:id="R2d5ec65212d64d5f"/>
+    <p:sldId xmlns:r="http://schemas.openxmlformats.org/officeDocument/2006/relationships" id="309" r:id="Rfacec637e1da47f8"/>
+    <p:sldId xmlns:r="http://schemas.openxmlformats.org/officeDocument/2006/relationships" id="310" r:id="Rfc65421c02ce45d9"/>
+    <p:sldId xmlns:r="http://schemas.openxmlformats.org/officeDocument/2006/relationships" id="311" r:id="R9503c7ed31d746cc"/>
+    <p:sldId xmlns:r="http://schemas.openxmlformats.org/officeDocument/2006/relationships" id="312" r:id="R49195153b85b4c2d"/>
+    <p:sldId xmlns:r="http://schemas.openxmlformats.org/officeDocument/2006/relationships" id="313" r:id="Racfc27ddf1a5417c"/>
+    <p:sldId xmlns:r="http://schemas.openxmlformats.org/officeDocument/2006/relationships" id="314" r:id="Re283b9d69609403d"/>
+    <p:sldId xmlns:r="http://schemas.openxmlformats.org/officeDocument/2006/relationships" id="315" r:id="Rb9af24ee955a4418"/>
   </p:sldIdLst>
   <p:sldSz cx="12192000" cy="6858000"/>
   <p:notesSz cx="6858000" cy="9144000"/>
@@ -4554,7 +4554,7 @@
   </p:cSld>
   <p:clrMap bg1="lt1" tx1="dk1" bg2="lt2" tx2="dk2" accent1="accent1" accent2="accent2" accent3="accent3" accent4="accent4" accent5="accent5" accent6="accent6" hlink="hlink" folHlink="folHlink"/>
   <p:sldLayoutIdLst>
-    <p:sldLayoutId xmlns:r="http://schemas.openxmlformats.org/officeDocument/2006/relationships" id="2147483649" r:id="R4117830162994df2"/>
+    <p:sldLayoutId xmlns:r="http://schemas.openxmlformats.org/officeDocument/2006/relationships" id="2147483649" r:id="R2ab4b8d7134e4a67"/>
   </p:sldLayoutIdLst>
   <p:txStyles>
     <p:titleStyle>
@@ -5105,7 +5105,7 @@
           <p:cNvPr id="1" name="">
             <a:extLst xmlns:a="http://schemas.openxmlformats.org/drawingml/2006/main">
               <a:ext uri="{FF2B5EF4-FFF2-40B4-BE49-F238E27FC236}">
-                <a16:creationId xmlns:a16="http://schemas.microsoft.com/office/drawing/2014/main" id="{51AA2C38-517F-476B-899E-85E1AACA4308}"/>
+                <a16:creationId xmlns:a16="http://schemas.microsoft.com/office/drawing/2014/main" id="{20A4F014-B435-4007-AFA3-B1F71D137B8F}"/>
               </a:ext>
             </a:extLst>
           </p:cNvPr>
@@ -5138,7 +5138,7 @@
           <p:cNvPr id="2" name="">
             <a:extLst xmlns:a="http://schemas.openxmlformats.org/drawingml/2006/main">
               <a:ext uri="{FF2B5EF4-FFF2-40B4-BE49-F238E27FC236}">
-                <a16:creationId xmlns:a16="http://schemas.microsoft.com/office/drawing/2014/main" id="{A6BC7496-9BA9-4749-9473-98415DD65EF4}"/>
+                <a16:creationId xmlns:a16="http://schemas.microsoft.com/office/drawing/2014/main" id="{AD7BFA4D-5F17-4B94-9F72-0A119E640FA9}"/>
               </a:ext>
             </a:extLst>
           </p:cNvPr>
@@ -5194,7 +5194,7 @@
           <p:cNvPr id="3" name="">
             <a:extLst xmlns:a="http://schemas.openxmlformats.org/drawingml/2006/main">
               <a:ext uri="{FF2B5EF4-FFF2-40B4-BE49-F238E27FC236}">
-                <a16:creationId xmlns:a16="http://schemas.microsoft.com/office/drawing/2014/main" id="{23204F4B-D12A-426F-B5D8-E5803DF6D0DA}"/>
+                <a16:creationId xmlns:a16="http://schemas.microsoft.com/office/drawing/2014/main" id="{26B37DC8-2A6B-46B9-900D-CAB270B6E767}"/>
               </a:ext>
             </a:extLst>
           </p:cNvPr>
@@ -5250,7 +5250,7 @@
           <p:cNvPr id="4" name="">
             <a:extLst xmlns:a="http://schemas.openxmlformats.org/drawingml/2006/main">
               <a:ext uri="{FF2B5EF4-FFF2-40B4-BE49-F238E27FC236}">
-                <a16:creationId xmlns:a16="http://schemas.microsoft.com/office/drawing/2014/main" id="{F683A969-BCD7-455D-9DBC-911D05CF70B7}"/>
+                <a16:creationId xmlns:a16="http://schemas.microsoft.com/office/drawing/2014/main" id="{D7F28DB2-ABC4-475F-972A-0BCDBC13F29C}"/>
               </a:ext>
             </a:extLst>
           </p:cNvPr>
@@ -5306,7 +5306,7 @@
           <p:cNvPr id="5" name="">
             <a:extLst xmlns:a="http://schemas.openxmlformats.org/drawingml/2006/main">
               <a:ext uri="{FF2B5EF4-FFF2-40B4-BE49-F238E27FC236}">
-                <a16:creationId xmlns:a16="http://schemas.microsoft.com/office/drawing/2014/main" id="{8E034BCA-277B-4275-B7AC-2B9DCD0C68CB}"/>
+                <a16:creationId xmlns:a16="http://schemas.microsoft.com/office/drawing/2014/main" id="{F03A9B97-31B2-4DAC-8946-BAABD8E236D3}"/>
               </a:ext>
             </a:extLst>
           </p:cNvPr>
@@ -5341,7 +5341,7 @@
           <p:cNvPr id="6" name="">
             <a:extLst xmlns:a="http://schemas.openxmlformats.org/drawingml/2006/main">
               <a:ext uri="{FF2B5EF4-FFF2-40B4-BE49-F238E27FC236}">
-                <a16:creationId xmlns:a16="http://schemas.microsoft.com/office/drawing/2014/main" id="{47781021-50B7-4344-9759-74C96F2335FD}"/>
+                <a16:creationId xmlns:a16="http://schemas.microsoft.com/office/drawing/2014/main" id="{CBE27610-F110-42A3-B19B-89EE6D375A21}"/>
               </a:ext>
             </a:extLst>
           </p:cNvPr>
@@ -5397,7 +5397,7 @@
           <p:cNvPr id="7" name="">
             <a:extLst xmlns:a="http://schemas.openxmlformats.org/drawingml/2006/main">
               <a:ext uri="{FF2B5EF4-FFF2-40B4-BE49-F238E27FC236}">
-                <a16:creationId xmlns:a16="http://schemas.microsoft.com/office/drawing/2014/main" id="{9A10943C-3111-4153-AE0D-E33202469CB9}"/>
+                <a16:creationId xmlns:a16="http://schemas.microsoft.com/office/drawing/2014/main" id="{8FB65239-69E6-47AF-B70F-C7949363E02C}"/>
               </a:ext>
             </a:extLst>
           </p:cNvPr>
@@ -5451,7 +5451,7 @@
     </p:spTree>
     <p:extLst>
       <p:ext uri="{BB962C8B-B14F-4D97-AF65-F5344CB8AC3E}">
-        <p14:creationId xmlns:p14="http://schemas.microsoft.com/office/powerpoint/2010/main" val="631007161"/>
+        <p14:creationId xmlns:p14="http://schemas.microsoft.com/office/powerpoint/2010/main" val="1604147280"/>
       </p:ext>
     </p:extLst>
   </p:cSld>
@@ -5482,7 +5482,7 @@
           <p:cNvPr id="1" name="">
             <a:extLst xmlns:a="http://schemas.openxmlformats.org/drawingml/2006/main">
               <a:ext uri="{FF2B5EF4-FFF2-40B4-BE49-F238E27FC236}">
-                <a16:creationId xmlns:a16="http://schemas.microsoft.com/office/drawing/2014/main" id="{916F3AE3-3502-4051-8AE0-F747D9D89871}"/>
+                <a16:creationId xmlns:a16="http://schemas.microsoft.com/office/drawing/2014/main" id="{A5F59B8B-63F4-4D23-A6E5-B02D6EEC11AB}"/>
               </a:ext>
             </a:extLst>
           </p:cNvPr>
@@ -5515,7 +5515,7 @@
           <p:cNvPr id="2" name="">
             <a:extLst xmlns:a="http://schemas.openxmlformats.org/drawingml/2006/main">
               <a:ext uri="{FF2B5EF4-FFF2-40B4-BE49-F238E27FC236}">
-                <a16:creationId xmlns:a16="http://schemas.microsoft.com/office/drawing/2014/main" id="{0A07FA29-97D5-4EC9-B38D-A6744FB81DCE}"/>
+                <a16:creationId xmlns:a16="http://schemas.microsoft.com/office/drawing/2014/main" id="{B6B1A4BE-5727-481C-980D-7A0CF1AB6CE1}"/>
               </a:ext>
             </a:extLst>
           </p:cNvPr>
@@ -5571,7 +5571,7 @@
           <p:cNvPr id="3" name="">
             <a:extLst xmlns:a="http://schemas.openxmlformats.org/drawingml/2006/main">
               <a:ext uri="{FF2B5EF4-FFF2-40B4-BE49-F238E27FC236}">
-                <a16:creationId xmlns:a16="http://schemas.microsoft.com/office/drawing/2014/main" id="{7182AE31-FDB4-472D-8565-8D6A583EB32E}"/>
+                <a16:creationId xmlns:a16="http://schemas.microsoft.com/office/drawing/2014/main" id="{E312C659-3B65-45C0-AB1F-86D29AFAC188}"/>
               </a:ext>
             </a:extLst>
           </p:cNvPr>
@@ -5627,7 +5627,7 @@
           <p:cNvPr id="4" name="">
             <a:extLst xmlns:a="http://schemas.openxmlformats.org/drawingml/2006/main">
               <a:ext uri="{FF2B5EF4-FFF2-40B4-BE49-F238E27FC236}">
-                <a16:creationId xmlns:a16="http://schemas.microsoft.com/office/drawing/2014/main" id="{D34FC239-996C-40F6-BD14-283795B8B736}"/>
+                <a16:creationId xmlns:a16="http://schemas.microsoft.com/office/drawing/2014/main" id="{7B945D9C-E480-4884-BAF3-034A2E3DEF53}"/>
               </a:ext>
             </a:extLst>
           </p:cNvPr>
@@ -5662,7 +5662,7 @@
           <p:cNvPr id="5" name="">
             <a:extLst xmlns:a="http://schemas.openxmlformats.org/drawingml/2006/main">
               <a:ext uri="{FF2B5EF4-FFF2-40B4-BE49-F238E27FC236}">
-                <a16:creationId xmlns:a16="http://schemas.microsoft.com/office/drawing/2014/main" id="{3E22309C-569C-4228-8602-9805C7D78D70}"/>
+                <a16:creationId xmlns:a16="http://schemas.microsoft.com/office/drawing/2014/main" id="{9E644F54-AE18-43FE-81D4-42F844684B34}"/>
               </a:ext>
             </a:extLst>
           </p:cNvPr>
@@ -5718,7 +5718,7 @@
           <p:cNvPr id="6" name="">
             <a:extLst xmlns:a="http://schemas.openxmlformats.org/drawingml/2006/main">
               <a:ext uri="{FF2B5EF4-FFF2-40B4-BE49-F238E27FC236}">
-                <a16:creationId xmlns:a16="http://schemas.microsoft.com/office/drawing/2014/main" id="{7D1E864D-296D-44C4-B5FD-88EC24E9ABA5}"/>
+                <a16:creationId xmlns:a16="http://schemas.microsoft.com/office/drawing/2014/main" id="{23D9850B-4782-44E9-BFB0-F5351055FA72}"/>
               </a:ext>
             </a:extLst>
           </p:cNvPr>
@@ -5843,7 +5843,7 @@
           <p:cNvPr id="7" name="">
             <a:extLst xmlns:a="http://schemas.openxmlformats.org/drawingml/2006/main">
               <a:ext uri="{FF2B5EF4-FFF2-40B4-BE49-F238E27FC236}">
-                <a16:creationId xmlns:a16="http://schemas.microsoft.com/office/drawing/2014/main" id="{55744E34-005E-4FC6-AA0B-15D6764393A1}"/>
+                <a16:creationId xmlns:a16="http://schemas.microsoft.com/office/drawing/2014/main" id="{A2641828-1DD9-4D63-88F7-91742E888DB2}"/>
               </a:ext>
             </a:extLst>
           </p:cNvPr>
@@ -5878,7 +5878,7 @@
           <p:cNvPr id="8" name="">
             <a:extLst xmlns:a="http://schemas.openxmlformats.org/drawingml/2006/main">
               <a:ext uri="{FF2B5EF4-FFF2-40B4-BE49-F238E27FC236}">
-                <a16:creationId xmlns:a16="http://schemas.microsoft.com/office/drawing/2014/main" id="{E7FF1411-E95A-43B8-A604-36A5FF084269}"/>
+                <a16:creationId xmlns:a16="http://schemas.microsoft.com/office/drawing/2014/main" id="{35A305C6-EB16-47C9-9257-0CB063940FF2}"/>
               </a:ext>
             </a:extLst>
           </p:cNvPr>
@@ -5934,7 +5934,7 @@
           <p:cNvPr id="9" name="">
             <a:extLst xmlns:a="http://schemas.openxmlformats.org/drawingml/2006/main">
               <a:ext uri="{FF2B5EF4-FFF2-40B4-BE49-F238E27FC236}">
-                <a16:creationId xmlns:a16="http://schemas.microsoft.com/office/drawing/2014/main" id="{98FD0BA1-AEFD-4C12-B2E9-E251216BC34F}"/>
+                <a16:creationId xmlns:a16="http://schemas.microsoft.com/office/drawing/2014/main" id="{E2EAC68E-A6E1-40CC-954C-23B74997EE01}"/>
               </a:ext>
             </a:extLst>
           </p:cNvPr>
@@ -5988,7 +5988,7 @@
     </p:spTree>
     <p:extLst>
       <p:ext uri="{BB962C8B-B14F-4D97-AF65-F5344CB8AC3E}">
-        <p14:creationId xmlns:p14="http://schemas.microsoft.com/office/powerpoint/2010/main" val="543782349"/>
+        <p14:creationId xmlns:p14="http://schemas.microsoft.com/office/powerpoint/2010/main" val="1615007664"/>
       </p:ext>
     </p:extLst>
   </p:cSld>
@@ -6019,7 +6019,7 @@
           <p:cNvPr id="1" name="">
             <a:extLst xmlns:a="http://schemas.openxmlformats.org/drawingml/2006/main">
               <a:ext uri="{FF2B5EF4-FFF2-40B4-BE49-F238E27FC236}">
-                <a16:creationId xmlns:a16="http://schemas.microsoft.com/office/drawing/2014/main" id="{78A908A2-6139-47B7-AB3E-3ED6498F27DB}"/>
+                <a16:creationId xmlns:a16="http://schemas.microsoft.com/office/drawing/2014/main" id="{B79090AF-97C3-428E-B857-262D68286534}"/>
               </a:ext>
             </a:extLst>
           </p:cNvPr>
@@ -6052,7 +6052,7 @@
           <p:cNvPr id="2" name="">
             <a:extLst xmlns:a="http://schemas.openxmlformats.org/drawingml/2006/main">
               <a:ext uri="{FF2B5EF4-FFF2-40B4-BE49-F238E27FC236}">
-                <a16:creationId xmlns:a16="http://schemas.microsoft.com/office/drawing/2014/main" id="{DBB1AA71-CD6F-4D44-9D50-F6A1DAAE4F02}"/>
+                <a16:creationId xmlns:a16="http://schemas.microsoft.com/office/drawing/2014/main" id="{A6556FE6-F441-46D3-947A-D34335ADF8D3}"/>
               </a:ext>
             </a:extLst>
           </p:cNvPr>
@@ -6108,7 +6108,7 @@
           <p:cNvPr id="3" name="">
             <a:extLst xmlns:a="http://schemas.openxmlformats.org/drawingml/2006/main">
               <a:ext uri="{FF2B5EF4-FFF2-40B4-BE49-F238E27FC236}">
-                <a16:creationId xmlns:a16="http://schemas.microsoft.com/office/drawing/2014/main" id="{9B2A0AEE-D0D6-4141-A673-ED01CAF30C2C}"/>
+                <a16:creationId xmlns:a16="http://schemas.microsoft.com/office/drawing/2014/main" id="{63CA347A-CDA2-4500-8EE4-A37FD3A51B24}"/>
               </a:ext>
             </a:extLst>
           </p:cNvPr>
@@ -6164,7 +6164,7 @@
           <p:cNvPr id="4" name="">
             <a:extLst xmlns:a="http://schemas.openxmlformats.org/drawingml/2006/main">
               <a:ext uri="{FF2B5EF4-FFF2-40B4-BE49-F238E27FC236}">
-                <a16:creationId xmlns:a16="http://schemas.microsoft.com/office/drawing/2014/main" id="{EDBDFF40-559E-44E4-B3C2-6DD7297F4E58}"/>
+                <a16:creationId xmlns:a16="http://schemas.microsoft.com/office/drawing/2014/main" id="{1191BE63-6614-42B3-B0FE-DF788C3B707A}"/>
               </a:ext>
             </a:extLst>
           </p:cNvPr>
@@ -6199,7 +6199,7 @@
           <p:cNvPr id="5" name="">
             <a:extLst xmlns:a="http://schemas.openxmlformats.org/drawingml/2006/main">
               <a:ext uri="{FF2B5EF4-FFF2-40B4-BE49-F238E27FC236}">
-                <a16:creationId xmlns:a16="http://schemas.microsoft.com/office/drawing/2014/main" id="{DFFE0445-C61F-4114-93F2-2D17F57EC36C}"/>
+                <a16:creationId xmlns:a16="http://schemas.microsoft.com/office/drawing/2014/main" id="{FF36B035-D551-4186-8837-8B356637DD87}"/>
               </a:ext>
             </a:extLst>
           </p:cNvPr>
@@ -6255,7 +6255,7 @@
           <p:cNvPr id="6" name="">
             <a:extLst xmlns:a="http://schemas.openxmlformats.org/drawingml/2006/main">
               <a:ext uri="{FF2B5EF4-FFF2-40B4-BE49-F238E27FC236}">
-                <a16:creationId xmlns:a16="http://schemas.microsoft.com/office/drawing/2014/main" id="{A152449D-6D31-44A3-925A-7F05E4332283}"/>
+                <a16:creationId xmlns:a16="http://schemas.microsoft.com/office/drawing/2014/main" id="{53614A05-B3BE-48F7-9AF9-407D5837A4BD}"/>
               </a:ext>
             </a:extLst>
           </p:cNvPr>
@@ -6290,7 +6290,7 @@
           <p:cNvPr id="7" name="">
             <a:extLst xmlns:a="http://schemas.openxmlformats.org/drawingml/2006/main">
               <a:ext uri="{FF2B5EF4-FFF2-40B4-BE49-F238E27FC236}">
-                <a16:creationId xmlns:a16="http://schemas.microsoft.com/office/drawing/2014/main" id="{E8859BA4-7589-44F1-A2FF-B12487FD8CC6}"/>
+                <a16:creationId xmlns:a16="http://schemas.microsoft.com/office/drawing/2014/main" id="{BFC2B0E3-0A49-4139-B570-F3846E401672}"/>
               </a:ext>
             </a:extLst>
           </p:cNvPr>
@@ -6346,7 +6346,7 @@
           <p:cNvPr id="8" name="">
             <a:extLst xmlns:a="http://schemas.openxmlformats.org/drawingml/2006/main">
               <a:ext uri="{FF2B5EF4-FFF2-40B4-BE49-F238E27FC236}">
-                <a16:creationId xmlns:a16="http://schemas.microsoft.com/office/drawing/2014/main" id="{8ACD947D-CD13-4F7B-972F-BEA7EC91E73B}"/>
+                <a16:creationId xmlns:a16="http://schemas.microsoft.com/office/drawing/2014/main" id="{9D0607A3-D408-42E2-8AE8-E232BBD9A3F0}"/>
               </a:ext>
             </a:extLst>
           </p:cNvPr>
@@ -6381,7 +6381,7 @@
           <p:cNvPr id="9" name="">
             <a:extLst xmlns:a="http://schemas.openxmlformats.org/drawingml/2006/main">
               <a:ext uri="{FF2B5EF4-FFF2-40B4-BE49-F238E27FC236}">
-                <a16:creationId xmlns:a16="http://schemas.microsoft.com/office/drawing/2014/main" id="{2D096AEC-F573-4C7B-9165-5E3176B51CDE}"/>
+                <a16:creationId xmlns:a16="http://schemas.microsoft.com/office/drawing/2014/main" id="{21663FE4-F7D6-4C7C-A29E-808D1ADC1AB4}"/>
               </a:ext>
             </a:extLst>
           </p:cNvPr>
@@ -6437,7 +6437,7 @@
           <p:cNvPr id="10" name="">
             <a:extLst xmlns:a="http://schemas.openxmlformats.org/drawingml/2006/main">
               <a:ext uri="{FF2B5EF4-FFF2-40B4-BE49-F238E27FC236}">
-                <a16:creationId xmlns:a16="http://schemas.microsoft.com/office/drawing/2014/main" id="{C615F7C2-4C0F-463C-A9E0-8ECFC69722C7}"/>
+                <a16:creationId xmlns:a16="http://schemas.microsoft.com/office/drawing/2014/main" id="{9DF5F936-0CE0-4A25-A994-1841CB3B4B47}"/>
               </a:ext>
             </a:extLst>
           </p:cNvPr>
@@ -6472,7 +6472,7 @@
           <p:cNvPr id="11" name="">
             <a:extLst xmlns:a="http://schemas.openxmlformats.org/drawingml/2006/main">
               <a:ext uri="{FF2B5EF4-FFF2-40B4-BE49-F238E27FC236}">
-                <a16:creationId xmlns:a16="http://schemas.microsoft.com/office/drawing/2014/main" id="{DED63949-5F90-4C57-8ACB-219223282F70}"/>
+                <a16:creationId xmlns:a16="http://schemas.microsoft.com/office/drawing/2014/main" id="{E39E3E2D-1A9B-47B8-81A9-C8354F3CA5ED}"/>
               </a:ext>
             </a:extLst>
           </p:cNvPr>
@@ -6528,7 +6528,7 @@
           <p:cNvPr id="12" name="">
             <a:extLst xmlns:a="http://schemas.openxmlformats.org/drawingml/2006/main">
               <a:ext uri="{FF2B5EF4-FFF2-40B4-BE49-F238E27FC236}">
-                <a16:creationId xmlns:a16="http://schemas.microsoft.com/office/drawing/2014/main" id="{DAC8D3CB-38D8-4D5F-A28F-024FA56E4F90}"/>
+                <a16:creationId xmlns:a16="http://schemas.microsoft.com/office/drawing/2014/main" id="{07F7C89F-8D37-48A1-85C5-AC1E8208FF73}"/>
               </a:ext>
             </a:extLst>
           </p:cNvPr>
@@ -6582,7 +6582,7 @@
     </p:spTree>
     <p:extLst>
       <p:ext uri="{BB962C8B-B14F-4D97-AF65-F5344CB8AC3E}">
-        <p14:creationId xmlns:p14="http://schemas.microsoft.com/office/powerpoint/2010/main" val="483525207"/>
+        <p14:creationId xmlns:p14="http://schemas.microsoft.com/office/powerpoint/2010/main" val="1922160491"/>
       </p:ext>
     </p:extLst>
   </p:cSld>
@@ -6613,7 +6613,7 @@
           <p:cNvPr id="1" name="">
             <a:extLst xmlns:a="http://schemas.openxmlformats.org/drawingml/2006/main">
               <a:ext uri="{FF2B5EF4-FFF2-40B4-BE49-F238E27FC236}">
-                <a16:creationId xmlns:a16="http://schemas.microsoft.com/office/drawing/2014/main" id="{1CC7A8DC-6462-44EB-ACDD-9D4A091744E9}"/>
+                <a16:creationId xmlns:a16="http://schemas.microsoft.com/office/drawing/2014/main" id="{4952FF9F-F9EF-4842-806B-A65A35D57E92}"/>
               </a:ext>
             </a:extLst>
           </p:cNvPr>
@@ -6646,7 +6646,7 @@
           <p:cNvPr id="2" name="">
             <a:extLst xmlns:a="http://schemas.openxmlformats.org/drawingml/2006/main">
               <a:ext uri="{FF2B5EF4-FFF2-40B4-BE49-F238E27FC236}">
-                <a16:creationId xmlns:a16="http://schemas.microsoft.com/office/drawing/2014/main" id="{7187D232-CE5D-49AD-8E8E-FB202E9A4093}"/>
+                <a16:creationId xmlns:a16="http://schemas.microsoft.com/office/drawing/2014/main" id="{B51FF0AD-C443-4BDC-8BA7-3575620E1033}"/>
               </a:ext>
             </a:extLst>
           </p:cNvPr>
@@ -6702,7 +6702,7 @@
           <p:cNvPr id="3" name="">
             <a:extLst xmlns:a="http://schemas.openxmlformats.org/drawingml/2006/main">
               <a:ext uri="{FF2B5EF4-FFF2-40B4-BE49-F238E27FC236}">
-                <a16:creationId xmlns:a16="http://schemas.microsoft.com/office/drawing/2014/main" id="{54808AB1-6139-425B-85FF-A5E148889214}"/>
+                <a16:creationId xmlns:a16="http://schemas.microsoft.com/office/drawing/2014/main" id="{1B4F9237-4509-42E9-B0C6-08C0CA2FC63B}"/>
               </a:ext>
             </a:extLst>
           </p:cNvPr>
@@ -6758,7 +6758,7 @@
           <p:cNvPr id="4" name="">
             <a:extLst xmlns:a="http://schemas.openxmlformats.org/drawingml/2006/main">
               <a:ext uri="{FF2B5EF4-FFF2-40B4-BE49-F238E27FC236}">
-                <a16:creationId xmlns:a16="http://schemas.microsoft.com/office/drawing/2014/main" id="{4912C642-053A-419D-A7D0-D1D88134C264}"/>
+                <a16:creationId xmlns:a16="http://schemas.microsoft.com/office/drawing/2014/main" id="{6849CD25-C3F1-46E7-B251-2CB24155CC1B}"/>
               </a:ext>
             </a:extLst>
           </p:cNvPr>
@@ -6793,7 +6793,7 @@
           <p:cNvPr id="5" name="">
             <a:extLst xmlns:a="http://schemas.openxmlformats.org/drawingml/2006/main">
               <a:ext uri="{FF2B5EF4-FFF2-40B4-BE49-F238E27FC236}">
-                <a16:creationId xmlns:a16="http://schemas.microsoft.com/office/drawing/2014/main" id="{9B15A720-229C-451A-BCE0-6AAC6E18FA9E}"/>
+                <a16:creationId xmlns:a16="http://schemas.microsoft.com/office/drawing/2014/main" id="{D7689837-732A-45AE-8156-4CCF5E533791}"/>
               </a:ext>
             </a:extLst>
           </p:cNvPr>
@@ -6849,7 +6849,7 @@
           <p:cNvPr id="6" name="">
             <a:extLst xmlns:a="http://schemas.openxmlformats.org/drawingml/2006/main">
               <a:ext uri="{FF2B5EF4-FFF2-40B4-BE49-F238E27FC236}">
-                <a16:creationId xmlns:a16="http://schemas.microsoft.com/office/drawing/2014/main" id="{44D8CFD7-D80A-42A8-B8D0-E9A70CE560C1}"/>
+                <a16:creationId xmlns:a16="http://schemas.microsoft.com/office/drawing/2014/main" id="{42791D33-B856-4495-A196-AF33D510E671}"/>
               </a:ext>
             </a:extLst>
           </p:cNvPr>
@@ -6884,7 +6884,7 @@
           <p:cNvPr id="7" name="">
             <a:extLst xmlns:a="http://schemas.openxmlformats.org/drawingml/2006/main">
               <a:ext uri="{FF2B5EF4-FFF2-40B4-BE49-F238E27FC236}">
-                <a16:creationId xmlns:a16="http://schemas.microsoft.com/office/drawing/2014/main" id="{35AE8968-F7EA-46B6-AC9D-5C791EE7EC7A}"/>
+                <a16:creationId xmlns:a16="http://schemas.microsoft.com/office/drawing/2014/main" id="{4C969058-84E2-4DA8-90E9-32F943430A76}"/>
               </a:ext>
             </a:extLst>
           </p:cNvPr>
@@ -6940,7 +6940,7 @@
           <p:cNvPr id="8" name="">
             <a:extLst xmlns:a="http://schemas.openxmlformats.org/drawingml/2006/main">
               <a:ext uri="{FF2B5EF4-FFF2-40B4-BE49-F238E27FC236}">
-                <a16:creationId xmlns:a16="http://schemas.microsoft.com/office/drawing/2014/main" id="{46D96D62-EA6A-4675-9C71-541AAC8623FB}"/>
+                <a16:creationId xmlns:a16="http://schemas.microsoft.com/office/drawing/2014/main" id="{B65D6AE6-E1BD-4D10-8311-9203840EF736}"/>
               </a:ext>
             </a:extLst>
           </p:cNvPr>
@@ -6994,7 +6994,7 @@
     </p:spTree>
     <p:extLst>
       <p:ext uri="{BB962C8B-B14F-4D97-AF65-F5344CB8AC3E}">
-        <p14:creationId xmlns:p14="http://schemas.microsoft.com/office/powerpoint/2010/main" val="1415562449"/>
+        <p14:creationId xmlns:p14="http://schemas.microsoft.com/office/powerpoint/2010/main" val="1241161653"/>
       </p:ext>
     </p:extLst>
   </p:cSld>
@@ -7025,7 +7025,7 @@
           <p:cNvPr id="1" name="">
             <a:extLst xmlns:a="http://schemas.openxmlformats.org/drawingml/2006/main">
               <a:ext uri="{FF2B5EF4-FFF2-40B4-BE49-F238E27FC236}">
-                <a16:creationId xmlns:a16="http://schemas.microsoft.com/office/drawing/2014/main" id="{ECFB978F-D1CE-4CA7-BD0C-9680DCD7D5AA}"/>
+                <a16:creationId xmlns:a16="http://schemas.microsoft.com/office/drawing/2014/main" id="{AA43B2C0-7891-498E-869C-07296B4DD86E}"/>
               </a:ext>
             </a:extLst>
           </p:cNvPr>
@@ -7058,7 +7058,7 @@
           <p:cNvPr id="2" name="">
             <a:extLst xmlns:a="http://schemas.openxmlformats.org/drawingml/2006/main">
               <a:ext uri="{FF2B5EF4-FFF2-40B4-BE49-F238E27FC236}">
-                <a16:creationId xmlns:a16="http://schemas.microsoft.com/office/drawing/2014/main" id="{100FE695-ED4E-4E68-8B93-34E78B0443F2}"/>
+                <a16:creationId xmlns:a16="http://schemas.microsoft.com/office/drawing/2014/main" id="{3AB2D5FD-ADF9-45D2-B115-11D4A515B889}"/>
               </a:ext>
             </a:extLst>
           </p:cNvPr>
@@ -7114,7 +7114,7 @@
           <p:cNvPr id="3" name="">
             <a:extLst xmlns:a="http://schemas.openxmlformats.org/drawingml/2006/main">
               <a:ext uri="{FF2B5EF4-FFF2-40B4-BE49-F238E27FC236}">
-                <a16:creationId xmlns:a16="http://schemas.microsoft.com/office/drawing/2014/main" id="{0AA9062A-016B-4788-ADC7-7CE42BDEFCBA}"/>
+                <a16:creationId xmlns:a16="http://schemas.microsoft.com/office/drawing/2014/main" id="{B4E3CF29-29CA-4292-86B1-D6C1834F518A}"/>
               </a:ext>
             </a:extLst>
           </p:cNvPr>
@@ -7174,19 +7174,13 @@
           <p:nvPr/>
         </p:nvPicPr>
         <p:blipFill>
-          <a:blip xmlns:r="http://schemas.openxmlformats.org/officeDocument/2006/relationships" xmlns:a="http://schemas.openxmlformats.org/drawingml/2006/main" r:embed="R1b71fb281d314fcd">
-            <a:extLst>
-              <a:ext uri="{96DAC541-7B7A-43D3-8B79-37D633B846F1}">
-                <asvg:svgBlip xmlns:asvg="http://schemas.microsoft.com/office/drawing/2016/SVG/main" r:embed="R8bbf5b47f37545be"/>
-              </a:ext>
-            </a:extLst>
-          </a:blip>
+          <a:blip xmlns:r="http://schemas.openxmlformats.org/officeDocument/2006/relationships" xmlns:a="http://schemas.openxmlformats.org/drawingml/2006/main" r:embed="R42e865c8bcfa4df5"/>
           <a:stretch xmlns:a="http://schemas.openxmlformats.org/drawingml/2006/main"/>
         </p:blipFill>
         <p:spPr>
           <a:xfrm xmlns:a="http://schemas.openxmlformats.org/drawingml/2006/main">
-            <a:off x="6858000" y="1352550"/>
-            <a:ext cx="4286250" cy="2000250"/>
+            <a:off x="6858000" y="1851685"/>
+            <a:ext cx="4286250" cy="1001981"/>
           </a:xfrm>
           <a:prstGeom xmlns:a="http://schemas.openxmlformats.org/drawingml/2006/main" prst="rect">
             <a:avLst/>
@@ -7198,7 +7192,7 @@
           <p:cNvPr id="5" name="">
             <a:extLst xmlns:a="http://schemas.openxmlformats.org/drawingml/2006/main">
               <a:ext uri="{FF2B5EF4-FFF2-40B4-BE49-F238E27FC236}">
-                <a16:creationId xmlns:a16="http://schemas.microsoft.com/office/drawing/2014/main" id="{0245EB7C-6568-47EA-9545-C4C0C54095F7}"/>
+                <a16:creationId xmlns:a16="http://schemas.microsoft.com/office/drawing/2014/main" id="{ABF6C4DD-622D-40DF-8020-FE3D08F98EFA}"/>
               </a:ext>
             </a:extLst>
           </p:cNvPr>
@@ -7233,7 +7227,7 @@
           <p:cNvPr id="6" name="">
             <a:extLst xmlns:a="http://schemas.openxmlformats.org/drawingml/2006/main">
               <a:ext uri="{FF2B5EF4-FFF2-40B4-BE49-F238E27FC236}">
-                <a16:creationId xmlns:a16="http://schemas.microsoft.com/office/drawing/2014/main" id="{80EED08E-2A37-41E3-8468-8C44D68C77A3}"/>
+                <a16:creationId xmlns:a16="http://schemas.microsoft.com/office/drawing/2014/main" id="{95363650-3E7C-438E-95C3-8AA50FAF4660}"/>
               </a:ext>
             </a:extLst>
           </p:cNvPr>
@@ -7289,7 +7283,7 @@
           <p:cNvPr id="7" name="">
             <a:extLst xmlns:a="http://schemas.openxmlformats.org/drawingml/2006/main">
               <a:ext uri="{FF2B5EF4-FFF2-40B4-BE49-F238E27FC236}">
-                <a16:creationId xmlns:a16="http://schemas.microsoft.com/office/drawing/2014/main" id="{EAE38633-733A-4E2D-8FC5-3028FACD3D9F}"/>
+                <a16:creationId xmlns:a16="http://schemas.microsoft.com/office/drawing/2014/main" id="{8F69EB30-B469-4695-9821-BC5BBB6811D2}"/>
               </a:ext>
             </a:extLst>
           </p:cNvPr>
@@ -7324,7 +7318,7 @@
           <p:cNvPr id="8" name="">
             <a:extLst xmlns:a="http://schemas.openxmlformats.org/drawingml/2006/main">
               <a:ext uri="{FF2B5EF4-FFF2-40B4-BE49-F238E27FC236}">
-                <a16:creationId xmlns:a16="http://schemas.microsoft.com/office/drawing/2014/main" id="{305F76BF-2FEF-4FFD-9A71-78EA0C72AADC}"/>
+                <a16:creationId xmlns:a16="http://schemas.microsoft.com/office/drawing/2014/main" id="{E671BB12-0228-4977-ABFA-051D5A715190}"/>
               </a:ext>
             </a:extLst>
           </p:cNvPr>
@@ -7380,7 +7374,7 @@
           <p:cNvPr id="9" name="">
             <a:extLst xmlns:a="http://schemas.openxmlformats.org/drawingml/2006/main">
               <a:ext uri="{FF2B5EF4-FFF2-40B4-BE49-F238E27FC236}">
-                <a16:creationId xmlns:a16="http://schemas.microsoft.com/office/drawing/2014/main" id="{BD79098B-1CAB-4E35-808C-CE360E6AE010}"/>
+                <a16:creationId xmlns:a16="http://schemas.microsoft.com/office/drawing/2014/main" id="{2DBB77F1-BBB6-46D0-8A34-390952F8E2A4}"/>
               </a:ext>
             </a:extLst>
           </p:cNvPr>
@@ -7415,7 +7409,7 @@
           <p:cNvPr id="10" name="">
             <a:extLst xmlns:a="http://schemas.openxmlformats.org/drawingml/2006/main">
               <a:ext uri="{FF2B5EF4-FFF2-40B4-BE49-F238E27FC236}">
-                <a16:creationId xmlns:a16="http://schemas.microsoft.com/office/drawing/2014/main" id="{5DB8F3FD-B2F9-4C6B-832C-4AF2006AB291}"/>
+                <a16:creationId xmlns:a16="http://schemas.microsoft.com/office/drawing/2014/main" id="{B99D5216-60F9-4EC5-A516-3B02BC31C7A4}"/>
               </a:ext>
             </a:extLst>
           </p:cNvPr>
@@ -7471,7 +7465,7 @@
           <p:cNvPr id="11" name="">
             <a:extLst xmlns:a="http://schemas.openxmlformats.org/drawingml/2006/main">
               <a:ext uri="{FF2B5EF4-FFF2-40B4-BE49-F238E27FC236}">
-                <a16:creationId xmlns:a16="http://schemas.microsoft.com/office/drawing/2014/main" id="{42261E87-AD85-468B-8B43-4FF569383B91}"/>
+                <a16:creationId xmlns:a16="http://schemas.microsoft.com/office/drawing/2014/main" id="{B05E6417-408E-4036-A7E2-9092DE99169B}"/>
               </a:ext>
             </a:extLst>
           </p:cNvPr>
@@ -7506,7 +7500,7 @@
           <p:cNvPr id="12" name="">
             <a:extLst xmlns:a="http://schemas.openxmlformats.org/drawingml/2006/main">
               <a:ext uri="{FF2B5EF4-FFF2-40B4-BE49-F238E27FC236}">
-                <a16:creationId xmlns:a16="http://schemas.microsoft.com/office/drawing/2014/main" id="{B3F0EFB0-DE21-4EEA-81BC-02FB57EB71A4}"/>
+                <a16:creationId xmlns:a16="http://schemas.microsoft.com/office/drawing/2014/main" id="{3BB8DB31-875C-4537-BCBC-7561BFD01BE0}"/>
               </a:ext>
             </a:extLst>
           </p:cNvPr>
@@ -7562,7 +7556,7 @@
           <p:cNvPr id="13" name="">
             <a:extLst xmlns:a="http://schemas.openxmlformats.org/drawingml/2006/main">
               <a:ext uri="{FF2B5EF4-FFF2-40B4-BE49-F238E27FC236}">
-                <a16:creationId xmlns:a16="http://schemas.microsoft.com/office/drawing/2014/main" id="{0D0D618D-61E5-4A23-96FB-C032BCF1957D}"/>
+                <a16:creationId xmlns:a16="http://schemas.microsoft.com/office/drawing/2014/main" id="{28F606ED-E4E0-4141-977E-857B056CBC95}"/>
               </a:ext>
             </a:extLst>
           </p:cNvPr>
@@ -7616,7 +7610,7 @@
     </p:spTree>
     <p:extLst>
       <p:ext uri="{BB962C8B-B14F-4D97-AF65-F5344CB8AC3E}">
-        <p14:creationId xmlns:p14="http://schemas.microsoft.com/office/powerpoint/2010/main" val="1690794839"/>
+        <p14:creationId xmlns:p14="http://schemas.microsoft.com/office/powerpoint/2010/main" val="74055293"/>
       </p:ext>
     </p:extLst>
   </p:cSld>
@@ -7647,7 +7641,7 @@
           <p:cNvPr id="1" name="">
             <a:extLst xmlns:a="http://schemas.openxmlformats.org/drawingml/2006/main">
               <a:ext uri="{FF2B5EF4-FFF2-40B4-BE49-F238E27FC236}">
-                <a16:creationId xmlns:a16="http://schemas.microsoft.com/office/drawing/2014/main" id="{7AE56EC9-7994-46AE-B524-66B9AE55AD8B}"/>
+                <a16:creationId xmlns:a16="http://schemas.microsoft.com/office/drawing/2014/main" id="{BEB8564E-C9E7-467C-B01D-E96301801FE0}"/>
               </a:ext>
             </a:extLst>
           </p:cNvPr>
@@ -7680,7 +7674,7 @@
           <p:cNvPr id="2" name="">
             <a:extLst xmlns:a="http://schemas.openxmlformats.org/drawingml/2006/main">
               <a:ext uri="{FF2B5EF4-FFF2-40B4-BE49-F238E27FC236}">
-                <a16:creationId xmlns:a16="http://schemas.microsoft.com/office/drawing/2014/main" id="{95B31451-E7AD-46A9-90F0-B4075DA94FA5}"/>
+                <a16:creationId xmlns:a16="http://schemas.microsoft.com/office/drawing/2014/main" id="{40E5F496-9D66-4190-96C3-DBEA0D4EC924}"/>
               </a:ext>
             </a:extLst>
           </p:cNvPr>
@@ -7736,7 +7730,7 @@
           <p:cNvPr id="3" name="">
             <a:extLst xmlns:a="http://schemas.openxmlformats.org/drawingml/2006/main">
               <a:ext uri="{FF2B5EF4-FFF2-40B4-BE49-F238E27FC236}">
-                <a16:creationId xmlns:a16="http://schemas.microsoft.com/office/drawing/2014/main" id="{8CE00B10-4400-4970-B387-BBD0B9CA49B0}"/>
+                <a16:creationId xmlns:a16="http://schemas.microsoft.com/office/drawing/2014/main" id="{7FA93253-959B-4CFA-8C22-D0245241C049}"/>
               </a:ext>
             </a:extLst>
           </p:cNvPr>
@@ -7796,19 +7790,13 @@
           <p:nvPr/>
         </p:nvPicPr>
         <p:blipFill>
-          <a:blip xmlns:r="http://schemas.openxmlformats.org/officeDocument/2006/relationships" xmlns:a="http://schemas.openxmlformats.org/drawingml/2006/main" r:embed="Rc328a456ae174998">
-            <a:extLst>
-              <a:ext uri="{96DAC541-7B7A-43D3-8B79-37D633B846F1}">
-                <asvg:svgBlip xmlns:asvg="http://schemas.microsoft.com/office/drawing/2016/SVG/main" r:embed="Re521b1712269484a"/>
-              </a:ext>
-            </a:extLst>
-          </a:blip>
+          <a:blip xmlns:r="http://schemas.openxmlformats.org/officeDocument/2006/relationships" xmlns:a="http://schemas.openxmlformats.org/drawingml/2006/main" r:embed="Re94de8c7b7034fc2"/>
           <a:stretch xmlns:a="http://schemas.openxmlformats.org/drawingml/2006/main"/>
         </p:blipFill>
         <p:spPr>
           <a:xfrm xmlns:a="http://schemas.openxmlformats.org/drawingml/2006/main">
-            <a:off x="6858000" y="1352550"/>
-            <a:ext cx="4286250" cy="2000250"/>
+            <a:off x="6858000" y="1866900"/>
+            <a:ext cx="4286250" cy="971550"/>
           </a:xfrm>
           <a:prstGeom xmlns:a="http://schemas.openxmlformats.org/drawingml/2006/main" prst="rect">
             <a:avLst/>
@@ -7820,7 +7808,7 @@
           <p:cNvPr id="5" name="">
             <a:extLst xmlns:a="http://schemas.openxmlformats.org/drawingml/2006/main">
               <a:ext uri="{FF2B5EF4-FFF2-40B4-BE49-F238E27FC236}">
-                <a16:creationId xmlns:a16="http://schemas.microsoft.com/office/drawing/2014/main" id="{433F8D92-B7D1-4EBA-BEB0-A1D114217B78}"/>
+                <a16:creationId xmlns:a16="http://schemas.microsoft.com/office/drawing/2014/main" id="{66789572-3901-4F9A-AD72-FBBB4783718D}"/>
               </a:ext>
             </a:extLst>
           </p:cNvPr>
@@ -7855,7 +7843,7 @@
           <p:cNvPr id="6" name="">
             <a:extLst xmlns:a="http://schemas.openxmlformats.org/drawingml/2006/main">
               <a:ext uri="{FF2B5EF4-FFF2-40B4-BE49-F238E27FC236}">
-                <a16:creationId xmlns:a16="http://schemas.microsoft.com/office/drawing/2014/main" id="{7AEB1F80-6647-440B-BB76-3B1F98B89CE5}"/>
+                <a16:creationId xmlns:a16="http://schemas.microsoft.com/office/drawing/2014/main" id="{56D65B28-F8DE-428E-B6F7-81C8F88299D2}"/>
               </a:ext>
             </a:extLst>
           </p:cNvPr>
@@ -7911,7 +7899,7 @@
           <p:cNvPr id="7" name="">
             <a:extLst xmlns:a="http://schemas.openxmlformats.org/drawingml/2006/main">
               <a:ext uri="{FF2B5EF4-FFF2-40B4-BE49-F238E27FC236}">
-                <a16:creationId xmlns:a16="http://schemas.microsoft.com/office/drawing/2014/main" id="{BE546B02-C8A6-4FA1-A2FD-AE2BF7FC1ABA}"/>
+                <a16:creationId xmlns:a16="http://schemas.microsoft.com/office/drawing/2014/main" id="{B4E31B29-C05C-41BB-913E-B31958433499}"/>
               </a:ext>
             </a:extLst>
           </p:cNvPr>
@@ -7946,7 +7934,7 @@
           <p:cNvPr id="8" name="">
             <a:extLst xmlns:a="http://schemas.openxmlformats.org/drawingml/2006/main">
               <a:ext uri="{FF2B5EF4-FFF2-40B4-BE49-F238E27FC236}">
-                <a16:creationId xmlns:a16="http://schemas.microsoft.com/office/drawing/2014/main" id="{E42F3EF9-2622-495F-9634-02695D14D2BB}"/>
+                <a16:creationId xmlns:a16="http://schemas.microsoft.com/office/drawing/2014/main" id="{8A4E48C7-4369-4F8C-AF02-0E353EAFF50B}"/>
               </a:ext>
             </a:extLst>
           </p:cNvPr>
@@ -8002,7 +7990,7 @@
           <p:cNvPr id="9" name="">
             <a:extLst xmlns:a="http://schemas.openxmlformats.org/drawingml/2006/main">
               <a:ext uri="{FF2B5EF4-FFF2-40B4-BE49-F238E27FC236}">
-                <a16:creationId xmlns:a16="http://schemas.microsoft.com/office/drawing/2014/main" id="{4C136A31-10A1-4FF2-B8AA-014C66A61706}"/>
+                <a16:creationId xmlns:a16="http://schemas.microsoft.com/office/drawing/2014/main" id="{DA171DFE-9B12-4354-9500-9F429685BA14}"/>
               </a:ext>
             </a:extLst>
           </p:cNvPr>
@@ -8037,7 +8025,7 @@
           <p:cNvPr id="10" name="">
             <a:extLst xmlns:a="http://schemas.openxmlformats.org/drawingml/2006/main">
               <a:ext uri="{FF2B5EF4-FFF2-40B4-BE49-F238E27FC236}">
-                <a16:creationId xmlns:a16="http://schemas.microsoft.com/office/drawing/2014/main" id="{C81341B4-FE5D-4BBA-B246-48B77A316C59}"/>
+                <a16:creationId xmlns:a16="http://schemas.microsoft.com/office/drawing/2014/main" id="{062076CD-5098-499F-A136-CA7D3F1480A5}"/>
               </a:ext>
             </a:extLst>
           </p:cNvPr>
@@ -8093,7 +8081,7 @@
           <p:cNvPr id="11" name="">
             <a:extLst xmlns:a="http://schemas.openxmlformats.org/drawingml/2006/main">
               <a:ext uri="{FF2B5EF4-FFF2-40B4-BE49-F238E27FC236}">
-                <a16:creationId xmlns:a16="http://schemas.microsoft.com/office/drawing/2014/main" id="{721FF3E8-F333-4A79-B105-0BF41FC9DA42}"/>
+                <a16:creationId xmlns:a16="http://schemas.microsoft.com/office/drawing/2014/main" id="{495477D6-1413-4B16-B9A7-ED5014601B05}"/>
               </a:ext>
             </a:extLst>
           </p:cNvPr>
@@ -8128,7 +8116,7 @@
           <p:cNvPr id="12" name="">
             <a:extLst xmlns:a="http://schemas.openxmlformats.org/drawingml/2006/main">
               <a:ext uri="{FF2B5EF4-FFF2-40B4-BE49-F238E27FC236}">
-                <a16:creationId xmlns:a16="http://schemas.microsoft.com/office/drawing/2014/main" id="{FB2F96BE-0B6C-4D3E-95E1-81FF7F830647}"/>
+                <a16:creationId xmlns:a16="http://schemas.microsoft.com/office/drawing/2014/main" id="{9108A89C-E0B6-4A03-9DF7-56243B8121F5}"/>
               </a:ext>
             </a:extLst>
           </p:cNvPr>
@@ -8184,7 +8172,7 @@
           <p:cNvPr id="13" name="">
             <a:extLst xmlns:a="http://schemas.openxmlformats.org/drawingml/2006/main">
               <a:ext uri="{FF2B5EF4-FFF2-40B4-BE49-F238E27FC236}">
-                <a16:creationId xmlns:a16="http://schemas.microsoft.com/office/drawing/2014/main" id="{5E70078E-13C9-404D-8427-F2EE56D0CE3E}"/>
+                <a16:creationId xmlns:a16="http://schemas.microsoft.com/office/drawing/2014/main" id="{C87DA78B-2638-4877-A1FE-CD4FB9D8554C}"/>
               </a:ext>
             </a:extLst>
           </p:cNvPr>
@@ -8238,7 +8226,7 @@
     </p:spTree>
     <p:extLst>
       <p:ext uri="{BB962C8B-B14F-4D97-AF65-F5344CB8AC3E}">
-        <p14:creationId xmlns:p14="http://schemas.microsoft.com/office/powerpoint/2010/main" val="591129383"/>
+        <p14:creationId xmlns:p14="http://schemas.microsoft.com/office/powerpoint/2010/main" val="957963752"/>
       </p:ext>
     </p:extLst>
   </p:cSld>
@@ -8269,7 +8257,7 @@
           <p:cNvPr id="1" name="">
             <a:extLst xmlns:a="http://schemas.openxmlformats.org/drawingml/2006/main">
               <a:ext uri="{FF2B5EF4-FFF2-40B4-BE49-F238E27FC236}">
-                <a16:creationId xmlns:a16="http://schemas.microsoft.com/office/drawing/2014/main" id="{BA64D1AC-B4F9-4653-8F33-DB4AA18513C6}"/>
+                <a16:creationId xmlns:a16="http://schemas.microsoft.com/office/drawing/2014/main" id="{FC503288-19BB-4AF7-B7D0-8E0EB0C51D83}"/>
               </a:ext>
             </a:extLst>
           </p:cNvPr>
@@ -8302,7 +8290,7 @@
           <p:cNvPr id="2" name="">
             <a:extLst xmlns:a="http://schemas.openxmlformats.org/drawingml/2006/main">
               <a:ext uri="{FF2B5EF4-FFF2-40B4-BE49-F238E27FC236}">
-                <a16:creationId xmlns:a16="http://schemas.microsoft.com/office/drawing/2014/main" id="{9E3F4D05-D137-4153-9949-70400A1448A3}"/>
+                <a16:creationId xmlns:a16="http://schemas.microsoft.com/office/drawing/2014/main" id="{5DACB00F-7495-4A1A-BACD-BD7012CE3832}"/>
               </a:ext>
             </a:extLst>
           </p:cNvPr>
@@ -8358,7 +8346,7 @@
           <p:cNvPr id="3" name="">
             <a:extLst xmlns:a="http://schemas.openxmlformats.org/drawingml/2006/main">
               <a:ext uri="{FF2B5EF4-FFF2-40B4-BE49-F238E27FC236}">
-                <a16:creationId xmlns:a16="http://schemas.microsoft.com/office/drawing/2014/main" id="{BED1C33B-D17E-4B33-9111-DC1DE6B8B500}"/>
+                <a16:creationId xmlns:a16="http://schemas.microsoft.com/office/drawing/2014/main" id="{24764332-6348-4C55-BD88-AB85B5348F6C}"/>
               </a:ext>
             </a:extLst>
           </p:cNvPr>
@@ -8418,19 +8406,13 @@
           <p:nvPr/>
         </p:nvPicPr>
         <p:blipFill>
-          <a:blip xmlns:r="http://schemas.openxmlformats.org/officeDocument/2006/relationships" xmlns:a="http://schemas.openxmlformats.org/drawingml/2006/main" r:embed="R541f0daf6fa24208">
-            <a:extLst>
-              <a:ext uri="{96DAC541-7B7A-43D3-8B79-37D633B846F1}">
-                <asvg:svgBlip xmlns:asvg="http://schemas.microsoft.com/office/drawing/2016/SVG/main" r:embed="Rae24d399c7e7487b"/>
-              </a:ext>
-            </a:extLst>
-          </a:blip>
+          <a:blip xmlns:r="http://schemas.openxmlformats.org/officeDocument/2006/relationships" xmlns:a="http://schemas.openxmlformats.org/drawingml/2006/main" r:embed="R8cb3366e59814f10"/>
           <a:stretch xmlns:a="http://schemas.openxmlformats.org/drawingml/2006/main"/>
         </p:blipFill>
         <p:spPr>
           <a:xfrm xmlns:a="http://schemas.openxmlformats.org/drawingml/2006/main">
-            <a:off x="6858000" y="1352550"/>
-            <a:ext cx="4286250" cy="2000250"/>
+            <a:off x="6938720" y="1352550"/>
+            <a:ext cx="4124809" cy="2000250"/>
           </a:xfrm>
           <a:prstGeom xmlns:a="http://schemas.openxmlformats.org/drawingml/2006/main" prst="rect">
             <a:avLst/>
@@ -8442,7 +8424,7 @@
           <p:cNvPr id="5" name="">
             <a:extLst xmlns:a="http://schemas.openxmlformats.org/drawingml/2006/main">
               <a:ext uri="{FF2B5EF4-FFF2-40B4-BE49-F238E27FC236}">
-                <a16:creationId xmlns:a16="http://schemas.microsoft.com/office/drawing/2014/main" id="{9C480684-19B5-49C3-9CA3-3B84E9CB338B}"/>
+                <a16:creationId xmlns:a16="http://schemas.microsoft.com/office/drawing/2014/main" id="{80A754C4-2DCB-47BB-BABE-AF0741B58E8E}"/>
               </a:ext>
             </a:extLst>
           </p:cNvPr>
@@ -8498,7 +8480,7 @@
           <p:cNvPr id="6" name="">
             <a:extLst xmlns:a="http://schemas.openxmlformats.org/drawingml/2006/main">
               <a:ext uri="{FF2B5EF4-FFF2-40B4-BE49-F238E27FC236}">
-                <a16:creationId xmlns:a16="http://schemas.microsoft.com/office/drawing/2014/main" id="{D84B8BF4-E05F-4DFD-BC18-BDBE4FFE3E3C}"/>
+                <a16:creationId xmlns:a16="http://schemas.microsoft.com/office/drawing/2014/main" id="{0AF36E5D-2DE3-4DA4-9D40-A92B7791AD60}"/>
               </a:ext>
             </a:extLst>
           </p:cNvPr>
@@ -8533,7 +8515,7 @@
           <p:cNvPr id="7" name="">
             <a:extLst xmlns:a="http://schemas.openxmlformats.org/drawingml/2006/main">
               <a:ext uri="{FF2B5EF4-FFF2-40B4-BE49-F238E27FC236}">
-                <a16:creationId xmlns:a16="http://schemas.microsoft.com/office/drawing/2014/main" id="{A4D4F025-5F44-4F0C-974B-D111698620E7}"/>
+                <a16:creationId xmlns:a16="http://schemas.microsoft.com/office/drawing/2014/main" id="{080E23EB-1FDF-42D3-B4A0-FE3BD099D6F9}"/>
               </a:ext>
             </a:extLst>
           </p:cNvPr>
@@ -8589,7 +8571,7 @@
           <p:cNvPr id="8" name="">
             <a:extLst xmlns:a="http://schemas.openxmlformats.org/drawingml/2006/main">
               <a:ext uri="{FF2B5EF4-FFF2-40B4-BE49-F238E27FC236}">
-                <a16:creationId xmlns:a16="http://schemas.microsoft.com/office/drawing/2014/main" id="{8F678CE4-631B-491A-BD3F-BA03C85668C4}"/>
+                <a16:creationId xmlns:a16="http://schemas.microsoft.com/office/drawing/2014/main" id="{201B23BD-940E-4781-ADC9-ED634767C34D}"/>
               </a:ext>
             </a:extLst>
           </p:cNvPr>
@@ -8643,7 +8625,7 @@
     </p:spTree>
     <p:extLst>
       <p:ext uri="{BB962C8B-B14F-4D97-AF65-F5344CB8AC3E}">
-        <p14:creationId xmlns:p14="http://schemas.microsoft.com/office/powerpoint/2010/main" val="580508106"/>
+        <p14:creationId xmlns:p14="http://schemas.microsoft.com/office/powerpoint/2010/main" val="660057907"/>
       </p:ext>
     </p:extLst>
   </p:cSld>
@@ -8674,7 +8656,7 @@
           <p:cNvPr id="1" name="">
             <a:extLst xmlns:a="http://schemas.openxmlformats.org/drawingml/2006/main">
               <a:ext uri="{FF2B5EF4-FFF2-40B4-BE49-F238E27FC236}">
-                <a16:creationId xmlns:a16="http://schemas.microsoft.com/office/drawing/2014/main" id="{398BA3B9-B100-4F28-B0F2-5B0EEE7155B9}"/>
+                <a16:creationId xmlns:a16="http://schemas.microsoft.com/office/drawing/2014/main" id="{C6027AF5-B3D7-47B4-A861-6825E9CDC616}"/>
               </a:ext>
             </a:extLst>
           </p:cNvPr>
@@ -8707,7 +8689,7 @@
           <p:cNvPr id="2" name="">
             <a:extLst xmlns:a="http://schemas.openxmlformats.org/drawingml/2006/main">
               <a:ext uri="{FF2B5EF4-FFF2-40B4-BE49-F238E27FC236}">
-                <a16:creationId xmlns:a16="http://schemas.microsoft.com/office/drawing/2014/main" id="{F03F8FD8-7EC1-448C-A007-CCA9110CF44E}"/>
+                <a16:creationId xmlns:a16="http://schemas.microsoft.com/office/drawing/2014/main" id="{2A31E4DA-3D9C-46B5-B576-05731A5754BF}"/>
               </a:ext>
             </a:extLst>
           </p:cNvPr>
@@ -8763,7 +8745,7 @@
           <p:cNvPr id="3" name="">
             <a:extLst xmlns:a="http://schemas.openxmlformats.org/drawingml/2006/main">
               <a:ext uri="{FF2B5EF4-FFF2-40B4-BE49-F238E27FC236}">
-                <a16:creationId xmlns:a16="http://schemas.microsoft.com/office/drawing/2014/main" id="{25F0BE13-C55F-42A2-9D08-3694D4E8E0FC}"/>
+                <a16:creationId xmlns:a16="http://schemas.microsoft.com/office/drawing/2014/main" id="{81B3D530-523E-4228-83E3-BEAB16986834}"/>
               </a:ext>
             </a:extLst>
           </p:cNvPr>
@@ -8819,7 +8801,7 @@
           <p:cNvPr id="4" name="">
             <a:extLst xmlns:a="http://schemas.openxmlformats.org/drawingml/2006/main">
               <a:ext uri="{FF2B5EF4-FFF2-40B4-BE49-F238E27FC236}">
-                <a16:creationId xmlns:a16="http://schemas.microsoft.com/office/drawing/2014/main" id="{E7003005-60E6-41A0-AF27-1E587025351C}"/>
+                <a16:creationId xmlns:a16="http://schemas.microsoft.com/office/drawing/2014/main" id="{A393B831-972C-4A4B-855E-73D9A512D9B4}"/>
               </a:ext>
             </a:extLst>
           </p:cNvPr>
@@ -8967,7 +8949,7 @@
           <p:cNvPr id="5" name="">
             <a:extLst xmlns:a="http://schemas.openxmlformats.org/drawingml/2006/main">
               <a:ext uri="{FF2B5EF4-FFF2-40B4-BE49-F238E27FC236}">
-                <a16:creationId xmlns:a16="http://schemas.microsoft.com/office/drawing/2014/main" id="{97CCAD9A-F6DD-48D9-B7A6-50A3B3F02547}"/>
+                <a16:creationId xmlns:a16="http://schemas.microsoft.com/office/drawing/2014/main" id="{6D7D6F64-BA3D-4947-A9A8-AAD00877B39E}"/>
               </a:ext>
             </a:extLst>
           </p:cNvPr>
@@ -9002,7 +8984,7 @@
           <p:cNvPr id="6" name="">
             <a:extLst xmlns:a="http://schemas.openxmlformats.org/drawingml/2006/main">
               <a:ext uri="{FF2B5EF4-FFF2-40B4-BE49-F238E27FC236}">
-                <a16:creationId xmlns:a16="http://schemas.microsoft.com/office/drawing/2014/main" id="{4BA05E3F-86CA-4C86-8C23-B4628BE8CFC5}"/>
+                <a16:creationId xmlns:a16="http://schemas.microsoft.com/office/drawing/2014/main" id="{D95792CD-6929-48E1-B254-691CC4422398}"/>
               </a:ext>
             </a:extLst>
           </p:cNvPr>
@@ -9058,7 +9040,7 @@
           <p:cNvPr id="7" name="">
             <a:extLst xmlns:a="http://schemas.openxmlformats.org/drawingml/2006/main">
               <a:ext uri="{FF2B5EF4-FFF2-40B4-BE49-F238E27FC236}">
-                <a16:creationId xmlns:a16="http://schemas.microsoft.com/office/drawing/2014/main" id="{C9BA4533-857E-4092-AA37-E11C2F342049}"/>
+                <a16:creationId xmlns:a16="http://schemas.microsoft.com/office/drawing/2014/main" id="{D128D99C-5915-4120-936A-F1CF2D9B8B26}"/>
               </a:ext>
             </a:extLst>
           </p:cNvPr>
@@ -9112,7 +9094,7 @@
     </p:spTree>
     <p:extLst>
       <p:ext uri="{BB962C8B-B14F-4D97-AF65-F5344CB8AC3E}">
-        <p14:creationId xmlns:p14="http://schemas.microsoft.com/office/powerpoint/2010/main" val="424568373"/>
+        <p14:creationId xmlns:p14="http://schemas.microsoft.com/office/powerpoint/2010/main" val="27496021"/>
       </p:ext>
     </p:extLst>
   </p:cSld>
@@ -9143,7 +9125,7 @@
           <p:cNvPr id="1" name="">
             <a:extLst xmlns:a="http://schemas.openxmlformats.org/drawingml/2006/main">
               <a:ext uri="{FF2B5EF4-FFF2-40B4-BE49-F238E27FC236}">
-                <a16:creationId xmlns:a16="http://schemas.microsoft.com/office/drawing/2014/main" id="{8DBB8FD0-D6E8-4B5B-87AA-C9B926EF17CE}"/>
+                <a16:creationId xmlns:a16="http://schemas.microsoft.com/office/drawing/2014/main" id="{1AAAB63F-2921-47FB-8CC8-B5F715278BDE}"/>
               </a:ext>
             </a:extLst>
           </p:cNvPr>
@@ -9176,7 +9158,7 @@
           <p:cNvPr id="2" name="">
             <a:extLst xmlns:a="http://schemas.openxmlformats.org/drawingml/2006/main">
               <a:ext uri="{FF2B5EF4-FFF2-40B4-BE49-F238E27FC236}">
-                <a16:creationId xmlns:a16="http://schemas.microsoft.com/office/drawing/2014/main" id="{79ABAD2A-444B-473B-88D3-168337AAA6B8}"/>
+                <a16:creationId xmlns:a16="http://schemas.microsoft.com/office/drawing/2014/main" id="{7A4CADF0-A54F-4A8B-8238-6C96DD2C7DFA}"/>
               </a:ext>
             </a:extLst>
           </p:cNvPr>
@@ -9232,7 +9214,7 @@
           <p:cNvPr id="3" name="">
             <a:extLst xmlns:a="http://schemas.openxmlformats.org/drawingml/2006/main">
               <a:ext uri="{FF2B5EF4-FFF2-40B4-BE49-F238E27FC236}">
-                <a16:creationId xmlns:a16="http://schemas.microsoft.com/office/drawing/2014/main" id="{A1B011F9-A72F-45DB-8D5F-3941F19DF908}"/>
+                <a16:creationId xmlns:a16="http://schemas.microsoft.com/office/drawing/2014/main" id="{5955E0AE-2194-49B8-8992-903E961B543E}"/>
               </a:ext>
             </a:extLst>
           </p:cNvPr>
@@ -9292,19 +9274,13 @@
           <p:nvPr/>
         </p:nvPicPr>
         <p:blipFill>
-          <a:blip xmlns:r="http://schemas.openxmlformats.org/officeDocument/2006/relationships" xmlns:a="http://schemas.openxmlformats.org/drawingml/2006/main" r:embed="Red57a8353cfe49ba">
-            <a:extLst>
-              <a:ext uri="{96DAC541-7B7A-43D3-8B79-37D633B846F1}">
-                <asvg:svgBlip xmlns:asvg="http://schemas.microsoft.com/office/drawing/2016/SVG/main" r:embed="R7e047b07107d4710"/>
-              </a:ext>
-            </a:extLst>
-          </a:blip>
+          <a:blip xmlns:r="http://schemas.openxmlformats.org/officeDocument/2006/relationships" xmlns:a="http://schemas.openxmlformats.org/drawingml/2006/main" r:embed="R5c5cdd67fc31440f"/>
           <a:stretch xmlns:a="http://schemas.openxmlformats.org/drawingml/2006/main"/>
         </p:blipFill>
         <p:spPr>
           <a:xfrm xmlns:a="http://schemas.openxmlformats.org/drawingml/2006/main">
-            <a:off x="6858000" y="1352550"/>
-            <a:ext cx="4286250" cy="2000250"/>
+            <a:off x="7000875" y="1352550"/>
+            <a:ext cx="4000500" cy="2000250"/>
           </a:xfrm>
           <a:prstGeom xmlns:a="http://schemas.openxmlformats.org/drawingml/2006/main" prst="rect">
             <a:avLst/>
@@ -9316,7 +9292,7 @@
           <p:cNvPr id="5" name="">
             <a:extLst xmlns:a="http://schemas.openxmlformats.org/drawingml/2006/main">
               <a:ext uri="{FF2B5EF4-FFF2-40B4-BE49-F238E27FC236}">
-                <a16:creationId xmlns:a16="http://schemas.microsoft.com/office/drawing/2014/main" id="{3122671C-E04B-49B5-9953-2E7D6BD57DAD}"/>
+                <a16:creationId xmlns:a16="http://schemas.microsoft.com/office/drawing/2014/main" id="{F0FF9672-3F35-4819-BA4F-8809BF2AFDC3}"/>
               </a:ext>
             </a:extLst>
           </p:cNvPr>
@@ -9351,7 +9327,7 @@
           <p:cNvPr id="6" name="">
             <a:extLst xmlns:a="http://schemas.openxmlformats.org/drawingml/2006/main">
               <a:ext uri="{FF2B5EF4-FFF2-40B4-BE49-F238E27FC236}">
-                <a16:creationId xmlns:a16="http://schemas.microsoft.com/office/drawing/2014/main" id="{0496B607-35A9-4AD4-883E-4A8CB518EBF4}"/>
+                <a16:creationId xmlns:a16="http://schemas.microsoft.com/office/drawing/2014/main" id="{2C3830FE-EF83-4EA5-8135-42D6B312B7AB}"/>
               </a:ext>
             </a:extLst>
           </p:cNvPr>
@@ -9407,7 +9383,7 @@
           <p:cNvPr id="7" name="">
             <a:extLst xmlns:a="http://schemas.openxmlformats.org/drawingml/2006/main">
               <a:ext uri="{FF2B5EF4-FFF2-40B4-BE49-F238E27FC236}">
-                <a16:creationId xmlns:a16="http://schemas.microsoft.com/office/drawing/2014/main" id="{421AD3FB-A0D4-4902-90E3-92F1ABD74DCE}"/>
+                <a16:creationId xmlns:a16="http://schemas.microsoft.com/office/drawing/2014/main" id="{4CB0C2D9-8C7E-47B5-A884-EB2457256422}"/>
               </a:ext>
             </a:extLst>
           </p:cNvPr>
@@ -9442,7 +9418,7 @@
           <p:cNvPr id="8" name="">
             <a:extLst xmlns:a="http://schemas.openxmlformats.org/drawingml/2006/main">
               <a:ext uri="{FF2B5EF4-FFF2-40B4-BE49-F238E27FC236}">
-                <a16:creationId xmlns:a16="http://schemas.microsoft.com/office/drawing/2014/main" id="{B9812013-97AA-48C9-8F86-C7790A2B989B}"/>
+                <a16:creationId xmlns:a16="http://schemas.microsoft.com/office/drawing/2014/main" id="{1E7814A9-4274-4788-AA03-3D1318B54B53}"/>
               </a:ext>
             </a:extLst>
           </p:cNvPr>
@@ -9498,7 +9474,7 @@
           <p:cNvPr id="9" name="">
             <a:extLst xmlns:a="http://schemas.openxmlformats.org/drawingml/2006/main">
               <a:ext uri="{FF2B5EF4-FFF2-40B4-BE49-F238E27FC236}">
-                <a16:creationId xmlns:a16="http://schemas.microsoft.com/office/drawing/2014/main" id="{39AE6DF6-328F-40D4-8DC3-C2AEFEFBF197}"/>
+                <a16:creationId xmlns:a16="http://schemas.microsoft.com/office/drawing/2014/main" id="{88668618-50C7-4F10-97A6-98BE8A84168E}"/>
               </a:ext>
             </a:extLst>
           </p:cNvPr>
@@ -9533,7 +9509,7 @@
           <p:cNvPr id="10" name="">
             <a:extLst xmlns:a="http://schemas.openxmlformats.org/drawingml/2006/main">
               <a:ext uri="{FF2B5EF4-FFF2-40B4-BE49-F238E27FC236}">
-                <a16:creationId xmlns:a16="http://schemas.microsoft.com/office/drawing/2014/main" id="{5FBBC912-60D9-4230-A6F5-F5046CE2F5E6}"/>
+                <a16:creationId xmlns:a16="http://schemas.microsoft.com/office/drawing/2014/main" id="{64FC8079-8447-4F6D-9FA3-0675EA7B9176}"/>
               </a:ext>
             </a:extLst>
           </p:cNvPr>
@@ -9589,7 +9565,7 @@
           <p:cNvPr id="11" name="">
             <a:extLst xmlns:a="http://schemas.openxmlformats.org/drawingml/2006/main">
               <a:ext uri="{FF2B5EF4-FFF2-40B4-BE49-F238E27FC236}">
-                <a16:creationId xmlns:a16="http://schemas.microsoft.com/office/drawing/2014/main" id="{C6DEB50A-B4DE-4B98-8E2D-297AAA866CE1}"/>
+                <a16:creationId xmlns:a16="http://schemas.microsoft.com/office/drawing/2014/main" id="{D8F59D30-6C7F-42EE-8813-447D8EF8833F}"/>
               </a:ext>
             </a:extLst>
           </p:cNvPr>
@@ -9624,7 +9600,7 @@
           <p:cNvPr id="12" name="">
             <a:extLst xmlns:a="http://schemas.openxmlformats.org/drawingml/2006/main">
               <a:ext uri="{FF2B5EF4-FFF2-40B4-BE49-F238E27FC236}">
-                <a16:creationId xmlns:a16="http://schemas.microsoft.com/office/drawing/2014/main" id="{EECAF4C6-B742-4BAE-B79C-E69F7BCEADEB}"/>
+                <a16:creationId xmlns:a16="http://schemas.microsoft.com/office/drawing/2014/main" id="{A64780DD-1D0A-489B-B554-D320ADEC38A6}"/>
               </a:ext>
             </a:extLst>
           </p:cNvPr>
@@ -9680,7 +9656,7 @@
           <p:cNvPr id="13" name="">
             <a:extLst xmlns:a="http://schemas.openxmlformats.org/drawingml/2006/main">
               <a:ext uri="{FF2B5EF4-FFF2-40B4-BE49-F238E27FC236}">
-                <a16:creationId xmlns:a16="http://schemas.microsoft.com/office/drawing/2014/main" id="{7FA878B9-8532-40FF-9847-738335BBE88F}"/>
+                <a16:creationId xmlns:a16="http://schemas.microsoft.com/office/drawing/2014/main" id="{69E5FC97-E9F8-468D-A6B9-35D0D79DD31F}"/>
               </a:ext>
             </a:extLst>
           </p:cNvPr>
@@ -9734,7 +9710,7 @@
     </p:spTree>
     <p:extLst>
       <p:ext uri="{BB962C8B-B14F-4D97-AF65-F5344CB8AC3E}">
-        <p14:creationId xmlns:p14="http://schemas.microsoft.com/office/powerpoint/2010/main" val="1384168236"/>
+        <p14:creationId xmlns:p14="http://schemas.microsoft.com/office/powerpoint/2010/main" val="854110409"/>
       </p:ext>
     </p:extLst>
   </p:cSld>
@@ -9765,7 +9741,7 @@
           <p:cNvPr id="1" name="">
             <a:extLst xmlns:a="http://schemas.openxmlformats.org/drawingml/2006/main">
               <a:ext uri="{FF2B5EF4-FFF2-40B4-BE49-F238E27FC236}">
-                <a16:creationId xmlns:a16="http://schemas.microsoft.com/office/drawing/2014/main" id="{4083C409-729F-423E-B6C3-4481D10DA967}"/>
+                <a16:creationId xmlns:a16="http://schemas.microsoft.com/office/drawing/2014/main" id="{A99AC58B-EE71-48A2-B581-2F2336FC6D48}"/>
               </a:ext>
             </a:extLst>
           </p:cNvPr>
@@ -9798,7 +9774,7 @@
           <p:cNvPr id="2" name="">
             <a:extLst xmlns:a="http://schemas.openxmlformats.org/drawingml/2006/main">
               <a:ext uri="{FF2B5EF4-FFF2-40B4-BE49-F238E27FC236}">
-                <a16:creationId xmlns:a16="http://schemas.microsoft.com/office/drawing/2014/main" id="{58CA2BDE-E322-4BDC-B218-69883DC544E1}"/>
+                <a16:creationId xmlns:a16="http://schemas.microsoft.com/office/drawing/2014/main" id="{1ECB6511-8061-4044-9CE5-4386206C672C}"/>
               </a:ext>
             </a:extLst>
           </p:cNvPr>
@@ -9854,7 +9830,7 @@
           <p:cNvPr id="3" name="">
             <a:extLst xmlns:a="http://schemas.openxmlformats.org/drawingml/2006/main">
               <a:ext uri="{FF2B5EF4-FFF2-40B4-BE49-F238E27FC236}">
-                <a16:creationId xmlns:a16="http://schemas.microsoft.com/office/drawing/2014/main" id="{18B82CF8-F079-4441-8206-FDA49B236643}"/>
+                <a16:creationId xmlns:a16="http://schemas.microsoft.com/office/drawing/2014/main" id="{24BAA827-A6C0-4516-8649-8A89164ECC99}"/>
               </a:ext>
             </a:extLst>
           </p:cNvPr>
@@ -9910,7 +9886,7 @@
           <p:cNvPr id="4" name="">
             <a:extLst xmlns:a="http://schemas.openxmlformats.org/drawingml/2006/main">
               <a:ext uri="{FF2B5EF4-FFF2-40B4-BE49-F238E27FC236}">
-                <a16:creationId xmlns:a16="http://schemas.microsoft.com/office/drawing/2014/main" id="{904FD8ED-8223-43D7-B7A1-E5B74E33B385}"/>
+                <a16:creationId xmlns:a16="http://schemas.microsoft.com/office/drawing/2014/main" id="{570A5B34-65FA-4273-A12E-048CE110DD40}"/>
               </a:ext>
             </a:extLst>
           </p:cNvPr>
@@ -10035,7 +10011,7 @@
           <p:cNvPr id="5" name="">
             <a:extLst xmlns:a="http://schemas.openxmlformats.org/drawingml/2006/main">
               <a:ext uri="{FF2B5EF4-FFF2-40B4-BE49-F238E27FC236}">
-                <a16:creationId xmlns:a16="http://schemas.microsoft.com/office/drawing/2014/main" id="{9D7CF52C-53E8-455F-8376-770F366A0BC3}"/>
+                <a16:creationId xmlns:a16="http://schemas.microsoft.com/office/drawing/2014/main" id="{DF1560FF-E6F9-4BA8-AC91-27E93BA3A4CD}"/>
               </a:ext>
             </a:extLst>
           </p:cNvPr>
@@ -10070,7 +10046,7 @@
           <p:cNvPr id="6" name="">
             <a:extLst xmlns:a="http://schemas.openxmlformats.org/drawingml/2006/main">
               <a:ext uri="{FF2B5EF4-FFF2-40B4-BE49-F238E27FC236}">
-                <a16:creationId xmlns:a16="http://schemas.microsoft.com/office/drawing/2014/main" id="{4AAADEE8-FAA6-492E-8155-D4B86ABF6147}"/>
+                <a16:creationId xmlns:a16="http://schemas.microsoft.com/office/drawing/2014/main" id="{08516AB9-CC37-48BB-BFE1-C47942F5B21E}"/>
               </a:ext>
             </a:extLst>
           </p:cNvPr>
@@ -10126,7 +10102,7 @@
           <p:cNvPr id="7" name="">
             <a:extLst xmlns:a="http://schemas.openxmlformats.org/drawingml/2006/main">
               <a:ext uri="{FF2B5EF4-FFF2-40B4-BE49-F238E27FC236}">
-                <a16:creationId xmlns:a16="http://schemas.microsoft.com/office/drawing/2014/main" id="{614198EE-F2BD-40F4-8F3D-5F3C3011F99A}"/>
+                <a16:creationId xmlns:a16="http://schemas.microsoft.com/office/drawing/2014/main" id="{70D2A3A9-72DD-4592-AD11-2D72AC01D884}"/>
               </a:ext>
             </a:extLst>
           </p:cNvPr>
@@ -10180,7 +10156,7 @@
     </p:spTree>
     <p:extLst>
       <p:ext uri="{BB962C8B-B14F-4D97-AF65-F5344CB8AC3E}">
-        <p14:creationId xmlns:p14="http://schemas.microsoft.com/office/powerpoint/2010/main" val="493823405"/>
+        <p14:creationId xmlns:p14="http://schemas.microsoft.com/office/powerpoint/2010/main" val="580277795"/>
       </p:ext>
     </p:extLst>
   </p:cSld>
@@ -10211,7 +10187,7 @@
           <p:cNvPr id="1" name="">
             <a:extLst xmlns:a="http://schemas.openxmlformats.org/drawingml/2006/main">
               <a:ext uri="{FF2B5EF4-FFF2-40B4-BE49-F238E27FC236}">
-                <a16:creationId xmlns:a16="http://schemas.microsoft.com/office/drawing/2014/main" id="{A461329A-2B84-4EE4-BF1A-B8619DD45D6D}"/>
+                <a16:creationId xmlns:a16="http://schemas.microsoft.com/office/drawing/2014/main" id="{43B1E929-5F36-4579-A7B9-5D5F69908867}"/>
               </a:ext>
             </a:extLst>
           </p:cNvPr>
@@ -10244,7 +10220,7 @@
           <p:cNvPr id="2" name="">
             <a:extLst xmlns:a="http://schemas.openxmlformats.org/drawingml/2006/main">
               <a:ext uri="{FF2B5EF4-FFF2-40B4-BE49-F238E27FC236}">
-                <a16:creationId xmlns:a16="http://schemas.microsoft.com/office/drawing/2014/main" id="{98EE2EE1-8B7B-4359-9D95-414DEE00E408}"/>
+                <a16:creationId xmlns:a16="http://schemas.microsoft.com/office/drawing/2014/main" id="{9B5FFD65-9C09-4504-B56C-00AE5E85CF26}"/>
               </a:ext>
             </a:extLst>
           </p:cNvPr>
@@ -10300,7 +10276,7 @@
           <p:cNvPr id="3" name="">
             <a:extLst xmlns:a="http://schemas.openxmlformats.org/drawingml/2006/main">
               <a:ext uri="{FF2B5EF4-FFF2-40B4-BE49-F238E27FC236}">
-                <a16:creationId xmlns:a16="http://schemas.microsoft.com/office/drawing/2014/main" id="{A5B411B9-63E3-4940-99CE-CC613A3A24ED}"/>
+                <a16:creationId xmlns:a16="http://schemas.microsoft.com/office/drawing/2014/main" id="{D0BA0E2D-90AA-4EBC-9C30-6D3F90D84BD0}"/>
               </a:ext>
             </a:extLst>
           </p:cNvPr>
@@ -10356,7 +10332,7 @@
           <p:cNvPr id="4" name="">
             <a:extLst xmlns:a="http://schemas.openxmlformats.org/drawingml/2006/main">
               <a:ext uri="{FF2B5EF4-FFF2-40B4-BE49-F238E27FC236}">
-                <a16:creationId xmlns:a16="http://schemas.microsoft.com/office/drawing/2014/main" id="{8A7610E1-AE18-406C-A1FA-3FC2906AA49C}"/>
+                <a16:creationId xmlns:a16="http://schemas.microsoft.com/office/drawing/2014/main" id="{45909451-A497-4748-9A65-ABE6A6121423}"/>
               </a:ext>
             </a:extLst>
           </p:cNvPr>
@@ -10391,7 +10367,7 @@
           <p:cNvPr id="5" name="">
             <a:extLst xmlns:a="http://schemas.openxmlformats.org/drawingml/2006/main">
               <a:ext uri="{FF2B5EF4-FFF2-40B4-BE49-F238E27FC236}">
-                <a16:creationId xmlns:a16="http://schemas.microsoft.com/office/drawing/2014/main" id="{51618A5C-6F56-4037-880F-6829055EFF09}"/>
+                <a16:creationId xmlns:a16="http://schemas.microsoft.com/office/drawing/2014/main" id="{845CF223-DC0D-4E1A-8DE9-B35538831358}"/>
               </a:ext>
             </a:extLst>
           </p:cNvPr>
@@ -10447,7 +10423,7 @@
           <p:cNvPr id="6" name="">
             <a:extLst xmlns:a="http://schemas.openxmlformats.org/drawingml/2006/main">
               <a:ext uri="{FF2B5EF4-FFF2-40B4-BE49-F238E27FC236}">
-                <a16:creationId xmlns:a16="http://schemas.microsoft.com/office/drawing/2014/main" id="{C4696C2D-2511-437F-A637-4DD3113D9B3F}"/>
+                <a16:creationId xmlns:a16="http://schemas.microsoft.com/office/drawing/2014/main" id="{4E7ACFE5-DAFE-44DF-A67F-F47974B812B8}"/>
               </a:ext>
             </a:extLst>
           </p:cNvPr>
@@ -10482,7 +10458,7 @@
           <p:cNvPr id="7" name="">
             <a:extLst xmlns:a="http://schemas.openxmlformats.org/drawingml/2006/main">
               <a:ext uri="{FF2B5EF4-FFF2-40B4-BE49-F238E27FC236}">
-                <a16:creationId xmlns:a16="http://schemas.microsoft.com/office/drawing/2014/main" id="{18C2276F-2CCE-4FF8-AE2D-F47CA063FA66}"/>
+                <a16:creationId xmlns:a16="http://schemas.microsoft.com/office/drawing/2014/main" id="{464B4B90-55CB-4864-8F69-0BF8092DFA8D}"/>
               </a:ext>
             </a:extLst>
           </p:cNvPr>
@@ -10538,7 +10514,7 @@
           <p:cNvPr id="8" name="">
             <a:extLst xmlns:a="http://schemas.openxmlformats.org/drawingml/2006/main">
               <a:ext uri="{FF2B5EF4-FFF2-40B4-BE49-F238E27FC236}">
-                <a16:creationId xmlns:a16="http://schemas.microsoft.com/office/drawing/2014/main" id="{FD2F43E9-674E-46D8-8EEE-8064184A875F}"/>
+                <a16:creationId xmlns:a16="http://schemas.microsoft.com/office/drawing/2014/main" id="{7A481203-C494-443C-882A-43F6A5DF66CA}"/>
               </a:ext>
             </a:extLst>
           </p:cNvPr>
@@ -10573,7 +10549,7 @@
           <p:cNvPr id="9" name="">
             <a:extLst xmlns:a="http://schemas.openxmlformats.org/drawingml/2006/main">
               <a:ext uri="{FF2B5EF4-FFF2-40B4-BE49-F238E27FC236}">
-                <a16:creationId xmlns:a16="http://schemas.microsoft.com/office/drawing/2014/main" id="{3CB18054-A800-48A0-8093-A65C9672B053}"/>
+                <a16:creationId xmlns:a16="http://schemas.microsoft.com/office/drawing/2014/main" id="{387534A4-7498-4D26-8459-925C257BFFA9}"/>
               </a:ext>
             </a:extLst>
           </p:cNvPr>
@@ -10629,7 +10605,7 @@
           <p:cNvPr id="10" name="">
             <a:extLst xmlns:a="http://schemas.openxmlformats.org/drawingml/2006/main">
               <a:ext uri="{FF2B5EF4-FFF2-40B4-BE49-F238E27FC236}">
-                <a16:creationId xmlns:a16="http://schemas.microsoft.com/office/drawing/2014/main" id="{2B201AF5-FF25-4991-B97C-161A7DA371FD}"/>
+                <a16:creationId xmlns:a16="http://schemas.microsoft.com/office/drawing/2014/main" id="{4D447AE4-E594-4D3F-8A85-638C18BC90C9}"/>
               </a:ext>
             </a:extLst>
           </p:cNvPr>
@@ -10664,7 +10640,7 @@
           <p:cNvPr id="11" name="">
             <a:extLst xmlns:a="http://schemas.openxmlformats.org/drawingml/2006/main">
               <a:ext uri="{FF2B5EF4-FFF2-40B4-BE49-F238E27FC236}">
-                <a16:creationId xmlns:a16="http://schemas.microsoft.com/office/drawing/2014/main" id="{CC83C0C0-E798-41C8-ADBD-6184B3F72B84}"/>
+                <a16:creationId xmlns:a16="http://schemas.microsoft.com/office/drawing/2014/main" id="{CFDECE05-1939-49E2-B484-1304BB9D9450}"/>
               </a:ext>
             </a:extLst>
           </p:cNvPr>
@@ -10720,7 +10696,7 @@
           <p:cNvPr id="12" name="">
             <a:extLst xmlns:a="http://schemas.openxmlformats.org/drawingml/2006/main">
               <a:ext uri="{FF2B5EF4-FFF2-40B4-BE49-F238E27FC236}">
-                <a16:creationId xmlns:a16="http://schemas.microsoft.com/office/drawing/2014/main" id="{D5D7BD48-AED5-4928-B5CF-006743989F80}"/>
+                <a16:creationId xmlns:a16="http://schemas.microsoft.com/office/drawing/2014/main" id="{729D7972-8969-4DA0-9DB2-FC69EBF88E32}"/>
               </a:ext>
             </a:extLst>
           </p:cNvPr>
@@ -10755,7 +10731,7 @@
           <p:cNvPr id="13" name="">
             <a:extLst xmlns:a="http://schemas.openxmlformats.org/drawingml/2006/main">
               <a:ext uri="{FF2B5EF4-FFF2-40B4-BE49-F238E27FC236}">
-                <a16:creationId xmlns:a16="http://schemas.microsoft.com/office/drawing/2014/main" id="{60A4D15E-77F7-463B-BAED-21169E465A62}"/>
+                <a16:creationId xmlns:a16="http://schemas.microsoft.com/office/drawing/2014/main" id="{2DC2C99E-8C5F-4679-88C6-F8401E21D097}"/>
               </a:ext>
             </a:extLst>
           </p:cNvPr>
@@ -10811,7 +10787,7 @@
           <p:cNvPr id="14" name="">
             <a:extLst xmlns:a="http://schemas.openxmlformats.org/drawingml/2006/main">
               <a:ext uri="{FF2B5EF4-FFF2-40B4-BE49-F238E27FC236}">
-                <a16:creationId xmlns:a16="http://schemas.microsoft.com/office/drawing/2014/main" id="{16F55374-25E9-4F49-BECC-883E9ACB143F}"/>
+                <a16:creationId xmlns:a16="http://schemas.microsoft.com/office/drawing/2014/main" id="{8BE09936-F915-4E84-A4BC-A00BD91E0394}"/>
               </a:ext>
             </a:extLst>
           </p:cNvPr>
@@ -10846,7 +10822,7 @@
           <p:cNvPr id="15" name="">
             <a:extLst xmlns:a="http://schemas.openxmlformats.org/drawingml/2006/main">
               <a:ext uri="{FF2B5EF4-FFF2-40B4-BE49-F238E27FC236}">
-                <a16:creationId xmlns:a16="http://schemas.microsoft.com/office/drawing/2014/main" id="{8995C09D-D7DA-4904-AB86-A5F99E48800B}"/>
+                <a16:creationId xmlns:a16="http://schemas.microsoft.com/office/drawing/2014/main" id="{08E90B29-A290-423C-9F46-8C726B349A9F}"/>
               </a:ext>
             </a:extLst>
           </p:cNvPr>
@@ -10902,7 +10878,7 @@
           <p:cNvPr id="16" name="">
             <a:extLst xmlns:a="http://schemas.openxmlformats.org/drawingml/2006/main">
               <a:ext uri="{FF2B5EF4-FFF2-40B4-BE49-F238E27FC236}">
-                <a16:creationId xmlns:a16="http://schemas.microsoft.com/office/drawing/2014/main" id="{5F77580D-3A66-467A-8B0E-2EC4F10ED1F5}"/>
+                <a16:creationId xmlns:a16="http://schemas.microsoft.com/office/drawing/2014/main" id="{B2E67B43-3E2C-4E82-AD6C-06C8564AA305}"/>
               </a:ext>
             </a:extLst>
           </p:cNvPr>
@@ -10937,7 +10913,7 @@
           <p:cNvPr id="17" name="">
             <a:extLst xmlns:a="http://schemas.openxmlformats.org/drawingml/2006/main">
               <a:ext uri="{FF2B5EF4-FFF2-40B4-BE49-F238E27FC236}">
-                <a16:creationId xmlns:a16="http://schemas.microsoft.com/office/drawing/2014/main" id="{7514133A-17C9-42A4-920B-6A6570F415DE}"/>
+                <a16:creationId xmlns:a16="http://schemas.microsoft.com/office/drawing/2014/main" id="{2238030A-A5FE-43F7-B055-90C1268B9539}"/>
               </a:ext>
             </a:extLst>
           </p:cNvPr>
@@ -10993,7 +10969,7 @@
           <p:cNvPr id="18" name="">
             <a:extLst xmlns:a="http://schemas.openxmlformats.org/drawingml/2006/main">
               <a:ext uri="{FF2B5EF4-FFF2-40B4-BE49-F238E27FC236}">
-                <a16:creationId xmlns:a16="http://schemas.microsoft.com/office/drawing/2014/main" id="{B076841B-8CCC-41AA-8D39-46A0AEA90918}"/>
+                <a16:creationId xmlns:a16="http://schemas.microsoft.com/office/drawing/2014/main" id="{3A4C16BC-1BA8-4348-9A22-6B99987B3A39}"/>
               </a:ext>
             </a:extLst>
           </p:cNvPr>
@@ -11028,7 +11004,7 @@
           <p:cNvPr id="19" name="">
             <a:extLst xmlns:a="http://schemas.openxmlformats.org/drawingml/2006/main">
               <a:ext uri="{FF2B5EF4-FFF2-40B4-BE49-F238E27FC236}">
-                <a16:creationId xmlns:a16="http://schemas.microsoft.com/office/drawing/2014/main" id="{4DDEB611-C3AE-4CBC-A6EB-4C8B5EE5C07A}"/>
+                <a16:creationId xmlns:a16="http://schemas.microsoft.com/office/drawing/2014/main" id="{9A374EAD-4D8F-4B7C-B65C-F3D4D4CD86EE}"/>
               </a:ext>
             </a:extLst>
           </p:cNvPr>
@@ -11084,7 +11060,7 @@
           <p:cNvPr id="20" name="">
             <a:extLst xmlns:a="http://schemas.openxmlformats.org/drawingml/2006/main">
               <a:ext uri="{FF2B5EF4-FFF2-40B4-BE49-F238E27FC236}">
-                <a16:creationId xmlns:a16="http://schemas.microsoft.com/office/drawing/2014/main" id="{0447129F-8CE3-40A4-A62C-3B56560D2FB5}"/>
+                <a16:creationId xmlns:a16="http://schemas.microsoft.com/office/drawing/2014/main" id="{8E327D92-653E-4E6B-8E51-10E05A3A6239}"/>
               </a:ext>
             </a:extLst>
           </p:cNvPr>
@@ -11119,7 +11095,7 @@
           <p:cNvPr id="21" name="">
             <a:extLst xmlns:a="http://schemas.openxmlformats.org/drawingml/2006/main">
               <a:ext uri="{FF2B5EF4-FFF2-40B4-BE49-F238E27FC236}">
-                <a16:creationId xmlns:a16="http://schemas.microsoft.com/office/drawing/2014/main" id="{506D93F1-1E52-4B93-BF1C-5AD8688F98E8}"/>
+                <a16:creationId xmlns:a16="http://schemas.microsoft.com/office/drawing/2014/main" id="{09C7A1A9-1B7B-46EA-AE18-D89613476D8E}"/>
               </a:ext>
             </a:extLst>
           </p:cNvPr>
@@ -11175,7 +11151,7 @@
           <p:cNvPr id="22" name="">
             <a:extLst xmlns:a="http://schemas.openxmlformats.org/drawingml/2006/main">
               <a:ext uri="{FF2B5EF4-FFF2-40B4-BE49-F238E27FC236}">
-                <a16:creationId xmlns:a16="http://schemas.microsoft.com/office/drawing/2014/main" id="{40833BF1-B20F-424E-8A1B-19872FB9DB01}"/>
+                <a16:creationId xmlns:a16="http://schemas.microsoft.com/office/drawing/2014/main" id="{F90B9246-FEA6-40CE-9EFE-E2DA2A62AA24}"/>
               </a:ext>
             </a:extLst>
           </p:cNvPr>
@@ -11229,7 +11205,7 @@
     </p:spTree>
     <p:extLst>
       <p:ext uri="{BB962C8B-B14F-4D97-AF65-F5344CB8AC3E}">
-        <p14:creationId xmlns:p14="http://schemas.microsoft.com/office/powerpoint/2010/main" val="3525023"/>
+        <p14:creationId xmlns:p14="http://schemas.microsoft.com/office/powerpoint/2010/main" val="1484620175"/>
       </p:ext>
     </p:extLst>
   </p:cSld>
@@ -11260,7 +11236,7 @@
           <p:cNvPr id="1" name="">
             <a:extLst xmlns:a="http://schemas.openxmlformats.org/drawingml/2006/main">
               <a:ext uri="{FF2B5EF4-FFF2-40B4-BE49-F238E27FC236}">
-                <a16:creationId xmlns:a16="http://schemas.microsoft.com/office/drawing/2014/main" id="{B08D8EAA-FA03-4D82-8DDA-14ACDF95390A}"/>
+                <a16:creationId xmlns:a16="http://schemas.microsoft.com/office/drawing/2014/main" id="{4A51503A-FF48-498B-B01F-C7481D38EE75}"/>
               </a:ext>
             </a:extLst>
           </p:cNvPr>
@@ -11293,7 +11269,7 @@
           <p:cNvPr id="2" name="">
             <a:extLst xmlns:a="http://schemas.openxmlformats.org/drawingml/2006/main">
               <a:ext uri="{FF2B5EF4-FFF2-40B4-BE49-F238E27FC236}">
-                <a16:creationId xmlns:a16="http://schemas.microsoft.com/office/drawing/2014/main" id="{296A0B7B-5061-4EF8-A27C-756B24882E64}"/>
+                <a16:creationId xmlns:a16="http://schemas.microsoft.com/office/drawing/2014/main" id="{1643EFC4-8B59-45A5-8520-2EA205CA2FA4}"/>
               </a:ext>
             </a:extLst>
           </p:cNvPr>
@@ -11349,7 +11325,7 @@
           <p:cNvPr id="3" name="">
             <a:extLst xmlns:a="http://schemas.openxmlformats.org/drawingml/2006/main">
               <a:ext uri="{FF2B5EF4-FFF2-40B4-BE49-F238E27FC236}">
-                <a16:creationId xmlns:a16="http://schemas.microsoft.com/office/drawing/2014/main" id="{5C273F33-FD07-401F-918E-3842DFFB1405}"/>
+                <a16:creationId xmlns:a16="http://schemas.microsoft.com/office/drawing/2014/main" id="{6F934FCE-B6FD-431B-9449-816AF90948A4}"/>
               </a:ext>
             </a:extLst>
           </p:cNvPr>
@@ -11405,7 +11381,7 @@
           <p:cNvPr id="4" name="">
             <a:extLst xmlns:a="http://schemas.openxmlformats.org/drawingml/2006/main">
               <a:ext uri="{FF2B5EF4-FFF2-40B4-BE49-F238E27FC236}">
-                <a16:creationId xmlns:a16="http://schemas.microsoft.com/office/drawing/2014/main" id="{ED4264C6-20FE-4E10-B975-031937E53BAF}"/>
+                <a16:creationId xmlns:a16="http://schemas.microsoft.com/office/drawing/2014/main" id="{8E348149-DCDA-42C5-8FF9-45BECBD294D2}"/>
               </a:ext>
             </a:extLst>
           </p:cNvPr>
@@ -11440,7 +11416,7 @@
           <p:cNvPr id="5" name="">
             <a:extLst xmlns:a="http://schemas.openxmlformats.org/drawingml/2006/main">
               <a:ext uri="{FF2B5EF4-FFF2-40B4-BE49-F238E27FC236}">
-                <a16:creationId xmlns:a16="http://schemas.microsoft.com/office/drawing/2014/main" id="{6F9AC23E-42AB-4CFB-949F-9869CC68688A}"/>
+                <a16:creationId xmlns:a16="http://schemas.microsoft.com/office/drawing/2014/main" id="{81D0075E-60EA-4AB9-B0C5-5610B5338A1B}"/>
               </a:ext>
             </a:extLst>
           </p:cNvPr>
@@ -11496,7 +11472,7 @@
           <p:cNvPr id="6" name="">
             <a:extLst xmlns:a="http://schemas.openxmlformats.org/drawingml/2006/main">
               <a:ext uri="{FF2B5EF4-FFF2-40B4-BE49-F238E27FC236}">
-                <a16:creationId xmlns:a16="http://schemas.microsoft.com/office/drawing/2014/main" id="{A61C03EF-5D82-43DA-AED0-56819A1FA114}"/>
+                <a16:creationId xmlns:a16="http://schemas.microsoft.com/office/drawing/2014/main" id="{B340B10F-9B00-4B2B-A65E-6994E9A2D7B2}"/>
               </a:ext>
             </a:extLst>
           </p:cNvPr>
@@ -11552,7 +11528,7 @@
           <p:cNvPr id="7" name="">
             <a:extLst xmlns:a="http://schemas.openxmlformats.org/drawingml/2006/main">
               <a:ext uri="{FF2B5EF4-FFF2-40B4-BE49-F238E27FC236}">
-                <a16:creationId xmlns:a16="http://schemas.microsoft.com/office/drawing/2014/main" id="{162F4A37-19E8-49DC-8704-509EAF3C00D3}"/>
+                <a16:creationId xmlns:a16="http://schemas.microsoft.com/office/drawing/2014/main" id="{E09DFE62-2F4F-453C-ACFE-4B0DABEBF8DD}"/>
               </a:ext>
             </a:extLst>
           </p:cNvPr>
@@ -11587,7 +11563,7 @@
           <p:cNvPr id="8" name="">
             <a:extLst xmlns:a="http://schemas.openxmlformats.org/drawingml/2006/main">
               <a:ext uri="{FF2B5EF4-FFF2-40B4-BE49-F238E27FC236}">
-                <a16:creationId xmlns:a16="http://schemas.microsoft.com/office/drawing/2014/main" id="{91F74850-A792-42DD-83D9-DD592ED7681C}"/>
+                <a16:creationId xmlns:a16="http://schemas.microsoft.com/office/drawing/2014/main" id="{318DE7F0-A4DF-41F6-BC14-F05E87497275}"/>
               </a:ext>
             </a:extLst>
           </p:cNvPr>
@@ -11643,7 +11619,7 @@
           <p:cNvPr id="9" name="">
             <a:extLst xmlns:a="http://schemas.openxmlformats.org/drawingml/2006/main">
               <a:ext uri="{FF2B5EF4-FFF2-40B4-BE49-F238E27FC236}">
-                <a16:creationId xmlns:a16="http://schemas.microsoft.com/office/drawing/2014/main" id="{779F9EFA-2ABA-4279-A294-45B0D0FCC349}"/>
+                <a16:creationId xmlns:a16="http://schemas.microsoft.com/office/drawing/2014/main" id="{8C558B55-A1C4-42D1-87C2-8499F39B4C4F}"/>
               </a:ext>
             </a:extLst>
           </p:cNvPr>
@@ -11699,7 +11675,7 @@
           <p:cNvPr id="10" name="">
             <a:extLst xmlns:a="http://schemas.openxmlformats.org/drawingml/2006/main">
               <a:ext uri="{FF2B5EF4-FFF2-40B4-BE49-F238E27FC236}">
-                <a16:creationId xmlns:a16="http://schemas.microsoft.com/office/drawing/2014/main" id="{564FB460-4A91-4CA1-AFC5-B24D9E02FC08}"/>
+                <a16:creationId xmlns:a16="http://schemas.microsoft.com/office/drawing/2014/main" id="{4ACCA5B3-85E1-46CB-B5A8-BA5F9CC13C96}"/>
               </a:ext>
             </a:extLst>
           </p:cNvPr>
@@ -11734,7 +11710,7 @@
           <p:cNvPr id="11" name="">
             <a:extLst xmlns:a="http://schemas.openxmlformats.org/drawingml/2006/main">
               <a:ext uri="{FF2B5EF4-FFF2-40B4-BE49-F238E27FC236}">
-                <a16:creationId xmlns:a16="http://schemas.microsoft.com/office/drawing/2014/main" id="{9C8EA93A-9BA1-4F9E-B548-2426CB97314D}"/>
+                <a16:creationId xmlns:a16="http://schemas.microsoft.com/office/drawing/2014/main" id="{35DA3AFE-E368-4614-80BD-51D5C56B23B4}"/>
               </a:ext>
             </a:extLst>
           </p:cNvPr>
@@ -11790,7 +11766,7 @@
           <p:cNvPr id="12" name="">
             <a:extLst xmlns:a="http://schemas.openxmlformats.org/drawingml/2006/main">
               <a:ext uri="{FF2B5EF4-FFF2-40B4-BE49-F238E27FC236}">
-                <a16:creationId xmlns:a16="http://schemas.microsoft.com/office/drawing/2014/main" id="{A7597E96-64C3-4A3D-9B29-B51E1DE3E05F}"/>
+                <a16:creationId xmlns:a16="http://schemas.microsoft.com/office/drawing/2014/main" id="{02B3B4D3-ED06-4921-8F12-503DCCFBC773}"/>
               </a:ext>
             </a:extLst>
           </p:cNvPr>
@@ -11825,7 +11801,7 @@
           <p:cNvPr id="13" name="">
             <a:extLst xmlns:a="http://schemas.openxmlformats.org/drawingml/2006/main">
               <a:ext uri="{FF2B5EF4-FFF2-40B4-BE49-F238E27FC236}">
-                <a16:creationId xmlns:a16="http://schemas.microsoft.com/office/drawing/2014/main" id="{449B5426-D815-4EB6-B578-7772226A2F02}"/>
+                <a16:creationId xmlns:a16="http://schemas.microsoft.com/office/drawing/2014/main" id="{D4201222-BC23-43B1-98FD-59A8A818CBD4}"/>
               </a:ext>
             </a:extLst>
           </p:cNvPr>
@@ -11881,7 +11857,7 @@
           <p:cNvPr id="14" name="">
             <a:extLst xmlns:a="http://schemas.openxmlformats.org/drawingml/2006/main">
               <a:ext uri="{FF2B5EF4-FFF2-40B4-BE49-F238E27FC236}">
-                <a16:creationId xmlns:a16="http://schemas.microsoft.com/office/drawing/2014/main" id="{AB773324-1F1B-4736-88FE-AAFDAE872E14}"/>
+                <a16:creationId xmlns:a16="http://schemas.microsoft.com/office/drawing/2014/main" id="{11C33802-2D9F-4689-ADCB-83E65A935E1C}"/>
               </a:ext>
             </a:extLst>
           </p:cNvPr>
@@ -11935,7 +11911,7 @@
     </p:spTree>
     <p:extLst>
       <p:ext uri="{BB962C8B-B14F-4D97-AF65-F5344CB8AC3E}">
-        <p14:creationId xmlns:p14="http://schemas.microsoft.com/office/powerpoint/2010/main" val="382921832"/>
+        <p14:creationId xmlns:p14="http://schemas.microsoft.com/office/powerpoint/2010/main" val="1401349876"/>
       </p:ext>
     </p:extLst>
   </p:cSld>
@@ -11966,7 +11942,7 @@
           <p:cNvPr id="1" name="">
             <a:extLst xmlns:a="http://schemas.openxmlformats.org/drawingml/2006/main">
               <a:ext uri="{FF2B5EF4-FFF2-40B4-BE49-F238E27FC236}">
-                <a16:creationId xmlns:a16="http://schemas.microsoft.com/office/drawing/2014/main" id="{D65F4988-727E-4168-ACDB-2B39D13E5FDB}"/>
+                <a16:creationId xmlns:a16="http://schemas.microsoft.com/office/drawing/2014/main" id="{4C2B54C8-6CED-47E5-916D-8605E80E059B}"/>
               </a:ext>
             </a:extLst>
           </p:cNvPr>
@@ -11999,7 +11975,7 @@
           <p:cNvPr id="2" name="">
             <a:extLst xmlns:a="http://schemas.openxmlformats.org/drawingml/2006/main">
               <a:ext uri="{FF2B5EF4-FFF2-40B4-BE49-F238E27FC236}">
-                <a16:creationId xmlns:a16="http://schemas.microsoft.com/office/drawing/2014/main" id="{C6756F0D-E325-4989-83F1-A82FAB2C57D0}"/>
+                <a16:creationId xmlns:a16="http://schemas.microsoft.com/office/drawing/2014/main" id="{CF91BD0C-16C0-441C-AF95-229A733E6E7D}"/>
               </a:ext>
             </a:extLst>
           </p:cNvPr>
@@ -12055,7 +12031,7 @@
           <p:cNvPr id="3" name="">
             <a:extLst xmlns:a="http://schemas.openxmlformats.org/drawingml/2006/main">
               <a:ext uri="{FF2B5EF4-FFF2-40B4-BE49-F238E27FC236}">
-                <a16:creationId xmlns:a16="http://schemas.microsoft.com/office/drawing/2014/main" id="{CF7C2750-BC36-4ADB-9598-E0C064BF779E}"/>
+                <a16:creationId xmlns:a16="http://schemas.microsoft.com/office/drawing/2014/main" id="{5A020548-48D4-4D76-93D7-C75D082F84E8}"/>
               </a:ext>
             </a:extLst>
           </p:cNvPr>
@@ -12111,7 +12087,7 @@
           <p:cNvPr id="4" name="">
             <a:extLst xmlns:a="http://schemas.openxmlformats.org/drawingml/2006/main">
               <a:ext uri="{FF2B5EF4-FFF2-40B4-BE49-F238E27FC236}">
-                <a16:creationId xmlns:a16="http://schemas.microsoft.com/office/drawing/2014/main" id="{7802B555-B9C0-4F78-8446-F7374BB8D31A}"/>
+                <a16:creationId xmlns:a16="http://schemas.microsoft.com/office/drawing/2014/main" id="{E87C2FCB-DB69-4C35-A0D8-6122FE72C942}"/>
               </a:ext>
             </a:extLst>
           </p:cNvPr>
@@ -12146,7 +12122,7 @@
           <p:cNvPr id="5" name="">
             <a:extLst xmlns:a="http://schemas.openxmlformats.org/drawingml/2006/main">
               <a:ext uri="{FF2B5EF4-FFF2-40B4-BE49-F238E27FC236}">
-                <a16:creationId xmlns:a16="http://schemas.microsoft.com/office/drawing/2014/main" id="{527BC268-B904-4960-9125-58050A588355}"/>
+                <a16:creationId xmlns:a16="http://schemas.microsoft.com/office/drawing/2014/main" id="{5988FF1D-3280-407E-B37E-44D096334077}"/>
               </a:ext>
             </a:extLst>
           </p:cNvPr>
@@ -12202,7 +12178,7 @@
           <p:cNvPr id="6" name="">
             <a:extLst xmlns:a="http://schemas.openxmlformats.org/drawingml/2006/main">
               <a:ext uri="{FF2B5EF4-FFF2-40B4-BE49-F238E27FC236}">
-                <a16:creationId xmlns:a16="http://schemas.microsoft.com/office/drawing/2014/main" id="{6A204FDE-79EB-4A75-91EF-0AE1877E1FE9}"/>
+                <a16:creationId xmlns:a16="http://schemas.microsoft.com/office/drawing/2014/main" id="{2166DB18-B1AE-4151-AC16-7F2745281310}"/>
               </a:ext>
             </a:extLst>
           </p:cNvPr>
@@ -12237,7 +12213,7 @@
           <p:cNvPr id="7" name="">
             <a:extLst xmlns:a="http://schemas.openxmlformats.org/drawingml/2006/main">
               <a:ext uri="{FF2B5EF4-FFF2-40B4-BE49-F238E27FC236}">
-                <a16:creationId xmlns:a16="http://schemas.microsoft.com/office/drawing/2014/main" id="{0FE11F1D-E024-4E7B-808A-C6BC3FBEC47C}"/>
+                <a16:creationId xmlns:a16="http://schemas.microsoft.com/office/drawing/2014/main" id="{46AFD62D-F881-4405-82F0-A4F45AE3AB27}"/>
               </a:ext>
             </a:extLst>
           </p:cNvPr>
@@ -12293,7 +12269,7 @@
           <p:cNvPr id="8" name="">
             <a:extLst xmlns:a="http://schemas.openxmlformats.org/drawingml/2006/main">
               <a:ext uri="{FF2B5EF4-FFF2-40B4-BE49-F238E27FC236}">
-                <a16:creationId xmlns:a16="http://schemas.microsoft.com/office/drawing/2014/main" id="{8EB007D5-8D5B-4997-8C27-F7E809A602F3}"/>
+                <a16:creationId xmlns:a16="http://schemas.microsoft.com/office/drawing/2014/main" id="{D795CA05-F0C0-435B-A4A4-1FB2B37089A3}"/>
               </a:ext>
             </a:extLst>
           </p:cNvPr>
@@ -12328,7 +12304,7 @@
           <p:cNvPr id="9" name="">
             <a:extLst xmlns:a="http://schemas.openxmlformats.org/drawingml/2006/main">
               <a:ext uri="{FF2B5EF4-FFF2-40B4-BE49-F238E27FC236}">
-                <a16:creationId xmlns:a16="http://schemas.microsoft.com/office/drawing/2014/main" id="{9FA511EA-8014-4CE8-ABC9-C26A9A7CA772}"/>
+                <a16:creationId xmlns:a16="http://schemas.microsoft.com/office/drawing/2014/main" id="{10BA45AB-F99B-42DC-9180-AC5CB3C9803F}"/>
               </a:ext>
             </a:extLst>
           </p:cNvPr>
@@ -12384,7 +12360,7 @@
           <p:cNvPr id="10" name="">
             <a:extLst xmlns:a="http://schemas.openxmlformats.org/drawingml/2006/main">
               <a:ext uri="{FF2B5EF4-FFF2-40B4-BE49-F238E27FC236}">
-                <a16:creationId xmlns:a16="http://schemas.microsoft.com/office/drawing/2014/main" id="{FF7A3A5A-BCAF-4BB3-A743-B822C0550437}"/>
+                <a16:creationId xmlns:a16="http://schemas.microsoft.com/office/drawing/2014/main" id="{FE3B47DF-B9EB-4D25-8106-E4D3C2EC30D7}"/>
               </a:ext>
             </a:extLst>
           </p:cNvPr>
@@ -12419,7 +12395,7 @@
           <p:cNvPr id="11" name="">
             <a:extLst xmlns:a="http://schemas.openxmlformats.org/drawingml/2006/main">
               <a:ext uri="{FF2B5EF4-FFF2-40B4-BE49-F238E27FC236}">
-                <a16:creationId xmlns:a16="http://schemas.microsoft.com/office/drawing/2014/main" id="{13AACCD2-699A-437C-96A8-D5B039119F78}"/>
+                <a16:creationId xmlns:a16="http://schemas.microsoft.com/office/drawing/2014/main" id="{792F5541-86C3-4CD3-B621-80385399A667}"/>
               </a:ext>
             </a:extLst>
           </p:cNvPr>
@@ -12475,7 +12451,7 @@
           <p:cNvPr id="12" name="">
             <a:extLst xmlns:a="http://schemas.openxmlformats.org/drawingml/2006/main">
               <a:ext uri="{FF2B5EF4-FFF2-40B4-BE49-F238E27FC236}">
-                <a16:creationId xmlns:a16="http://schemas.microsoft.com/office/drawing/2014/main" id="{8F6CB9FC-6349-49AD-9030-0B802806C1B4}"/>
+                <a16:creationId xmlns:a16="http://schemas.microsoft.com/office/drawing/2014/main" id="{CBD5986E-AC4B-4D74-844F-91CECC9BDEA7}"/>
               </a:ext>
             </a:extLst>
           </p:cNvPr>
@@ -12529,7 +12505,7 @@
     </p:spTree>
     <p:extLst>
       <p:ext uri="{BB962C8B-B14F-4D97-AF65-F5344CB8AC3E}">
-        <p14:creationId xmlns:p14="http://schemas.microsoft.com/office/powerpoint/2010/main" val="1859236326"/>
+        <p14:creationId xmlns:p14="http://schemas.microsoft.com/office/powerpoint/2010/main" val="752210092"/>
       </p:ext>
     </p:extLst>
   </p:cSld>
@@ -12560,7 +12536,7 @@
           <p:cNvPr id="1" name="">
             <a:extLst xmlns:a="http://schemas.openxmlformats.org/drawingml/2006/main">
               <a:ext uri="{FF2B5EF4-FFF2-40B4-BE49-F238E27FC236}">
-                <a16:creationId xmlns:a16="http://schemas.microsoft.com/office/drawing/2014/main" id="{76EF6E9A-2871-4D1C-9C47-653F06690CEB}"/>
+                <a16:creationId xmlns:a16="http://schemas.microsoft.com/office/drawing/2014/main" id="{060B052F-51D7-465D-9842-95C000BFB807}"/>
               </a:ext>
             </a:extLst>
           </p:cNvPr>
@@ -12593,7 +12569,7 @@
           <p:cNvPr id="2" name="">
             <a:extLst xmlns:a="http://schemas.openxmlformats.org/drawingml/2006/main">
               <a:ext uri="{FF2B5EF4-FFF2-40B4-BE49-F238E27FC236}">
-                <a16:creationId xmlns:a16="http://schemas.microsoft.com/office/drawing/2014/main" id="{E4ABC26E-CD98-445F-ADDB-095774183C3A}"/>
+                <a16:creationId xmlns:a16="http://schemas.microsoft.com/office/drawing/2014/main" id="{36DE8B42-F5F2-4238-924D-1C08DB544ACF}"/>
               </a:ext>
             </a:extLst>
           </p:cNvPr>
@@ -12649,7 +12625,7 @@
           <p:cNvPr id="3" name="">
             <a:extLst xmlns:a="http://schemas.openxmlformats.org/drawingml/2006/main">
               <a:ext uri="{FF2B5EF4-FFF2-40B4-BE49-F238E27FC236}">
-                <a16:creationId xmlns:a16="http://schemas.microsoft.com/office/drawing/2014/main" id="{0C483C27-E925-4688-AA2C-F76D17D5DA53}"/>
+                <a16:creationId xmlns:a16="http://schemas.microsoft.com/office/drawing/2014/main" id="{E56397E8-32C5-49B8-AB07-6E68B5041B1C}"/>
               </a:ext>
             </a:extLst>
           </p:cNvPr>
@@ -12705,7 +12681,7 @@
           <p:cNvPr id="4" name="">
             <a:extLst xmlns:a="http://schemas.openxmlformats.org/drawingml/2006/main">
               <a:ext uri="{FF2B5EF4-FFF2-40B4-BE49-F238E27FC236}">
-                <a16:creationId xmlns:a16="http://schemas.microsoft.com/office/drawing/2014/main" id="{04AF99BB-D515-42EB-A8FB-25BD4BF61900}"/>
+                <a16:creationId xmlns:a16="http://schemas.microsoft.com/office/drawing/2014/main" id="{9DF3F275-4214-44B4-A97E-019002D5F28C}"/>
               </a:ext>
             </a:extLst>
           </p:cNvPr>
@@ -12761,7 +12737,7 @@
           <p:cNvPr id="5" name="">
             <a:extLst xmlns:a="http://schemas.openxmlformats.org/drawingml/2006/main">
               <a:ext uri="{FF2B5EF4-FFF2-40B4-BE49-F238E27FC236}">
-                <a16:creationId xmlns:a16="http://schemas.microsoft.com/office/drawing/2014/main" id="{1C547617-6FF6-41A5-A0DF-24599501D06E}"/>
+                <a16:creationId xmlns:a16="http://schemas.microsoft.com/office/drawing/2014/main" id="{61059306-A85A-4BEB-BA3C-56E90E2469BB}"/>
               </a:ext>
             </a:extLst>
           </p:cNvPr>
@@ -12796,7 +12772,7 @@
           <p:cNvPr id="6" name="">
             <a:extLst xmlns:a="http://schemas.openxmlformats.org/drawingml/2006/main">
               <a:ext uri="{FF2B5EF4-FFF2-40B4-BE49-F238E27FC236}">
-                <a16:creationId xmlns:a16="http://schemas.microsoft.com/office/drawing/2014/main" id="{744A14CF-8EC5-4990-8AC2-98803ADC0E28}"/>
+                <a16:creationId xmlns:a16="http://schemas.microsoft.com/office/drawing/2014/main" id="{1AACD3D6-BE35-4C7E-B8AC-43985EDC93A7}"/>
               </a:ext>
             </a:extLst>
           </p:cNvPr>
@@ -12852,7 +12828,7 @@
           <p:cNvPr id="7" name="">
             <a:extLst xmlns:a="http://schemas.openxmlformats.org/drawingml/2006/main">
               <a:ext uri="{FF2B5EF4-FFF2-40B4-BE49-F238E27FC236}">
-                <a16:creationId xmlns:a16="http://schemas.microsoft.com/office/drawing/2014/main" id="{2C590FAF-B246-4F0B-A4DB-46BBA088DE9A}"/>
+                <a16:creationId xmlns:a16="http://schemas.microsoft.com/office/drawing/2014/main" id="{9325EA1F-C452-4DEF-8872-B64C03BFF4DA}"/>
               </a:ext>
             </a:extLst>
           </p:cNvPr>
@@ -12906,7 +12882,7 @@
     </p:spTree>
     <p:extLst>
       <p:ext uri="{BB962C8B-B14F-4D97-AF65-F5344CB8AC3E}">
-        <p14:creationId xmlns:p14="http://schemas.microsoft.com/office/powerpoint/2010/main" val="365059830"/>
+        <p14:creationId xmlns:p14="http://schemas.microsoft.com/office/powerpoint/2010/main" val="967842969"/>
       </p:ext>
     </p:extLst>
   </p:cSld>
@@ -12937,7 +12913,7 @@
           <p:cNvPr id="1" name="">
             <a:extLst xmlns:a="http://schemas.openxmlformats.org/drawingml/2006/main">
               <a:ext uri="{FF2B5EF4-FFF2-40B4-BE49-F238E27FC236}">
-                <a16:creationId xmlns:a16="http://schemas.microsoft.com/office/drawing/2014/main" id="{E98CD0FC-2ACE-49F2-AA45-76B20AE7B334}"/>
+                <a16:creationId xmlns:a16="http://schemas.microsoft.com/office/drawing/2014/main" id="{89BD842E-20E3-4758-98A5-375707FD1A57}"/>
               </a:ext>
             </a:extLst>
           </p:cNvPr>
@@ -12970,7 +12946,7 @@
           <p:cNvPr id="2" name="">
             <a:extLst xmlns:a="http://schemas.openxmlformats.org/drawingml/2006/main">
               <a:ext uri="{FF2B5EF4-FFF2-40B4-BE49-F238E27FC236}">
-                <a16:creationId xmlns:a16="http://schemas.microsoft.com/office/drawing/2014/main" id="{654E86FA-7EAA-40A0-A61E-9C0162DDEB0B}"/>
+                <a16:creationId xmlns:a16="http://schemas.microsoft.com/office/drawing/2014/main" id="{F1428CB5-3C21-4B5D-A065-20F2CE7233D3}"/>
               </a:ext>
             </a:extLst>
           </p:cNvPr>
@@ -13026,7 +13002,7 @@
           <p:cNvPr id="3" name="">
             <a:extLst xmlns:a="http://schemas.openxmlformats.org/drawingml/2006/main">
               <a:ext uri="{FF2B5EF4-FFF2-40B4-BE49-F238E27FC236}">
-                <a16:creationId xmlns:a16="http://schemas.microsoft.com/office/drawing/2014/main" id="{0455C88B-1E8C-46AF-9957-C8D663DFAF6A}"/>
+                <a16:creationId xmlns:a16="http://schemas.microsoft.com/office/drawing/2014/main" id="{15EDD262-395F-46BA-BF97-9CF1722B7EBF}"/>
               </a:ext>
             </a:extLst>
           </p:cNvPr>
@@ -13082,7 +13058,7 @@
           <p:cNvPr id="4" name="">
             <a:extLst xmlns:a="http://schemas.openxmlformats.org/drawingml/2006/main">
               <a:ext uri="{FF2B5EF4-FFF2-40B4-BE49-F238E27FC236}">
-                <a16:creationId xmlns:a16="http://schemas.microsoft.com/office/drawing/2014/main" id="{06177BD6-818D-44F7-AFA1-4E6DA30D8B31}"/>
+                <a16:creationId xmlns:a16="http://schemas.microsoft.com/office/drawing/2014/main" id="{2F39619A-D52A-4257-BFD4-BCFD728BD5C5}"/>
               </a:ext>
             </a:extLst>
           </p:cNvPr>
@@ -13117,7 +13093,7 @@
           <p:cNvPr id="5" name="">
             <a:extLst xmlns:a="http://schemas.openxmlformats.org/drawingml/2006/main">
               <a:ext uri="{FF2B5EF4-FFF2-40B4-BE49-F238E27FC236}">
-                <a16:creationId xmlns:a16="http://schemas.microsoft.com/office/drawing/2014/main" id="{67855D13-829D-438C-B642-E3635585A849}"/>
+                <a16:creationId xmlns:a16="http://schemas.microsoft.com/office/drawing/2014/main" id="{D01F1481-DAAF-4282-AD21-A97CC33256D7}"/>
               </a:ext>
             </a:extLst>
           </p:cNvPr>
@@ -13173,7 +13149,7 @@
           <p:cNvPr id="6" name="">
             <a:extLst xmlns:a="http://schemas.openxmlformats.org/drawingml/2006/main">
               <a:ext uri="{FF2B5EF4-FFF2-40B4-BE49-F238E27FC236}">
-                <a16:creationId xmlns:a16="http://schemas.microsoft.com/office/drawing/2014/main" id="{37A7029B-4179-4F76-B3B4-6F43316D456F}"/>
+                <a16:creationId xmlns:a16="http://schemas.microsoft.com/office/drawing/2014/main" id="{83B07A3A-AF88-400F-B53E-6354A2F293F8}"/>
               </a:ext>
             </a:extLst>
           </p:cNvPr>
@@ -13208,7 +13184,7 @@
           <p:cNvPr id="7" name="">
             <a:extLst xmlns:a="http://schemas.openxmlformats.org/drawingml/2006/main">
               <a:ext uri="{FF2B5EF4-FFF2-40B4-BE49-F238E27FC236}">
-                <a16:creationId xmlns:a16="http://schemas.microsoft.com/office/drawing/2014/main" id="{7517AEA9-7AF6-4B18-A8A4-1F0E39B0B464}"/>
+                <a16:creationId xmlns:a16="http://schemas.microsoft.com/office/drawing/2014/main" id="{456560AC-795A-4D35-98E6-7419E2E65F5A}"/>
               </a:ext>
             </a:extLst>
           </p:cNvPr>
@@ -13264,7 +13240,7 @@
           <p:cNvPr id="8" name="">
             <a:extLst xmlns:a="http://schemas.openxmlformats.org/drawingml/2006/main">
               <a:ext uri="{FF2B5EF4-FFF2-40B4-BE49-F238E27FC236}">
-                <a16:creationId xmlns:a16="http://schemas.microsoft.com/office/drawing/2014/main" id="{EA039678-6F8C-4FDF-8B15-A84E48B42296}"/>
+                <a16:creationId xmlns:a16="http://schemas.microsoft.com/office/drawing/2014/main" id="{3D1E3C15-0309-4396-80B7-807837938255}"/>
               </a:ext>
             </a:extLst>
           </p:cNvPr>
@@ -13299,7 +13275,7 @@
           <p:cNvPr id="9" name="">
             <a:extLst xmlns:a="http://schemas.openxmlformats.org/drawingml/2006/main">
               <a:ext uri="{FF2B5EF4-FFF2-40B4-BE49-F238E27FC236}">
-                <a16:creationId xmlns:a16="http://schemas.microsoft.com/office/drawing/2014/main" id="{ACAEC527-B118-4DAD-B303-98DFD1EC5823}"/>
+                <a16:creationId xmlns:a16="http://schemas.microsoft.com/office/drawing/2014/main" id="{EA986271-6539-4EFC-96F7-5E002A9B4FE0}"/>
               </a:ext>
             </a:extLst>
           </p:cNvPr>
@@ -13355,7 +13331,7 @@
           <p:cNvPr id="10" name="">
             <a:extLst xmlns:a="http://schemas.openxmlformats.org/drawingml/2006/main">
               <a:ext uri="{FF2B5EF4-FFF2-40B4-BE49-F238E27FC236}">
-                <a16:creationId xmlns:a16="http://schemas.microsoft.com/office/drawing/2014/main" id="{81D09007-D025-42C7-BE8D-11C1A6A622BA}"/>
+                <a16:creationId xmlns:a16="http://schemas.microsoft.com/office/drawing/2014/main" id="{F221CB4F-F565-43DF-AC7D-88B2103D4C94}"/>
               </a:ext>
             </a:extLst>
           </p:cNvPr>
@@ -13390,7 +13366,7 @@
           <p:cNvPr id="11" name="">
             <a:extLst xmlns:a="http://schemas.openxmlformats.org/drawingml/2006/main">
               <a:ext uri="{FF2B5EF4-FFF2-40B4-BE49-F238E27FC236}">
-                <a16:creationId xmlns:a16="http://schemas.microsoft.com/office/drawing/2014/main" id="{F2B71B5E-0519-46A0-B0D0-CE4010DBAF3B}"/>
+                <a16:creationId xmlns:a16="http://schemas.microsoft.com/office/drawing/2014/main" id="{97116213-EF6F-4A2B-A225-BBFE69D812A7}"/>
               </a:ext>
             </a:extLst>
           </p:cNvPr>
@@ -13446,7 +13422,7 @@
           <p:cNvPr id="12" name="">
             <a:extLst xmlns:a="http://schemas.openxmlformats.org/drawingml/2006/main">
               <a:ext uri="{FF2B5EF4-FFF2-40B4-BE49-F238E27FC236}">
-                <a16:creationId xmlns:a16="http://schemas.microsoft.com/office/drawing/2014/main" id="{4515B1E8-07D0-44A7-9596-374136F46CBE}"/>
+                <a16:creationId xmlns:a16="http://schemas.microsoft.com/office/drawing/2014/main" id="{FCA8E03F-F900-4A84-901F-3642A4C402EF}"/>
               </a:ext>
             </a:extLst>
           </p:cNvPr>
@@ -13500,7 +13476,7 @@
     </p:spTree>
     <p:extLst>
       <p:ext uri="{BB962C8B-B14F-4D97-AF65-F5344CB8AC3E}">
-        <p14:creationId xmlns:p14="http://schemas.microsoft.com/office/powerpoint/2010/main" val="755834027"/>
+        <p14:creationId xmlns:p14="http://schemas.microsoft.com/office/powerpoint/2010/main" val="57436716"/>
       </p:ext>
     </p:extLst>
   </p:cSld>
@@ -13531,7 +13507,7 @@
           <p:cNvPr id="1" name="">
             <a:extLst xmlns:a="http://schemas.openxmlformats.org/drawingml/2006/main">
               <a:ext uri="{FF2B5EF4-FFF2-40B4-BE49-F238E27FC236}">
-                <a16:creationId xmlns:a16="http://schemas.microsoft.com/office/drawing/2014/main" id="{043353D1-3EF9-436F-B297-35EBD8E134D7}"/>
+                <a16:creationId xmlns:a16="http://schemas.microsoft.com/office/drawing/2014/main" id="{26B1C142-2722-4950-B1A4-78DB63A67937}"/>
               </a:ext>
             </a:extLst>
           </p:cNvPr>
@@ -13564,7 +13540,7 @@
           <p:cNvPr id="2" name="">
             <a:extLst xmlns:a="http://schemas.openxmlformats.org/drawingml/2006/main">
               <a:ext uri="{FF2B5EF4-FFF2-40B4-BE49-F238E27FC236}">
-                <a16:creationId xmlns:a16="http://schemas.microsoft.com/office/drawing/2014/main" id="{231A83C4-9D7F-480A-A398-FE3B35EBC6CB}"/>
+                <a16:creationId xmlns:a16="http://schemas.microsoft.com/office/drawing/2014/main" id="{00CD7EBD-0020-4104-8A04-2BE1D1C8859F}"/>
               </a:ext>
             </a:extLst>
           </p:cNvPr>
@@ -13620,7 +13596,7 @@
           <p:cNvPr id="3" name="">
             <a:extLst xmlns:a="http://schemas.openxmlformats.org/drawingml/2006/main">
               <a:ext uri="{FF2B5EF4-FFF2-40B4-BE49-F238E27FC236}">
-                <a16:creationId xmlns:a16="http://schemas.microsoft.com/office/drawing/2014/main" id="{B5A75E20-4DE1-4EB4-B238-A36C0402045E}"/>
+                <a16:creationId xmlns:a16="http://schemas.microsoft.com/office/drawing/2014/main" id="{F26711A9-7D4F-469F-8554-8A8759D7C9E2}"/>
               </a:ext>
             </a:extLst>
           </p:cNvPr>
@@ -13680,19 +13656,13 @@
           <p:nvPr/>
         </p:nvPicPr>
         <p:blipFill>
-          <a:blip xmlns:r="http://schemas.openxmlformats.org/officeDocument/2006/relationships" xmlns:a="http://schemas.openxmlformats.org/drawingml/2006/main" r:embed="Rc14e37f5753c46e0">
-            <a:extLst>
-              <a:ext uri="{96DAC541-7B7A-43D3-8B79-37D633B846F1}">
-                <asvg:svgBlip xmlns:asvg="http://schemas.microsoft.com/office/drawing/2016/SVG/main" r:embed="R1a11ca0c44dc4624"/>
-              </a:ext>
-            </a:extLst>
-          </a:blip>
+          <a:blip xmlns:r="http://schemas.openxmlformats.org/officeDocument/2006/relationships" xmlns:a="http://schemas.openxmlformats.org/drawingml/2006/main" r:embed="R278bc8afdf964888"/>
           <a:stretch xmlns:a="http://schemas.openxmlformats.org/drawingml/2006/main"/>
         </p:blipFill>
         <p:spPr>
           <a:xfrm xmlns:a="http://schemas.openxmlformats.org/drawingml/2006/main">
-            <a:off x="6858000" y="1352550"/>
-            <a:ext cx="4286250" cy="2000250"/>
+            <a:off x="6908472" y="1352550"/>
+            <a:ext cx="4185306" cy="2000250"/>
           </a:xfrm>
           <a:prstGeom xmlns:a="http://schemas.openxmlformats.org/drawingml/2006/main" prst="rect">
             <a:avLst/>
@@ -13704,7 +13674,7 @@
           <p:cNvPr id="5" name="">
             <a:extLst xmlns:a="http://schemas.openxmlformats.org/drawingml/2006/main">
               <a:ext uri="{FF2B5EF4-FFF2-40B4-BE49-F238E27FC236}">
-                <a16:creationId xmlns:a16="http://schemas.microsoft.com/office/drawing/2014/main" id="{5AA029BB-B494-46C1-A9CC-A4A644912827}"/>
+                <a16:creationId xmlns:a16="http://schemas.microsoft.com/office/drawing/2014/main" id="{74AFDA2E-EDB2-4A8A-8C4A-B0561D65BC2C}"/>
               </a:ext>
             </a:extLst>
           </p:cNvPr>
@@ -13739,7 +13709,7 @@
           <p:cNvPr id="6" name="">
             <a:extLst xmlns:a="http://schemas.openxmlformats.org/drawingml/2006/main">
               <a:ext uri="{FF2B5EF4-FFF2-40B4-BE49-F238E27FC236}">
-                <a16:creationId xmlns:a16="http://schemas.microsoft.com/office/drawing/2014/main" id="{EC564432-12A6-4C9C-ADAC-8F517A577631}"/>
+                <a16:creationId xmlns:a16="http://schemas.microsoft.com/office/drawing/2014/main" id="{CACE96DF-66D3-43AB-B250-E60D4029C486}"/>
               </a:ext>
             </a:extLst>
           </p:cNvPr>
@@ -13795,7 +13765,7 @@
           <p:cNvPr id="7" name="">
             <a:extLst xmlns:a="http://schemas.openxmlformats.org/drawingml/2006/main">
               <a:ext uri="{FF2B5EF4-FFF2-40B4-BE49-F238E27FC236}">
-                <a16:creationId xmlns:a16="http://schemas.microsoft.com/office/drawing/2014/main" id="{43F52BFA-23CB-4B69-806E-B3166DA8CD14}"/>
+                <a16:creationId xmlns:a16="http://schemas.microsoft.com/office/drawing/2014/main" id="{97E73B61-3A80-4598-B368-6A599C15CC91}"/>
               </a:ext>
             </a:extLst>
           </p:cNvPr>
@@ -13830,7 +13800,7 @@
           <p:cNvPr id="8" name="">
             <a:extLst xmlns:a="http://schemas.openxmlformats.org/drawingml/2006/main">
               <a:ext uri="{FF2B5EF4-FFF2-40B4-BE49-F238E27FC236}">
-                <a16:creationId xmlns:a16="http://schemas.microsoft.com/office/drawing/2014/main" id="{67667A8F-E06E-4FF9-8928-E0D1BC079B3B}"/>
+                <a16:creationId xmlns:a16="http://schemas.microsoft.com/office/drawing/2014/main" id="{3BBBFE4B-674E-45CF-84FC-3820475D5B31}"/>
               </a:ext>
             </a:extLst>
           </p:cNvPr>
@@ -13886,7 +13856,7 @@
           <p:cNvPr id="9" name="">
             <a:extLst xmlns:a="http://schemas.openxmlformats.org/drawingml/2006/main">
               <a:ext uri="{FF2B5EF4-FFF2-40B4-BE49-F238E27FC236}">
-                <a16:creationId xmlns:a16="http://schemas.microsoft.com/office/drawing/2014/main" id="{BBB010F1-774E-4066-A30B-CAB02B7252CF}"/>
+                <a16:creationId xmlns:a16="http://schemas.microsoft.com/office/drawing/2014/main" id="{03254436-7D6D-41CE-929F-6F1751ACC2CF}"/>
               </a:ext>
             </a:extLst>
           </p:cNvPr>
@@ -13921,7 +13891,7 @@
           <p:cNvPr id="10" name="">
             <a:extLst xmlns:a="http://schemas.openxmlformats.org/drawingml/2006/main">
               <a:ext uri="{FF2B5EF4-FFF2-40B4-BE49-F238E27FC236}">
-                <a16:creationId xmlns:a16="http://schemas.microsoft.com/office/drawing/2014/main" id="{7B5F2804-2BC8-4891-8E0F-9953F4DE7A88}"/>
+                <a16:creationId xmlns:a16="http://schemas.microsoft.com/office/drawing/2014/main" id="{2983B384-97C4-4C3A-8733-030FC71F0A32}"/>
               </a:ext>
             </a:extLst>
           </p:cNvPr>
@@ -13977,7 +13947,7 @@
           <p:cNvPr id="11" name="">
             <a:extLst xmlns:a="http://schemas.openxmlformats.org/drawingml/2006/main">
               <a:ext uri="{FF2B5EF4-FFF2-40B4-BE49-F238E27FC236}">
-                <a16:creationId xmlns:a16="http://schemas.microsoft.com/office/drawing/2014/main" id="{AD1E7CC2-7212-47FE-B1A2-D13F440E72F9}"/>
+                <a16:creationId xmlns:a16="http://schemas.microsoft.com/office/drawing/2014/main" id="{A8E5767F-9009-4C7B-A617-043036E69220}"/>
               </a:ext>
             </a:extLst>
           </p:cNvPr>
@@ -14012,7 +13982,7 @@
           <p:cNvPr id="12" name="">
             <a:extLst xmlns:a="http://schemas.openxmlformats.org/drawingml/2006/main">
               <a:ext uri="{FF2B5EF4-FFF2-40B4-BE49-F238E27FC236}">
-                <a16:creationId xmlns:a16="http://schemas.microsoft.com/office/drawing/2014/main" id="{FBB78E11-3B4F-4777-A412-453C36AAE3C2}"/>
+                <a16:creationId xmlns:a16="http://schemas.microsoft.com/office/drawing/2014/main" id="{F13773AE-0815-450C-96B0-1E40399AB180}"/>
               </a:ext>
             </a:extLst>
           </p:cNvPr>
@@ -14068,7 +14038,7 @@
           <p:cNvPr id="13" name="">
             <a:extLst xmlns:a="http://schemas.openxmlformats.org/drawingml/2006/main">
               <a:ext uri="{FF2B5EF4-FFF2-40B4-BE49-F238E27FC236}">
-                <a16:creationId xmlns:a16="http://schemas.microsoft.com/office/drawing/2014/main" id="{376E6272-C8BE-475B-B722-455F87E845D9}"/>
+                <a16:creationId xmlns:a16="http://schemas.microsoft.com/office/drawing/2014/main" id="{F39A7A1C-2FFA-47D5-B460-A0A4D22EA5C3}"/>
               </a:ext>
             </a:extLst>
           </p:cNvPr>
@@ -14103,7 +14073,7 @@
           <p:cNvPr id="14" name="">
             <a:extLst xmlns:a="http://schemas.openxmlformats.org/drawingml/2006/main">
               <a:ext uri="{FF2B5EF4-FFF2-40B4-BE49-F238E27FC236}">
-                <a16:creationId xmlns:a16="http://schemas.microsoft.com/office/drawing/2014/main" id="{19531D28-49F3-44E6-A9BE-BF545E75D9D8}"/>
+                <a16:creationId xmlns:a16="http://schemas.microsoft.com/office/drawing/2014/main" id="{84E2EE7D-782A-4961-9B91-F31DC6F25949}"/>
               </a:ext>
             </a:extLst>
           </p:cNvPr>
@@ -14159,7 +14129,7 @@
           <p:cNvPr id="15" name="">
             <a:extLst xmlns:a="http://schemas.openxmlformats.org/drawingml/2006/main">
               <a:ext uri="{FF2B5EF4-FFF2-40B4-BE49-F238E27FC236}">
-                <a16:creationId xmlns:a16="http://schemas.microsoft.com/office/drawing/2014/main" id="{E0499D88-D88A-45DC-B767-BB2AB41BEE57}"/>
+                <a16:creationId xmlns:a16="http://schemas.microsoft.com/office/drawing/2014/main" id="{489F58E5-4B77-4B57-AC72-814278EDEED5}"/>
               </a:ext>
             </a:extLst>
           </p:cNvPr>
@@ -14194,7 +14164,7 @@
           <p:cNvPr id="16" name="">
             <a:extLst xmlns:a="http://schemas.openxmlformats.org/drawingml/2006/main">
               <a:ext uri="{FF2B5EF4-FFF2-40B4-BE49-F238E27FC236}">
-                <a16:creationId xmlns:a16="http://schemas.microsoft.com/office/drawing/2014/main" id="{589A1DEB-6947-4491-8B88-F25093C6D430}"/>
+                <a16:creationId xmlns:a16="http://schemas.microsoft.com/office/drawing/2014/main" id="{57D46EB2-7E84-4D54-9A98-EF61CE74DB93}"/>
               </a:ext>
             </a:extLst>
           </p:cNvPr>
@@ -14250,7 +14220,7 @@
           <p:cNvPr id="17" name="">
             <a:extLst xmlns:a="http://schemas.openxmlformats.org/drawingml/2006/main">
               <a:ext uri="{FF2B5EF4-FFF2-40B4-BE49-F238E27FC236}">
-                <a16:creationId xmlns:a16="http://schemas.microsoft.com/office/drawing/2014/main" id="{3B9B654F-0E4B-431F-995A-80BFCA37C896}"/>
+                <a16:creationId xmlns:a16="http://schemas.microsoft.com/office/drawing/2014/main" id="{D3534345-6CC5-43D1-AD1D-9800E8E851FD}"/>
               </a:ext>
             </a:extLst>
           </p:cNvPr>
@@ -14285,7 +14255,7 @@
           <p:cNvPr id="18" name="">
             <a:extLst xmlns:a="http://schemas.openxmlformats.org/drawingml/2006/main">
               <a:ext uri="{FF2B5EF4-FFF2-40B4-BE49-F238E27FC236}">
-                <a16:creationId xmlns:a16="http://schemas.microsoft.com/office/drawing/2014/main" id="{0491857A-DB88-43C9-B1E5-62FF050C1DB6}"/>
+                <a16:creationId xmlns:a16="http://schemas.microsoft.com/office/drawing/2014/main" id="{66C38F07-95C4-4B53-8D99-B763983A4892}"/>
               </a:ext>
             </a:extLst>
           </p:cNvPr>
@@ -14341,7 +14311,7 @@
           <p:cNvPr id="19" name="">
             <a:extLst xmlns:a="http://schemas.openxmlformats.org/drawingml/2006/main">
               <a:ext uri="{FF2B5EF4-FFF2-40B4-BE49-F238E27FC236}">
-                <a16:creationId xmlns:a16="http://schemas.microsoft.com/office/drawing/2014/main" id="{1B1DE653-A19C-4DA6-A011-33B1D57E491B}"/>
+                <a16:creationId xmlns:a16="http://schemas.microsoft.com/office/drawing/2014/main" id="{DA2696CE-F720-4B25-8DBD-BCD91728AC68}"/>
               </a:ext>
             </a:extLst>
           </p:cNvPr>
@@ -14395,7 +14365,7 @@
     </p:spTree>
     <p:extLst>
       <p:ext uri="{BB962C8B-B14F-4D97-AF65-F5344CB8AC3E}">
-        <p14:creationId xmlns:p14="http://schemas.microsoft.com/office/powerpoint/2010/main" val="1371516882"/>
+        <p14:creationId xmlns:p14="http://schemas.microsoft.com/office/powerpoint/2010/main" val="1109322737"/>
       </p:ext>
     </p:extLst>
   </p:cSld>
@@ -14426,7 +14396,7 @@
           <p:cNvPr id="1" name="">
             <a:extLst xmlns:a="http://schemas.openxmlformats.org/drawingml/2006/main">
               <a:ext uri="{FF2B5EF4-FFF2-40B4-BE49-F238E27FC236}">
-                <a16:creationId xmlns:a16="http://schemas.microsoft.com/office/drawing/2014/main" id="{2F4193D5-147D-433B-833A-086485D4B5AF}"/>
+                <a16:creationId xmlns:a16="http://schemas.microsoft.com/office/drawing/2014/main" id="{DD9699DF-DED9-4B56-B3F3-A5F4B6DCD6E3}"/>
               </a:ext>
             </a:extLst>
           </p:cNvPr>
@@ -14459,7 +14429,7 @@
           <p:cNvPr id="2" name="">
             <a:extLst xmlns:a="http://schemas.openxmlformats.org/drawingml/2006/main">
               <a:ext uri="{FF2B5EF4-FFF2-40B4-BE49-F238E27FC236}">
-                <a16:creationId xmlns:a16="http://schemas.microsoft.com/office/drawing/2014/main" id="{46647BD8-3AEE-4EC9-AA65-E9A679C3FD7A}"/>
+                <a16:creationId xmlns:a16="http://schemas.microsoft.com/office/drawing/2014/main" id="{5037B31A-1A8A-438C-9D36-C5C80B63E4CA}"/>
               </a:ext>
             </a:extLst>
           </p:cNvPr>
@@ -14515,7 +14485,7 @@
           <p:cNvPr id="3" name="">
             <a:extLst xmlns:a="http://schemas.openxmlformats.org/drawingml/2006/main">
               <a:ext uri="{FF2B5EF4-FFF2-40B4-BE49-F238E27FC236}">
-                <a16:creationId xmlns:a16="http://schemas.microsoft.com/office/drawing/2014/main" id="{2EC661A8-F0BF-417C-BAD9-703BCDC424E3}"/>
+                <a16:creationId xmlns:a16="http://schemas.microsoft.com/office/drawing/2014/main" id="{D6712628-2D4D-4644-ABA7-ECA344A0EA15}"/>
               </a:ext>
             </a:extLst>
           </p:cNvPr>
@@ -14575,19 +14545,13 @@
           <p:nvPr/>
         </p:nvPicPr>
         <p:blipFill>
-          <a:blip xmlns:r="http://schemas.openxmlformats.org/officeDocument/2006/relationships" xmlns:a="http://schemas.openxmlformats.org/drawingml/2006/main" r:embed="Red4549c483934782">
-            <a:extLst>
-              <a:ext uri="{96DAC541-7B7A-43D3-8B79-37D633B846F1}">
-                <asvg:svgBlip xmlns:asvg="http://schemas.microsoft.com/office/drawing/2016/SVG/main" r:embed="Rd3563b37771d4c16"/>
-              </a:ext>
-            </a:extLst>
-          </a:blip>
+          <a:blip xmlns:r="http://schemas.openxmlformats.org/officeDocument/2006/relationships" xmlns:a="http://schemas.openxmlformats.org/drawingml/2006/main" r:embed="R2c2a6a4d31c14fee"/>
           <a:stretch xmlns:a="http://schemas.openxmlformats.org/drawingml/2006/main"/>
         </p:blipFill>
         <p:spPr>
           <a:xfrm xmlns:a="http://schemas.openxmlformats.org/drawingml/2006/main">
-            <a:off x="6858000" y="1352550"/>
-            <a:ext cx="4286250" cy="2000250"/>
+            <a:off x="6858000" y="1921354"/>
+            <a:ext cx="4286250" cy="862642"/>
           </a:xfrm>
           <a:prstGeom xmlns:a="http://schemas.openxmlformats.org/drawingml/2006/main" prst="rect">
             <a:avLst/>
@@ -14599,7 +14563,7 @@
           <p:cNvPr id="5" name="">
             <a:extLst xmlns:a="http://schemas.openxmlformats.org/drawingml/2006/main">
               <a:ext uri="{FF2B5EF4-FFF2-40B4-BE49-F238E27FC236}">
-                <a16:creationId xmlns:a16="http://schemas.microsoft.com/office/drawing/2014/main" id="{BACC869C-9DAE-43D6-B0D6-DC5DAFF365A3}"/>
+                <a16:creationId xmlns:a16="http://schemas.microsoft.com/office/drawing/2014/main" id="{CB2918C3-B553-4541-A847-C464541B7373}"/>
               </a:ext>
             </a:extLst>
           </p:cNvPr>
@@ -14634,7 +14598,7 @@
           <p:cNvPr id="6" name="">
             <a:extLst xmlns:a="http://schemas.openxmlformats.org/drawingml/2006/main">
               <a:ext uri="{FF2B5EF4-FFF2-40B4-BE49-F238E27FC236}">
-                <a16:creationId xmlns:a16="http://schemas.microsoft.com/office/drawing/2014/main" id="{CAF29E2A-68BD-4A79-9DA3-3D2EFEE3B628}"/>
+                <a16:creationId xmlns:a16="http://schemas.microsoft.com/office/drawing/2014/main" id="{E6E6252F-36B2-4CB2-8EFA-9EAAE40D9C4A}"/>
               </a:ext>
             </a:extLst>
           </p:cNvPr>
@@ -14690,7 +14654,7 @@
           <p:cNvPr id="7" name="">
             <a:extLst xmlns:a="http://schemas.openxmlformats.org/drawingml/2006/main">
               <a:ext uri="{FF2B5EF4-FFF2-40B4-BE49-F238E27FC236}">
-                <a16:creationId xmlns:a16="http://schemas.microsoft.com/office/drawing/2014/main" id="{122AF960-CF43-4082-9343-6148B35F302D}"/>
+                <a16:creationId xmlns:a16="http://schemas.microsoft.com/office/drawing/2014/main" id="{3372BE2F-A3A0-4A28-B9B3-A7078FB251C0}"/>
               </a:ext>
             </a:extLst>
           </p:cNvPr>
@@ -14725,7 +14689,7 @@
           <p:cNvPr id="8" name="">
             <a:extLst xmlns:a="http://schemas.openxmlformats.org/drawingml/2006/main">
               <a:ext uri="{FF2B5EF4-FFF2-40B4-BE49-F238E27FC236}">
-                <a16:creationId xmlns:a16="http://schemas.microsoft.com/office/drawing/2014/main" id="{625130CA-8BFE-41A0-B8DF-8F27C2A6CF10}"/>
+                <a16:creationId xmlns:a16="http://schemas.microsoft.com/office/drawing/2014/main" id="{DA4F1AA3-8741-4F09-8596-9F8F57AC3552}"/>
               </a:ext>
             </a:extLst>
           </p:cNvPr>
@@ -14781,7 +14745,7 @@
           <p:cNvPr id="9" name="">
             <a:extLst xmlns:a="http://schemas.openxmlformats.org/drawingml/2006/main">
               <a:ext uri="{FF2B5EF4-FFF2-40B4-BE49-F238E27FC236}">
-                <a16:creationId xmlns:a16="http://schemas.microsoft.com/office/drawing/2014/main" id="{677E005E-160B-444B-A692-D4AB210C370A}"/>
+                <a16:creationId xmlns:a16="http://schemas.microsoft.com/office/drawing/2014/main" id="{3F030081-2AC4-4BBF-8E41-DF838D73E29A}"/>
               </a:ext>
             </a:extLst>
           </p:cNvPr>
@@ -14835,7 +14799,7 @@
     </p:spTree>
     <p:extLst>
       <p:ext uri="{BB962C8B-B14F-4D97-AF65-F5344CB8AC3E}">
-        <p14:creationId xmlns:p14="http://schemas.microsoft.com/office/powerpoint/2010/main" val="201772001"/>
+        <p14:creationId xmlns:p14="http://schemas.microsoft.com/office/powerpoint/2010/main" val="195890581"/>
       </p:ext>
     </p:extLst>
   </p:cSld>
@@ -14866,7 +14830,7 @@
           <p:cNvPr id="1" name="">
             <a:extLst xmlns:a="http://schemas.openxmlformats.org/drawingml/2006/main">
               <a:ext uri="{FF2B5EF4-FFF2-40B4-BE49-F238E27FC236}">
-                <a16:creationId xmlns:a16="http://schemas.microsoft.com/office/drawing/2014/main" id="{225FA5FC-FF26-447C-B1DC-9FBCD01F29EB}"/>
+                <a16:creationId xmlns:a16="http://schemas.microsoft.com/office/drawing/2014/main" id="{798049E4-B1DB-4F6D-86E5-EE0639A797E0}"/>
               </a:ext>
             </a:extLst>
           </p:cNvPr>
@@ -14899,7 +14863,7 @@
           <p:cNvPr id="2" name="">
             <a:extLst xmlns:a="http://schemas.openxmlformats.org/drawingml/2006/main">
               <a:ext uri="{FF2B5EF4-FFF2-40B4-BE49-F238E27FC236}">
-                <a16:creationId xmlns:a16="http://schemas.microsoft.com/office/drawing/2014/main" id="{4E751EAD-00B3-4345-B87E-7A11E9432C0C}"/>
+                <a16:creationId xmlns:a16="http://schemas.microsoft.com/office/drawing/2014/main" id="{B2E02264-451E-4187-AEAB-AE8CCD3859D1}"/>
               </a:ext>
             </a:extLst>
           </p:cNvPr>
@@ -14955,7 +14919,7 @@
           <p:cNvPr id="3" name="">
             <a:extLst xmlns:a="http://schemas.openxmlformats.org/drawingml/2006/main">
               <a:ext uri="{FF2B5EF4-FFF2-40B4-BE49-F238E27FC236}">
-                <a16:creationId xmlns:a16="http://schemas.microsoft.com/office/drawing/2014/main" id="{291641AF-98A6-4F41-AFE1-D6F42B054A83}"/>
+                <a16:creationId xmlns:a16="http://schemas.microsoft.com/office/drawing/2014/main" id="{D2D81176-1590-42C0-A915-2222B0330491}"/>
               </a:ext>
             </a:extLst>
           </p:cNvPr>
@@ -15011,7 +14975,7 @@
           <p:cNvPr id="4" name="">
             <a:extLst xmlns:a="http://schemas.openxmlformats.org/drawingml/2006/main">
               <a:ext uri="{FF2B5EF4-FFF2-40B4-BE49-F238E27FC236}">
-                <a16:creationId xmlns:a16="http://schemas.microsoft.com/office/drawing/2014/main" id="{B1805AC6-D24E-4207-9564-9FA077F8C130}"/>
+                <a16:creationId xmlns:a16="http://schemas.microsoft.com/office/drawing/2014/main" id="{4A943E70-0697-4CAC-8A71-4D2AE016EAD9}"/>
               </a:ext>
             </a:extLst>
           </p:cNvPr>
@@ -15046,7 +15010,7 @@
           <p:cNvPr id="5" name="">
             <a:extLst xmlns:a="http://schemas.openxmlformats.org/drawingml/2006/main">
               <a:ext uri="{FF2B5EF4-FFF2-40B4-BE49-F238E27FC236}">
-                <a16:creationId xmlns:a16="http://schemas.microsoft.com/office/drawing/2014/main" id="{04FA6FF4-8E0C-496F-AD76-FB1F98A27A46}"/>
+                <a16:creationId xmlns:a16="http://schemas.microsoft.com/office/drawing/2014/main" id="{B20C5CD2-D5E4-4FBF-A160-5A444730FCCF}"/>
               </a:ext>
             </a:extLst>
           </p:cNvPr>
@@ -15102,7 +15066,7 @@
           <p:cNvPr id="6" name="">
             <a:extLst xmlns:a="http://schemas.openxmlformats.org/drawingml/2006/main">
               <a:ext uri="{FF2B5EF4-FFF2-40B4-BE49-F238E27FC236}">
-                <a16:creationId xmlns:a16="http://schemas.microsoft.com/office/drawing/2014/main" id="{C17D8177-2F05-4A05-898B-60A90E76936C}"/>
+                <a16:creationId xmlns:a16="http://schemas.microsoft.com/office/drawing/2014/main" id="{1B6AD886-22F4-4BB5-9403-E24A0C4511A5}"/>
               </a:ext>
             </a:extLst>
           </p:cNvPr>
@@ -15137,7 +15101,7 @@
           <p:cNvPr id="7" name="">
             <a:extLst xmlns:a="http://schemas.openxmlformats.org/drawingml/2006/main">
               <a:ext uri="{FF2B5EF4-FFF2-40B4-BE49-F238E27FC236}">
-                <a16:creationId xmlns:a16="http://schemas.microsoft.com/office/drawing/2014/main" id="{B263603D-8614-43CF-A469-1C9A2A7EF179}"/>
+                <a16:creationId xmlns:a16="http://schemas.microsoft.com/office/drawing/2014/main" id="{9E3434B2-8640-4CA4-AF3E-E92BCF73C6AC}"/>
               </a:ext>
             </a:extLst>
           </p:cNvPr>
@@ -15193,7 +15157,7 @@
           <p:cNvPr id="8" name="">
             <a:extLst xmlns:a="http://schemas.openxmlformats.org/drawingml/2006/main">
               <a:ext uri="{FF2B5EF4-FFF2-40B4-BE49-F238E27FC236}">
-                <a16:creationId xmlns:a16="http://schemas.microsoft.com/office/drawing/2014/main" id="{5291905E-1CE4-49B8-BC4C-C8F23D08C78B}"/>
+                <a16:creationId xmlns:a16="http://schemas.microsoft.com/office/drawing/2014/main" id="{7FCDEBFD-DB66-41B7-BB0A-0FC239AFBBB2}"/>
               </a:ext>
             </a:extLst>
           </p:cNvPr>
@@ -15228,7 +15192,7 @@
           <p:cNvPr id="9" name="">
             <a:extLst xmlns:a="http://schemas.openxmlformats.org/drawingml/2006/main">
               <a:ext uri="{FF2B5EF4-FFF2-40B4-BE49-F238E27FC236}">
-                <a16:creationId xmlns:a16="http://schemas.microsoft.com/office/drawing/2014/main" id="{90089C46-8992-4770-B4A2-1EF8D64CBBF6}"/>
+                <a16:creationId xmlns:a16="http://schemas.microsoft.com/office/drawing/2014/main" id="{8B51001C-EFC6-41B1-9459-B8A7E114465F}"/>
               </a:ext>
             </a:extLst>
           </p:cNvPr>
@@ -15284,7 +15248,7 @@
           <p:cNvPr id="10" name="">
             <a:extLst xmlns:a="http://schemas.openxmlformats.org/drawingml/2006/main">
               <a:ext uri="{FF2B5EF4-FFF2-40B4-BE49-F238E27FC236}">
-                <a16:creationId xmlns:a16="http://schemas.microsoft.com/office/drawing/2014/main" id="{1C70A951-C325-421B-810F-6183AC64A866}"/>
+                <a16:creationId xmlns:a16="http://schemas.microsoft.com/office/drawing/2014/main" id="{B90F87C4-88F9-4642-A518-A9B43F5AACAE}"/>
               </a:ext>
             </a:extLst>
           </p:cNvPr>
@@ -15319,7 +15283,7 @@
           <p:cNvPr id="11" name="">
             <a:extLst xmlns:a="http://schemas.openxmlformats.org/drawingml/2006/main">
               <a:ext uri="{FF2B5EF4-FFF2-40B4-BE49-F238E27FC236}">
-                <a16:creationId xmlns:a16="http://schemas.microsoft.com/office/drawing/2014/main" id="{D1F4022F-6940-4E8B-93CD-358CD43466CC}"/>
+                <a16:creationId xmlns:a16="http://schemas.microsoft.com/office/drawing/2014/main" id="{8AF00297-B0AA-4C26-9D50-421000D8102C}"/>
               </a:ext>
             </a:extLst>
           </p:cNvPr>
@@ -15375,7 +15339,7 @@
           <p:cNvPr id="12" name="">
             <a:extLst xmlns:a="http://schemas.openxmlformats.org/drawingml/2006/main">
               <a:ext uri="{FF2B5EF4-FFF2-40B4-BE49-F238E27FC236}">
-                <a16:creationId xmlns:a16="http://schemas.microsoft.com/office/drawing/2014/main" id="{1B67099A-121B-4C50-A878-5BD4EE423FDD}"/>
+                <a16:creationId xmlns:a16="http://schemas.microsoft.com/office/drawing/2014/main" id="{D84A2504-19AC-421A-B8CD-2284569F50CE}"/>
               </a:ext>
             </a:extLst>
           </p:cNvPr>
@@ -15410,7 +15374,7 @@
           <p:cNvPr id="13" name="">
             <a:extLst xmlns:a="http://schemas.openxmlformats.org/drawingml/2006/main">
               <a:ext uri="{FF2B5EF4-FFF2-40B4-BE49-F238E27FC236}">
-                <a16:creationId xmlns:a16="http://schemas.microsoft.com/office/drawing/2014/main" id="{428C9CB8-B0C1-4AA5-889B-43E02A5AD67E}"/>
+                <a16:creationId xmlns:a16="http://schemas.microsoft.com/office/drawing/2014/main" id="{C6D49AFD-7362-4C1F-B91D-CD8DD75A014B}"/>
               </a:ext>
             </a:extLst>
           </p:cNvPr>
@@ -15466,7 +15430,7 @@
           <p:cNvPr id="14" name="">
             <a:extLst xmlns:a="http://schemas.openxmlformats.org/drawingml/2006/main">
               <a:ext uri="{FF2B5EF4-FFF2-40B4-BE49-F238E27FC236}">
-                <a16:creationId xmlns:a16="http://schemas.microsoft.com/office/drawing/2014/main" id="{41862069-4F92-4291-8B99-6B9609C0B28E}"/>
+                <a16:creationId xmlns:a16="http://schemas.microsoft.com/office/drawing/2014/main" id="{4268D8AF-A936-4361-B214-4A5CD4A0416C}"/>
               </a:ext>
             </a:extLst>
           </p:cNvPr>
@@ -15520,7 +15484,7 @@
     </p:spTree>
     <p:extLst>
       <p:ext uri="{BB962C8B-B14F-4D97-AF65-F5344CB8AC3E}">
-        <p14:creationId xmlns:p14="http://schemas.microsoft.com/office/powerpoint/2010/main" val="192716717"/>
+        <p14:creationId xmlns:p14="http://schemas.microsoft.com/office/powerpoint/2010/main" val="1294172168"/>
       </p:ext>
     </p:extLst>
   </p:cSld>
@@ -15551,7 +15515,7 @@
           <p:cNvPr id="1" name="">
             <a:extLst xmlns:a="http://schemas.openxmlformats.org/drawingml/2006/main">
               <a:ext uri="{FF2B5EF4-FFF2-40B4-BE49-F238E27FC236}">
-                <a16:creationId xmlns:a16="http://schemas.microsoft.com/office/drawing/2014/main" id="{C205FC01-A22C-43B9-80F3-AF752A7CF819}"/>
+                <a16:creationId xmlns:a16="http://schemas.microsoft.com/office/drawing/2014/main" id="{3251144B-56BB-4502-ADF3-CA051E672362}"/>
               </a:ext>
             </a:extLst>
           </p:cNvPr>
@@ -15584,7 +15548,7 @@
           <p:cNvPr id="2" name="">
             <a:extLst xmlns:a="http://schemas.openxmlformats.org/drawingml/2006/main">
               <a:ext uri="{FF2B5EF4-FFF2-40B4-BE49-F238E27FC236}">
-                <a16:creationId xmlns:a16="http://schemas.microsoft.com/office/drawing/2014/main" id="{B68B30FC-23AB-4EF2-8428-040BC77D2E9A}"/>
+                <a16:creationId xmlns:a16="http://schemas.microsoft.com/office/drawing/2014/main" id="{21695C59-8BA6-494D-A8FF-FEED49EC78DC}"/>
               </a:ext>
             </a:extLst>
           </p:cNvPr>
@@ -15640,7 +15604,7 @@
           <p:cNvPr id="3" name="">
             <a:extLst xmlns:a="http://schemas.openxmlformats.org/drawingml/2006/main">
               <a:ext uri="{FF2B5EF4-FFF2-40B4-BE49-F238E27FC236}">
-                <a16:creationId xmlns:a16="http://schemas.microsoft.com/office/drawing/2014/main" id="{B68D7096-0385-4561-8B4C-466BF45556E6}"/>
+                <a16:creationId xmlns:a16="http://schemas.microsoft.com/office/drawing/2014/main" id="{E70F9DA2-9317-4DCD-9C40-E103E3DC017A}"/>
               </a:ext>
             </a:extLst>
           </p:cNvPr>
@@ -15696,7 +15660,7 @@
           <p:cNvPr id="4" name="">
             <a:extLst xmlns:a="http://schemas.openxmlformats.org/drawingml/2006/main">
               <a:ext uri="{FF2B5EF4-FFF2-40B4-BE49-F238E27FC236}">
-                <a16:creationId xmlns:a16="http://schemas.microsoft.com/office/drawing/2014/main" id="{CB246366-C9A8-48C5-9020-EF55E1B2DA50}"/>
+                <a16:creationId xmlns:a16="http://schemas.microsoft.com/office/drawing/2014/main" id="{1D461880-DC1D-4038-985E-E31B74E67145}"/>
               </a:ext>
             </a:extLst>
           </p:cNvPr>
@@ -15821,7 +15785,7 @@
           <p:cNvPr id="5" name="">
             <a:extLst xmlns:a="http://schemas.openxmlformats.org/drawingml/2006/main">
               <a:ext uri="{FF2B5EF4-FFF2-40B4-BE49-F238E27FC236}">
-                <a16:creationId xmlns:a16="http://schemas.microsoft.com/office/drawing/2014/main" id="{C2F70FC2-BC3B-43FF-9905-7D9FA5640448}"/>
+                <a16:creationId xmlns:a16="http://schemas.microsoft.com/office/drawing/2014/main" id="{80D178F6-C21C-4216-B6EB-82D687CA5548}"/>
               </a:ext>
             </a:extLst>
           </p:cNvPr>
@@ -15856,7 +15820,7 @@
           <p:cNvPr id="6" name="">
             <a:extLst xmlns:a="http://schemas.openxmlformats.org/drawingml/2006/main">
               <a:ext uri="{FF2B5EF4-FFF2-40B4-BE49-F238E27FC236}">
-                <a16:creationId xmlns:a16="http://schemas.microsoft.com/office/drawing/2014/main" id="{928118D2-5201-466D-A898-3447938F3533}"/>
+                <a16:creationId xmlns:a16="http://schemas.microsoft.com/office/drawing/2014/main" id="{1B9CDA0C-4C98-424E-B90C-07AF77BD3BC5}"/>
               </a:ext>
             </a:extLst>
           </p:cNvPr>
@@ -15912,7 +15876,7 @@
           <p:cNvPr id="7" name="">
             <a:extLst xmlns:a="http://schemas.openxmlformats.org/drawingml/2006/main">
               <a:ext uri="{FF2B5EF4-FFF2-40B4-BE49-F238E27FC236}">
-                <a16:creationId xmlns:a16="http://schemas.microsoft.com/office/drawing/2014/main" id="{03F96C67-3322-4398-81A4-1C5AD78272B7}"/>
+                <a16:creationId xmlns:a16="http://schemas.microsoft.com/office/drawing/2014/main" id="{134937C7-7DC0-4AB7-B858-50AE147CCE01}"/>
               </a:ext>
             </a:extLst>
           </p:cNvPr>
@@ -15966,7 +15930,7 @@
     </p:spTree>
     <p:extLst>
       <p:ext uri="{BB962C8B-B14F-4D97-AF65-F5344CB8AC3E}">
-        <p14:creationId xmlns:p14="http://schemas.microsoft.com/office/powerpoint/2010/main" val="793504592"/>
+        <p14:creationId xmlns:p14="http://schemas.microsoft.com/office/powerpoint/2010/main" val="429974206"/>
       </p:ext>
     </p:extLst>
   </p:cSld>
@@ -15997,7 +15961,7 @@
           <p:cNvPr id="1" name="">
             <a:extLst xmlns:a="http://schemas.openxmlformats.org/drawingml/2006/main">
               <a:ext uri="{FF2B5EF4-FFF2-40B4-BE49-F238E27FC236}">
-                <a16:creationId xmlns:a16="http://schemas.microsoft.com/office/drawing/2014/main" id="{F74B2CFE-8316-4A76-B2F9-ECBD96B9473C}"/>
+                <a16:creationId xmlns:a16="http://schemas.microsoft.com/office/drawing/2014/main" id="{64FDE252-F9CF-43C9-B193-8DB413FB92DF}"/>
               </a:ext>
             </a:extLst>
           </p:cNvPr>
@@ -16030,7 +15994,7 @@
           <p:cNvPr id="2" name="">
             <a:extLst xmlns:a="http://schemas.openxmlformats.org/drawingml/2006/main">
               <a:ext uri="{FF2B5EF4-FFF2-40B4-BE49-F238E27FC236}">
-                <a16:creationId xmlns:a16="http://schemas.microsoft.com/office/drawing/2014/main" id="{C38A2954-C7B7-43C8-910B-6C39C3F9E30A}"/>
+                <a16:creationId xmlns:a16="http://schemas.microsoft.com/office/drawing/2014/main" id="{7A7401F7-DE0D-4227-8D03-8214D3430231}"/>
               </a:ext>
             </a:extLst>
           </p:cNvPr>
@@ -16086,7 +16050,7 @@
           <p:cNvPr id="3" name="">
             <a:extLst xmlns:a="http://schemas.openxmlformats.org/drawingml/2006/main">
               <a:ext uri="{FF2B5EF4-FFF2-40B4-BE49-F238E27FC236}">
-                <a16:creationId xmlns:a16="http://schemas.microsoft.com/office/drawing/2014/main" id="{73200EFB-804F-40B3-B572-88B2DAD8324C}"/>
+                <a16:creationId xmlns:a16="http://schemas.microsoft.com/office/drawing/2014/main" id="{CD0217DD-AEB1-4B0C-93CC-59408610D48C}"/>
               </a:ext>
             </a:extLst>
           </p:cNvPr>
@@ -16146,19 +16110,13 @@
           <p:nvPr/>
         </p:nvPicPr>
         <p:blipFill>
-          <a:blip xmlns:r="http://schemas.openxmlformats.org/officeDocument/2006/relationships" xmlns:a="http://schemas.openxmlformats.org/drawingml/2006/main" r:embed="R13886e43b6224ef8">
-            <a:extLst>
-              <a:ext uri="{96DAC541-7B7A-43D3-8B79-37D633B846F1}">
-                <asvg:svgBlip xmlns:asvg="http://schemas.microsoft.com/office/drawing/2016/SVG/main" r:embed="R70332a4d0ac14df4"/>
-              </a:ext>
-            </a:extLst>
-          </a:blip>
+          <a:blip xmlns:r="http://schemas.openxmlformats.org/officeDocument/2006/relationships" xmlns:a="http://schemas.openxmlformats.org/drawingml/2006/main" r:embed="R4faf3283618f4c71"/>
           <a:stretch xmlns:a="http://schemas.openxmlformats.org/drawingml/2006/main"/>
         </p:blipFill>
         <p:spPr>
           <a:xfrm xmlns:a="http://schemas.openxmlformats.org/drawingml/2006/main">
-            <a:off x="6858000" y="1352550"/>
-            <a:ext cx="4286250" cy="2000250"/>
+            <a:off x="6858000" y="1384812"/>
+            <a:ext cx="4286250" cy="1935726"/>
           </a:xfrm>
           <a:prstGeom xmlns:a="http://schemas.openxmlformats.org/drawingml/2006/main" prst="rect">
             <a:avLst/>
@@ -16170,7 +16128,7 @@
           <p:cNvPr id="5" name="">
             <a:extLst xmlns:a="http://schemas.openxmlformats.org/drawingml/2006/main">
               <a:ext uri="{FF2B5EF4-FFF2-40B4-BE49-F238E27FC236}">
-                <a16:creationId xmlns:a16="http://schemas.microsoft.com/office/drawing/2014/main" id="{1976BD57-365B-4FF5-A2F2-C9287C99D6D3}"/>
+                <a16:creationId xmlns:a16="http://schemas.microsoft.com/office/drawing/2014/main" id="{569914DC-2690-4AED-9282-ADABC36DD07A}"/>
               </a:ext>
             </a:extLst>
           </p:cNvPr>
@@ -16226,7 +16184,7 @@
           <p:cNvPr id="6" name="">
             <a:extLst xmlns:a="http://schemas.openxmlformats.org/drawingml/2006/main">
               <a:ext uri="{FF2B5EF4-FFF2-40B4-BE49-F238E27FC236}">
-                <a16:creationId xmlns:a16="http://schemas.microsoft.com/office/drawing/2014/main" id="{4E47C9E1-53A5-4B10-9F51-79E266600EE5}"/>
+                <a16:creationId xmlns:a16="http://schemas.microsoft.com/office/drawing/2014/main" id="{CE5CC58C-3A3B-4E25-A2D2-315CAB3C50D8}"/>
               </a:ext>
             </a:extLst>
           </p:cNvPr>
@@ -16261,7 +16219,7 @@
           <p:cNvPr id="7" name="">
             <a:extLst xmlns:a="http://schemas.openxmlformats.org/drawingml/2006/main">
               <a:ext uri="{FF2B5EF4-FFF2-40B4-BE49-F238E27FC236}">
-                <a16:creationId xmlns:a16="http://schemas.microsoft.com/office/drawing/2014/main" id="{801A53AF-4E90-4426-A56E-F1EEFF8F823F}"/>
+                <a16:creationId xmlns:a16="http://schemas.microsoft.com/office/drawing/2014/main" id="{1DCCDAF0-B889-4F7A-8E75-CE5489E79403}"/>
               </a:ext>
             </a:extLst>
           </p:cNvPr>
@@ -16317,7 +16275,7 @@
           <p:cNvPr id="8" name="">
             <a:extLst xmlns:a="http://schemas.openxmlformats.org/drawingml/2006/main">
               <a:ext uri="{FF2B5EF4-FFF2-40B4-BE49-F238E27FC236}">
-                <a16:creationId xmlns:a16="http://schemas.microsoft.com/office/drawing/2014/main" id="{29892F83-24A7-4E78-ADA3-1DBBAB96DD8E}"/>
+                <a16:creationId xmlns:a16="http://schemas.microsoft.com/office/drawing/2014/main" id="{EF897E47-3CC0-4220-8797-3006D9C18255}"/>
               </a:ext>
             </a:extLst>
           </p:cNvPr>
@@ -16371,7 +16329,7 @@
     </p:spTree>
     <p:extLst>
       <p:ext uri="{BB962C8B-B14F-4D97-AF65-F5344CB8AC3E}">
-        <p14:creationId xmlns:p14="http://schemas.microsoft.com/office/powerpoint/2010/main" val="666323206"/>
+        <p14:creationId xmlns:p14="http://schemas.microsoft.com/office/powerpoint/2010/main" val="1901266506"/>
       </p:ext>
     </p:extLst>
   </p:cSld>
@@ -16402,7 +16360,7 @@
           <p:cNvPr id="1" name="">
             <a:extLst xmlns:a="http://schemas.openxmlformats.org/drawingml/2006/main">
               <a:ext uri="{FF2B5EF4-FFF2-40B4-BE49-F238E27FC236}">
-                <a16:creationId xmlns:a16="http://schemas.microsoft.com/office/drawing/2014/main" id="{C4B39ADB-2EE5-4D25-808D-FED2C51C6ED4}"/>
+                <a16:creationId xmlns:a16="http://schemas.microsoft.com/office/drawing/2014/main" id="{6B6E050E-B12B-441C-B18E-464CF2E0A897}"/>
               </a:ext>
             </a:extLst>
           </p:cNvPr>
@@ -16435,7 +16393,7 @@
           <p:cNvPr id="2" name="">
             <a:extLst xmlns:a="http://schemas.openxmlformats.org/drawingml/2006/main">
               <a:ext uri="{FF2B5EF4-FFF2-40B4-BE49-F238E27FC236}">
-                <a16:creationId xmlns:a16="http://schemas.microsoft.com/office/drawing/2014/main" id="{B74F57F9-B1F8-4D5C-80B6-B2926CC54514}"/>
+                <a16:creationId xmlns:a16="http://schemas.microsoft.com/office/drawing/2014/main" id="{F755B55E-E0B7-4E64-95B0-57433C65EDA4}"/>
               </a:ext>
             </a:extLst>
           </p:cNvPr>
@@ -16491,7 +16449,7 @@
           <p:cNvPr id="3" name="">
             <a:extLst xmlns:a="http://schemas.openxmlformats.org/drawingml/2006/main">
               <a:ext uri="{FF2B5EF4-FFF2-40B4-BE49-F238E27FC236}">
-                <a16:creationId xmlns:a16="http://schemas.microsoft.com/office/drawing/2014/main" id="{FF2BC22C-85A7-439C-9A81-F0BB42007199}"/>
+                <a16:creationId xmlns:a16="http://schemas.microsoft.com/office/drawing/2014/main" id="{71958C3C-85CA-4B16-9EA8-642982C4456A}"/>
               </a:ext>
             </a:extLst>
           </p:cNvPr>
@@ -16547,7 +16505,7 @@
           <p:cNvPr id="4" name="">
             <a:extLst xmlns:a="http://schemas.openxmlformats.org/drawingml/2006/main">
               <a:ext uri="{FF2B5EF4-FFF2-40B4-BE49-F238E27FC236}">
-                <a16:creationId xmlns:a16="http://schemas.microsoft.com/office/drawing/2014/main" id="{F25E1526-220B-42B3-B73D-0447456DE6CF}"/>
+                <a16:creationId xmlns:a16="http://schemas.microsoft.com/office/drawing/2014/main" id="{023795C2-5CBE-4ABA-A70B-71BD34050613}"/>
               </a:ext>
             </a:extLst>
           </p:cNvPr>
@@ -16582,7 +16540,7 @@
           <p:cNvPr id="5" name="">
             <a:extLst xmlns:a="http://schemas.openxmlformats.org/drawingml/2006/main">
               <a:ext uri="{FF2B5EF4-FFF2-40B4-BE49-F238E27FC236}">
-                <a16:creationId xmlns:a16="http://schemas.microsoft.com/office/drawing/2014/main" id="{6D06EBB4-B83B-41A0-8CCB-23254C1FD634}"/>
+                <a16:creationId xmlns:a16="http://schemas.microsoft.com/office/drawing/2014/main" id="{33F0E10A-5DB1-4F6B-A58B-07C0CFF958E1}"/>
               </a:ext>
             </a:extLst>
           </p:cNvPr>
@@ -16638,7 +16596,7 @@
           <p:cNvPr id="6" name="">
             <a:extLst xmlns:a="http://schemas.openxmlformats.org/drawingml/2006/main">
               <a:ext uri="{FF2B5EF4-FFF2-40B4-BE49-F238E27FC236}">
-                <a16:creationId xmlns:a16="http://schemas.microsoft.com/office/drawing/2014/main" id="{9D0D05A4-7B62-44A8-AAB4-37017C08A5EA}"/>
+                <a16:creationId xmlns:a16="http://schemas.microsoft.com/office/drawing/2014/main" id="{22016D23-BF32-448F-9118-E2165382879A}"/>
               </a:ext>
             </a:extLst>
           </p:cNvPr>
@@ -16673,7 +16631,7 @@
           <p:cNvPr id="7" name="">
             <a:extLst xmlns:a="http://schemas.openxmlformats.org/drawingml/2006/main">
               <a:ext uri="{FF2B5EF4-FFF2-40B4-BE49-F238E27FC236}">
-                <a16:creationId xmlns:a16="http://schemas.microsoft.com/office/drawing/2014/main" id="{AC7DF3F0-E8C6-44D5-904C-8C3CCEFDCA9F}"/>
+                <a16:creationId xmlns:a16="http://schemas.microsoft.com/office/drawing/2014/main" id="{2E5AE39E-C549-4211-A0BC-7DA13B22DE1E}"/>
               </a:ext>
             </a:extLst>
           </p:cNvPr>
@@ -16729,7 +16687,7 @@
           <p:cNvPr id="8" name="">
             <a:extLst xmlns:a="http://schemas.openxmlformats.org/drawingml/2006/main">
               <a:ext uri="{FF2B5EF4-FFF2-40B4-BE49-F238E27FC236}">
-                <a16:creationId xmlns:a16="http://schemas.microsoft.com/office/drawing/2014/main" id="{706D3082-FA7E-4F5E-B779-8D409D3F4E52}"/>
+                <a16:creationId xmlns:a16="http://schemas.microsoft.com/office/drawing/2014/main" id="{6AC35DC1-4513-4F9B-A9A8-C46CFB39FA74}"/>
               </a:ext>
             </a:extLst>
           </p:cNvPr>
@@ -16764,7 +16722,7 @@
           <p:cNvPr id="9" name="">
             <a:extLst xmlns:a="http://schemas.openxmlformats.org/drawingml/2006/main">
               <a:ext uri="{FF2B5EF4-FFF2-40B4-BE49-F238E27FC236}">
-                <a16:creationId xmlns:a16="http://schemas.microsoft.com/office/drawing/2014/main" id="{7FE57475-3B17-435A-9509-59C014D92611}"/>
+                <a16:creationId xmlns:a16="http://schemas.microsoft.com/office/drawing/2014/main" id="{CDAB2117-ED98-4F36-A96B-0CD393987D59}"/>
               </a:ext>
             </a:extLst>
           </p:cNvPr>
@@ -16820,7 +16778,7 @@
           <p:cNvPr id="10" name="">
             <a:extLst xmlns:a="http://schemas.openxmlformats.org/drawingml/2006/main">
               <a:ext uri="{FF2B5EF4-FFF2-40B4-BE49-F238E27FC236}">
-                <a16:creationId xmlns:a16="http://schemas.microsoft.com/office/drawing/2014/main" id="{76F5B859-90B8-49D1-B1FA-9A5B8FB66C4A}"/>
+                <a16:creationId xmlns:a16="http://schemas.microsoft.com/office/drawing/2014/main" id="{7BABE6AE-1C16-4CE5-849F-D9EF92D633D3}"/>
               </a:ext>
             </a:extLst>
           </p:cNvPr>
@@ -16855,7 +16813,7 @@
           <p:cNvPr id="11" name="">
             <a:extLst xmlns:a="http://schemas.openxmlformats.org/drawingml/2006/main">
               <a:ext uri="{FF2B5EF4-FFF2-40B4-BE49-F238E27FC236}">
-                <a16:creationId xmlns:a16="http://schemas.microsoft.com/office/drawing/2014/main" id="{D9098C69-D509-431D-90AA-7574219F5BB4}"/>
+                <a16:creationId xmlns:a16="http://schemas.microsoft.com/office/drawing/2014/main" id="{B2E38FC0-6522-431E-8640-7320698A4509}"/>
               </a:ext>
             </a:extLst>
           </p:cNvPr>
@@ -16911,7 +16869,7 @@
           <p:cNvPr id="12" name="">
             <a:extLst xmlns:a="http://schemas.openxmlformats.org/drawingml/2006/main">
               <a:ext uri="{FF2B5EF4-FFF2-40B4-BE49-F238E27FC236}">
-                <a16:creationId xmlns:a16="http://schemas.microsoft.com/office/drawing/2014/main" id="{1AA644F6-B965-469E-B980-A1AB3CB0B1FE}"/>
+                <a16:creationId xmlns:a16="http://schemas.microsoft.com/office/drawing/2014/main" id="{58B00F97-B49E-4FF5-AF50-60C614A198E0}"/>
               </a:ext>
             </a:extLst>
           </p:cNvPr>
@@ -16965,7 +16923,7 @@
     </p:spTree>
     <p:extLst>
       <p:ext uri="{BB962C8B-B14F-4D97-AF65-F5344CB8AC3E}">
-        <p14:creationId xmlns:p14="http://schemas.microsoft.com/office/powerpoint/2010/main" val="933237886"/>
+        <p14:creationId xmlns:p14="http://schemas.microsoft.com/office/powerpoint/2010/main" val="715003524"/>
       </p:ext>
     </p:extLst>
   </p:cSld>
@@ -16996,7 +16954,7 @@
           <p:cNvPr id="1" name="">
             <a:extLst xmlns:a="http://schemas.openxmlformats.org/drawingml/2006/main">
               <a:ext uri="{FF2B5EF4-FFF2-40B4-BE49-F238E27FC236}">
-                <a16:creationId xmlns:a16="http://schemas.microsoft.com/office/drawing/2014/main" id="{7547A5AC-1FD6-4936-AD95-EA773D333C26}"/>
+                <a16:creationId xmlns:a16="http://schemas.microsoft.com/office/drawing/2014/main" id="{A446509C-4AA9-45D5-9084-1DF6D364A49A}"/>
               </a:ext>
             </a:extLst>
           </p:cNvPr>
@@ -17029,7 +16987,7 @@
           <p:cNvPr id="2" name="">
             <a:extLst xmlns:a="http://schemas.openxmlformats.org/drawingml/2006/main">
               <a:ext uri="{FF2B5EF4-FFF2-40B4-BE49-F238E27FC236}">
-                <a16:creationId xmlns:a16="http://schemas.microsoft.com/office/drawing/2014/main" id="{4ADDFD6B-9E91-494F-8FC1-AD3A194B966A}"/>
+                <a16:creationId xmlns:a16="http://schemas.microsoft.com/office/drawing/2014/main" id="{255F39F4-889D-418E-A3E1-5266A5144E2A}"/>
               </a:ext>
             </a:extLst>
           </p:cNvPr>
@@ -17085,7 +17043,7 @@
           <p:cNvPr id="3" name="">
             <a:extLst xmlns:a="http://schemas.openxmlformats.org/drawingml/2006/main">
               <a:ext uri="{FF2B5EF4-FFF2-40B4-BE49-F238E27FC236}">
-                <a16:creationId xmlns:a16="http://schemas.microsoft.com/office/drawing/2014/main" id="{4994FE15-EC5E-4E6F-B79C-C7FD5C5FC066}"/>
+                <a16:creationId xmlns:a16="http://schemas.microsoft.com/office/drawing/2014/main" id="{CE54BF71-F67B-41C2-B208-9851F53384AA}"/>
               </a:ext>
             </a:extLst>
           </p:cNvPr>
@@ -17141,7 +17099,7 @@
           <p:cNvPr id="4" name="">
             <a:extLst xmlns:a="http://schemas.openxmlformats.org/drawingml/2006/main">
               <a:ext uri="{FF2B5EF4-FFF2-40B4-BE49-F238E27FC236}">
-                <a16:creationId xmlns:a16="http://schemas.microsoft.com/office/drawing/2014/main" id="{15F6365F-6D31-4633-A9B5-1693FCF39E21}"/>
+                <a16:creationId xmlns:a16="http://schemas.microsoft.com/office/drawing/2014/main" id="{4A4BC0A9-04CB-4C9D-96EB-32A55B29A259}"/>
               </a:ext>
             </a:extLst>
           </p:cNvPr>
@@ -17176,7 +17134,7 @@
           <p:cNvPr id="5" name="">
             <a:extLst xmlns:a="http://schemas.openxmlformats.org/drawingml/2006/main">
               <a:ext uri="{FF2B5EF4-FFF2-40B4-BE49-F238E27FC236}">
-                <a16:creationId xmlns:a16="http://schemas.microsoft.com/office/drawing/2014/main" id="{EF65D027-8F4D-4C75-AF7A-0602BD64F9C4}"/>
+                <a16:creationId xmlns:a16="http://schemas.microsoft.com/office/drawing/2014/main" id="{6AC0743C-D7E8-409A-9872-7B612F973F80}"/>
               </a:ext>
             </a:extLst>
           </p:cNvPr>
@@ -17232,7 +17190,7 @@
           <p:cNvPr id="6" name="">
             <a:extLst xmlns:a="http://schemas.openxmlformats.org/drawingml/2006/main">
               <a:ext uri="{FF2B5EF4-FFF2-40B4-BE49-F238E27FC236}">
-                <a16:creationId xmlns:a16="http://schemas.microsoft.com/office/drawing/2014/main" id="{3CA13269-6C37-47A2-A340-EA60DFA32AE8}"/>
+                <a16:creationId xmlns:a16="http://schemas.microsoft.com/office/drawing/2014/main" id="{790FF00B-554E-498A-BD6F-666D1A42005F}"/>
               </a:ext>
             </a:extLst>
           </p:cNvPr>
@@ -17267,7 +17225,7 @@
           <p:cNvPr id="7" name="">
             <a:extLst xmlns:a="http://schemas.openxmlformats.org/drawingml/2006/main">
               <a:ext uri="{FF2B5EF4-FFF2-40B4-BE49-F238E27FC236}">
-                <a16:creationId xmlns:a16="http://schemas.microsoft.com/office/drawing/2014/main" id="{B077DEBD-B681-4552-88CE-A0623ED0CDF8}"/>
+                <a16:creationId xmlns:a16="http://schemas.microsoft.com/office/drawing/2014/main" id="{1264F9CA-D687-4C56-8B53-E2F1B82CE573}"/>
               </a:ext>
             </a:extLst>
           </p:cNvPr>
@@ -17323,7 +17281,7 @@
           <p:cNvPr id="8" name="">
             <a:extLst xmlns:a="http://schemas.openxmlformats.org/drawingml/2006/main">
               <a:ext uri="{FF2B5EF4-FFF2-40B4-BE49-F238E27FC236}">
-                <a16:creationId xmlns:a16="http://schemas.microsoft.com/office/drawing/2014/main" id="{7788C461-F94B-4150-B4CF-C297D78D26C2}"/>
+                <a16:creationId xmlns:a16="http://schemas.microsoft.com/office/drawing/2014/main" id="{075BF692-26AA-4556-A920-C373E29318FF}"/>
               </a:ext>
             </a:extLst>
           </p:cNvPr>
@@ -17358,7 +17316,7 @@
           <p:cNvPr id="9" name="">
             <a:extLst xmlns:a="http://schemas.openxmlformats.org/drawingml/2006/main">
               <a:ext uri="{FF2B5EF4-FFF2-40B4-BE49-F238E27FC236}">
-                <a16:creationId xmlns:a16="http://schemas.microsoft.com/office/drawing/2014/main" id="{7D1EDFE8-D561-48F7-B7AD-2FF6F7BD03B7}"/>
+                <a16:creationId xmlns:a16="http://schemas.microsoft.com/office/drawing/2014/main" id="{ECBA3B94-07AB-4D75-A1E3-FF8FA21F9BC4}"/>
               </a:ext>
             </a:extLst>
           </p:cNvPr>
@@ -17414,7 +17372,7 @@
           <p:cNvPr id="10" name="">
             <a:extLst xmlns:a="http://schemas.openxmlformats.org/drawingml/2006/main">
               <a:ext uri="{FF2B5EF4-FFF2-40B4-BE49-F238E27FC236}">
-                <a16:creationId xmlns:a16="http://schemas.microsoft.com/office/drawing/2014/main" id="{52B162E0-E80E-47FE-887D-24A16385DC79}"/>
+                <a16:creationId xmlns:a16="http://schemas.microsoft.com/office/drawing/2014/main" id="{7AFB5C07-463D-4A57-9C5C-9D713D10C20A}"/>
               </a:ext>
             </a:extLst>
           </p:cNvPr>
@@ -17449,7 +17407,7 @@
           <p:cNvPr id="11" name="">
             <a:extLst xmlns:a="http://schemas.openxmlformats.org/drawingml/2006/main">
               <a:ext uri="{FF2B5EF4-FFF2-40B4-BE49-F238E27FC236}">
-                <a16:creationId xmlns:a16="http://schemas.microsoft.com/office/drawing/2014/main" id="{0E305FBE-7B08-48E3-8621-BA41FA7A9B08}"/>
+                <a16:creationId xmlns:a16="http://schemas.microsoft.com/office/drawing/2014/main" id="{C438D21A-93C6-4A6C-880D-999F3036FA1E}"/>
               </a:ext>
             </a:extLst>
           </p:cNvPr>
@@ -17505,7 +17463,7 @@
           <p:cNvPr id="12" name="">
             <a:extLst xmlns:a="http://schemas.openxmlformats.org/drawingml/2006/main">
               <a:ext uri="{FF2B5EF4-FFF2-40B4-BE49-F238E27FC236}">
-                <a16:creationId xmlns:a16="http://schemas.microsoft.com/office/drawing/2014/main" id="{DEDC3EAC-EA0B-453D-8EF6-61A10257DF3A}"/>
+                <a16:creationId xmlns:a16="http://schemas.microsoft.com/office/drawing/2014/main" id="{39AD8EAA-25D4-4495-881E-1C526C830266}"/>
               </a:ext>
             </a:extLst>
           </p:cNvPr>
@@ -17540,7 +17498,7 @@
           <p:cNvPr id="13" name="">
             <a:extLst xmlns:a="http://schemas.openxmlformats.org/drawingml/2006/main">
               <a:ext uri="{FF2B5EF4-FFF2-40B4-BE49-F238E27FC236}">
-                <a16:creationId xmlns:a16="http://schemas.microsoft.com/office/drawing/2014/main" id="{FA59D1D7-B63C-419F-B92F-44217B06D64B}"/>
+                <a16:creationId xmlns:a16="http://schemas.microsoft.com/office/drawing/2014/main" id="{886CB6D2-F350-4576-9E09-0C9487D22256}"/>
               </a:ext>
             </a:extLst>
           </p:cNvPr>
@@ -17596,7 +17554,7 @@
           <p:cNvPr id="14" name="">
             <a:extLst xmlns:a="http://schemas.openxmlformats.org/drawingml/2006/main">
               <a:ext uri="{FF2B5EF4-FFF2-40B4-BE49-F238E27FC236}">
-                <a16:creationId xmlns:a16="http://schemas.microsoft.com/office/drawing/2014/main" id="{81724A36-AA70-4B57-AE7D-1A42C97C70DA}"/>
+                <a16:creationId xmlns:a16="http://schemas.microsoft.com/office/drawing/2014/main" id="{3C01A9BF-AE63-49EB-8B36-53BDD24965A0}"/>
               </a:ext>
             </a:extLst>
           </p:cNvPr>
@@ -17631,7 +17589,7 @@
           <p:cNvPr id="15" name="">
             <a:extLst xmlns:a="http://schemas.openxmlformats.org/drawingml/2006/main">
               <a:ext uri="{FF2B5EF4-FFF2-40B4-BE49-F238E27FC236}">
-                <a16:creationId xmlns:a16="http://schemas.microsoft.com/office/drawing/2014/main" id="{339BD2C9-A658-441A-8072-9455A33063FD}"/>
+                <a16:creationId xmlns:a16="http://schemas.microsoft.com/office/drawing/2014/main" id="{C32B1E24-CAAB-4F9A-B1B3-87DB8C9A0A45}"/>
               </a:ext>
             </a:extLst>
           </p:cNvPr>
@@ -17687,7 +17645,7 @@
           <p:cNvPr id="16" name="">
             <a:extLst xmlns:a="http://schemas.openxmlformats.org/drawingml/2006/main">
               <a:ext uri="{FF2B5EF4-FFF2-40B4-BE49-F238E27FC236}">
-                <a16:creationId xmlns:a16="http://schemas.microsoft.com/office/drawing/2014/main" id="{E71A312A-1419-4B2A-9B6E-029B3F4E4A95}"/>
+                <a16:creationId xmlns:a16="http://schemas.microsoft.com/office/drawing/2014/main" id="{0D656B29-24A8-4AA5-BAA1-989DC26EBEE6}"/>
               </a:ext>
             </a:extLst>
           </p:cNvPr>
@@ -17722,7 +17680,7 @@
           <p:cNvPr id="17" name="">
             <a:extLst xmlns:a="http://schemas.openxmlformats.org/drawingml/2006/main">
               <a:ext uri="{FF2B5EF4-FFF2-40B4-BE49-F238E27FC236}">
-                <a16:creationId xmlns:a16="http://schemas.microsoft.com/office/drawing/2014/main" id="{5E434385-FC56-4BE6-A020-844C3F46B3D9}"/>
+                <a16:creationId xmlns:a16="http://schemas.microsoft.com/office/drawing/2014/main" id="{C30ADB1F-41CA-4015-B65A-7F68A86C4FA1}"/>
               </a:ext>
             </a:extLst>
           </p:cNvPr>
@@ -17778,7 +17736,7 @@
           <p:cNvPr id="18" name="">
             <a:extLst xmlns:a="http://schemas.openxmlformats.org/drawingml/2006/main">
               <a:ext uri="{FF2B5EF4-FFF2-40B4-BE49-F238E27FC236}">
-                <a16:creationId xmlns:a16="http://schemas.microsoft.com/office/drawing/2014/main" id="{2BC26AC9-13ED-46ED-8E58-1C27E9B64CF9}"/>
+                <a16:creationId xmlns:a16="http://schemas.microsoft.com/office/drawing/2014/main" id="{B3C07AD1-9C31-41FD-90B5-E70C61D50510}"/>
               </a:ext>
             </a:extLst>
           </p:cNvPr>
@@ -17832,7 +17790,7 @@
     </p:spTree>
     <p:extLst>
       <p:ext uri="{BB962C8B-B14F-4D97-AF65-F5344CB8AC3E}">
-        <p14:creationId xmlns:p14="http://schemas.microsoft.com/office/powerpoint/2010/main" val="1292367289"/>
+        <p14:creationId xmlns:p14="http://schemas.microsoft.com/office/powerpoint/2010/main" val="497344396"/>
       </p:ext>
     </p:extLst>
   </p:cSld>
@@ -17863,7 +17821,7 @@
           <p:cNvPr id="1" name="">
             <a:extLst xmlns:a="http://schemas.openxmlformats.org/drawingml/2006/main">
               <a:ext uri="{FF2B5EF4-FFF2-40B4-BE49-F238E27FC236}">
-                <a16:creationId xmlns:a16="http://schemas.microsoft.com/office/drawing/2014/main" id="{FFED5A7C-7F78-49A6-89A9-0319FABBBC19}"/>
+                <a16:creationId xmlns:a16="http://schemas.microsoft.com/office/drawing/2014/main" id="{ABBB089B-41EC-48FC-971F-2E907954DDAE}"/>
               </a:ext>
             </a:extLst>
           </p:cNvPr>
@@ -17896,7 +17854,7 @@
           <p:cNvPr id="2" name="">
             <a:extLst xmlns:a="http://schemas.openxmlformats.org/drawingml/2006/main">
               <a:ext uri="{FF2B5EF4-FFF2-40B4-BE49-F238E27FC236}">
-                <a16:creationId xmlns:a16="http://schemas.microsoft.com/office/drawing/2014/main" id="{1E850107-FC6B-4E42-80E9-0AAB7ED39CA4}"/>
+                <a16:creationId xmlns:a16="http://schemas.microsoft.com/office/drawing/2014/main" id="{C896A5DA-347A-471E-8849-CD140A518675}"/>
               </a:ext>
             </a:extLst>
           </p:cNvPr>
@@ -17952,7 +17910,7 @@
           <p:cNvPr id="3" name="">
             <a:extLst xmlns:a="http://schemas.openxmlformats.org/drawingml/2006/main">
               <a:ext uri="{FF2B5EF4-FFF2-40B4-BE49-F238E27FC236}">
-                <a16:creationId xmlns:a16="http://schemas.microsoft.com/office/drawing/2014/main" id="{F1A0BCA4-AB57-4222-972B-DFFAB960FB1E}"/>
+                <a16:creationId xmlns:a16="http://schemas.microsoft.com/office/drawing/2014/main" id="{EDD355B5-71F9-457A-AC0B-7919EA9F9F47}"/>
               </a:ext>
             </a:extLst>
           </p:cNvPr>
@@ -18012,19 +17970,13 @@
           <p:nvPr/>
         </p:nvPicPr>
         <p:blipFill>
-          <a:blip xmlns:r="http://schemas.openxmlformats.org/officeDocument/2006/relationships" xmlns:a="http://schemas.openxmlformats.org/drawingml/2006/main" r:embed="R31814d2f4bc34c80">
-            <a:extLst>
-              <a:ext uri="{96DAC541-7B7A-43D3-8B79-37D633B846F1}">
-                <asvg:svgBlip xmlns:asvg="http://schemas.microsoft.com/office/drawing/2016/SVG/main" r:embed="Rd8eb51a2950d452c"/>
-              </a:ext>
-            </a:extLst>
-          </a:blip>
+          <a:blip xmlns:r="http://schemas.openxmlformats.org/officeDocument/2006/relationships" xmlns:a="http://schemas.openxmlformats.org/drawingml/2006/main" r:embed="R9b03267e462044fb"/>
           <a:stretch xmlns:a="http://schemas.openxmlformats.org/drawingml/2006/main"/>
         </p:blipFill>
         <p:spPr>
           <a:xfrm xmlns:a="http://schemas.openxmlformats.org/drawingml/2006/main">
-            <a:off x="6858000" y="1352550"/>
-            <a:ext cx="4286250" cy="2000250"/>
+            <a:off x="6858000" y="1419466"/>
+            <a:ext cx="4286250" cy="1866418"/>
           </a:xfrm>
           <a:prstGeom xmlns:a="http://schemas.openxmlformats.org/drawingml/2006/main" prst="rect">
             <a:avLst/>
@@ -18036,7 +17988,7 @@
           <p:cNvPr id="5" name="">
             <a:extLst xmlns:a="http://schemas.openxmlformats.org/drawingml/2006/main">
               <a:ext uri="{FF2B5EF4-FFF2-40B4-BE49-F238E27FC236}">
-                <a16:creationId xmlns:a16="http://schemas.microsoft.com/office/drawing/2014/main" id="{BFAEC072-0ACB-44C2-B2C7-9794EC9DF136}"/>
+                <a16:creationId xmlns:a16="http://schemas.microsoft.com/office/drawing/2014/main" id="{4875E321-7A30-4394-92BC-FBBF2EF09FC1}"/>
               </a:ext>
             </a:extLst>
           </p:cNvPr>
@@ -18092,7 +18044,7 @@
           <p:cNvPr id="6" name="">
             <a:extLst xmlns:a="http://schemas.openxmlformats.org/drawingml/2006/main">
               <a:ext uri="{FF2B5EF4-FFF2-40B4-BE49-F238E27FC236}">
-                <a16:creationId xmlns:a16="http://schemas.microsoft.com/office/drawing/2014/main" id="{C639685F-D085-40D7-9D0D-A4AA210CAE56}"/>
+                <a16:creationId xmlns:a16="http://schemas.microsoft.com/office/drawing/2014/main" id="{BB50D879-6F1B-4898-8A6A-66D309CAF8F3}"/>
               </a:ext>
             </a:extLst>
           </p:cNvPr>
@@ -18127,7 +18079,7 @@
           <p:cNvPr id="7" name="">
             <a:extLst xmlns:a="http://schemas.openxmlformats.org/drawingml/2006/main">
               <a:ext uri="{FF2B5EF4-FFF2-40B4-BE49-F238E27FC236}">
-                <a16:creationId xmlns:a16="http://schemas.microsoft.com/office/drawing/2014/main" id="{74242A47-6D47-4FDA-8529-710D7BF72EF1}"/>
+                <a16:creationId xmlns:a16="http://schemas.microsoft.com/office/drawing/2014/main" id="{A077E818-52FE-41B8-84F3-6BDB3271E4D1}"/>
               </a:ext>
             </a:extLst>
           </p:cNvPr>
@@ -18183,7 +18135,7 @@
           <p:cNvPr id="8" name="">
             <a:extLst xmlns:a="http://schemas.openxmlformats.org/drawingml/2006/main">
               <a:ext uri="{FF2B5EF4-FFF2-40B4-BE49-F238E27FC236}">
-                <a16:creationId xmlns:a16="http://schemas.microsoft.com/office/drawing/2014/main" id="{64E789DB-2FA4-4B4C-8546-B972923451B9}"/>
+                <a16:creationId xmlns:a16="http://schemas.microsoft.com/office/drawing/2014/main" id="{4E4AB18C-4480-4D70-9F20-11DFEE37A618}"/>
               </a:ext>
             </a:extLst>
           </p:cNvPr>
@@ -18237,7 +18189,7 @@
     </p:spTree>
     <p:extLst>
       <p:ext uri="{BB962C8B-B14F-4D97-AF65-F5344CB8AC3E}">
-        <p14:creationId xmlns:p14="http://schemas.microsoft.com/office/powerpoint/2010/main" val="1425741774"/>
+        <p14:creationId xmlns:p14="http://schemas.microsoft.com/office/powerpoint/2010/main" val="1042046563"/>
       </p:ext>
     </p:extLst>
   </p:cSld>
@@ -18268,7 +18220,7 @@
           <p:cNvPr id="1" name="">
             <a:extLst xmlns:a="http://schemas.openxmlformats.org/drawingml/2006/main">
               <a:ext uri="{FF2B5EF4-FFF2-40B4-BE49-F238E27FC236}">
-                <a16:creationId xmlns:a16="http://schemas.microsoft.com/office/drawing/2014/main" id="{215610BB-2A0B-4CA2-BFD1-734AE57E4B1C}"/>
+                <a16:creationId xmlns:a16="http://schemas.microsoft.com/office/drawing/2014/main" id="{B91E6736-C1F6-4789-A214-34094F29DA3F}"/>
               </a:ext>
             </a:extLst>
           </p:cNvPr>
@@ -18301,7 +18253,7 @@
           <p:cNvPr id="2" name="">
             <a:extLst xmlns:a="http://schemas.openxmlformats.org/drawingml/2006/main">
               <a:ext uri="{FF2B5EF4-FFF2-40B4-BE49-F238E27FC236}">
-                <a16:creationId xmlns:a16="http://schemas.microsoft.com/office/drawing/2014/main" id="{2C9A1297-52CB-43E7-801E-CD2900F6A71C}"/>
+                <a16:creationId xmlns:a16="http://schemas.microsoft.com/office/drawing/2014/main" id="{B57BEE60-0CC4-4460-BA3B-B5BAE753DA0A}"/>
               </a:ext>
             </a:extLst>
           </p:cNvPr>
@@ -18357,7 +18309,7 @@
           <p:cNvPr id="3" name="">
             <a:extLst xmlns:a="http://schemas.openxmlformats.org/drawingml/2006/main">
               <a:ext uri="{FF2B5EF4-FFF2-40B4-BE49-F238E27FC236}">
-                <a16:creationId xmlns:a16="http://schemas.microsoft.com/office/drawing/2014/main" id="{A109F827-563E-46D9-AF96-2B0162572B41}"/>
+                <a16:creationId xmlns:a16="http://schemas.microsoft.com/office/drawing/2014/main" id="{D7D09C6B-02C7-4BFF-A311-0EEE2E227881}"/>
               </a:ext>
             </a:extLst>
           </p:cNvPr>
@@ -18417,19 +18369,13 @@
           <p:nvPr/>
         </p:nvPicPr>
         <p:blipFill>
-          <a:blip xmlns:r="http://schemas.openxmlformats.org/officeDocument/2006/relationships" xmlns:a="http://schemas.openxmlformats.org/drawingml/2006/main" r:embed="Rcfb2f43997704182">
-            <a:extLst>
-              <a:ext uri="{96DAC541-7B7A-43D3-8B79-37D633B846F1}">
-                <asvg:svgBlip xmlns:asvg="http://schemas.microsoft.com/office/drawing/2016/SVG/main" r:embed="Rdc258cc9db624592"/>
-              </a:ext>
-            </a:extLst>
-          </a:blip>
+          <a:blip xmlns:r="http://schemas.openxmlformats.org/officeDocument/2006/relationships" xmlns:a="http://schemas.openxmlformats.org/drawingml/2006/main" r:embed="Rd1902c330f044a1b"/>
           <a:stretch xmlns:a="http://schemas.openxmlformats.org/drawingml/2006/main"/>
         </p:blipFill>
         <p:spPr>
           <a:xfrm xmlns:a="http://schemas.openxmlformats.org/drawingml/2006/main">
-            <a:off x="6858000" y="1352550"/>
-            <a:ext cx="4286250" cy="2000250"/>
+            <a:off x="6858000" y="1868384"/>
+            <a:ext cx="4286250" cy="968581"/>
           </a:xfrm>
           <a:prstGeom xmlns:a="http://schemas.openxmlformats.org/drawingml/2006/main" prst="rect">
             <a:avLst/>
@@ -18441,7 +18387,7 @@
           <p:cNvPr id="5" name="">
             <a:extLst xmlns:a="http://schemas.openxmlformats.org/drawingml/2006/main">
               <a:ext uri="{FF2B5EF4-FFF2-40B4-BE49-F238E27FC236}">
-                <a16:creationId xmlns:a16="http://schemas.microsoft.com/office/drawing/2014/main" id="{4B549954-5B78-4EC7-B6E1-073754C4BD2E}"/>
+                <a16:creationId xmlns:a16="http://schemas.microsoft.com/office/drawing/2014/main" id="{4EAE842F-A6B6-4E32-9324-5CDAFAA3AE55}"/>
               </a:ext>
             </a:extLst>
           </p:cNvPr>
@@ -18566,7 +18512,7 @@
           <p:cNvPr id="6" name="">
             <a:extLst xmlns:a="http://schemas.openxmlformats.org/drawingml/2006/main">
               <a:ext uri="{FF2B5EF4-FFF2-40B4-BE49-F238E27FC236}">
-                <a16:creationId xmlns:a16="http://schemas.microsoft.com/office/drawing/2014/main" id="{68530CF3-2B3A-4880-800D-1DB9B0493895}"/>
+                <a16:creationId xmlns:a16="http://schemas.microsoft.com/office/drawing/2014/main" id="{13644D8D-C1C9-4E5B-BC0C-4650D64BB684}"/>
               </a:ext>
             </a:extLst>
           </p:cNvPr>
@@ -18601,7 +18547,7 @@
           <p:cNvPr id="7" name="">
             <a:extLst xmlns:a="http://schemas.openxmlformats.org/drawingml/2006/main">
               <a:ext uri="{FF2B5EF4-FFF2-40B4-BE49-F238E27FC236}">
-                <a16:creationId xmlns:a16="http://schemas.microsoft.com/office/drawing/2014/main" id="{2C0CCE11-E2B0-4569-8C22-C3107D7379BA}"/>
+                <a16:creationId xmlns:a16="http://schemas.microsoft.com/office/drawing/2014/main" id="{89CB337C-38B7-469B-9A43-187D461153FA}"/>
               </a:ext>
             </a:extLst>
           </p:cNvPr>
@@ -18657,7 +18603,7 @@
           <p:cNvPr id="8" name="">
             <a:extLst xmlns:a="http://schemas.openxmlformats.org/drawingml/2006/main">
               <a:ext uri="{FF2B5EF4-FFF2-40B4-BE49-F238E27FC236}">
-                <a16:creationId xmlns:a16="http://schemas.microsoft.com/office/drawing/2014/main" id="{85D9508E-0993-4EEF-974F-CA9B0287DAAD}"/>
+                <a16:creationId xmlns:a16="http://schemas.microsoft.com/office/drawing/2014/main" id="{E5541CCA-5F66-4C93-AD8B-66C892C490E5}"/>
               </a:ext>
             </a:extLst>
           </p:cNvPr>
@@ -18711,7 +18657,7 @@
     </p:spTree>
     <p:extLst>
       <p:ext uri="{BB962C8B-B14F-4D97-AF65-F5344CB8AC3E}">
-        <p14:creationId xmlns:p14="http://schemas.microsoft.com/office/powerpoint/2010/main" val="674394532"/>
+        <p14:creationId xmlns:p14="http://schemas.microsoft.com/office/powerpoint/2010/main" val="443574618"/>
       </p:ext>
     </p:extLst>
   </p:cSld>
@@ -18742,7 +18688,7 @@
           <p:cNvPr id="1" name="">
             <a:extLst xmlns:a="http://schemas.openxmlformats.org/drawingml/2006/main">
               <a:ext uri="{FF2B5EF4-FFF2-40B4-BE49-F238E27FC236}">
-                <a16:creationId xmlns:a16="http://schemas.microsoft.com/office/drawing/2014/main" id="{DE31FB13-4705-416D-9C6A-5018AA94EF7D}"/>
+                <a16:creationId xmlns:a16="http://schemas.microsoft.com/office/drawing/2014/main" id="{46CDCC2F-5A66-4DEC-B804-18C6E1393916}"/>
               </a:ext>
             </a:extLst>
           </p:cNvPr>
@@ -18775,7 +18721,7 @@
           <p:cNvPr id="2" name="">
             <a:extLst xmlns:a="http://schemas.openxmlformats.org/drawingml/2006/main">
               <a:ext uri="{FF2B5EF4-FFF2-40B4-BE49-F238E27FC236}">
-                <a16:creationId xmlns:a16="http://schemas.microsoft.com/office/drawing/2014/main" id="{97E755AD-E293-46D2-9611-A4D7F0CAA9FD}"/>
+                <a16:creationId xmlns:a16="http://schemas.microsoft.com/office/drawing/2014/main" id="{41F8465D-C60F-4674-80A8-84C288C1F796}"/>
               </a:ext>
             </a:extLst>
           </p:cNvPr>
@@ -18831,7 +18777,7 @@
           <p:cNvPr id="3" name="">
             <a:extLst xmlns:a="http://schemas.openxmlformats.org/drawingml/2006/main">
               <a:ext uri="{FF2B5EF4-FFF2-40B4-BE49-F238E27FC236}">
-                <a16:creationId xmlns:a16="http://schemas.microsoft.com/office/drawing/2014/main" id="{9883B317-B833-4B3A-AF9F-D28CF8B4D1FF}"/>
+                <a16:creationId xmlns:a16="http://schemas.microsoft.com/office/drawing/2014/main" id="{6F784D58-4C33-4CC2-AA1D-D85D93380C97}"/>
               </a:ext>
             </a:extLst>
           </p:cNvPr>
@@ -18891,19 +18837,13 @@
           <p:nvPr/>
         </p:nvPicPr>
         <p:blipFill>
-          <a:blip xmlns:r="http://schemas.openxmlformats.org/officeDocument/2006/relationships" xmlns:a="http://schemas.openxmlformats.org/drawingml/2006/main" r:embed="R1d61d9e89c704a39">
-            <a:extLst>
-              <a:ext uri="{96DAC541-7B7A-43D3-8B79-37D633B846F1}">
-                <asvg:svgBlip xmlns:asvg="http://schemas.microsoft.com/office/drawing/2016/SVG/main" r:embed="Re37e6703fcf44094"/>
-              </a:ext>
-            </a:extLst>
-          </a:blip>
+          <a:blip xmlns:r="http://schemas.openxmlformats.org/officeDocument/2006/relationships" xmlns:a="http://schemas.openxmlformats.org/drawingml/2006/main" r:embed="Rcb2f672ee7e24da6"/>
           <a:stretch xmlns:a="http://schemas.openxmlformats.org/drawingml/2006/main"/>
         </p:blipFill>
         <p:spPr>
           <a:xfrm xmlns:a="http://schemas.openxmlformats.org/drawingml/2006/main">
-            <a:off x="6858000" y="1352550"/>
-            <a:ext cx="4286250" cy="2000250"/>
+            <a:off x="6930974" y="1352550"/>
+            <a:ext cx="4140302" cy="2000250"/>
           </a:xfrm>
           <a:prstGeom xmlns:a="http://schemas.openxmlformats.org/drawingml/2006/main" prst="rect">
             <a:avLst/>
@@ -18915,7 +18855,7 @@
           <p:cNvPr id="5" name="">
             <a:extLst xmlns:a="http://schemas.openxmlformats.org/drawingml/2006/main">
               <a:ext uri="{FF2B5EF4-FFF2-40B4-BE49-F238E27FC236}">
-                <a16:creationId xmlns:a16="http://schemas.microsoft.com/office/drawing/2014/main" id="{12A30F90-530B-4EFC-BB92-56BE8250FDAF}"/>
+                <a16:creationId xmlns:a16="http://schemas.microsoft.com/office/drawing/2014/main" id="{EC697FB4-A484-4295-9FED-2B5F167870F1}"/>
               </a:ext>
             </a:extLst>
           </p:cNvPr>
@@ -18950,7 +18890,7 @@
           <p:cNvPr id="6" name="">
             <a:extLst xmlns:a="http://schemas.openxmlformats.org/drawingml/2006/main">
               <a:ext uri="{FF2B5EF4-FFF2-40B4-BE49-F238E27FC236}">
-                <a16:creationId xmlns:a16="http://schemas.microsoft.com/office/drawing/2014/main" id="{FD79924E-44D0-46A5-8719-8CACD45AED54}"/>
+                <a16:creationId xmlns:a16="http://schemas.microsoft.com/office/drawing/2014/main" id="{3B25D077-6CDC-4AD8-8BDF-261EEF1573CC}"/>
               </a:ext>
             </a:extLst>
           </p:cNvPr>
@@ -19006,7 +18946,7 @@
           <p:cNvPr id="7" name="">
             <a:extLst xmlns:a="http://schemas.openxmlformats.org/drawingml/2006/main">
               <a:ext uri="{FF2B5EF4-FFF2-40B4-BE49-F238E27FC236}">
-                <a16:creationId xmlns:a16="http://schemas.microsoft.com/office/drawing/2014/main" id="{99E9A5F0-1748-4466-80D2-2D6FFA1EDEA3}"/>
+                <a16:creationId xmlns:a16="http://schemas.microsoft.com/office/drawing/2014/main" id="{655E46F9-3997-4612-ADF7-A337B8C0813C}"/>
               </a:ext>
             </a:extLst>
           </p:cNvPr>
@@ -19041,7 +18981,7 @@
           <p:cNvPr id="8" name="">
             <a:extLst xmlns:a="http://schemas.openxmlformats.org/drawingml/2006/main">
               <a:ext uri="{FF2B5EF4-FFF2-40B4-BE49-F238E27FC236}">
-                <a16:creationId xmlns:a16="http://schemas.microsoft.com/office/drawing/2014/main" id="{9753E2F1-CC1E-464D-8477-524F07D68292}"/>
+                <a16:creationId xmlns:a16="http://schemas.microsoft.com/office/drawing/2014/main" id="{07C9B4CE-3402-4B5D-8C55-68D540F7F10F}"/>
               </a:ext>
             </a:extLst>
           </p:cNvPr>
@@ -19097,7 +19037,7 @@
           <p:cNvPr id="9" name="">
             <a:extLst xmlns:a="http://schemas.openxmlformats.org/drawingml/2006/main">
               <a:ext uri="{FF2B5EF4-FFF2-40B4-BE49-F238E27FC236}">
-                <a16:creationId xmlns:a16="http://schemas.microsoft.com/office/drawing/2014/main" id="{A6F0124B-6C78-4F82-BF8C-B1D377BAD0F5}"/>
+                <a16:creationId xmlns:a16="http://schemas.microsoft.com/office/drawing/2014/main" id="{29D6EDEF-FAD0-481B-8113-5BD901A8AFE7}"/>
               </a:ext>
             </a:extLst>
           </p:cNvPr>
@@ -19132,7 +19072,7 @@
           <p:cNvPr id="10" name="">
             <a:extLst xmlns:a="http://schemas.openxmlformats.org/drawingml/2006/main">
               <a:ext uri="{FF2B5EF4-FFF2-40B4-BE49-F238E27FC236}">
-                <a16:creationId xmlns:a16="http://schemas.microsoft.com/office/drawing/2014/main" id="{9EE2114F-F77E-4960-99ED-83E51C5285D5}"/>
+                <a16:creationId xmlns:a16="http://schemas.microsoft.com/office/drawing/2014/main" id="{5BEE6C24-AB3B-4756-8BD3-3AFB0A4E9B0B}"/>
               </a:ext>
             </a:extLst>
           </p:cNvPr>
@@ -19188,7 +19128,7 @@
           <p:cNvPr id="11" name="">
             <a:extLst xmlns:a="http://schemas.openxmlformats.org/drawingml/2006/main">
               <a:ext uri="{FF2B5EF4-FFF2-40B4-BE49-F238E27FC236}">
-                <a16:creationId xmlns:a16="http://schemas.microsoft.com/office/drawing/2014/main" id="{96C419F8-378B-483A-9959-E2DD6FD97404}"/>
+                <a16:creationId xmlns:a16="http://schemas.microsoft.com/office/drawing/2014/main" id="{059B9FF1-AADA-415A-9BE9-30FD3A514723}"/>
               </a:ext>
             </a:extLst>
           </p:cNvPr>
@@ -19223,7 +19163,7 @@
           <p:cNvPr id="12" name="">
             <a:extLst xmlns:a="http://schemas.openxmlformats.org/drawingml/2006/main">
               <a:ext uri="{FF2B5EF4-FFF2-40B4-BE49-F238E27FC236}">
-                <a16:creationId xmlns:a16="http://schemas.microsoft.com/office/drawing/2014/main" id="{E6CD0357-C28F-4BD5-B3D8-C3D029E38E1B}"/>
+                <a16:creationId xmlns:a16="http://schemas.microsoft.com/office/drawing/2014/main" id="{69DC5646-3D93-41F1-8DEC-E49C43958C00}"/>
               </a:ext>
             </a:extLst>
           </p:cNvPr>
@@ -19279,7 +19219,7 @@
           <p:cNvPr id="13" name="">
             <a:extLst xmlns:a="http://schemas.openxmlformats.org/drawingml/2006/main">
               <a:ext uri="{FF2B5EF4-FFF2-40B4-BE49-F238E27FC236}">
-                <a16:creationId xmlns:a16="http://schemas.microsoft.com/office/drawing/2014/main" id="{7537E201-58B4-4823-9B1A-1433F7A3CA5A}"/>
+                <a16:creationId xmlns:a16="http://schemas.microsoft.com/office/drawing/2014/main" id="{472D5702-3E69-4EAB-B209-FA3B815333DC}"/>
               </a:ext>
             </a:extLst>
           </p:cNvPr>
@@ -19333,7 +19273,7 @@
     </p:spTree>
     <p:extLst>
       <p:ext uri="{BB962C8B-B14F-4D97-AF65-F5344CB8AC3E}">
-        <p14:creationId xmlns:p14="http://schemas.microsoft.com/office/powerpoint/2010/main" val="827520680"/>
+        <p14:creationId xmlns:p14="http://schemas.microsoft.com/office/powerpoint/2010/main" val="1824329685"/>
       </p:ext>
     </p:extLst>
   </p:cSld>
@@ -19364,7 +19304,7 @@
           <p:cNvPr id="1" name="">
             <a:extLst xmlns:a="http://schemas.openxmlformats.org/drawingml/2006/main">
               <a:ext uri="{FF2B5EF4-FFF2-40B4-BE49-F238E27FC236}">
-                <a16:creationId xmlns:a16="http://schemas.microsoft.com/office/drawing/2014/main" id="{04E500D4-87B4-4943-83B1-8AD44C83C873}"/>
+                <a16:creationId xmlns:a16="http://schemas.microsoft.com/office/drawing/2014/main" id="{3CF1CCED-1A11-4433-B524-AA39831F402F}"/>
               </a:ext>
             </a:extLst>
           </p:cNvPr>
@@ -19397,7 +19337,7 @@
           <p:cNvPr id="2" name="">
             <a:extLst xmlns:a="http://schemas.openxmlformats.org/drawingml/2006/main">
               <a:ext uri="{FF2B5EF4-FFF2-40B4-BE49-F238E27FC236}">
-                <a16:creationId xmlns:a16="http://schemas.microsoft.com/office/drawing/2014/main" id="{CC484135-D3A6-4975-A9AC-2B0914844747}"/>
+                <a16:creationId xmlns:a16="http://schemas.microsoft.com/office/drawing/2014/main" id="{4ABB3786-2787-4069-91A5-732484091527}"/>
               </a:ext>
             </a:extLst>
           </p:cNvPr>
@@ -19453,7 +19393,7 @@
           <p:cNvPr id="3" name="">
             <a:extLst xmlns:a="http://schemas.openxmlformats.org/drawingml/2006/main">
               <a:ext uri="{FF2B5EF4-FFF2-40B4-BE49-F238E27FC236}">
-                <a16:creationId xmlns:a16="http://schemas.microsoft.com/office/drawing/2014/main" id="{744E21AD-A117-4965-8C63-DE7741E5E80E}"/>
+                <a16:creationId xmlns:a16="http://schemas.microsoft.com/office/drawing/2014/main" id="{882AFA9A-9327-4636-AF3C-E70B55F92441}"/>
               </a:ext>
             </a:extLst>
           </p:cNvPr>
@@ -19513,19 +19453,13 @@
           <p:nvPr/>
         </p:nvPicPr>
         <p:blipFill>
-          <a:blip xmlns:r="http://schemas.openxmlformats.org/officeDocument/2006/relationships" xmlns:a="http://schemas.openxmlformats.org/drawingml/2006/main" r:embed="R1c18da7ec4174c1e">
-            <a:extLst>
-              <a:ext uri="{96DAC541-7B7A-43D3-8B79-37D633B846F1}">
-                <asvg:svgBlip xmlns:asvg="http://schemas.microsoft.com/office/drawing/2016/SVG/main" r:embed="R35ad5534adef44ad"/>
-              </a:ext>
-            </a:extLst>
-          </a:blip>
+          <a:blip xmlns:r="http://schemas.openxmlformats.org/officeDocument/2006/relationships" xmlns:a="http://schemas.openxmlformats.org/drawingml/2006/main" r:embed="R070dcf89a9db4c67"/>
           <a:stretch xmlns:a="http://schemas.openxmlformats.org/drawingml/2006/main"/>
         </p:blipFill>
         <p:spPr>
           <a:xfrm xmlns:a="http://schemas.openxmlformats.org/drawingml/2006/main">
-            <a:off x="6858000" y="1352550"/>
-            <a:ext cx="4286250" cy="2000250"/>
+            <a:off x="6858000" y="1846118"/>
+            <a:ext cx="4286250" cy="1013114"/>
           </a:xfrm>
           <a:prstGeom xmlns:a="http://schemas.openxmlformats.org/drawingml/2006/main" prst="rect">
             <a:avLst/>
@@ -19537,7 +19471,7 @@
           <p:cNvPr id="5" name="">
             <a:extLst xmlns:a="http://schemas.openxmlformats.org/drawingml/2006/main">
               <a:ext uri="{FF2B5EF4-FFF2-40B4-BE49-F238E27FC236}">
-                <a16:creationId xmlns:a16="http://schemas.microsoft.com/office/drawing/2014/main" id="{C4821D62-456D-49AC-AFDD-6C378B1137BA}"/>
+                <a16:creationId xmlns:a16="http://schemas.microsoft.com/office/drawing/2014/main" id="{E1B94BDC-529F-4307-8688-7059D4747A1C}"/>
               </a:ext>
             </a:extLst>
           </p:cNvPr>
@@ -19572,7 +19506,7 @@
           <p:cNvPr id="6" name="">
             <a:extLst xmlns:a="http://schemas.openxmlformats.org/drawingml/2006/main">
               <a:ext uri="{FF2B5EF4-FFF2-40B4-BE49-F238E27FC236}">
-                <a16:creationId xmlns:a16="http://schemas.microsoft.com/office/drawing/2014/main" id="{681DC5C4-9DE0-4708-BD46-80B306155F7C}"/>
+                <a16:creationId xmlns:a16="http://schemas.microsoft.com/office/drawing/2014/main" id="{97D31051-8813-4AD5-8574-6DA87BC97DC4}"/>
               </a:ext>
             </a:extLst>
           </p:cNvPr>
@@ -19628,7 +19562,7 @@
           <p:cNvPr id="7" name="">
             <a:extLst xmlns:a="http://schemas.openxmlformats.org/drawingml/2006/main">
               <a:ext uri="{FF2B5EF4-FFF2-40B4-BE49-F238E27FC236}">
-                <a16:creationId xmlns:a16="http://schemas.microsoft.com/office/drawing/2014/main" id="{A1E18B0C-C32F-4BF9-9EC1-E4931B8CDE21}"/>
+                <a16:creationId xmlns:a16="http://schemas.microsoft.com/office/drawing/2014/main" id="{8913815F-5272-4DB6-B098-ACD73CFAC746}"/>
               </a:ext>
             </a:extLst>
           </p:cNvPr>
@@ -19663,7 +19597,7 @@
           <p:cNvPr id="8" name="">
             <a:extLst xmlns:a="http://schemas.openxmlformats.org/drawingml/2006/main">
               <a:ext uri="{FF2B5EF4-FFF2-40B4-BE49-F238E27FC236}">
-                <a16:creationId xmlns:a16="http://schemas.microsoft.com/office/drawing/2014/main" id="{668ADD9F-ADC9-4417-95B7-49707B6A8C1D}"/>
+                <a16:creationId xmlns:a16="http://schemas.microsoft.com/office/drawing/2014/main" id="{721A2582-09F9-44CD-BC4E-25A2147A4BF2}"/>
               </a:ext>
             </a:extLst>
           </p:cNvPr>
@@ -19719,7 +19653,7 @@
           <p:cNvPr id="9" name="">
             <a:extLst xmlns:a="http://schemas.openxmlformats.org/drawingml/2006/main">
               <a:ext uri="{FF2B5EF4-FFF2-40B4-BE49-F238E27FC236}">
-                <a16:creationId xmlns:a16="http://schemas.microsoft.com/office/drawing/2014/main" id="{A70861A3-473B-4636-BB7B-7C6914741963}"/>
+                <a16:creationId xmlns:a16="http://schemas.microsoft.com/office/drawing/2014/main" id="{85673573-0DD2-42D8-91F5-9014DF54D7D7}"/>
               </a:ext>
             </a:extLst>
           </p:cNvPr>
@@ -19754,7 +19688,7 @@
           <p:cNvPr id="10" name="">
             <a:extLst xmlns:a="http://schemas.openxmlformats.org/drawingml/2006/main">
               <a:ext uri="{FF2B5EF4-FFF2-40B4-BE49-F238E27FC236}">
-                <a16:creationId xmlns:a16="http://schemas.microsoft.com/office/drawing/2014/main" id="{F110FE86-360B-4BAF-A644-CC8A831E3D0F}"/>
+                <a16:creationId xmlns:a16="http://schemas.microsoft.com/office/drawing/2014/main" id="{0A2EBC5C-6F1B-43EF-BD43-153F0A2F2353}"/>
               </a:ext>
             </a:extLst>
           </p:cNvPr>
@@ -19810,7 +19744,7 @@
           <p:cNvPr id="11" name="">
             <a:extLst xmlns:a="http://schemas.openxmlformats.org/drawingml/2006/main">
               <a:ext uri="{FF2B5EF4-FFF2-40B4-BE49-F238E27FC236}">
-                <a16:creationId xmlns:a16="http://schemas.microsoft.com/office/drawing/2014/main" id="{131EDC28-C04F-4D86-A771-D903202F32B1}"/>
+                <a16:creationId xmlns:a16="http://schemas.microsoft.com/office/drawing/2014/main" id="{BFBAC67E-5644-4C21-B87E-CE9756268DC7}"/>
               </a:ext>
             </a:extLst>
           </p:cNvPr>
@@ -19845,7 +19779,7 @@
           <p:cNvPr id="12" name="">
             <a:extLst xmlns:a="http://schemas.openxmlformats.org/drawingml/2006/main">
               <a:ext uri="{FF2B5EF4-FFF2-40B4-BE49-F238E27FC236}">
-                <a16:creationId xmlns:a16="http://schemas.microsoft.com/office/drawing/2014/main" id="{B91D8D2D-12C2-4B9A-882E-C042C642B806}"/>
+                <a16:creationId xmlns:a16="http://schemas.microsoft.com/office/drawing/2014/main" id="{42007D6D-C911-4DF2-A1A4-5C1592E0346D}"/>
               </a:ext>
             </a:extLst>
           </p:cNvPr>
@@ -19901,7 +19835,7 @@
           <p:cNvPr id="13" name="">
             <a:extLst xmlns:a="http://schemas.openxmlformats.org/drawingml/2006/main">
               <a:ext uri="{FF2B5EF4-FFF2-40B4-BE49-F238E27FC236}">
-                <a16:creationId xmlns:a16="http://schemas.microsoft.com/office/drawing/2014/main" id="{EC01481D-3DCB-464F-A561-BA1DC0AC6BDE}"/>
+                <a16:creationId xmlns:a16="http://schemas.microsoft.com/office/drawing/2014/main" id="{A7FB0CB9-8F71-4737-B5F2-B9404BF9CFE2}"/>
               </a:ext>
             </a:extLst>
           </p:cNvPr>
@@ -19936,7 +19870,7 @@
           <p:cNvPr id="14" name="">
             <a:extLst xmlns:a="http://schemas.openxmlformats.org/drawingml/2006/main">
               <a:ext uri="{FF2B5EF4-FFF2-40B4-BE49-F238E27FC236}">
-                <a16:creationId xmlns:a16="http://schemas.microsoft.com/office/drawing/2014/main" id="{29A90CCC-9C4F-40AD-AA09-184F6950295C}"/>
+                <a16:creationId xmlns:a16="http://schemas.microsoft.com/office/drawing/2014/main" id="{3CD1E9D2-B7E9-4479-8D4B-D8F30541E45B}"/>
               </a:ext>
             </a:extLst>
           </p:cNvPr>
@@ -19992,7 +19926,7 @@
           <p:cNvPr id="15" name="">
             <a:extLst xmlns:a="http://schemas.openxmlformats.org/drawingml/2006/main">
               <a:ext uri="{FF2B5EF4-FFF2-40B4-BE49-F238E27FC236}">
-                <a16:creationId xmlns:a16="http://schemas.microsoft.com/office/drawing/2014/main" id="{BF0C73C2-A2B8-4B9F-9370-35EDD8BC4AE8}"/>
+                <a16:creationId xmlns:a16="http://schemas.microsoft.com/office/drawing/2014/main" id="{CB7AFDC0-1020-4187-9919-DF68B59BBCC9}"/>
               </a:ext>
             </a:extLst>
           </p:cNvPr>
@@ -20027,7 +19961,7 @@
           <p:cNvPr id="16" name="">
             <a:extLst xmlns:a="http://schemas.openxmlformats.org/drawingml/2006/main">
               <a:ext uri="{FF2B5EF4-FFF2-40B4-BE49-F238E27FC236}">
-                <a16:creationId xmlns:a16="http://schemas.microsoft.com/office/drawing/2014/main" id="{E18FA121-8815-4909-91EF-44B75884C2D6}"/>
+                <a16:creationId xmlns:a16="http://schemas.microsoft.com/office/drawing/2014/main" id="{9A6F0DE3-046D-443F-9691-ABBB8A48CCB5}"/>
               </a:ext>
             </a:extLst>
           </p:cNvPr>
@@ -20083,7 +20017,7 @@
           <p:cNvPr id="17" name="">
             <a:extLst xmlns:a="http://schemas.openxmlformats.org/drawingml/2006/main">
               <a:ext uri="{FF2B5EF4-FFF2-40B4-BE49-F238E27FC236}">
-                <a16:creationId xmlns:a16="http://schemas.microsoft.com/office/drawing/2014/main" id="{97CBEEE5-4F5C-4334-AA48-A63D9B3402C0}"/>
+                <a16:creationId xmlns:a16="http://schemas.microsoft.com/office/drawing/2014/main" id="{211098CB-DEFB-4FA5-A434-1B5023896E11}"/>
               </a:ext>
             </a:extLst>
           </p:cNvPr>
@@ -20118,7 +20052,7 @@
           <p:cNvPr id="18" name="">
             <a:extLst xmlns:a="http://schemas.openxmlformats.org/drawingml/2006/main">
               <a:ext uri="{FF2B5EF4-FFF2-40B4-BE49-F238E27FC236}">
-                <a16:creationId xmlns:a16="http://schemas.microsoft.com/office/drawing/2014/main" id="{530C4FE1-E22E-4AF1-A4C8-C40B6DD1E28C}"/>
+                <a16:creationId xmlns:a16="http://schemas.microsoft.com/office/drawing/2014/main" id="{16FEDEA0-A75A-4B23-AED7-7D82369AA8EA}"/>
               </a:ext>
             </a:extLst>
           </p:cNvPr>
@@ -20174,7 +20108,7 @@
           <p:cNvPr id="19" name="">
             <a:extLst xmlns:a="http://schemas.openxmlformats.org/drawingml/2006/main">
               <a:ext uri="{FF2B5EF4-FFF2-40B4-BE49-F238E27FC236}">
-                <a16:creationId xmlns:a16="http://schemas.microsoft.com/office/drawing/2014/main" id="{58748DE0-BDEE-42C2-83D0-69D04C713BD9}"/>
+                <a16:creationId xmlns:a16="http://schemas.microsoft.com/office/drawing/2014/main" id="{A3F6A95A-7DE6-4B6E-8008-11F255AB228A}"/>
               </a:ext>
             </a:extLst>
           </p:cNvPr>
@@ -20228,7 +20162,7 @@
     </p:spTree>
     <p:extLst>
       <p:ext uri="{BB962C8B-B14F-4D97-AF65-F5344CB8AC3E}">
-        <p14:creationId xmlns:p14="http://schemas.microsoft.com/office/powerpoint/2010/main" val="377885727"/>
+        <p14:creationId xmlns:p14="http://schemas.microsoft.com/office/powerpoint/2010/main" val="1507033437"/>
       </p:ext>
     </p:extLst>
   </p:cSld>
@@ -20259,7 +20193,7 @@
           <p:cNvPr id="1" name="">
             <a:extLst xmlns:a="http://schemas.openxmlformats.org/drawingml/2006/main">
               <a:ext uri="{FF2B5EF4-FFF2-40B4-BE49-F238E27FC236}">
-                <a16:creationId xmlns:a16="http://schemas.microsoft.com/office/drawing/2014/main" id="{F364ECFF-4E10-43FD-8E00-4680048C8701}"/>
+                <a16:creationId xmlns:a16="http://schemas.microsoft.com/office/drawing/2014/main" id="{07F16AF7-20EB-416E-9E57-D9BEFD966293}"/>
               </a:ext>
             </a:extLst>
           </p:cNvPr>
@@ -20292,7 +20226,7 @@
           <p:cNvPr id="2" name="">
             <a:extLst xmlns:a="http://schemas.openxmlformats.org/drawingml/2006/main">
               <a:ext uri="{FF2B5EF4-FFF2-40B4-BE49-F238E27FC236}">
-                <a16:creationId xmlns:a16="http://schemas.microsoft.com/office/drawing/2014/main" id="{A66CFE10-D8C9-4709-AF3C-162DCC8ECC09}"/>
+                <a16:creationId xmlns:a16="http://schemas.microsoft.com/office/drawing/2014/main" id="{B5482D67-279A-47B1-94AB-53F830AC2F8B}"/>
               </a:ext>
             </a:extLst>
           </p:cNvPr>
@@ -20348,7 +20282,7 @@
           <p:cNvPr id="3" name="">
             <a:extLst xmlns:a="http://schemas.openxmlformats.org/drawingml/2006/main">
               <a:ext uri="{FF2B5EF4-FFF2-40B4-BE49-F238E27FC236}">
-                <a16:creationId xmlns:a16="http://schemas.microsoft.com/office/drawing/2014/main" id="{26CEB19B-D7E8-4BC8-99B1-99AA449E0AB0}"/>
+                <a16:creationId xmlns:a16="http://schemas.microsoft.com/office/drawing/2014/main" id="{3CB6E619-FDA4-4421-9D85-746083F7B000}"/>
               </a:ext>
             </a:extLst>
           </p:cNvPr>
@@ -20404,7 +20338,7 @@
           <p:cNvPr id="4" name="">
             <a:extLst xmlns:a="http://schemas.openxmlformats.org/drawingml/2006/main">
               <a:ext uri="{FF2B5EF4-FFF2-40B4-BE49-F238E27FC236}">
-                <a16:creationId xmlns:a16="http://schemas.microsoft.com/office/drawing/2014/main" id="{24509E73-D6A5-4A25-8FC5-BF0AA8101B23}"/>
+                <a16:creationId xmlns:a16="http://schemas.microsoft.com/office/drawing/2014/main" id="{5DCFB829-63AF-4ADB-9C22-3B7BD2C5BB02}"/>
               </a:ext>
             </a:extLst>
           </p:cNvPr>
@@ -20439,7 +20373,7 @@
           <p:cNvPr id="5" name="">
             <a:extLst xmlns:a="http://schemas.openxmlformats.org/drawingml/2006/main">
               <a:ext uri="{FF2B5EF4-FFF2-40B4-BE49-F238E27FC236}">
-                <a16:creationId xmlns:a16="http://schemas.microsoft.com/office/drawing/2014/main" id="{62C136D2-E7C0-464B-A5E1-C4D178A9504B}"/>
+                <a16:creationId xmlns:a16="http://schemas.microsoft.com/office/drawing/2014/main" id="{814DBB49-7998-45BE-A12A-83FD5394CD45}"/>
               </a:ext>
             </a:extLst>
           </p:cNvPr>
@@ -20495,7 +20429,7 @@
           <p:cNvPr id="6" name="">
             <a:extLst xmlns:a="http://schemas.openxmlformats.org/drawingml/2006/main">
               <a:ext uri="{FF2B5EF4-FFF2-40B4-BE49-F238E27FC236}">
-                <a16:creationId xmlns:a16="http://schemas.microsoft.com/office/drawing/2014/main" id="{09D19888-67C0-487D-BD31-14741637E93B}"/>
+                <a16:creationId xmlns:a16="http://schemas.microsoft.com/office/drawing/2014/main" id="{9AD62A32-B172-4A7E-B84D-0C1E9A4BAC76}"/>
               </a:ext>
             </a:extLst>
           </p:cNvPr>
@@ -20530,7 +20464,7 @@
           <p:cNvPr id="7" name="">
             <a:extLst xmlns:a="http://schemas.openxmlformats.org/drawingml/2006/main">
               <a:ext uri="{FF2B5EF4-FFF2-40B4-BE49-F238E27FC236}">
-                <a16:creationId xmlns:a16="http://schemas.microsoft.com/office/drawing/2014/main" id="{66C4180D-B69A-473B-8DB7-BD800443A9ED}"/>
+                <a16:creationId xmlns:a16="http://schemas.microsoft.com/office/drawing/2014/main" id="{7A50A4BA-8C34-4AEB-A364-86A0CBC75466}"/>
               </a:ext>
             </a:extLst>
           </p:cNvPr>
@@ -20586,7 +20520,7 @@
           <p:cNvPr id="8" name="">
             <a:extLst xmlns:a="http://schemas.openxmlformats.org/drawingml/2006/main">
               <a:ext uri="{FF2B5EF4-FFF2-40B4-BE49-F238E27FC236}">
-                <a16:creationId xmlns:a16="http://schemas.microsoft.com/office/drawing/2014/main" id="{AA9EB64E-74C0-4B2D-A488-9F03145FDFC3}"/>
+                <a16:creationId xmlns:a16="http://schemas.microsoft.com/office/drawing/2014/main" id="{A7B4D13D-81ED-4BD8-85DA-B7EF60130A74}"/>
               </a:ext>
             </a:extLst>
           </p:cNvPr>
@@ -20621,7 +20555,7 @@
           <p:cNvPr id="9" name="">
             <a:extLst xmlns:a="http://schemas.openxmlformats.org/drawingml/2006/main">
               <a:ext uri="{FF2B5EF4-FFF2-40B4-BE49-F238E27FC236}">
-                <a16:creationId xmlns:a16="http://schemas.microsoft.com/office/drawing/2014/main" id="{69FD762D-295E-4C23-A259-6564BB2FB8D2}"/>
+                <a16:creationId xmlns:a16="http://schemas.microsoft.com/office/drawing/2014/main" id="{E5959C66-2FF7-4BAC-8B9F-23C9970D8686}"/>
               </a:ext>
             </a:extLst>
           </p:cNvPr>
@@ -20677,7 +20611,7 @@
           <p:cNvPr id="10" name="">
             <a:extLst xmlns:a="http://schemas.openxmlformats.org/drawingml/2006/main">
               <a:ext uri="{FF2B5EF4-FFF2-40B4-BE49-F238E27FC236}">
-                <a16:creationId xmlns:a16="http://schemas.microsoft.com/office/drawing/2014/main" id="{7E806BA0-EB23-4C47-8606-64D1643A5FA2}"/>
+                <a16:creationId xmlns:a16="http://schemas.microsoft.com/office/drawing/2014/main" id="{37BFC85F-3CE6-4267-B400-EC4C62B175D8}"/>
               </a:ext>
             </a:extLst>
           </p:cNvPr>
@@ -20712,7 +20646,7 @@
           <p:cNvPr id="11" name="">
             <a:extLst xmlns:a="http://schemas.openxmlformats.org/drawingml/2006/main">
               <a:ext uri="{FF2B5EF4-FFF2-40B4-BE49-F238E27FC236}">
-                <a16:creationId xmlns:a16="http://schemas.microsoft.com/office/drawing/2014/main" id="{04EB7E44-8DFA-4806-8F35-B1CD0402B8C0}"/>
+                <a16:creationId xmlns:a16="http://schemas.microsoft.com/office/drawing/2014/main" id="{6EE8894F-6DE6-4B9F-BDC0-144B62FE9223}"/>
               </a:ext>
             </a:extLst>
           </p:cNvPr>
@@ -20768,7 +20702,7 @@
           <p:cNvPr id="12" name="">
             <a:extLst xmlns:a="http://schemas.openxmlformats.org/drawingml/2006/main">
               <a:ext uri="{FF2B5EF4-FFF2-40B4-BE49-F238E27FC236}">
-                <a16:creationId xmlns:a16="http://schemas.microsoft.com/office/drawing/2014/main" id="{02857432-F09F-4BB9-B943-D2B9E135D8D9}"/>
+                <a16:creationId xmlns:a16="http://schemas.microsoft.com/office/drawing/2014/main" id="{8BB30EBE-BA3B-4DB2-BE04-44F3AC0A8024}"/>
               </a:ext>
             </a:extLst>
           </p:cNvPr>
@@ -20803,7 +20737,7 @@
           <p:cNvPr id="13" name="">
             <a:extLst xmlns:a="http://schemas.openxmlformats.org/drawingml/2006/main">
               <a:ext uri="{FF2B5EF4-FFF2-40B4-BE49-F238E27FC236}">
-                <a16:creationId xmlns:a16="http://schemas.microsoft.com/office/drawing/2014/main" id="{9E8D84A8-CAF5-46F4-9C5B-31552A6BA756}"/>
+                <a16:creationId xmlns:a16="http://schemas.microsoft.com/office/drawing/2014/main" id="{6FDDD8C6-9E04-4F72-B568-3AA33DFC46C5}"/>
               </a:ext>
             </a:extLst>
           </p:cNvPr>
@@ -20859,7 +20793,7 @@
           <p:cNvPr id="14" name="">
             <a:extLst xmlns:a="http://schemas.openxmlformats.org/drawingml/2006/main">
               <a:ext uri="{FF2B5EF4-FFF2-40B4-BE49-F238E27FC236}">
-                <a16:creationId xmlns:a16="http://schemas.microsoft.com/office/drawing/2014/main" id="{976BF3B2-28C8-4534-BCA9-0FC427A3B007}"/>
+                <a16:creationId xmlns:a16="http://schemas.microsoft.com/office/drawing/2014/main" id="{6D47F918-1307-4696-8467-B83059007B33}"/>
               </a:ext>
             </a:extLst>
           </p:cNvPr>
@@ -20894,7 +20828,7 @@
           <p:cNvPr id="15" name="">
             <a:extLst xmlns:a="http://schemas.openxmlformats.org/drawingml/2006/main">
               <a:ext uri="{FF2B5EF4-FFF2-40B4-BE49-F238E27FC236}">
-                <a16:creationId xmlns:a16="http://schemas.microsoft.com/office/drawing/2014/main" id="{8D3FF5D5-305A-4FD6-957A-024800DFCF17}"/>
+                <a16:creationId xmlns:a16="http://schemas.microsoft.com/office/drawing/2014/main" id="{49B480D3-7587-4DCB-A0D0-A22A3F8901A0}"/>
               </a:ext>
             </a:extLst>
           </p:cNvPr>
@@ -20950,7 +20884,7 @@
           <p:cNvPr id="16" name="">
             <a:extLst xmlns:a="http://schemas.openxmlformats.org/drawingml/2006/main">
               <a:ext uri="{FF2B5EF4-FFF2-40B4-BE49-F238E27FC236}">
-                <a16:creationId xmlns:a16="http://schemas.microsoft.com/office/drawing/2014/main" id="{5EB590C1-B28C-4907-9149-E348E78828CA}"/>
+                <a16:creationId xmlns:a16="http://schemas.microsoft.com/office/drawing/2014/main" id="{C3F93609-FF1B-4D59-B0F9-35FC22669F46}"/>
               </a:ext>
             </a:extLst>
           </p:cNvPr>
@@ -20985,7 +20919,7 @@
           <p:cNvPr id="17" name="">
             <a:extLst xmlns:a="http://schemas.openxmlformats.org/drawingml/2006/main">
               <a:ext uri="{FF2B5EF4-FFF2-40B4-BE49-F238E27FC236}">
-                <a16:creationId xmlns:a16="http://schemas.microsoft.com/office/drawing/2014/main" id="{387C725C-1126-47B9-A9D7-AD90D596522E}"/>
+                <a16:creationId xmlns:a16="http://schemas.microsoft.com/office/drawing/2014/main" id="{0C780AF9-3FD0-4CB2-B1B4-A9DB74FF73D0}"/>
               </a:ext>
             </a:extLst>
           </p:cNvPr>
@@ -21041,7 +20975,7 @@
           <p:cNvPr id="18" name="">
             <a:extLst xmlns:a="http://schemas.openxmlformats.org/drawingml/2006/main">
               <a:ext uri="{FF2B5EF4-FFF2-40B4-BE49-F238E27FC236}">
-                <a16:creationId xmlns:a16="http://schemas.microsoft.com/office/drawing/2014/main" id="{0E9E73C7-2D96-4D40-BFBB-DF1F14E1587F}"/>
+                <a16:creationId xmlns:a16="http://schemas.microsoft.com/office/drawing/2014/main" id="{DD62F1B2-E986-4DD5-8810-6835750510A1}"/>
               </a:ext>
             </a:extLst>
           </p:cNvPr>
@@ -21076,7 +21010,7 @@
           <p:cNvPr id="19" name="">
             <a:extLst xmlns:a="http://schemas.openxmlformats.org/drawingml/2006/main">
               <a:ext uri="{FF2B5EF4-FFF2-40B4-BE49-F238E27FC236}">
-                <a16:creationId xmlns:a16="http://schemas.microsoft.com/office/drawing/2014/main" id="{AF818A6B-6E29-4032-B74D-660D49D5011E}"/>
+                <a16:creationId xmlns:a16="http://schemas.microsoft.com/office/drawing/2014/main" id="{DB87955C-8570-4F11-8442-5A70EA9300DC}"/>
               </a:ext>
             </a:extLst>
           </p:cNvPr>
@@ -21132,7 +21066,7 @@
           <p:cNvPr id="20" name="">
             <a:extLst xmlns:a="http://schemas.openxmlformats.org/drawingml/2006/main">
               <a:ext uri="{FF2B5EF4-FFF2-40B4-BE49-F238E27FC236}">
-                <a16:creationId xmlns:a16="http://schemas.microsoft.com/office/drawing/2014/main" id="{BAA0CF2D-227F-4E92-A368-55BCFC71C33D}"/>
+                <a16:creationId xmlns:a16="http://schemas.microsoft.com/office/drawing/2014/main" id="{5CB86553-5A0A-4B97-BB8F-6C6D68E6E98E}"/>
               </a:ext>
             </a:extLst>
           </p:cNvPr>
@@ -21167,7 +21101,7 @@
           <p:cNvPr id="21" name="">
             <a:extLst xmlns:a="http://schemas.openxmlformats.org/drawingml/2006/main">
               <a:ext uri="{FF2B5EF4-FFF2-40B4-BE49-F238E27FC236}">
-                <a16:creationId xmlns:a16="http://schemas.microsoft.com/office/drawing/2014/main" id="{30554FFB-2901-4C2A-9AAB-33D5B64C6439}"/>
+                <a16:creationId xmlns:a16="http://schemas.microsoft.com/office/drawing/2014/main" id="{983776CB-75BD-42B8-9D06-57BA3CA78BE1}"/>
               </a:ext>
             </a:extLst>
           </p:cNvPr>
@@ -21223,7 +21157,7 @@
           <p:cNvPr id="22" name="">
             <a:extLst xmlns:a="http://schemas.openxmlformats.org/drawingml/2006/main">
               <a:ext uri="{FF2B5EF4-FFF2-40B4-BE49-F238E27FC236}">
-                <a16:creationId xmlns:a16="http://schemas.microsoft.com/office/drawing/2014/main" id="{113FA5DB-6EDB-4C54-9982-74227A076D0B}"/>
+                <a16:creationId xmlns:a16="http://schemas.microsoft.com/office/drawing/2014/main" id="{90295A80-E2BC-4C19-838F-0AFC59DB5430}"/>
               </a:ext>
             </a:extLst>
           </p:cNvPr>
@@ -21277,7 +21211,7 @@
     </p:spTree>
     <p:extLst>
       <p:ext uri="{BB962C8B-B14F-4D97-AF65-F5344CB8AC3E}">
-        <p14:creationId xmlns:p14="http://schemas.microsoft.com/office/powerpoint/2010/main" val="360897124"/>
+        <p14:creationId xmlns:p14="http://schemas.microsoft.com/office/powerpoint/2010/main" val="800516149"/>
       </p:ext>
     </p:extLst>
   </p:cSld>
@@ -21308,7 +21242,7 @@
           <p:cNvPr id="1" name="">
             <a:extLst xmlns:a="http://schemas.openxmlformats.org/drawingml/2006/main">
               <a:ext uri="{FF2B5EF4-FFF2-40B4-BE49-F238E27FC236}">
-                <a16:creationId xmlns:a16="http://schemas.microsoft.com/office/drawing/2014/main" id="{B3B74F27-8762-4A20-B413-73566AB03AAD}"/>
+                <a16:creationId xmlns:a16="http://schemas.microsoft.com/office/drawing/2014/main" id="{7BC7EB1C-DF09-409B-BD8F-32BC3B3E4B9A}"/>
               </a:ext>
             </a:extLst>
           </p:cNvPr>
@@ -21341,7 +21275,7 @@
           <p:cNvPr id="2" name="">
             <a:extLst xmlns:a="http://schemas.openxmlformats.org/drawingml/2006/main">
               <a:ext uri="{FF2B5EF4-FFF2-40B4-BE49-F238E27FC236}">
-                <a16:creationId xmlns:a16="http://schemas.microsoft.com/office/drawing/2014/main" id="{10796CCA-108F-4AA1-8E1F-4B7ADBC77D83}"/>
+                <a16:creationId xmlns:a16="http://schemas.microsoft.com/office/drawing/2014/main" id="{363AE4F1-0EDA-4836-A745-2EE42B37E973}"/>
               </a:ext>
             </a:extLst>
           </p:cNvPr>
@@ -21397,7 +21331,7 @@
           <p:cNvPr id="3" name="">
             <a:extLst xmlns:a="http://schemas.openxmlformats.org/drawingml/2006/main">
               <a:ext uri="{FF2B5EF4-FFF2-40B4-BE49-F238E27FC236}">
-                <a16:creationId xmlns:a16="http://schemas.microsoft.com/office/drawing/2014/main" id="{6295103E-C34A-4AEC-A577-E0947B6AC360}"/>
+                <a16:creationId xmlns:a16="http://schemas.microsoft.com/office/drawing/2014/main" id="{523187E3-BBAD-4147-9673-78084EB17FE7}"/>
               </a:ext>
             </a:extLst>
           </p:cNvPr>
@@ -21453,7 +21387,7 @@
           <p:cNvPr id="4" name="">
             <a:extLst xmlns:a="http://schemas.openxmlformats.org/drawingml/2006/main">
               <a:ext uri="{FF2B5EF4-FFF2-40B4-BE49-F238E27FC236}">
-                <a16:creationId xmlns:a16="http://schemas.microsoft.com/office/drawing/2014/main" id="{C0A7D1B4-8A34-4E77-951F-F5E35B46D717}"/>
+                <a16:creationId xmlns:a16="http://schemas.microsoft.com/office/drawing/2014/main" id="{A77890EE-13A5-48FF-B675-2995E535AE07}"/>
               </a:ext>
             </a:extLst>
           </p:cNvPr>
@@ -21488,7 +21422,7 @@
           <p:cNvPr id="5" name="">
             <a:extLst xmlns:a="http://schemas.openxmlformats.org/drawingml/2006/main">
               <a:ext uri="{FF2B5EF4-FFF2-40B4-BE49-F238E27FC236}">
-                <a16:creationId xmlns:a16="http://schemas.microsoft.com/office/drawing/2014/main" id="{426097C9-D09F-4C34-8840-F21835F8673A}"/>
+                <a16:creationId xmlns:a16="http://schemas.microsoft.com/office/drawing/2014/main" id="{2828D284-050D-45A8-8DD8-2AF0352250D5}"/>
               </a:ext>
             </a:extLst>
           </p:cNvPr>
@@ -21544,7 +21478,7 @@
           <p:cNvPr id="6" name="">
             <a:extLst xmlns:a="http://schemas.openxmlformats.org/drawingml/2006/main">
               <a:ext uri="{FF2B5EF4-FFF2-40B4-BE49-F238E27FC236}">
-                <a16:creationId xmlns:a16="http://schemas.microsoft.com/office/drawing/2014/main" id="{B25F81CD-AB88-413E-A815-5A03B6FD2C8F}"/>
+                <a16:creationId xmlns:a16="http://schemas.microsoft.com/office/drawing/2014/main" id="{134CC707-2F2B-4675-83B3-AD77A6386DCB}"/>
               </a:ext>
             </a:extLst>
           </p:cNvPr>
@@ -21598,7 +21532,7 @@
     </p:spTree>
     <p:extLst>
       <p:ext uri="{BB962C8B-B14F-4D97-AF65-F5344CB8AC3E}">
-        <p14:creationId xmlns:p14="http://schemas.microsoft.com/office/powerpoint/2010/main" val="513711930"/>
+        <p14:creationId xmlns:p14="http://schemas.microsoft.com/office/powerpoint/2010/main" val="1554881364"/>
       </p:ext>
     </p:extLst>
   </p:cSld>
@@ -21629,7 +21563,7 @@
           <p:cNvPr id="1" name="">
             <a:extLst xmlns:a="http://schemas.openxmlformats.org/drawingml/2006/main">
               <a:ext uri="{FF2B5EF4-FFF2-40B4-BE49-F238E27FC236}">
-                <a16:creationId xmlns:a16="http://schemas.microsoft.com/office/drawing/2014/main" id="{7A4532B3-B457-42B0-BE68-A1F3AD4C4622}"/>
+                <a16:creationId xmlns:a16="http://schemas.microsoft.com/office/drawing/2014/main" id="{13631656-0FC2-4ED3-AF1C-35BDBC0F0EE9}"/>
               </a:ext>
             </a:extLst>
           </p:cNvPr>
@@ -21662,7 +21596,7 @@
           <p:cNvPr id="2" name="">
             <a:extLst xmlns:a="http://schemas.openxmlformats.org/drawingml/2006/main">
               <a:ext uri="{FF2B5EF4-FFF2-40B4-BE49-F238E27FC236}">
-                <a16:creationId xmlns:a16="http://schemas.microsoft.com/office/drawing/2014/main" id="{27DD7EAC-391F-4D8F-BD4F-BA0672B477C7}"/>
+                <a16:creationId xmlns:a16="http://schemas.microsoft.com/office/drawing/2014/main" id="{BDC4FB28-0155-4086-A69A-AEA1467F893C}"/>
               </a:ext>
             </a:extLst>
           </p:cNvPr>
@@ -21718,7 +21652,7 @@
           <p:cNvPr id="3" name="">
             <a:extLst xmlns:a="http://schemas.openxmlformats.org/drawingml/2006/main">
               <a:ext uri="{FF2B5EF4-FFF2-40B4-BE49-F238E27FC236}">
-                <a16:creationId xmlns:a16="http://schemas.microsoft.com/office/drawing/2014/main" id="{BC612AFC-38A8-4192-BAC9-0A4C8FDCE823}"/>
+                <a16:creationId xmlns:a16="http://schemas.microsoft.com/office/drawing/2014/main" id="{6EED633D-17E1-4D08-8788-E65376429D88}"/>
               </a:ext>
             </a:extLst>
           </p:cNvPr>
@@ -21778,19 +21712,13 @@
           <p:nvPr/>
         </p:nvPicPr>
         <p:blipFill>
-          <a:blip xmlns:r="http://schemas.openxmlformats.org/officeDocument/2006/relationships" xmlns:a="http://schemas.openxmlformats.org/drawingml/2006/main" r:embed="R817364608cc6418d">
-            <a:extLst>
-              <a:ext uri="{96DAC541-7B7A-43D3-8B79-37D633B846F1}">
-                <asvg:svgBlip xmlns:asvg="http://schemas.microsoft.com/office/drawing/2016/SVG/main" r:embed="R54b562274e164e49"/>
-              </a:ext>
-            </a:extLst>
-          </a:blip>
+          <a:blip xmlns:r="http://schemas.openxmlformats.org/officeDocument/2006/relationships" xmlns:a="http://schemas.openxmlformats.org/drawingml/2006/main" r:embed="R249e4d8443e0492d"/>
           <a:stretch xmlns:a="http://schemas.openxmlformats.org/drawingml/2006/main"/>
         </p:blipFill>
         <p:spPr>
           <a:xfrm xmlns:a="http://schemas.openxmlformats.org/drawingml/2006/main">
-            <a:off x="6858000" y="1352550"/>
-            <a:ext cx="4286250" cy="2000250"/>
+            <a:off x="6858000" y="1393909"/>
+            <a:ext cx="4286250" cy="1917533"/>
           </a:xfrm>
           <a:prstGeom xmlns:a="http://schemas.openxmlformats.org/drawingml/2006/main" prst="rect">
             <a:avLst/>
@@ -21802,7 +21730,7 @@
           <p:cNvPr id="5" name="">
             <a:extLst xmlns:a="http://schemas.openxmlformats.org/drawingml/2006/main">
               <a:ext uri="{FF2B5EF4-FFF2-40B4-BE49-F238E27FC236}">
-                <a16:creationId xmlns:a16="http://schemas.microsoft.com/office/drawing/2014/main" id="{552EECEB-15F7-4185-B468-5EF1605F16DC}"/>
+                <a16:creationId xmlns:a16="http://schemas.microsoft.com/office/drawing/2014/main" id="{C98D34DA-B1D1-4F91-B548-25D25E7C508D}"/>
               </a:ext>
             </a:extLst>
           </p:cNvPr>
@@ -21927,7 +21855,7 @@
           <p:cNvPr id="6" name="">
             <a:extLst xmlns:a="http://schemas.openxmlformats.org/drawingml/2006/main">
               <a:ext uri="{FF2B5EF4-FFF2-40B4-BE49-F238E27FC236}">
-                <a16:creationId xmlns:a16="http://schemas.microsoft.com/office/drawing/2014/main" id="{E8072FC9-980F-4A73-A479-37FEAAD18A4B}"/>
+                <a16:creationId xmlns:a16="http://schemas.microsoft.com/office/drawing/2014/main" id="{EF173915-4D3C-4056-957E-B159BF15D7CC}"/>
               </a:ext>
             </a:extLst>
           </p:cNvPr>
@@ -21962,7 +21890,7 @@
           <p:cNvPr id="7" name="">
             <a:extLst xmlns:a="http://schemas.openxmlformats.org/drawingml/2006/main">
               <a:ext uri="{FF2B5EF4-FFF2-40B4-BE49-F238E27FC236}">
-                <a16:creationId xmlns:a16="http://schemas.microsoft.com/office/drawing/2014/main" id="{61A5B8F8-03CE-42EC-B92C-2FBDED77151E}"/>
+                <a16:creationId xmlns:a16="http://schemas.microsoft.com/office/drawing/2014/main" id="{F3B05A42-AE5E-4EAE-8C8C-F579E8CF3E27}"/>
               </a:ext>
             </a:extLst>
           </p:cNvPr>
@@ -22018,7 +21946,7 @@
           <p:cNvPr id="8" name="">
             <a:extLst xmlns:a="http://schemas.openxmlformats.org/drawingml/2006/main">
               <a:ext uri="{FF2B5EF4-FFF2-40B4-BE49-F238E27FC236}">
-                <a16:creationId xmlns:a16="http://schemas.microsoft.com/office/drawing/2014/main" id="{424012EE-B6AD-44FA-9DD8-47449326A637}"/>
+                <a16:creationId xmlns:a16="http://schemas.microsoft.com/office/drawing/2014/main" id="{B3756676-687E-418E-A84D-D8033519DA56}"/>
               </a:ext>
             </a:extLst>
           </p:cNvPr>
@@ -22072,7 +22000,7 @@
     </p:spTree>
     <p:extLst>
       <p:ext uri="{BB962C8B-B14F-4D97-AF65-F5344CB8AC3E}">
-        <p14:creationId xmlns:p14="http://schemas.microsoft.com/office/powerpoint/2010/main" val="768990541"/>
+        <p14:creationId xmlns:p14="http://schemas.microsoft.com/office/powerpoint/2010/main" val="1667732000"/>
       </p:ext>
     </p:extLst>
   </p:cSld>
@@ -22103,7 +22031,7 @@
           <p:cNvPr id="1" name="">
             <a:extLst xmlns:a="http://schemas.openxmlformats.org/drawingml/2006/main">
               <a:ext uri="{FF2B5EF4-FFF2-40B4-BE49-F238E27FC236}">
-                <a16:creationId xmlns:a16="http://schemas.microsoft.com/office/drawing/2014/main" id="{BD3B8111-57E1-48EC-A163-3EE0E00E1972}"/>
+                <a16:creationId xmlns:a16="http://schemas.microsoft.com/office/drawing/2014/main" id="{BF444198-F3BC-4246-99DC-97E3B13546C4}"/>
               </a:ext>
             </a:extLst>
           </p:cNvPr>
@@ -22136,7 +22064,7 @@
           <p:cNvPr id="2" name="">
             <a:extLst xmlns:a="http://schemas.openxmlformats.org/drawingml/2006/main">
               <a:ext uri="{FF2B5EF4-FFF2-40B4-BE49-F238E27FC236}">
-                <a16:creationId xmlns:a16="http://schemas.microsoft.com/office/drawing/2014/main" id="{1269EEA8-16C0-40E7-B32D-8EA6BFB504EE}"/>
+                <a16:creationId xmlns:a16="http://schemas.microsoft.com/office/drawing/2014/main" id="{EB400D79-D6AC-4330-A2F6-34E92255DFD2}"/>
               </a:ext>
             </a:extLst>
           </p:cNvPr>
@@ -22192,7 +22120,7 @@
           <p:cNvPr id="3" name="">
             <a:extLst xmlns:a="http://schemas.openxmlformats.org/drawingml/2006/main">
               <a:ext uri="{FF2B5EF4-FFF2-40B4-BE49-F238E27FC236}">
-                <a16:creationId xmlns:a16="http://schemas.microsoft.com/office/drawing/2014/main" id="{79C424F6-A6BC-48D3-BDE2-C7C62A792C95}"/>
+                <a16:creationId xmlns:a16="http://schemas.microsoft.com/office/drawing/2014/main" id="{31B9858F-329C-47E8-8F4A-8359EE355548}"/>
               </a:ext>
             </a:extLst>
           </p:cNvPr>
@@ -22248,7 +22176,7 @@
           <p:cNvPr id="4" name="">
             <a:extLst xmlns:a="http://schemas.openxmlformats.org/drawingml/2006/main">
               <a:ext uri="{FF2B5EF4-FFF2-40B4-BE49-F238E27FC236}">
-                <a16:creationId xmlns:a16="http://schemas.microsoft.com/office/drawing/2014/main" id="{37184D88-477B-4D76-AFEF-EEF2768B488A}"/>
+                <a16:creationId xmlns:a16="http://schemas.microsoft.com/office/drawing/2014/main" id="{3AB73812-E7AA-4026-AC45-FDD53BFA140F}"/>
               </a:ext>
             </a:extLst>
           </p:cNvPr>
@@ -22283,7 +22211,7 @@
           <p:cNvPr id="5" name="">
             <a:extLst xmlns:a="http://schemas.openxmlformats.org/drawingml/2006/main">
               <a:ext uri="{FF2B5EF4-FFF2-40B4-BE49-F238E27FC236}">
-                <a16:creationId xmlns:a16="http://schemas.microsoft.com/office/drawing/2014/main" id="{0D1DA449-EF04-467E-A233-A6A5EB38F2E7}"/>
+                <a16:creationId xmlns:a16="http://schemas.microsoft.com/office/drawing/2014/main" id="{1B8BB85D-CEC1-4178-9DBB-69C63550CA95}"/>
               </a:ext>
             </a:extLst>
           </p:cNvPr>
@@ -22339,7 +22267,7 @@
           <p:cNvPr id="6" name="">
             <a:extLst xmlns:a="http://schemas.openxmlformats.org/drawingml/2006/main">
               <a:ext uri="{FF2B5EF4-FFF2-40B4-BE49-F238E27FC236}">
-                <a16:creationId xmlns:a16="http://schemas.microsoft.com/office/drawing/2014/main" id="{E7D6E7E7-92C5-4CAA-9788-86E20182AAC8}"/>
+                <a16:creationId xmlns:a16="http://schemas.microsoft.com/office/drawing/2014/main" id="{96FC33E6-4ABB-4549-BE02-6D825EEDD660}"/>
               </a:ext>
             </a:extLst>
           </p:cNvPr>
@@ -22374,7 +22302,7 @@
           <p:cNvPr id="7" name="">
             <a:extLst xmlns:a="http://schemas.openxmlformats.org/drawingml/2006/main">
               <a:ext uri="{FF2B5EF4-FFF2-40B4-BE49-F238E27FC236}">
-                <a16:creationId xmlns:a16="http://schemas.microsoft.com/office/drawing/2014/main" id="{4D99A49B-A4A5-4EE3-97FE-BD7F5B6DDD00}"/>
+                <a16:creationId xmlns:a16="http://schemas.microsoft.com/office/drawing/2014/main" id="{6ECCC5EE-76CF-401E-A98A-F5E1A47971A8}"/>
               </a:ext>
             </a:extLst>
           </p:cNvPr>
@@ -22430,7 +22358,7 @@
           <p:cNvPr id="8" name="">
             <a:extLst xmlns:a="http://schemas.openxmlformats.org/drawingml/2006/main">
               <a:ext uri="{FF2B5EF4-FFF2-40B4-BE49-F238E27FC236}">
-                <a16:creationId xmlns:a16="http://schemas.microsoft.com/office/drawing/2014/main" id="{68D4ECF4-1632-4B75-B2A0-E2735E7D8D9E}"/>
+                <a16:creationId xmlns:a16="http://schemas.microsoft.com/office/drawing/2014/main" id="{63BAC923-9951-4A08-AFCB-F7A9B649525C}"/>
               </a:ext>
             </a:extLst>
           </p:cNvPr>
@@ -22465,7 +22393,7 @@
           <p:cNvPr id="9" name="">
             <a:extLst xmlns:a="http://schemas.openxmlformats.org/drawingml/2006/main">
               <a:ext uri="{FF2B5EF4-FFF2-40B4-BE49-F238E27FC236}">
-                <a16:creationId xmlns:a16="http://schemas.microsoft.com/office/drawing/2014/main" id="{5EE24866-E3FD-4B08-BB1A-221BD79AE46F}"/>
+                <a16:creationId xmlns:a16="http://schemas.microsoft.com/office/drawing/2014/main" id="{D05356C1-5259-4104-9535-6FB79B8F55E3}"/>
               </a:ext>
             </a:extLst>
           </p:cNvPr>
@@ -22521,7 +22449,7 @@
           <p:cNvPr id="10" name="">
             <a:extLst xmlns:a="http://schemas.openxmlformats.org/drawingml/2006/main">
               <a:ext uri="{FF2B5EF4-FFF2-40B4-BE49-F238E27FC236}">
-                <a16:creationId xmlns:a16="http://schemas.microsoft.com/office/drawing/2014/main" id="{FB439698-7D54-44C7-B71D-CC5839FA3515}"/>
+                <a16:creationId xmlns:a16="http://schemas.microsoft.com/office/drawing/2014/main" id="{A22CC14F-152A-4E3F-B449-A617F670B37B}"/>
               </a:ext>
             </a:extLst>
           </p:cNvPr>
@@ -22556,7 +22484,7 @@
           <p:cNvPr id="11" name="">
             <a:extLst xmlns:a="http://schemas.openxmlformats.org/drawingml/2006/main">
               <a:ext uri="{FF2B5EF4-FFF2-40B4-BE49-F238E27FC236}">
-                <a16:creationId xmlns:a16="http://schemas.microsoft.com/office/drawing/2014/main" id="{3E77A2C2-610F-4538-A02A-5E39877F64B9}"/>
+                <a16:creationId xmlns:a16="http://schemas.microsoft.com/office/drawing/2014/main" id="{84DE3992-8203-4300-8DFE-59F242347223}"/>
               </a:ext>
             </a:extLst>
           </p:cNvPr>
@@ -22612,7 +22540,7 @@
           <p:cNvPr id="12" name="">
             <a:extLst xmlns:a="http://schemas.openxmlformats.org/drawingml/2006/main">
               <a:ext uri="{FF2B5EF4-FFF2-40B4-BE49-F238E27FC236}">
-                <a16:creationId xmlns:a16="http://schemas.microsoft.com/office/drawing/2014/main" id="{0A562EFC-7C51-47FA-B1C3-59822C10D9A0}"/>
+                <a16:creationId xmlns:a16="http://schemas.microsoft.com/office/drawing/2014/main" id="{3EF00B81-A9C1-46C0-9313-28A2A2348C3C}"/>
               </a:ext>
             </a:extLst>
           </p:cNvPr>
@@ -22666,7 +22594,7 @@
     </p:spTree>
     <p:extLst>
       <p:ext uri="{BB962C8B-B14F-4D97-AF65-F5344CB8AC3E}">
-        <p14:creationId xmlns:p14="http://schemas.microsoft.com/office/powerpoint/2010/main" val="706911026"/>
+        <p14:creationId xmlns:p14="http://schemas.microsoft.com/office/powerpoint/2010/main" val="542111550"/>
       </p:ext>
     </p:extLst>
   </p:cSld>
@@ -22697,7 +22625,7 @@
           <p:cNvPr id="1" name="">
             <a:extLst xmlns:a="http://schemas.openxmlformats.org/drawingml/2006/main">
               <a:ext uri="{FF2B5EF4-FFF2-40B4-BE49-F238E27FC236}">
-                <a16:creationId xmlns:a16="http://schemas.microsoft.com/office/drawing/2014/main" id="{B49E1B51-2F64-4D83-B3FD-DD81CA738632}"/>
+                <a16:creationId xmlns:a16="http://schemas.microsoft.com/office/drawing/2014/main" id="{AFA25012-2738-4FDE-9912-519A323F8D85}"/>
               </a:ext>
             </a:extLst>
           </p:cNvPr>
@@ -22730,7 +22658,7 @@
           <p:cNvPr id="2" name="">
             <a:extLst xmlns:a="http://schemas.openxmlformats.org/drawingml/2006/main">
               <a:ext uri="{FF2B5EF4-FFF2-40B4-BE49-F238E27FC236}">
-                <a16:creationId xmlns:a16="http://schemas.microsoft.com/office/drawing/2014/main" id="{E9E0A6AE-DCB0-43E8-BF7A-C6B7C41A9413}"/>
+                <a16:creationId xmlns:a16="http://schemas.microsoft.com/office/drawing/2014/main" id="{FFBF1399-6AE2-4685-AEE7-D53453D48C4A}"/>
               </a:ext>
             </a:extLst>
           </p:cNvPr>
@@ -22786,7 +22714,7 @@
           <p:cNvPr id="3" name="">
             <a:extLst xmlns:a="http://schemas.openxmlformats.org/drawingml/2006/main">
               <a:ext uri="{FF2B5EF4-FFF2-40B4-BE49-F238E27FC236}">
-                <a16:creationId xmlns:a16="http://schemas.microsoft.com/office/drawing/2014/main" id="{40988294-CC82-41D7-AA5B-2F689F9E3575}"/>
+                <a16:creationId xmlns:a16="http://schemas.microsoft.com/office/drawing/2014/main" id="{292E0E4C-9DFE-4F96-BE1C-B3862FD12C2E}"/>
               </a:ext>
             </a:extLst>
           </p:cNvPr>
@@ -22842,7 +22770,7 @@
           <p:cNvPr id="4" name="">
             <a:extLst xmlns:a="http://schemas.openxmlformats.org/drawingml/2006/main">
               <a:ext uri="{FF2B5EF4-FFF2-40B4-BE49-F238E27FC236}">
-                <a16:creationId xmlns:a16="http://schemas.microsoft.com/office/drawing/2014/main" id="{9735C5DF-0A57-4FE3-BE19-F3DA04CF415C}"/>
+                <a16:creationId xmlns:a16="http://schemas.microsoft.com/office/drawing/2014/main" id="{352CCE90-57FF-49BC-A415-AE1498AB04E1}"/>
               </a:ext>
             </a:extLst>
           </p:cNvPr>
@@ -22990,7 +22918,7 @@
           <p:cNvPr id="5" name="">
             <a:extLst xmlns:a="http://schemas.openxmlformats.org/drawingml/2006/main">
               <a:ext uri="{FF2B5EF4-FFF2-40B4-BE49-F238E27FC236}">
-                <a16:creationId xmlns:a16="http://schemas.microsoft.com/office/drawing/2014/main" id="{82899542-42CD-46F4-9068-A7B9372A9816}"/>
+                <a16:creationId xmlns:a16="http://schemas.microsoft.com/office/drawing/2014/main" id="{1387C197-8B30-4CD7-80AB-002D82FDE505}"/>
               </a:ext>
             </a:extLst>
           </p:cNvPr>
@@ -23025,7 +22953,7 @@
           <p:cNvPr id="6" name="">
             <a:extLst xmlns:a="http://schemas.openxmlformats.org/drawingml/2006/main">
               <a:ext uri="{FF2B5EF4-FFF2-40B4-BE49-F238E27FC236}">
-                <a16:creationId xmlns:a16="http://schemas.microsoft.com/office/drawing/2014/main" id="{F8EB837F-D971-4153-94A9-DFAD8137D1D1}"/>
+                <a16:creationId xmlns:a16="http://schemas.microsoft.com/office/drawing/2014/main" id="{8FB25701-068B-4F53-96F9-5DD51C4BEEF6}"/>
               </a:ext>
             </a:extLst>
           </p:cNvPr>
@@ -23081,7 +23009,7 @@
           <p:cNvPr id="7" name="">
             <a:extLst xmlns:a="http://schemas.openxmlformats.org/drawingml/2006/main">
               <a:ext uri="{FF2B5EF4-FFF2-40B4-BE49-F238E27FC236}">
-                <a16:creationId xmlns:a16="http://schemas.microsoft.com/office/drawing/2014/main" id="{AADE801B-0E24-4D54-9813-C60ABA9AA89B}"/>
+                <a16:creationId xmlns:a16="http://schemas.microsoft.com/office/drawing/2014/main" id="{B8151E81-7E28-4F74-9056-1D2CF5D44A5B}"/>
               </a:ext>
             </a:extLst>
           </p:cNvPr>
@@ -23135,7 +23063,7 @@
     </p:spTree>
     <p:extLst>
       <p:ext uri="{BB962C8B-B14F-4D97-AF65-F5344CB8AC3E}">
-        <p14:creationId xmlns:p14="http://schemas.microsoft.com/office/powerpoint/2010/main" val="103032835"/>
+        <p14:creationId xmlns:p14="http://schemas.microsoft.com/office/powerpoint/2010/main" val="1068696568"/>
       </p:ext>
     </p:extLst>
   </p:cSld>
@@ -23166,7 +23094,7 @@
           <p:cNvPr id="1" name="">
             <a:extLst xmlns:a="http://schemas.openxmlformats.org/drawingml/2006/main">
               <a:ext uri="{FF2B5EF4-FFF2-40B4-BE49-F238E27FC236}">
-                <a16:creationId xmlns:a16="http://schemas.microsoft.com/office/drawing/2014/main" id="{23B80F68-7DAB-471B-BE88-EDAB5D32B06B}"/>
+                <a16:creationId xmlns:a16="http://schemas.microsoft.com/office/drawing/2014/main" id="{2BCD9623-CCBE-4AFB-8927-56CFD6B6A17E}"/>
               </a:ext>
             </a:extLst>
           </p:cNvPr>
@@ -23199,7 +23127,7 @@
           <p:cNvPr id="2" name="">
             <a:extLst xmlns:a="http://schemas.openxmlformats.org/drawingml/2006/main">
               <a:ext uri="{FF2B5EF4-FFF2-40B4-BE49-F238E27FC236}">
-                <a16:creationId xmlns:a16="http://schemas.microsoft.com/office/drawing/2014/main" id="{63DBE132-BC39-4960-8ABD-B23B4DC3D742}"/>
+                <a16:creationId xmlns:a16="http://schemas.microsoft.com/office/drawing/2014/main" id="{FC8B0FD9-A500-44E3-9289-50F391FE8405}"/>
               </a:ext>
             </a:extLst>
           </p:cNvPr>
@@ -23255,7 +23183,7 @@
           <p:cNvPr id="3" name="">
             <a:extLst xmlns:a="http://schemas.openxmlformats.org/drawingml/2006/main">
               <a:ext uri="{FF2B5EF4-FFF2-40B4-BE49-F238E27FC236}">
-                <a16:creationId xmlns:a16="http://schemas.microsoft.com/office/drawing/2014/main" id="{2DC5D6A7-8843-4057-867F-822C2EF22D7D}"/>
+                <a16:creationId xmlns:a16="http://schemas.microsoft.com/office/drawing/2014/main" id="{A4D38732-160C-4E43-B1D5-B9A83BAE83A5}"/>
               </a:ext>
             </a:extLst>
           </p:cNvPr>
@@ -23311,7 +23239,7 @@
           <p:cNvPr id="4" name="">
             <a:extLst xmlns:a="http://schemas.openxmlformats.org/drawingml/2006/main">
               <a:ext uri="{FF2B5EF4-FFF2-40B4-BE49-F238E27FC236}">
-                <a16:creationId xmlns:a16="http://schemas.microsoft.com/office/drawing/2014/main" id="{8DF25AD0-3769-4265-9A16-4CC6C729C258}"/>
+                <a16:creationId xmlns:a16="http://schemas.microsoft.com/office/drawing/2014/main" id="{D70C9408-CE17-4DB8-90C6-A8D55851F04A}"/>
               </a:ext>
             </a:extLst>
           </p:cNvPr>
@@ -23346,7 +23274,7 @@
           <p:cNvPr id="5" name="">
             <a:extLst xmlns:a="http://schemas.openxmlformats.org/drawingml/2006/main">
               <a:ext uri="{FF2B5EF4-FFF2-40B4-BE49-F238E27FC236}">
-                <a16:creationId xmlns:a16="http://schemas.microsoft.com/office/drawing/2014/main" id="{4C1CF6E9-A60F-46A7-988D-D72D864E0901}"/>
+                <a16:creationId xmlns:a16="http://schemas.microsoft.com/office/drawing/2014/main" id="{5B3A6981-9D6F-4C8C-BB45-C7D76E5D1E95}"/>
               </a:ext>
             </a:extLst>
           </p:cNvPr>
@@ -23402,7 +23330,7 @@
           <p:cNvPr id="6" name="">
             <a:extLst xmlns:a="http://schemas.openxmlformats.org/drawingml/2006/main">
               <a:ext uri="{FF2B5EF4-FFF2-40B4-BE49-F238E27FC236}">
-                <a16:creationId xmlns:a16="http://schemas.microsoft.com/office/drawing/2014/main" id="{B50CF1CB-83A7-4716-A1EA-D2AFD5E527C4}"/>
+                <a16:creationId xmlns:a16="http://schemas.microsoft.com/office/drawing/2014/main" id="{6666AF90-F74F-4B50-A191-6AC7734B7E1D}"/>
               </a:ext>
             </a:extLst>
           </p:cNvPr>
@@ -23527,7 +23455,7 @@
           <p:cNvPr id="7" name="">
             <a:extLst xmlns:a="http://schemas.openxmlformats.org/drawingml/2006/main">
               <a:ext uri="{FF2B5EF4-FFF2-40B4-BE49-F238E27FC236}">
-                <a16:creationId xmlns:a16="http://schemas.microsoft.com/office/drawing/2014/main" id="{F04A897C-63F9-455F-87D9-B3CD9349147C}"/>
+                <a16:creationId xmlns:a16="http://schemas.microsoft.com/office/drawing/2014/main" id="{F30AC818-5B8B-4787-B039-423111EC6709}"/>
               </a:ext>
             </a:extLst>
           </p:cNvPr>
@@ -23562,7 +23490,7 @@
           <p:cNvPr id="8" name="">
             <a:extLst xmlns:a="http://schemas.openxmlformats.org/drawingml/2006/main">
               <a:ext uri="{FF2B5EF4-FFF2-40B4-BE49-F238E27FC236}">
-                <a16:creationId xmlns:a16="http://schemas.microsoft.com/office/drawing/2014/main" id="{EA3C1580-667A-4B6D-87F4-208267405521}"/>
+                <a16:creationId xmlns:a16="http://schemas.microsoft.com/office/drawing/2014/main" id="{1EE8CC63-5637-4622-8AB2-5748E1DC83F2}"/>
               </a:ext>
             </a:extLst>
           </p:cNvPr>
@@ -23618,7 +23546,7 @@
           <p:cNvPr id="9" name="">
             <a:extLst xmlns:a="http://schemas.openxmlformats.org/drawingml/2006/main">
               <a:ext uri="{FF2B5EF4-FFF2-40B4-BE49-F238E27FC236}">
-                <a16:creationId xmlns:a16="http://schemas.microsoft.com/office/drawing/2014/main" id="{004E41BA-3994-4EE6-B0F9-04D8E8E16ACB}"/>
+                <a16:creationId xmlns:a16="http://schemas.microsoft.com/office/drawing/2014/main" id="{01322068-57B5-4F6D-B7D3-37619B7C78A3}"/>
               </a:ext>
             </a:extLst>
           </p:cNvPr>
@@ -23672,7 +23600,7 @@
     </p:spTree>
     <p:extLst>
       <p:ext uri="{BB962C8B-B14F-4D97-AF65-F5344CB8AC3E}">
-        <p14:creationId xmlns:p14="http://schemas.microsoft.com/office/powerpoint/2010/main" val="1937949118"/>
+        <p14:creationId xmlns:p14="http://schemas.microsoft.com/office/powerpoint/2010/main" val="681136238"/>
       </p:ext>
     </p:extLst>
   </p:cSld>
@@ -23703,7 +23631,7 @@
           <p:cNvPr id="1" name="">
             <a:extLst xmlns:a="http://schemas.openxmlformats.org/drawingml/2006/main">
               <a:ext uri="{FF2B5EF4-FFF2-40B4-BE49-F238E27FC236}">
-                <a16:creationId xmlns:a16="http://schemas.microsoft.com/office/drawing/2014/main" id="{46EF8B50-F034-4FF7-88CC-1E3B410060BC}"/>
+                <a16:creationId xmlns:a16="http://schemas.microsoft.com/office/drawing/2014/main" id="{3C8AA81B-B61B-44B4-8965-FBA949635D61}"/>
               </a:ext>
             </a:extLst>
           </p:cNvPr>
@@ -23736,7 +23664,7 @@
           <p:cNvPr id="2" name="">
             <a:extLst xmlns:a="http://schemas.openxmlformats.org/drawingml/2006/main">
               <a:ext uri="{FF2B5EF4-FFF2-40B4-BE49-F238E27FC236}">
-                <a16:creationId xmlns:a16="http://schemas.microsoft.com/office/drawing/2014/main" id="{F3F9CBA7-8648-4B1F-95C9-C4AEF26B7755}"/>
+                <a16:creationId xmlns:a16="http://schemas.microsoft.com/office/drawing/2014/main" id="{EBA60961-1014-4132-B1FF-68C8BD412B37}"/>
               </a:ext>
             </a:extLst>
           </p:cNvPr>
@@ -23792,7 +23720,7 @@
           <p:cNvPr id="3" name="">
             <a:extLst xmlns:a="http://schemas.openxmlformats.org/drawingml/2006/main">
               <a:ext uri="{FF2B5EF4-FFF2-40B4-BE49-F238E27FC236}">
-                <a16:creationId xmlns:a16="http://schemas.microsoft.com/office/drawing/2014/main" id="{B3E8E267-94F7-49C2-A133-167C51453375}"/>
+                <a16:creationId xmlns:a16="http://schemas.microsoft.com/office/drawing/2014/main" id="{AE45C839-7DD0-4D25-AE9A-5655A11B9C77}"/>
               </a:ext>
             </a:extLst>
           </p:cNvPr>
@@ -23848,7 +23776,7 @@
           <p:cNvPr id="4" name="">
             <a:extLst xmlns:a="http://schemas.openxmlformats.org/drawingml/2006/main">
               <a:ext uri="{FF2B5EF4-FFF2-40B4-BE49-F238E27FC236}">
-                <a16:creationId xmlns:a16="http://schemas.microsoft.com/office/drawing/2014/main" id="{959B5568-6CA0-4658-8450-0F012782F66E}"/>
+                <a16:creationId xmlns:a16="http://schemas.microsoft.com/office/drawing/2014/main" id="{6E8B61BB-E44B-438F-B5ED-C6EF95964463}"/>
               </a:ext>
             </a:extLst>
           </p:cNvPr>
@@ -23883,7 +23811,7 @@
           <p:cNvPr id="5" name="">
             <a:extLst xmlns:a="http://schemas.openxmlformats.org/drawingml/2006/main">
               <a:ext uri="{FF2B5EF4-FFF2-40B4-BE49-F238E27FC236}">
-                <a16:creationId xmlns:a16="http://schemas.microsoft.com/office/drawing/2014/main" id="{A68FB9A2-3EFA-4CDF-9CBD-EBBE8B29CD35}"/>
+                <a16:creationId xmlns:a16="http://schemas.microsoft.com/office/drawing/2014/main" id="{36572831-836B-41BD-8B13-C950DFE5E32C}"/>
               </a:ext>
             </a:extLst>
           </p:cNvPr>
@@ -23939,7 +23867,7 @@
           <p:cNvPr id="6" name="">
             <a:extLst xmlns:a="http://schemas.openxmlformats.org/drawingml/2006/main">
               <a:ext uri="{FF2B5EF4-FFF2-40B4-BE49-F238E27FC236}">
-                <a16:creationId xmlns:a16="http://schemas.microsoft.com/office/drawing/2014/main" id="{C4740892-9665-4C8C-BCC0-72CFDC387F38}"/>
+                <a16:creationId xmlns:a16="http://schemas.microsoft.com/office/drawing/2014/main" id="{E56BFF1A-1D70-4115-A314-F5D0948EB066}"/>
               </a:ext>
             </a:extLst>
           </p:cNvPr>
@@ -23974,7 +23902,7 @@
           <p:cNvPr id="7" name="">
             <a:extLst xmlns:a="http://schemas.openxmlformats.org/drawingml/2006/main">
               <a:ext uri="{FF2B5EF4-FFF2-40B4-BE49-F238E27FC236}">
-                <a16:creationId xmlns:a16="http://schemas.microsoft.com/office/drawing/2014/main" id="{4C480372-58FD-4E1F-8EF5-3F88161B997E}"/>
+                <a16:creationId xmlns:a16="http://schemas.microsoft.com/office/drawing/2014/main" id="{892DCB1B-F10F-4EE5-8518-ADD58AB03CFB}"/>
               </a:ext>
             </a:extLst>
           </p:cNvPr>
@@ -24030,7 +23958,7 @@
           <p:cNvPr id="8" name="">
             <a:extLst xmlns:a="http://schemas.openxmlformats.org/drawingml/2006/main">
               <a:ext uri="{FF2B5EF4-FFF2-40B4-BE49-F238E27FC236}">
-                <a16:creationId xmlns:a16="http://schemas.microsoft.com/office/drawing/2014/main" id="{9360BCE4-4480-4781-85F7-5AFA68873B09}"/>
+                <a16:creationId xmlns:a16="http://schemas.microsoft.com/office/drawing/2014/main" id="{6B20C459-2E79-4F54-9430-AB6738A50AA7}"/>
               </a:ext>
             </a:extLst>
           </p:cNvPr>
@@ -24065,7 +23993,7 @@
           <p:cNvPr id="9" name="">
             <a:extLst xmlns:a="http://schemas.openxmlformats.org/drawingml/2006/main">
               <a:ext uri="{FF2B5EF4-FFF2-40B4-BE49-F238E27FC236}">
-                <a16:creationId xmlns:a16="http://schemas.microsoft.com/office/drawing/2014/main" id="{BA897CC8-9737-44AD-914D-0A57D4D30CBF}"/>
+                <a16:creationId xmlns:a16="http://schemas.microsoft.com/office/drawing/2014/main" id="{A6C141E8-A732-4ED9-9662-1F26F481ACE5}"/>
               </a:ext>
             </a:extLst>
           </p:cNvPr>
@@ -24121,7 +24049,7 @@
           <p:cNvPr id="10" name="">
             <a:extLst xmlns:a="http://schemas.openxmlformats.org/drawingml/2006/main">
               <a:ext uri="{FF2B5EF4-FFF2-40B4-BE49-F238E27FC236}">
-                <a16:creationId xmlns:a16="http://schemas.microsoft.com/office/drawing/2014/main" id="{47A1121C-A66A-49E6-9903-4D2D3892E467}"/>
+                <a16:creationId xmlns:a16="http://schemas.microsoft.com/office/drawing/2014/main" id="{C24B9761-B03A-4F8F-883E-883E44639E40}"/>
               </a:ext>
             </a:extLst>
           </p:cNvPr>
@@ -24156,7 +24084,7 @@
           <p:cNvPr id="11" name="">
             <a:extLst xmlns:a="http://schemas.openxmlformats.org/drawingml/2006/main">
               <a:ext uri="{FF2B5EF4-FFF2-40B4-BE49-F238E27FC236}">
-                <a16:creationId xmlns:a16="http://schemas.microsoft.com/office/drawing/2014/main" id="{A390ECF5-5875-45BD-A1FF-F7C62464502E}"/>
+                <a16:creationId xmlns:a16="http://schemas.microsoft.com/office/drawing/2014/main" id="{6EB232D8-FBFC-4A06-954F-5DF86D3AF743}"/>
               </a:ext>
             </a:extLst>
           </p:cNvPr>
@@ -24212,7 +24140,7 @@
           <p:cNvPr id="12" name="">
             <a:extLst xmlns:a="http://schemas.openxmlformats.org/drawingml/2006/main">
               <a:ext uri="{FF2B5EF4-FFF2-40B4-BE49-F238E27FC236}">
-                <a16:creationId xmlns:a16="http://schemas.microsoft.com/office/drawing/2014/main" id="{4A24D97D-0A2A-4D02-BB5E-F1C449C88625}"/>
+                <a16:creationId xmlns:a16="http://schemas.microsoft.com/office/drawing/2014/main" id="{39581790-1C03-432D-ACF6-CEF6676B2E0D}"/>
               </a:ext>
             </a:extLst>
           </p:cNvPr>
@@ -24266,7 +24194,7 @@
     </p:spTree>
     <p:extLst>
       <p:ext uri="{BB962C8B-B14F-4D97-AF65-F5344CB8AC3E}">
-        <p14:creationId xmlns:p14="http://schemas.microsoft.com/office/powerpoint/2010/main" val="865320588"/>
+        <p14:creationId xmlns:p14="http://schemas.microsoft.com/office/powerpoint/2010/main" val="444939291"/>
       </p:ext>
     </p:extLst>
   </p:cSld>
@@ -24297,7 +24225,7 @@
           <p:cNvPr id="1" name="">
             <a:extLst xmlns:a="http://schemas.openxmlformats.org/drawingml/2006/main">
               <a:ext uri="{FF2B5EF4-FFF2-40B4-BE49-F238E27FC236}">
-                <a16:creationId xmlns:a16="http://schemas.microsoft.com/office/drawing/2014/main" id="{6D09ADE5-6435-46E7-B845-A4A27FA673B0}"/>
+                <a16:creationId xmlns:a16="http://schemas.microsoft.com/office/drawing/2014/main" id="{01A5F90A-C61F-46C0-8307-DA42867D35EA}"/>
               </a:ext>
             </a:extLst>
           </p:cNvPr>
@@ -24330,7 +24258,7 @@
           <p:cNvPr id="2" name="">
             <a:extLst xmlns:a="http://schemas.openxmlformats.org/drawingml/2006/main">
               <a:ext uri="{FF2B5EF4-FFF2-40B4-BE49-F238E27FC236}">
-                <a16:creationId xmlns:a16="http://schemas.microsoft.com/office/drawing/2014/main" id="{555FF6B7-CF7D-4953-9C2D-10E694445E17}"/>
+                <a16:creationId xmlns:a16="http://schemas.microsoft.com/office/drawing/2014/main" id="{742B0D62-9C61-49B4-80FF-9B8E5E2DF0E5}"/>
               </a:ext>
             </a:extLst>
           </p:cNvPr>
@@ -24386,7 +24314,7 @@
           <p:cNvPr id="3" name="">
             <a:extLst xmlns:a="http://schemas.openxmlformats.org/drawingml/2006/main">
               <a:ext uri="{FF2B5EF4-FFF2-40B4-BE49-F238E27FC236}">
-                <a16:creationId xmlns:a16="http://schemas.microsoft.com/office/drawing/2014/main" id="{A9F5C345-E9AC-4FF2-8E0B-B9847FAAAD54}"/>
+                <a16:creationId xmlns:a16="http://schemas.microsoft.com/office/drawing/2014/main" id="{B8B1A819-F9BA-428B-A23B-8FC40061E272}"/>
               </a:ext>
             </a:extLst>
           </p:cNvPr>
@@ -24446,19 +24374,13 @@
           <p:nvPr/>
         </p:nvPicPr>
         <p:blipFill>
-          <a:blip xmlns:r="http://schemas.openxmlformats.org/officeDocument/2006/relationships" xmlns:a="http://schemas.openxmlformats.org/drawingml/2006/main" r:embed="Rbb2774606d984171">
-            <a:extLst>
-              <a:ext uri="{96DAC541-7B7A-43D3-8B79-37D633B846F1}">
-                <asvg:svgBlip xmlns:asvg="http://schemas.microsoft.com/office/drawing/2016/SVG/main" r:embed="R753f26c9bcb44b5a"/>
-              </a:ext>
-            </a:extLst>
-          </a:blip>
+          <a:blip xmlns:r="http://schemas.openxmlformats.org/officeDocument/2006/relationships" xmlns:a="http://schemas.openxmlformats.org/drawingml/2006/main" r:embed="R24a0ae136add4a51"/>
           <a:stretch xmlns:a="http://schemas.openxmlformats.org/drawingml/2006/main"/>
         </p:blipFill>
         <p:spPr>
           <a:xfrm xmlns:a="http://schemas.openxmlformats.org/drawingml/2006/main">
-            <a:off x="6858000" y="1352550"/>
-            <a:ext cx="4286250" cy="2000250"/>
+            <a:off x="6858000" y="1376989"/>
+            <a:ext cx="4286250" cy="1951372"/>
           </a:xfrm>
           <a:prstGeom xmlns:a="http://schemas.openxmlformats.org/drawingml/2006/main" prst="rect">
             <a:avLst/>
@@ -24470,7 +24392,7 @@
           <p:cNvPr id="5" name="">
             <a:extLst xmlns:a="http://schemas.openxmlformats.org/drawingml/2006/main">
               <a:ext uri="{FF2B5EF4-FFF2-40B4-BE49-F238E27FC236}">
-                <a16:creationId xmlns:a16="http://schemas.microsoft.com/office/drawing/2014/main" id="{760BEA9B-245C-4382-AA16-6A80A7071E4E}"/>
+                <a16:creationId xmlns:a16="http://schemas.microsoft.com/office/drawing/2014/main" id="{D697AACE-36E7-487F-B245-BEE633EB186F}"/>
               </a:ext>
             </a:extLst>
           </p:cNvPr>
@@ -24687,7 +24609,7 @@
           <p:cNvPr id="6" name="">
             <a:extLst xmlns:a="http://schemas.openxmlformats.org/drawingml/2006/main">
               <a:ext uri="{FF2B5EF4-FFF2-40B4-BE49-F238E27FC236}">
-                <a16:creationId xmlns:a16="http://schemas.microsoft.com/office/drawing/2014/main" id="{844AABE6-4A4D-444F-BE60-E9DD02FBFEC9}"/>
+                <a16:creationId xmlns:a16="http://schemas.microsoft.com/office/drawing/2014/main" id="{95284FC1-3DDF-4BDE-B92D-2F1286636F0C}"/>
               </a:ext>
             </a:extLst>
           </p:cNvPr>
@@ -24722,7 +24644,7 @@
           <p:cNvPr id="7" name="">
             <a:extLst xmlns:a="http://schemas.openxmlformats.org/drawingml/2006/main">
               <a:ext uri="{FF2B5EF4-FFF2-40B4-BE49-F238E27FC236}">
-                <a16:creationId xmlns:a16="http://schemas.microsoft.com/office/drawing/2014/main" id="{880149D4-EF53-4C3C-B544-5F8B13A0E3AC}"/>
+                <a16:creationId xmlns:a16="http://schemas.microsoft.com/office/drawing/2014/main" id="{B28C900C-46B3-4ECE-BC63-D9E93BFF0ADB}"/>
               </a:ext>
             </a:extLst>
           </p:cNvPr>
@@ -24778,7 +24700,7 @@
           <p:cNvPr id="8" name="">
             <a:extLst xmlns:a="http://schemas.openxmlformats.org/drawingml/2006/main">
               <a:ext uri="{FF2B5EF4-FFF2-40B4-BE49-F238E27FC236}">
-                <a16:creationId xmlns:a16="http://schemas.microsoft.com/office/drawing/2014/main" id="{4AD78895-7486-43CE-BC2E-038D9DEB0FAB}"/>
+                <a16:creationId xmlns:a16="http://schemas.microsoft.com/office/drawing/2014/main" id="{D223993F-0F36-470F-BD60-C9F32B36FD5D}"/>
               </a:ext>
             </a:extLst>
           </p:cNvPr>
@@ -24832,7 +24754,7 @@
     </p:spTree>
     <p:extLst>
       <p:ext uri="{BB962C8B-B14F-4D97-AF65-F5344CB8AC3E}">
-        <p14:creationId xmlns:p14="http://schemas.microsoft.com/office/powerpoint/2010/main" val="142173332"/>
+        <p14:creationId xmlns:p14="http://schemas.microsoft.com/office/powerpoint/2010/main" val="996423341"/>
       </p:ext>
     </p:extLst>
   </p:cSld>
@@ -24863,7 +24785,7 @@
           <p:cNvPr id="1" name="">
             <a:extLst xmlns:a="http://schemas.openxmlformats.org/drawingml/2006/main">
               <a:ext uri="{FF2B5EF4-FFF2-40B4-BE49-F238E27FC236}">
-                <a16:creationId xmlns:a16="http://schemas.microsoft.com/office/drawing/2014/main" id="{919414F2-CD04-4F5E-B21C-DF7C0835FD59}"/>
+                <a16:creationId xmlns:a16="http://schemas.microsoft.com/office/drawing/2014/main" id="{4DC11AE5-8FA7-48E2-8978-6AB91264C34F}"/>
               </a:ext>
             </a:extLst>
           </p:cNvPr>
@@ -24896,7 +24818,7 @@
           <p:cNvPr id="2" name="">
             <a:extLst xmlns:a="http://schemas.openxmlformats.org/drawingml/2006/main">
               <a:ext uri="{FF2B5EF4-FFF2-40B4-BE49-F238E27FC236}">
-                <a16:creationId xmlns:a16="http://schemas.microsoft.com/office/drawing/2014/main" id="{38A915D1-851F-4363-96B5-42F42578058D}"/>
+                <a16:creationId xmlns:a16="http://schemas.microsoft.com/office/drawing/2014/main" id="{C6185975-5046-4EC0-ACB3-10629766D4BD}"/>
               </a:ext>
             </a:extLst>
           </p:cNvPr>
@@ -24952,7 +24874,7 @@
           <p:cNvPr id="3" name="">
             <a:extLst xmlns:a="http://schemas.openxmlformats.org/drawingml/2006/main">
               <a:ext uri="{FF2B5EF4-FFF2-40B4-BE49-F238E27FC236}">
-                <a16:creationId xmlns:a16="http://schemas.microsoft.com/office/drawing/2014/main" id="{D9F4E00D-8539-45CA-9AA0-E291AB7998C3}"/>
+                <a16:creationId xmlns:a16="http://schemas.microsoft.com/office/drawing/2014/main" id="{CC2E6541-9110-4E09-8B68-F0D628AD3B9E}"/>
               </a:ext>
             </a:extLst>
           </p:cNvPr>
@@ -25008,7 +24930,7 @@
           <p:cNvPr id="4" name="">
             <a:extLst xmlns:a="http://schemas.openxmlformats.org/drawingml/2006/main">
               <a:ext uri="{FF2B5EF4-FFF2-40B4-BE49-F238E27FC236}">
-                <a16:creationId xmlns:a16="http://schemas.microsoft.com/office/drawing/2014/main" id="{A5E0EBF1-6605-4DF5-921A-8367D88C8374}"/>
+                <a16:creationId xmlns:a16="http://schemas.microsoft.com/office/drawing/2014/main" id="{98F324B5-8F93-4C52-B256-1396B664D749}"/>
               </a:ext>
             </a:extLst>
           </p:cNvPr>
@@ -25133,7 +25055,7 @@
           <p:cNvPr id="5" name="">
             <a:extLst xmlns:a="http://schemas.openxmlformats.org/drawingml/2006/main">
               <a:ext uri="{FF2B5EF4-FFF2-40B4-BE49-F238E27FC236}">
-                <a16:creationId xmlns:a16="http://schemas.microsoft.com/office/drawing/2014/main" id="{4D02CF57-EBBA-4BFE-A3D4-7FE545922D50}"/>
+                <a16:creationId xmlns:a16="http://schemas.microsoft.com/office/drawing/2014/main" id="{3A7DCEDC-8CED-4D22-A2F0-B388534A0C1F}"/>
               </a:ext>
             </a:extLst>
           </p:cNvPr>
@@ -25168,7 +25090,7 @@
           <p:cNvPr id="6" name="">
             <a:extLst xmlns:a="http://schemas.openxmlformats.org/drawingml/2006/main">
               <a:ext uri="{FF2B5EF4-FFF2-40B4-BE49-F238E27FC236}">
-                <a16:creationId xmlns:a16="http://schemas.microsoft.com/office/drawing/2014/main" id="{9138343E-98CA-4BEB-B63E-402FD555DB0B}"/>
+                <a16:creationId xmlns:a16="http://schemas.microsoft.com/office/drawing/2014/main" id="{E53DAD66-BF6C-43E2-AAD2-CDA3874C2FA5}"/>
               </a:ext>
             </a:extLst>
           </p:cNvPr>
@@ -25224,7 +25146,7 @@
           <p:cNvPr id="7" name="">
             <a:extLst xmlns:a="http://schemas.openxmlformats.org/drawingml/2006/main">
               <a:ext uri="{FF2B5EF4-FFF2-40B4-BE49-F238E27FC236}">
-                <a16:creationId xmlns:a16="http://schemas.microsoft.com/office/drawing/2014/main" id="{9CF9A171-5966-4C60-9E1D-B4FFA3892CA6}"/>
+                <a16:creationId xmlns:a16="http://schemas.microsoft.com/office/drawing/2014/main" id="{F72A7C06-2287-45EE-9508-946BCA2FEA24}"/>
               </a:ext>
             </a:extLst>
           </p:cNvPr>
@@ -25278,7 +25200,7 @@
     </p:spTree>
     <p:extLst>
       <p:ext uri="{BB962C8B-B14F-4D97-AF65-F5344CB8AC3E}">
-        <p14:creationId xmlns:p14="http://schemas.microsoft.com/office/powerpoint/2010/main" val="1872391262"/>
+        <p14:creationId xmlns:p14="http://schemas.microsoft.com/office/powerpoint/2010/main" val="1233404662"/>
       </p:ext>
     </p:extLst>
   </p:cSld>
@@ -25309,7 +25231,7 @@
           <p:cNvPr id="1" name="">
             <a:extLst xmlns:a="http://schemas.openxmlformats.org/drawingml/2006/main">
               <a:ext uri="{FF2B5EF4-FFF2-40B4-BE49-F238E27FC236}">
-                <a16:creationId xmlns:a16="http://schemas.microsoft.com/office/drawing/2014/main" id="{E3A8A5A6-6095-45AA-BAB7-066F9093EE6E}"/>
+                <a16:creationId xmlns:a16="http://schemas.microsoft.com/office/drawing/2014/main" id="{B4C7E0AF-C811-40B5-8BD6-805DE5AC5A69}"/>
               </a:ext>
             </a:extLst>
           </p:cNvPr>
@@ -25342,7 +25264,7 @@
           <p:cNvPr id="2" name="">
             <a:extLst xmlns:a="http://schemas.openxmlformats.org/drawingml/2006/main">
               <a:ext uri="{FF2B5EF4-FFF2-40B4-BE49-F238E27FC236}">
-                <a16:creationId xmlns:a16="http://schemas.microsoft.com/office/drawing/2014/main" id="{80610403-57B8-4EFA-9EB7-C8D2BB7F05D3}"/>
+                <a16:creationId xmlns:a16="http://schemas.microsoft.com/office/drawing/2014/main" id="{A0551343-B635-4AA3-8551-C13A69B44281}"/>
               </a:ext>
             </a:extLst>
           </p:cNvPr>
@@ -25398,7 +25320,7 @@
           <p:cNvPr id="3" name="">
             <a:extLst xmlns:a="http://schemas.openxmlformats.org/drawingml/2006/main">
               <a:ext uri="{FF2B5EF4-FFF2-40B4-BE49-F238E27FC236}">
-                <a16:creationId xmlns:a16="http://schemas.microsoft.com/office/drawing/2014/main" id="{076F7AF6-3F96-4F7B-82CB-3E68E9967FC1}"/>
+                <a16:creationId xmlns:a16="http://schemas.microsoft.com/office/drawing/2014/main" id="{1D04B288-5A72-4528-B42E-2E60D825226D}"/>
               </a:ext>
             </a:extLst>
           </p:cNvPr>
@@ -25454,7 +25376,7 @@
           <p:cNvPr id="4" name="">
             <a:extLst xmlns:a="http://schemas.openxmlformats.org/drawingml/2006/main">
               <a:ext uri="{FF2B5EF4-FFF2-40B4-BE49-F238E27FC236}">
-                <a16:creationId xmlns:a16="http://schemas.microsoft.com/office/drawing/2014/main" id="{B37E08AB-7E73-4AC1-A9F8-1EDD7256AE75}"/>
+                <a16:creationId xmlns:a16="http://schemas.microsoft.com/office/drawing/2014/main" id="{AA00D622-3734-4ACE-83A8-6574DB8E742A}"/>
               </a:ext>
             </a:extLst>
           </p:cNvPr>
@@ -25510,7 +25432,7 @@
           <p:cNvPr id="5" name="">
             <a:extLst xmlns:a="http://schemas.openxmlformats.org/drawingml/2006/main">
               <a:ext uri="{FF2B5EF4-FFF2-40B4-BE49-F238E27FC236}">
-                <a16:creationId xmlns:a16="http://schemas.microsoft.com/office/drawing/2014/main" id="{F49D737A-DFE3-4813-8F26-C843827C2DA2}"/>
+                <a16:creationId xmlns:a16="http://schemas.microsoft.com/office/drawing/2014/main" id="{E23C4197-3938-4C18-BF7D-7EAF261787EC}"/>
               </a:ext>
             </a:extLst>
           </p:cNvPr>
@@ -25545,7 +25467,7 @@
           <p:cNvPr id="6" name="">
             <a:extLst xmlns:a="http://schemas.openxmlformats.org/drawingml/2006/main">
               <a:ext uri="{FF2B5EF4-FFF2-40B4-BE49-F238E27FC236}">
-                <a16:creationId xmlns:a16="http://schemas.microsoft.com/office/drawing/2014/main" id="{D8C86CCE-583E-426B-9C5E-2099A7DF0C9A}"/>
+                <a16:creationId xmlns:a16="http://schemas.microsoft.com/office/drawing/2014/main" id="{16E5E4FF-75FB-46F4-91DA-2D71DE781E48}"/>
               </a:ext>
             </a:extLst>
           </p:cNvPr>
@@ -25601,7 +25523,7 @@
           <p:cNvPr id="7" name="">
             <a:extLst xmlns:a="http://schemas.openxmlformats.org/drawingml/2006/main">
               <a:ext uri="{FF2B5EF4-FFF2-40B4-BE49-F238E27FC236}">
-                <a16:creationId xmlns:a16="http://schemas.microsoft.com/office/drawing/2014/main" id="{89828740-20D7-405E-BC3C-E6A167C6B2F2}"/>
+                <a16:creationId xmlns:a16="http://schemas.microsoft.com/office/drawing/2014/main" id="{4D4DE515-D8F7-4D65-B66E-29E48087C2CE}"/>
               </a:ext>
             </a:extLst>
           </p:cNvPr>
@@ -25655,7 +25577,7 @@
     </p:spTree>
     <p:extLst>
       <p:ext uri="{BB962C8B-B14F-4D97-AF65-F5344CB8AC3E}">
-        <p14:creationId xmlns:p14="http://schemas.microsoft.com/office/powerpoint/2010/main" val="956030153"/>
+        <p14:creationId xmlns:p14="http://schemas.microsoft.com/office/powerpoint/2010/main" val="1533735696"/>
       </p:ext>
     </p:extLst>
   </p:cSld>
@@ -25686,7 +25608,7 @@
           <p:cNvPr id="1" name="">
             <a:extLst xmlns:a="http://schemas.openxmlformats.org/drawingml/2006/main">
               <a:ext uri="{FF2B5EF4-FFF2-40B4-BE49-F238E27FC236}">
-                <a16:creationId xmlns:a16="http://schemas.microsoft.com/office/drawing/2014/main" id="{04159F4B-57CC-40B4-B82B-278341D6976D}"/>
+                <a16:creationId xmlns:a16="http://schemas.microsoft.com/office/drawing/2014/main" id="{DA12C6B3-515B-406A-927A-A1C176D9027C}"/>
               </a:ext>
             </a:extLst>
           </p:cNvPr>
@@ -25719,7 +25641,7 @@
           <p:cNvPr id="2" name="">
             <a:extLst xmlns:a="http://schemas.openxmlformats.org/drawingml/2006/main">
               <a:ext uri="{FF2B5EF4-FFF2-40B4-BE49-F238E27FC236}">
-                <a16:creationId xmlns:a16="http://schemas.microsoft.com/office/drawing/2014/main" id="{61F0AAF5-59A4-4B71-81B5-0782EEC64C9C}"/>
+                <a16:creationId xmlns:a16="http://schemas.microsoft.com/office/drawing/2014/main" id="{29852BC5-2588-47BC-97E5-AB58E70A2ADC}"/>
               </a:ext>
             </a:extLst>
           </p:cNvPr>
@@ -25775,7 +25697,7 @@
           <p:cNvPr id="3" name="">
             <a:extLst xmlns:a="http://schemas.openxmlformats.org/drawingml/2006/main">
               <a:ext uri="{FF2B5EF4-FFF2-40B4-BE49-F238E27FC236}">
-                <a16:creationId xmlns:a16="http://schemas.microsoft.com/office/drawing/2014/main" id="{41909A4E-1B97-48DD-8710-8ACC3D7F4018}"/>
+                <a16:creationId xmlns:a16="http://schemas.microsoft.com/office/drawing/2014/main" id="{B4A1BAF9-696C-4D9E-A62B-E8785990FCB8}"/>
               </a:ext>
             </a:extLst>
           </p:cNvPr>
@@ -25835,19 +25757,13 @@
           <p:nvPr/>
         </p:nvPicPr>
         <p:blipFill>
-          <a:blip xmlns:r="http://schemas.openxmlformats.org/officeDocument/2006/relationships" xmlns:a="http://schemas.openxmlformats.org/drawingml/2006/main" r:embed="R70c16da5fc854839">
-            <a:extLst>
-              <a:ext uri="{96DAC541-7B7A-43D3-8B79-37D633B846F1}">
-                <asvg:svgBlip xmlns:asvg="http://schemas.microsoft.com/office/drawing/2016/SVG/main" r:embed="R9f127388263d40bb"/>
-              </a:ext>
-            </a:extLst>
-          </a:blip>
+          <a:blip xmlns:r="http://schemas.openxmlformats.org/officeDocument/2006/relationships" xmlns:a="http://schemas.openxmlformats.org/drawingml/2006/main" r:embed="R6f4f2547626c4e58"/>
           <a:stretch xmlns:a="http://schemas.openxmlformats.org/drawingml/2006/main"/>
         </p:blipFill>
         <p:spPr>
           <a:xfrm xmlns:a="http://schemas.openxmlformats.org/drawingml/2006/main">
-            <a:off x="6858000" y="1352550"/>
-            <a:ext cx="4286250" cy="2000250"/>
+            <a:off x="6858000" y="1939542"/>
+            <a:ext cx="4286250" cy="826265"/>
           </a:xfrm>
           <a:prstGeom xmlns:a="http://schemas.openxmlformats.org/drawingml/2006/main" prst="rect">
             <a:avLst/>
@@ -25859,7 +25775,7 @@
           <p:cNvPr id="5" name="">
             <a:extLst xmlns:a="http://schemas.openxmlformats.org/drawingml/2006/main">
               <a:ext uri="{FF2B5EF4-FFF2-40B4-BE49-F238E27FC236}">
-                <a16:creationId xmlns:a16="http://schemas.microsoft.com/office/drawing/2014/main" id="{23004BA5-9886-4B4B-9976-34DA826C2F9D}"/>
+                <a16:creationId xmlns:a16="http://schemas.microsoft.com/office/drawing/2014/main" id="{7E9ED16E-3A3E-4EDB-B405-733951E4C761}"/>
               </a:ext>
             </a:extLst>
           </p:cNvPr>
@@ -25915,7 +25831,7 @@
           <p:cNvPr id="6" name="">
             <a:extLst xmlns:a="http://schemas.openxmlformats.org/drawingml/2006/main">
               <a:ext uri="{FF2B5EF4-FFF2-40B4-BE49-F238E27FC236}">
-                <a16:creationId xmlns:a16="http://schemas.microsoft.com/office/drawing/2014/main" id="{4B360ADA-983B-496D-8FED-9555F3D66C6D}"/>
+                <a16:creationId xmlns:a16="http://schemas.microsoft.com/office/drawing/2014/main" id="{799FDA9A-68D6-43C6-BA88-BD1B644665EE}"/>
               </a:ext>
             </a:extLst>
           </p:cNvPr>
@@ -25950,7 +25866,7 @@
           <p:cNvPr id="7" name="">
             <a:extLst xmlns:a="http://schemas.openxmlformats.org/drawingml/2006/main">
               <a:ext uri="{FF2B5EF4-FFF2-40B4-BE49-F238E27FC236}">
-                <a16:creationId xmlns:a16="http://schemas.microsoft.com/office/drawing/2014/main" id="{0E6ED0DA-1F1C-4A2A-B427-F5343ABF3CD5}"/>
+                <a16:creationId xmlns:a16="http://schemas.microsoft.com/office/drawing/2014/main" id="{B995BA7B-CD9F-4E8F-BC50-09B456610E95}"/>
               </a:ext>
             </a:extLst>
           </p:cNvPr>
@@ -26006,7 +25922,7 @@
           <p:cNvPr id="8" name="">
             <a:extLst xmlns:a="http://schemas.openxmlformats.org/drawingml/2006/main">
               <a:ext uri="{FF2B5EF4-FFF2-40B4-BE49-F238E27FC236}">
-                <a16:creationId xmlns:a16="http://schemas.microsoft.com/office/drawing/2014/main" id="{E28548E0-D28C-4CB8-8F42-1F1F95502548}"/>
+                <a16:creationId xmlns:a16="http://schemas.microsoft.com/office/drawing/2014/main" id="{0F8EE350-0C00-45B5-B2A6-F97DE034B42C}"/>
               </a:ext>
             </a:extLst>
           </p:cNvPr>
@@ -26060,7 +25976,7 @@
     </p:spTree>
     <p:extLst>
       <p:ext uri="{BB962C8B-B14F-4D97-AF65-F5344CB8AC3E}">
-        <p14:creationId xmlns:p14="http://schemas.microsoft.com/office/powerpoint/2010/main" val="956848604"/>
+        <p14:creationId xmlns:p14="http://schemas.microsoft.com/office/powerpoint/2010/main" val="1590596759"/>
       </p:ext>
     </p:extLst>
   </p:cSld>
@@ -26091,7 +26007,7 @@
           <p:cNvPr id="1" name="">
             <a:extLst xmlns:a="http://schemas.openxmlformats.org/drawingml/2006/main">
               <a:ext uri="{FF2B5EF4-FFF2-40B4-BE49-F238E27FC236}">
-                <a16:creationId xmlns:a16="http://schemas.microsoft.com/office/drawing/2014/main" id="{C586C65A-85C5-4D97-9C58-67730DA3FB55}"/>
+                <a16:creationId xmlns:a16="http://schemas.microsoft.com/office/drawing/2014/main" id="{AF2BE7BC-53C8-451A-9206-32855D1495EE}"/>
               </a:ext>
             </a:extLst>
           </p:cNvPr>
@@ -26124,7 +26040,7 @@
           <p:cNvPr id="2" name="">
             <a:extLst xmlns:a="http://schemas.openxmlformats.org/drawingml/2006/main">
               <a:ext uri="{FF2B5EF4-FFF2-40B4-BE49-F238E27FC236}">
-                <a16:creationId xmlns:a16="http://schemas.microsoft.com/office/drawing/2014/main" id="{7B7FE6AD-E054-42B2-9759-A7D23EE7F65B}"/>
+                <a16:creationId xmlns:a16="http://schemas.microsoft.com/office/drawing/2014/main" id="{F18C8B88-8727-449E-86CB-4C52B1F9E25F}"/>
               </a:ext>
             </a:extLst>
           </p:cNvPr>
@@ -26180,7 +26096,7 @@
           <p:cNvPr id="3" name="">
             <a:extLst xmlns:a="http://schemas.openxmlformats.org/drawingml/2006/main">
               <a:ext uri="{FF2B5EF4-FFF2-40B4-BE49-F238E27FC236}">
-                <a16:creationId xmlns:a16="http://schemas.microsoft.com/office/drawing/2014/main" id="{3F8E5BD6-BF74-443E-9BFF-8BFA11E6759B}"/>
+                <a16:creationId xmlns:a16="http://schemas.microsoft.com/office/drawing/2014/main" id="{5D0C8DFE-69F4-405D-BFDA-CD7C568ADBCD}"/>
               </a:ext>
             </a:extLst>
           </p:cNvPr>
@@ -26236,7 +26152,7 @@
           <p:cNvPr id="4" name="">
             <a:extLst xmlns:a="http://schemas.openxmlformats.org/drawingml/2006/main">
               <a:ext uri="{FF2B5EF4-FFF2-40B4-BE49-F238E27FC236}">
-                <a16:creationId xmlns:a16="http://schemas.microsoft.com/office/drawing/2014/main" id="{55FF6D91-473D-45F6-B12E-9E8B869554B2}"/>
+                <a16:creationId xmlns:a16="http://schemas.microsoft.com/office/drawing/2014/main" id="{D537E798-4433-4011-9FDC-74DE04A7D34D}"/>
               </a:ext>
             </a:extLst>
           </p:cNvPr>
@@ -26271,7 +26187,7 @@
           <p:cNvPr id="5" name="">
             <a:extLst xmlns:a="http://schemas.openxmlformats.org/drawingml/2006/main">
               <a:ext uri="{FF2B5EF4-FFF2-40B4-BE49-F238E27FC236}">
-                <a16:creationId xmlns:a16="http://schemas.microsoft.com/office/drawing/2014/main" id="{B70A098D-7509-4D67-AEEB-BA1E6FFAD7E2}"/>
+                <a16:creationId xmlns:a16="http://schemas.microsoft.com/office/drawing/2014/main" id="{E85AF824-D55D-43BE-BA40-2B3CC1C0B625}"/>
               </a:ext>
             </a:extLst>
           </p:cNvPr>
@@ -26327,7 +26243,7 @@
           <p:cNvPr id="6" name="">
             <a:extLst xmlns:a="http://schemas.openxmlformats.org/drawingml/2006/main">
               <a:ext uri="{FF2B5EF4-FFF2-40B4-BE49-F238E27FC236}">
-                <a16:creationId xmlns:a16="http://schemas.microsoft.com/office/drawing/2014/main" id="{D5442486-D5A7-49F1-B49D-1FB19EE400DF}"/>
+                <a16:creationId xmlns:a16="http://schemas.microsoft.com/office/drawing/2014/main" id="{5D6F2607-3B71-4947-8E25-61C89A2971A6}"/>
               </a:ext>
             </a:extLst>
           </p:cNvPr>
@@ -26362,7 +26278,7 @@
           <p:cNvPr id="7" name="">
             <a:extLst xmlns:a="http://schemas.openxmlformats.org/drawingml/2006/main">
               <a:ext uri="{FF2B5EF4-FFF2-40B4-BE49-F238E27FC236}">
-                <a16:creationId xmlns:a16="http://schemas.microsoft.com/office/drawing/2014/main" id="{6B20FEC1-ABE6-4E85-B151-4F4EC29F009F}"/>
+                <a16:creationId xmlns:a16="http://schemas.microsoft.com/office/drawing/2014/main" id="{073D4DED-FD10-41FB-B4AF-C22A27D8DF88}"/>
               </a:ext>
             </a:extLst>
           </p:cNvPr>
@@ -26418,7 +26334,7 @@
           <p:cNvPr id="8" name="">
             <a:extLst xmlns:a="http://schemas.openxmlformats.org/drawingml/2006/main">
               <a:ext uri="{FF2B5EF4-FFF2-40B4-BE49-F238E27FC236}">
-                <a16:creationId xmlns:a16="http://schemas.microsoft.com/office/drawing/2014/main" id="{2A516097-D09A-478D-8DF2-781774C73323}"/>
+                <a16:creationId xmlns:a16="http://schemas.microsoft.com/office/drawing/2014/main" id="{C0D8CBFF-3230-42E1-A208-15A1A60CB1D8}"/>
               </a:ext>
             </a:extLst>
           </p:cNvPr>
@@ -26453,7 +26369,7 @@
           <p:cNvPr id="9" name="">
             <a:extLst xmlns:a="http://schemas.openxmlformats.org/drawingml/2006/main">
               <a:ext uri="{FF2B5EF4-FFF2-40B4-BE49-F238E27FC236}">
-                <a16:creationId xmlns:a16="http://schemas.microsoft.com/office/drawing/2014/main" id="{2AA43681-7016-4F78-8964-AEE690FDD26A}"/>
+                <a16:creationId xmlns:a16="http://schemas.microsoft.com/office/drawing/2014/main" id="{4C71855B-0350-4E99-8438-FC4FFAECC511}"/>
               </a:ext>
             </a:extLst>
           </p:cNvPr>
@@ -26509,7 +26425,7 @@
           <p:cNvPr id="10" name="">
             <a:extLst xmlns:a="http://schemas.openxmlformats.org/drawingml/2006/main">
               <a:ext uri="{FF2B5EF4-FFF2-40B4-BE49-F238E27FC236}">
-                <a16:creationId xmlns:a16="http://schemas.microsoft.com/office/drawing/2014/main" id="{0F0863E0-0821-47C9-AE09-CCE7E59ADF30}"/>
+                <a16:creationId xmlns:a16="http://schemas.microsoft.com/office/drawing/2014/main" id="{4DEF2159-B187-459A-98B7-102FFFFC8BE8}"/>
               </a:ext>
             </a:extLst>
           </p:cNvPr>
@@ -26544,7 +26460,7 @@
           <p:cNvPr id="11" name="">
             <a:extLst xmlns:a="http://schemas.openxmlformats.org/drawingml/2006/main">
               <a:ext uri="{FF2B5EF4-FFF2-40B4-BE49-F238E27FC236}">
-                <a16:creationId xmlns:a16="http://schemas.microsoft.com/office/drawing/2014/main" id="{320555E8-D3AC-4770-A3CF-786B3B92BBBD}"/>
+                <a16:creationId xmlns:a16="http://schemas.microsoft.com/office/drawing/2014/main" id="{3416787C-E14C-43F0-8609-D6AF9646E3D6}"/>
               </a:ext>
             </a:extLst>
           </p:cNvPr>
@@ -26600,7 +26516,7 @@
           <p:cNvPr id="12" name="">
             <a:extLst xmlns:a="http://schemas.openxmlformats.org/drawingml/2006/main">
               <a:ext uri="{FF2B5EF4-FFF2-40B4-BE49-F238E27FC236}">
-                <a16:creationId xmlns:a16="http://schemas.microsoft.com/office/drawing/2014/main" id="{58CC0D40-8274-41C1-9BBC-97B1E416E30A}"/>
+                <a16:creationId xmlns:a16="http://schemas.microsoft.com/office/drawing/2014/main" id="{675A4B05-538A-405A-84B1-C397B8E11683}"/>
               </a:ext>
             </a:extLst>
           </p:cNvPr>
@@ -26635,7 +26551,7 @@
           <p:cNvPr id="13" name="">
             <a:extLst xmlns:a="http://schemas.openxmlformats.org/drawingml/2006/main">
               <a:ext uri="{FF2B5EF4-FFF2-40B4-BE49-F238E27FC236}">
-                <a16:creationId xmlns:a16="http://schemas.microsoft.com/office/drawing/2014/main" id="{E3E13853-18AF-41EB-AB31-EEFCBF0F1833}"/>
+                <a16:creationId xmlns:a16="http://schemas.microsoft.com/office/drawing/2014/main" id="{6E85144A-7D74-4815-A9EA-97D8856C1CF4}"/>
               </a:ext>
             </a:extLst>
           </p:cNvPr>
@@ -26691,7 +26607,7 @@
           <p:cNvPr id="14" name="">
             <a:extLst xmlns:a="http://schemas.openxmlformats.org/drawingml/2006/main">
               <a:ext uri="{FF2B5EF4-FFF2-40B4-BE49-F238E27FC236}">
-                <a16:creationId xmlns:a16="http://schemas.microsoft.com/office/drawing/2014/main" id="{1DD18DF7-23D9-45E9-A130-CD91937C21BE}"/>
+                <a16:creationId xmlns:a16="http://schemas.microsoft.com/office/drawing/2014/main" id="{D037C61D-D46C-4C3F-82F0-D655BB935448}"/>
               </a:ext>
             </a:extLst>
           </p:cNvPr>
@@ -26726,7 +26642,7 @@
           <p:cNvPr id="15" name="">
             <a:extLst xmlns:a="http://schemas.openxmlformats.org/drawingml/2006/main">
               <a:ext uri="{FF2B5EF4-FFF2-40B4-BE49-F238E27FC236}">
-                <a16:creationId xmlns:a16="http://schemas.microsoft.com/office/drawing/2014/main" id="{05512950-B15F-4BA0-984D-3D602351CFA5}"/>
+                <a16:creationId xmlns:a16="http://schemas.microsoft.com/office/drawing/2014/main" id="{FD98CE30-81EC-4618-B0C6-B939ED6AE7CE}"/>
               </a:ext>
             </a:extLst>
           </p:cNvPr>
@@ -26782,7 +26698,7 @@
           <p:cNvPr id="16" name="">
             <a:extLst xmlns:a="http://schemas.openxmlformats.org/drawingml/2006/main">
               <a:ext uri="{FF2B5EF4-FFF2-40B4-BE49-F238E27FC236}">
-                <a16:creationId xmlns:a16="http://schemas.microsoft.com/office/drawing/2014/main" id="{088036BF-390A-4AEE-9F38-B26291D3A874}"/>
+                <a16:creationId xmlns:a16="http://schemas.microsoft.com/office/drawing/2014/main" id="{5D312294-2F8D-4361-B98E-D3E5C256423F}"/>
               </a:ext>
             </a:extLst>
           </p:cNvPr>
@@ -26817,7 +26733,7 @@
           <p:cNvPr id="17" name="">
             <a:extLst xmlns:a="http://schemas.openxmlformats.org/drawingml/2006/main">
               <a:ext uri="{FF2B5EF4-FFF2-40B4-BE49-F238E27FC236}">
-                <a16:creationId xmlns:a16="http://schemas.microsoft.com/office/drawing/2014/main" id="{AB9341C1-98A5-4352-80E7-2C12A15EAF3D}"/>
+                <a16:creationId xmlns:a16="http://schemas.microsoft.com/office/drawing/2014/main" id="{B2EDACBF-83CB-499A-B25D-87B2C6D90703}"/>
               </a:ext>
             </a:extLst>
           </p:cNvPr>
@@ -26873,7 +26789,7 @@
           <p:cNvPr id="18" name="">
             <a:extLst xmlns:a="http://schemas.openxmlformats.org/drawingml/2006/main">
               <a:ext uri="{FF2B5EF4-FFF2-40B4-BE49-F238E27FC236}">
-                <a16:creationId xmlns:a16="http://schemas.microsoft.com/office/drawing/2014/main" id="{724C0DC7-0673-4550-8E26-7FC6DB7AECB4}"/>
+                <a16:creationId xmlns:a16="http://schemas.microsoft.com/office/drawing/2014/main" id="{602BEEF0-B77B-4AAC-B859-2764638F5A2D}"/>
               </a:ext>
             </a:extLst>
           </p:cNvPr>
@@ -26927,7 +26843,7 @@
     </p:spTree>
     <p:extLst>
       <p:ext uri="{BB962C8B-B14F-4D97-AF65-F5344CB8AC3E}">
-        <p14:creationId xmlns:p14="http://schemas.microsoft.com/office/powerpoint/2010/main" val="1126700165"/>
+        <p14:creationId xmlns:p14="http://schemas.microsoft.com/office/powerpoint/2010/main" val="1883270378"/>
       </p:ext>
     </p:extLst>
   </p:cSld>
@@ -26958,7 +26874,7 @@
           <p:cNvPr id="1" name="">
             <a:extLst xmlns:a="http://schemas.openxmlformats.org/drawingml/2006/main">
               <a:ext uri="{FF2B5EF4-FFF2-40B4-BE49-F238E27FC236}">
-                <a16:creationId xmlns:a16="http://schemas.microsoft.com/office/drawing/2014/main" id="{61367A26-C3EB-4B03-B55E-E36638254D5D}"/>
+                <a16:creationId xmlns:a16="http://schemas.microsoft.com/office/drawing/2014/main" id="{DE735EC5-462F-4BE6-BF29-C98C03E0B162}"/>
               </a:ext>
             </a:extLst>
           </p:cNvPr>
@@ -26991,7 +26907,7 @@
           <p:cNvPr id="2" name="">
             <a:extLst xmlns:a="http://schemas.openxmlformats.org/drawingml/2006/main">
               <a:ext uri="{FF2B5EF4-FFF2-40B4-BE49-F238E27FC236}">
-                <a16:creationId xmlns:a16="http://schemas.microsoft.com/office/drawing/2014/main" id="{EEB656E8-5F6E-469C-BC4F-11C7C6A30AE3}"/>
+                <a16:creationId xmlns:a16="http://schemas.microsoft.com/office/drawing/2014/main" id="{99B22E78-DD6E-41A0-8A52-46967471B1F3}"/>
               </a:ext>
             </a:extLst>
           </p:cNvPr>
@@ -27047,7 +26963,7 @@
           <p:cNvPr id="3" name="">
             <a:extLst xmlns:a="http://schemas.openxmlformats.org/drawingml/2006/main">
               <a:ext uri="{FF2B5EF4-FFF2-40B4-BE49-F238E27FC236}">
-                <a16:creationId xmlns:a16="http://schemas.microsoft.com/office/drawing/2014/main" id="{B92A8E83-15DE-41C0-B3B1-DE4D7E6F2754}"/>
+                <a16:creationId xmlns:a16="http://schemas.microsoft.com/office/drawing/2014/main" id="{AAC096BC-EFDB-4E51-B6EF-724497EF57BD}"/>
               </a:ext>
             </a:extLst>
           </p:cNvPr>
@@ -27107,19 +27023,13 @@
           <p:nvPr/>
         </p:nvPicPr>
         <p:blipFill>
-          <a:blip xmlns:r="http://schemas.openxmlformats.org/officeDocument/2006/relationships" xmlns:a="http://schemas.openxmlformats.org/drawingml/2006/main" r:embed="R0efe1d9044b84e83">
-            <a:extLst>
-              <a:ext uri="{96DAC541-7B7A-43D3-8B79-37D633B846F1}">
-                <asvg:svgBlip xmlns:asvg="http://schemas.microsoft.com/office/drawing/2016/SVG/main" r:embed="Ra8d6506cd4a7472a"/>
-              </a:ext>
-            </a:extLst>
-          </a:blip>
+          <a:blip xmlns:r="http://schemas.openxmlformats.org/officeDocument/2006/relationships" xmlns:a="http://schemas.openxmlformats.org/drawingml/2006/main" r:embed="R060323d3e9134f19"/>
           <a:stretch xmlns:a="http://schemas.openxmlformats.org/drawingml/2006/main"/>
         </p:blipFill>
         <p:spPr>
           <a:xfrm xmlns:a="http://schemas.openxmlformats.org/drawingml/2006/main">
-            <a:off x="6858000" y="1352550"/>
-            <a:ext cx="4286250" cy="2000250"/>
+            <a:off x="6974556" y="1352550"/>
+            <a:ext cx="4053138" cy="2000250"/>
           </a:xfrm>
           <a:prstGeom xmlns:a="http://schemas.openxmlformats.org/drawingml/2006/main" prst="rect">
             <a:avLst/>
@@ -27131,7 +27041,7 @@
           <p:cNvPr id="5" name="">
             <a:extLst xmlns:a="http://schemas.openxmlformats.org/drawingml/2006/main">
               <a:ext uri="{FF2B5EF4-FFF2-40B4-BE49-F238E27FC236}">
-                <a16:creationId xmlns:a16="http://schemas.microsoft.com/office/drawing/2014/main" id="{4617F0C8-A1B6-4689-B106-35F0F8C47E42}"/>
+                <a16:creationId xmlns:a16="http://schemas.microsoft.com/office/drawing/2014/main" id="{6E5B4FD5-7950-46EB-8751-029AAE6B86A5}"/>
               </a:ext>
             </a:extLst>
           </p:cNvPr>
@@ -27166,7 +27076,7 @@
           <p:cNvPr id="6" name="">
             <a:extLst xmlns:a="http://schemas.openxmlformats.org/drawingml/2006/main">
               <a:ext uri="{FF2B5EF4-FFF2-40B4-BE49-F238E27FC236}">
-                <a16:creationId xmlns:a16="http://schemas.microsoft.com/office/drawing/2014/main" id="{3CB78B70-9EFD-41FA-8F9E-595F843D1F67}"/>
+                <a16:creationId xmlns:a16="http://schemas.microsoft.com/office/drawing/2014/main" id="{48B52BE5-44D8-4129-A498-334961322AE3}"/>
               </a:ext>
             </a:extLst>
           </p:cNvPr>
@@ -27222,7 +27132,7 @@
           <p:cNvPr id="7" name="">
             <a:extLst xmlns:a="http://schemas.openxmlformats.org/drawingml/2006/main">
               <a:ext uri="{FF2B5EF4-FFF2-40B4-BE49-F238E27FC236}">
-                <a16:creationId xmlns:a16="http://schemas.microsoft.com/office/drawing/2014/main" id="{8CB97562-1919-45CE-9F5A-E68BA851578A}"/>
+                <a16:creationId xmlns:a16="http://schemas.microsoft.com/office/drawing/2014/main" id="{58EB2FFE-1EA8-4D60-A384-7481A6E706BC}"/>
               </a:ext>
             </a:extLst>
           </p:cNvPr>
@@ -27257,7 +27167,7 @@
           <p:cNvPr id="8" name="">
             <a:extLst xmlns:a="http://schemas.openxmlformats.org/drawingml/2006/main">
               <a:ext uri="{FF2B5EF4-FFF2-40B4-BE49-F238E27FC236}">
-                <a16:creationId xmlns:a16="http://schemas.microsoft.com/office/drawing/2014/main" id="{11ED2EFF-109F-42B8-AB0D-D412F22A397F}"/>
+                <a16:creationId xmlns:a16="http://schemas.microsoft.com/office/drawing/2014/main" id="{00F63A2E-3511-44EF-BD5B-F1279FFA2CC1}"/>
               </a:ext>
             </a:extLst>
           </p:cNvPr>
@@ -27313,7 +27223,7 @@
           <p:cNvPr id="9" name="">
             <a:extLst xmlns:a="http://schemas.openxmlformats.org/drawingml/2006/main">
               <a:ext uri="{FF2B5EF4-FFF2-40B4-BE49-F238E27FC236}">
-                <a16:creationId xmlns:a16="http://schemas.microsoft.com/office/drawing/2014/main" id="{94F29C45-BE74-474B-9825-C1E861DF6540}"/>
+                <a16:creationId xmlns:a16="http://schemas.microsoft.com/office/drawing/2014/main" id="{728B15FC-B832-4301-BC3D-C23780E10005}"/>
               </a:ext>
             </a:extLst>
           </p:cNvPr>
@@ -27348,7 +27258,7 @@
           <p:cNvPr id="10" name="">
             <a:extLst xmlns:a="http://schemas.openxmlformats.org/drawingml/2006/main">
               <a:ext uri="{FF2B5EF4-FFF2-40B4-BE49-F238E27FC236}">
-                <a16:creationId xmlns:a16="http://schemas.microsoft.com/office/drawing/2014/main" id="{8A637066-658E-4B1C-B733-6C479BAAFDEA}"/>
+                <a16:creationId xmlns:a16="http://schemas.microsoft.com/office/drawing/2014/main" id="{A14DB58D-A1A4-4F28-9EBD-4F057EEA7FE5}"/>
               </a:ext>
             </a:extLst>
           </p:cNvPr>
@@ -27404,7 +27314,7 @@
           <p:cNvPr id="11" name="">
             <a:extLst xmlns:a="http://schemas.openxmlformats.org/drawingml/2006/main">
               <a:ext uri="{FF2B5EF4-FFF2-40B4-BE49-F238E27FC236}">
-                <a16:creationId xmlns:a16="http://schemas.microsoft.com/office/drawing/2014/main" id="{1B901077-3036-42FE-B2C4-61CD0D32EDE8}"/>
+                <a16:creationId xmlns:a16="http://schemas.microsoft.com/office/drawing/2014/main" id="{C2328295-FC83-4167-9678-2DB375FE691C}"/>
               </a:ext>
             </a:extLst>
           </p:cNvPr>
@@ -27439,7 +27349,7 @@
           <p:cNvPr id="12" name="">
             <a:extLst xmlns:a="http://schemas.openxmlformats.org/drawingml/2006/main">
               <a:ext uri="{FF2B5EF4-FFF2-40B4-BE49-F238E27FC236}">
-                <a16:creationId xmlns:a16="http://schemas.microsoft.com/office/drawing/2014/main" id="{18C71ED0-F334-4D16-959F-676D2C1D1B5E}"/>
+                <a16:creationId xmlns:a16="http://schemas.microsoft.com/office/drawing/2014/main" id="{B9323D4E-E239-4BA2-88E0-C537F9EB1346}"/>
               </a:ext>
             </a:extLst>
           </p:cNvPr>
@@ -27495,7 +27405,7 @@
           <p:cNvPr id="13" name="">
             <a:extLst xmlns:a="http://schemas.openxmlformats.org/drawingml/2006/main">
               <a:ext uri="{FF2B5EF4-FFF2-40B4-BE49-F238E27FC236}">
-                <a16:creationId xmlns:a16="http://schemas.microsoft.com/office/drawing/2014/main" id="{4CDBACBE-8907-40C7-B257-4A813B4C0FD7}"/>
+                <a16:creationId xmlns:a16="http://schemas.microsoft.com/office/drawing/2014/main" id="{6F0FFC87-043C-462E-B097-6CF51EC5792F}"/>
               </a:ext>
             </a:extLst>
           </p:cNvPr>
@@ -27530,7 +27440,7 @@
           <p:cNvPr id="14" name="">
             <a:extLst xmlns:a="http://schemas.openxmlformats.org/drawingml/2006/main">
               <a:ext uri="{FF2B5EF4-FFF2-40B4-BE49-F238E27FC236}">
-                <a16:creationId xmlns:a16="http://schemas.microsoft.com/office/drawing/2014/main" id="{333C6F17-0784-48BE-BEE4-CD877E78E0C8}"/>
+                <a16:creationId xmlns:a16="http://schemas.microsoft.com/office/drawing/2014/main" id="{55B99B38-228B-4C9E-BC79-1684C364EE27}"/>
               </a:ext>
             </a:extLst>
           </p:cNvPr>
@@ -27586,7 +27496,7 @@
           <p:cNvPr id="15" name="">
             <a:extLst xmlns:a="http://schemas.openxmlformats.org/drawingml/2006/main">
               <a:ext uri="{FF2B5EF4-FFF2-40B4-BE49-F238E27FC236}">
-                <a16:creationId xmlns:a16="http://schemas.microsoft.com/office/drawing/2014/main" id="{32D87DB5-3DC8-4A83-AF9F-C64D444839AC}"/>
+                <a16:creationId xmlns:a16="http://schemas.microsoft.com/office/drawing/2014/main" id="{DAEA3191-B5DE-4C34-A18D-D93A357D2057}"/>
               </a:ext>
             </a:extLst>
           </p:cNvPr>
@@ -27640,7 +27550,7 @@
     </p:spTree>
     <p:extLst>
       <p:ext uri="{BB962C8B-B14F-4D97-AF65-F5344CB8AC3E}">
-        <p14:creationId xmlns:p14="http://schemas.microsoft.com/office/powerpoint/2010/main" val="1703475006"/>
+        <p14:creationId xmlns:p14="http://schemas.microsoft.com/office/powerpoint/2010/main" val="901958966"/>
       </p:ext>
     </p:extLst>
   </p:cSld>
@@ -27671,7 +27581,7 @@
           <p:cNvPr id="1" name="">
             <a:extLst xmlns:a="http://schemas.openxmlformats.org/drawingml/2006/main">
               <a:ext uri="{FF2B5EF4-FFF2-40B4-BE49-F238E27FC236}">
-                <a16:creationId xmlns:a16="http://schemas.microsoft.com/office/drawing/2014/main" id="{11F66EAE-4999-48A4-8458-67974A9F7704}"/>
+                <a16:creationId xmlns:a16="http://schemas.microsoft.com/office/drawing/2014/main" id="{36B2894F-D72D-4A0E-961C-542D79DFAEF8}"/>
               </a:ext>
             </a:extLst>
           </p:cNvPr>
@@ -27704,7 +27614,7 @@
           <p:cNvPr id="2" name="">
             <a:extLst xmlns:a="http://schemas.openxmlformats.org/drawingml/2006/main">
               <a:ext uri="{FF2B5EF4-FFF2-40B4-BE49-F238E27FC236}">
-                <a16:creationId xmlns:a16="http://schemas.microsoft.com/office/drawing/2014/main" id="{B353399C-2A44-4A86-AA08-9FA4652F754D}"/>
+                <a16:creationId xmlns:a16="http://schemas.microsoft.com/office/drawing/2014/main" id="{6F9153E5-3A50-44E3-AF88-F11F8371479F}"/>
               </a:ext>
             </a:extLst>
           </p:cNvPr>
@@ -27760,7 +27670,7 @@
           <p:cNvPr id="3" name="">
             <a:extLst xmlns:a="http://schemas.openxmlformats.org/drawingml/2006/main">
               <a:ext uri="{FF2B5EF4-FFF2-40B4-BE49-F238E27FC236}">
-                <a16:creationId xmlns:a16="http://schemas.microsoft.com/office/drawing/2014/main" id="{56306C1F-E73C-43E8-87C3-D243C3AE32A6}"/>
+                <a16:creationId xmlns:a16="http://schemas.microsoft.com/office/drawing/2014/main" id="{FA782234-5DF8-47FE-A0EE-3FC6AA8AF4D6}"/>
               </a:ext>
             </a:extLst>
           </p:cNvPr>
@@ -27816,7 +27726,7 @@
           <p:cNvPr id="4" name="">
             <a:extLst xmlns:a="http://schemas.openxmlformats.org/drawingml/2006/main">
               <a:ext uri="{FF2B5EF4-FFF2-40B4-BE49-F238E27FC236}">
-                <a16:creationId xmlns:a16="http://schemas.microsoft.com/office/drawing/2014/main" id="{E15DD402-AA7B-4680-AF58-FB10E254267F}"/>
+                <a16:creationId xmlns:a16="http://schemas.microsoft.com/office/drawing/2014/main" id="{BEA044C6-48D5-459A-9D62-705B74E96A61}"/>
               </a:ext>
             </a:extLst>
           </p:cNvPr>
@@ -27851,7 +27761,7 @@
           <p:cNvPr id="5" name="">
             <a:extLst xmlns:a="http://schemas.openxmlformats.org/drawingml/2006/main">
               <a:ext uri="{FF2B5EF4-FFF2-40B4-BE49-F238E27FC236}">
-                <a16:creationId xmlns:a16="http://schemas.microsoft.com/office/drawing/2014/main" id="{585695F6-D545-402A-B5AF-60177582C614}"/>
+                <a16:creationId xmlns:a16="http://schemas.microsoft.com/office/drawing/2014/main" id="{C782C988-F0EB-4E67-BD6B-84B85BCF3D8A}"/>
               </a:ext>
             </a:extLst>
           </p:cNvPr>
@@ -27907,7 +27817,7 @@
           <p:cNvPr id="6" name="">
             <a:extLst xmlns:a="http://schemas.openxmlformats.org/drawingml/2006/main">
               <a:ext uri="{FF2B5EF4-FFF2-40B4-BE49-F238E27FC236}">
-                <a16:creationId xmlns:a16="http://schemas.microsoft.com/office/drawing/2014/main" id="{37DA0DA7-6895-4037-95C1-C5639C68ED86}"/>
+                <a16:creationId xmlns:a16="http://schemas.microsoft.com/office/drawing/2014/main" id="{F9492AF4-1A9A-4DF7-A59E-4AD8D1147E43}"/>
               </a:ext>
             </a:extLst>
           </p:cNvPr>
@@ -27942,7 +27852,7 @@
           <p:cNvPr id="7" name="">
             <a:extLst xmlns:a="http://schemas.openxmlformats.org/drawingml/2006/main">
               <a:ext uri="{FF2B5EF4-FFF2-40B4-BE49-F238E27FC236}">
-                <a16:creationId xmlns:a16="http://schemas.microsoft.com/office/drawing/2014/main" id="{367D085F-468F-4825-8F7A-0760B88D9213}"/>
+                <a16:creationId xmlns:a16="http://schemas.microsoft.com/office/drawing/2014/main" id="{367CC776-AE78-4A42-9030-DC5F65ECA0DB}"/>
               </a:ext>
             </a:extLst>
           </p:cNvPr>
@@ -27998,7 +27908,7 @@
           <p:cNvPr id="8" name="">
             <a:extLst xmlns:a="http://schemas.openxmlformats.org/drawingml/2006/main">
               <a:ext uri="{FF2B5EF4-FFF2-40B4-BE49-F238E27FC236}">
-                <a16:creationId xmlns:a16="http://schemas.microsoft.com/office/drawing/2014/main" id="{C9467C94-806D-4D9B-90BB-4B632C417335}"/>
+                <a16:creationId xmlns:a16="http://schemas.microsoft.com/office/drawing/2014/main" id="{29483160-FBB8-48D1-BDE2-4B2B2FBBE5D4}"/>
               </a:ext>
             </a:extLst>
           </p:cNvPr>
@@ -28033,7 +27943,7 @@
           <p:cNvPr id="9" name="">
             <a:extLst xmlns:a="http://schemas.openxmlformats.org/drawingml/2006/main">
               <a:ext uri="{FF2B5EF4-FFF2-40B4-BE49-F238E27FC236}">
-                <a16:creationId xmlns:a16="http://schemas.microsoft.com/office/drawing/2014/main" id="{29B81001-3657-4827-BB63-E8A9F1DD63DF}"/>
+                <a16:creationId xmlns:a16="http://schemas.microsoft.com/office/drawing/2014/main" id="{7EAE3952-9916-487E-9007-192B86525020}"/>
               </a:ext>
             </a:extLst>
           </p:cNvPr>
@@ -28089,7 +27999,7 @@
           <p:cNvPr id="10" name="">
             <a:extLst xmlns:a="http://schemas.openxmlformats.org/drawingml/2006/main">
               <a:ext uri="{FF2B5EF4-FFF2-40B4-BE49-F238E27FC236}">
-                <a16:creationId xmlns:a16="http://schemas.microsoft.com/office/drawing/2014/main" id="{88D7DD58-33F5-45F3-AF90-E2BFC0E8D4F2}"/>
+                <a16:creationId xmlns:a16="http://schemas.microsoft.com/office/drawing/2014/main" id="{DFFADF56-6A4C-4F30-BB9F-CE367E35F792}"/>
               </a:ext>
             </a:extLst>
           </p:cNvPr>
@@ -28124,7 +28034,7 @@
           <p:cNvPr id="11" name="">
             <a:extLst xmlns:a="http://schemas.openxmlformats.org/drawingml/2006/main">
               <a:ext uri="{FF2B5EF4-FFF2-40B4-BE49-F238E27FC236}">
-                <a16:creationId xmlns:a16="http://schemas.microsoft.com/office/drawing/2014/main" id="{7F818288-4B2C-48F2-B89A-6387945B2C8E}"/>
+                <a16:creationId xmlns:a16="http://schemas.microsoft.com/office/drawing/2014/main" id="{9142FC8C-F181-4C16-899D-F6B08CABBCCD}"/>
               </a:ext>
             </a:extLst>
           </p:cNvPr>
@@ -28180,7 +28090,7 @@
           <p:cNvPr id="12" name="">
             <a:extLst xmlns:a="http://schemas.openxmlformats.org/drawingml/2006/main">
               <a:ext uri="{FF2B5EF4-FFF2-40B4-BE49-F238E27FC236}">
-                <a16:creationId xmlns:a16="http://schemas.microsoft.com/office/drawing/2014/main" id="{34CE0143-85FD-420D-840F-228BA03BAF4C}"/>
+                <a16:creationId xmlns:a16="http://schemas.microsoft.com/office/drawing/2014/main" id="{CD4411F5-B731-4D5E-A05F-B4B8A3FEEAC9}"/>
               </a:ext>
             </a:extLst>
           </p:cNvPr>
@@ -28215,7 +28125,7 @@
           <p:cNvPr id="13" name="">
             <a:extLst xmlns:a="http://schemas.openxmlformats.org/drawingml/2006/main">
               <a:ext uri="{FF2B5EF4-FFF2-40B4-BE49-F238E27FC236}">
-                <a16:creationId xmlns:a16="http://schemas.microsoft.com/office/drawing/2014/main" id="{8E2BDAC8-C722-408F-8806-E7F8F4E76825}"/>
+                <a16:creationId xmlns:a16="http://schemas.microsoft.com/office/drawing/2014/main" id="{BC658890-9C72-4500-A3C4-0A5E1BE6E1FD}"/>
               </a:ext>
             </a:extLst>
           </p:cNvPr>
@@ -28271,7 +28181,7 @@
           <p:cNvPr id="14" name="">
             <a:extLst xmlns:a="http://schemas.openxmlformats.org/drawingml/2006/main">
               <a:ext uri="{FF2B5EF4-FFF2-40B4-BE49-F238E27FC236}">
-                <a16:creationId xmlns:a16="http://schemas.microsoft.com/office/drawing/2014/main" id="{CADF7CFB-341B-493F-A96A-6400B77AA91E}"/>
+                <a16:creationId xmlns:a16="http://schemas.microsoft.com/office/drawing/2014/main" id="{98CBBCAA-CDE5-4655-AABA-3151CA6BADA9}"/>
               </a:ext>
             </a:extLst>
           </p:cNvPr>
@@ -28306,7 +28216,7 @@
           <p:cNvPr id="15" name="">
             <a:extLst xmlns:a="http://schemas.openxmlformats.org/drawingml/2006/main">
               <a:ext uri="{FF2B5EF4-FFF2-40B4-BE49-F238E27FC236}">
-                <a16:creationId xmlns:a16="http://schemas.microsoft.com/office/drawing/2014/main" id="{7F2C20EF-AAD7-480F-B8DE-B93C1D58489B}"/>
+                <a16:creationId xmlns:a16="http://schemas.microsoft.com/office/drawing/2014/main" id="{424EDC83-3796-4F89-8C63-6A3271B82D2D}"/>
               </a:ext>
             </a:extLst>
           </p:cNvPr>
@@ -28362,7 +28272,7 @@
           <p:cNvPr id="16" name="">
             <a:extLst xmlns:a="http://schemas.openxmlformats.org/drawingml/2006/main">
               <a:ext uri="{FF2B5EF4-FFF2-40B4-BE49-F238E27FC236}">
-                <a16:creationId xmlns:a16="http://schemas.microsoft.com/office/drawing/2014/main" id="{7D5105F4-6C70-4CD9-8207-3BC002259236}"/>
+                <a16:creationId xmlns:a16="http://schemas.microsoft.com/office/drawing/2014/main" id="{717766AE-0698-4C98-9825-DCAA021B596F}"/>
               </a:ext>
             </a:extLst>
           </p:cNvPr>
@@ -28397,7 +28307,7 @@
           <p:cNvPr id="17" name="">
             <a:extLst xmlns:a="http://schemas.openxmlformats.org/drawingml/2006/main">
               <a:ext uri="{FF2B5EF4-FFF2-40B4-BE49-F238E27FC236}">
-                <a16:creationId xmlns:a16="http://schemas.microsoft.com/office/drawing/2014/main" id="{FF8FEC02-212C-4C21-BC08-EF087ED1301D}"/>
+                <a16:creationId xmlns:a16="http://schemas.microsoft.com/office/drawing/2014/main" id="{DB45C1B6-5E13-4221-A09A-E9517D083FC9}"/>
               </a:ext>
             </a:extLst>
           </p:cNvPr>
@@ -28453,7 +28363,7 @@
           <p:cNvPr id="18" name="">
             <a:extLst xmlns:a="http://schemas.openxmlformats.org/drawingml/2006/main">
               <a:ext uri="{FF2B5EF4-FFF2-40B4-BE49-F238E27FC236}">
-                <a16:creationId xmlns:a16="http://schemas.microsoft.com/office/drawing/2014/main" id="{D24BB6A0-9ED5-4B7B-86CC-13197B85A126}"/>
+                <a16:creationId xmlns:a16="http://schemas.microsoft.com/office/drawing/2014/main" id="{AAE2A528-0FD5-4A64-88B4-E63D180AB083}"/>
               </a:ext>
             </a:extLst>
           </p:cNvPr>
@@ -28488,7 +28398,7 @@
           <p:cNvPr id="19" name="">
             <a:extLst xmlns:a="http://schemas.openxmlformats.org/drawingml/2006/main">
               <a:ext uri="{FF2B5EF4-FFF2-40B4-BE49-F238E27FC236}">
-                <a16:creationId xmlns:a16="http://schemas.microsoft.com/office/drawing/2014/main" id="{651CA4A0-B405-4E50-BF4D-0729E2E0A834}"/>
+                <a16:creationId xmlns:a16="http://schemas.microsoft.com/office/drawing/2014/main" id="{430EAB6D-A526-447E-B13F-192B2A1A14F6}"/>
               </a:ext>
             </a:extLst>
           </p:cNvPr>
@@ -28544,7 +28454,7 @@
           <p:cNvPr id="20" name="">
             <a:extLst xmlns:a="http://schemas.openxmlformats.org/drawingml/2006/main">
               <a:ext uri="{FF2B5EF4-FFF2-40B4-BE49-F238E27FC236}">
-                <a16:creationId xmlns:a16="http://schemas.microsoft.com/office/drawing/2014/main" id="{40DF0453-FC88-429B-B10C-83A08530701D}"/>
+                <a16:creationId xmlns:a16="http://schemas.microsoft.com/office/drawing/2014/main" id="{233B701D-547A-4A47-9BC4-B872CEE92C1B}"/>
               </a:ext>
             </a:extLst>
           </p:cNvPr>
@@ -28579,7 +28489,7 @@
           <p:cNvPr id="21" name="">
             <a:extLst xmlns:a="http://schemas.openxmlformats.org/drawingml/2006/main">
               <a:ext uri="{FF2B5EF4-FFF2-40B4-BE49-F238E27FC236}">
-                <a16:creationId xmlns:a16="http://schemas.microsoft.com/office/drawing/2014/main" id="{DF6DF520-5F4B-4B65-B110-DB241CBFA062}"/>
+                <a16:creationId xmlns:a16="http://schemas.microsoft.com/office/drawing/2014/main" id="{B1D8FB10-999F-4A23-926E-489AB9865B8B}"/>
               </a:ext>
             </a:extLst>
           </p:cNvPr>
@@ -28635,7 +28545,7 @@
           <p:cNvPr id="22" name="">
             <a:extLst xmlns:a="http://schemas.openxmlformats.org/drawingml/2006/main">
               <a:ext uri="{FF2B5EF4-FFF2-40B4-BE49-F238E27FC236}">
-                <a16:creationId xmlns:a16="http://schemas.microsoft.com/office/drawing/2014/main" id="{96F74CB6-8A9D-4D74-9FB7-D4AB4E8B87E9}"/>
+                <a16:creationId xmlns:a16="http://schemas.microsoft.com/office/drawing/2014/main" id="{C071FF22-2B7C-4794-8FAB-6E7B1F66015B}"/>
               </a:ext>
             </a:extLst>
           </p:cNvPr>
@@ -28689,7 +28599,7 @@
     </p:spTree>
     <p:extLst>
       <p:ext uri="{BB962C8B-B14F-4D97-AF65-F5344CB8AC3E}">
-        <p14:creationId xmlns:p14="http://schemas.microsoft.com/office/powerpoint/2010/main" val="1405420778"/>
+        <p14:creationId xmlns:p14="http://schemas.microsoft.com/office/powerpoint/2010/main" val="1847784790"/>
       </p:ext>
     </p:extLst>
   </p:cSld>
@@ -28720,7 +28630,7 @@
           <p:cNvPr id="1" name="">
             <a:extLst xmlns:a="http://schemas.openxmlformats.org/drawingml/2006/main">
               <a:ext uri="{FF2B5EF4-FFF2-40B4-BE49-F238E27FC236}">
-                <a16:creationId xmlns:a16="http://schemas.microsoft.com/office/drawing/2014/main" id="{93FF6027-E0FF-4FC7-935D-D43347F956FC}"/>
+                <a16:creationId xmlns:a16="http://schemas.microsoft.com/office/drawing/2014/main" id="{726EF0BC-6D27-42E9-98FD-7EB1F1D2ADA3}"/>
               </a:ext>
             </a:extLst>
           </p:cNvPr>
@@ -28753,7 +28663,7 @@
           <p:cNvPr id="2" name="">
             <a:extLst xmlns:a="http://schemas.openxmlformats.org/drawingml/2006/main">
               <a:ext uri="{FF2B5EF4-FFF2-40B4-BE49-F238E27FC236}">
-                <a16:creationId xmlns:a16="http://schemas.microsoft.com/office/drawing/2014/main" id="{98173DA9-293A-40A7-B7FD-CAF6B8994ECE}"/>
+                <a16:creationId xmlns:a16="http://schemas.microsoft.com/office/drawing/2014/main" id="{6FB051D2-2E62-4CD0-8901-EE1584E88C3A}"/>
               </a:ext>
             </a:extLst>
           </p:cNvPr>
@@ -28809,7 +28719,7 @@
           <p:cNvPr id="3" name="">
             <a:extLst xmlns:a="http://schemas.openxmlformats.org/drawingml/2006/main">
               <a:ext uri="{FF2B5EF4-FFF2-40B4-BE49-F238E27FC236}">
-                <a16:creationId xmlns:a16="http://schemas.microsoft.com/office/drawing/2014/main" id="{56B5BA21-15C5-4A20-B1CC-E7AF6C0B573F}"/>
+                <a16:creationId xmlns:a16="http://schemas.microsoft.com/office/drawing/2014/main" id="{28E66A01-7BA7-4E40-842D-44B5E0FF496A}"/>
               </a:ext>
             </a:extLst>
           </p:cNvPr>
@@ -28869,19 +28779,13 @@
           <p:nvPr/>
         </p:nvPicPr>
         <p:blipFill>
-          <a:blip xmlns:r="http://schemas.openxmlformats.org/officeDocument/2006/relationships" xmlns:a="http://schemas.openxmlformats.org/drawingml/2006/main" r:embed="R6227102c8ac444bf">
-            <a:extLst>
-              <a:ext uri="{96DAC541-7B7A-43D3-8B79-37D633B846F1}">
-                <asvg:svgBlip xmlns:asvg="http://schemas.microsoft.com/office/drawing/2016/SVG/main" r:embed="Rab16decb016b4c6f"/>
-              </a:ext>
-            </a:extLst>
-          </a:blip>
+          <a:blip xmlns:r="http://schemas.openxmlformats.org/officeDocument/2006/relationships" xmlns:a="http://schemas.openxmlformats.org/drawingml/2006/main" r:embed="R5f78814e126c40da"/>
           <a:stretch xmlns:a="http://schemas.openxmlformats.org/drawingml/2006/main"/>
         </p:blipFill>
         <p:spPr>
           <a:xfrm xmlns:a="http://schemas.openxmlformats.org/drawingml/2006/main">
-            <a:off x="6858000" y="1352550"/>
-            <a:ext cx="4286250" cy="2000250"/>
+            <a:off x="6858000" y="1969547"/>
+            <a:ext cx="4286250" cy="766257"/>
           </a:xfrm>
           <a:prstGeom xmlns:a="http://schemas.openxmlformats.org/drawingml/2006/main" prst="rect">
             <a:avLst/>
@@ -28893,7 +28797,7 @@
           <p:cNvPr id="5" name="">
             <a:extLst xmlns:a="http://schemas.openxmlformats.org/drawingml/2006/main">
               <a:ext uri="{FF2B5EF4-FFF2-40B4-BE49-F238E27FC236}">
-                <a16:creationId xmlns:a16="http://schemas.microsoft.com/office/drawing/2014/main" id="{D8DC2FE1-8EE9-4852-B163-345688552228}"/>
+                <a16:creationId xmlns:a16="http://schemas.microsoft.com/office/drawing/2014/main" id="{47AFB52E-2CA0-4B0A-B95C-F28BE1931C91}"/>
               </a:ext>
             </a:extLst>
           </p:cNvPr>
@@ -28928,7 +28832,7 @@
           <p:cNvPr id="6" name="">
             <a:extLst xmlns:a="http://schemas.openxmlformats.org/drawingml/2006/main">
               <a:ext uri="{FF2B5EF4-FFF2-40B4-BE49-F238E27FC236}">
-                <a16:creationId xmlns:a16="http://schemas.microsoft.com/office/drawing/2014/main" id="{845ACD71-8D5F-4624-B92E-CB05685BF7FD}"/>
+                <a16:creationId xmlns:a16="http://schemas.microsoft.com/office/drawing/2014/main" id="{7577ADB3-5C4B-4A65-9884-F01A1478ADC8}"/>
               </a:ext>
             </a:extLst>
           </p:cNvPr>
@@ -28984,7 +28888,7 @@
           <p:cNvPr id="7" name="">
             <a:extLst xmlns:a="http://schemas.openxmlformats.org/drawingml/2006/main">
               <a:ext uri="{FF2B5EF4-FFF2-40B4-BE49-F238E27FC236}">
-                <a16:creationId xmlns:a16="http://schemas.microsoft.com/office/drawing/2014/main" id="{3F62F14B-0048-4E29-92A6-6676E974888D}"/>
+                <a16:creationId xmlns:a16="http://schemas.microsoft.com/office/drawing/2014/main" id="{773F5F2A-0AAA-4068-A8E0-D1F4F56F4B99}"/>
               </a:ext>
             </a:extLst>
           </p:cNvPr>
@@ -29019,7 +28923,7 @@
           <p:cNvPr id="8" name="">
             <a:extLst xmlns:a="http://schemas.openxmlformats.org/drawingml/2006/main">
               <a:ext uri="{FF2B5EF4-FFF2-40B4-BE49-F238E27FC236}">
-                <a16:creationId xmlns:a16="http://schemas.microsoft.com/office/drawing/2014/main" id="{6D12DB66-B8F6-45D2-9885-1B0BA1C4318A}"/>
+                <a16:creationId xmlns:a16="http://schemas.microsoft.com/office/drawing/2014/main" id="{03D691AA-290C-4749-A3D8-6A2555123961}"/>
               </a:ext>
             </a:extLst>
           </p:cNvPr>
@@ -29075,7 +28979,7 @@
           <p:cNvPr id="9" name="">
             <a:extLst xmlns:a="http://schemas.openxmlformats.org/drawingml/2006/main">
               <a:ext uri="{FF2B5EF4-FFF2-40B4-BE49-F238E27FC236}">
-                <a16:creationId xmlns:a16="http://schemas.microsoft.com/office/drawing/2014/main" id="{6A0B0A59-3F77-47B5-9776-EB396C32D253}"/>
+                <a16:creationId xmlns:a16="http://schemas.microsoft.com/office/drawing/2014/main" id="{42904C24-EF8D-4D26-9685-BA08D446425D}"/>
               </a:ext>
             </a:extLst>
           </p:cNvPr>
@@ -29110,7 +29014,7 @@
           <p:cNvPr id="10" name="">
             <a:extLst xmlns:a="http://schemas.openxmlformats.org/drawingml/2006/main">
               <a:ext uri="{FF2B5EF4-FFF2-40B4-BE49-F238E27FC236}">
-                <a16:creationId xmlns:a16="http://schemas.microsoft.com/office/drawing/2014/main" id="{CD8F67CE-9A20-4378-A1A8-CEFF1A091615}"/>
+                <a16:creationId xmlns:a16="http://schemas.microsoft.com/office/drawing/2014/main" id="{75183960-833B-4709-BE87-6E777029883D}"/>
               </a:ext>
             </a:extLst>
           </p:cNvPr>
@@ -29166,7 +29070,7 @@
           <p:cNvPr id="11" name="">
             <a:extLst xmlns:a="http://schemas.openxmlformats.org/drawingml/2006/main">
               <a:ext uri="{FF2B5EF4-FFF2-40B4-BE49-F238E27FC236}">
-                <a16:creationId xmlns:a16="http://schemas.microsoft.com/office/drawing/2014/main" id="{0795139B-1B96-4254-97E0-9E95F68BFC91}"/>
+                <a16:creationId xmlns:a16="http://schemas.microsoft.com/office/drawing/2014/main" id="{39B2315D-9052-4FA1-A869-C8B8A8037257}"/>
               </a:ext>
             </a:extLst>
           </p:cNvPr>
@@ -29201,7 +29105,7 @@
           <p:cNvPr id="12" name="">
             <a:extLst xmlns:a="http://schemas.openxmlformats.org/drawingml/2006/main">
               <a:ext uri="{FF2B5EF4-FFF2-40B4-BE49-F238E27FC236}">
-                <a16:creationId xmlns:a16="http://schemas.microsoft.com/office/drawing/2014/main" id="{E7B5086D-6BE5-475A-B93C-1D0CA72F6E6F}"/>
+                <a16:creationId xmlns:a16="http://schemas.microsoft.com/office/drawing/2014/main" id="{F68E5D7C-9FD5-452E-8E12-DE65C8E542F5}"/>
               </a:ext>
             </a:extLst>
           </p:cNvPr>
@@ -29257,7 +29161,7 @@
           <p:cNvPr id="13" name="">
             <a:extLst xmlns:a="http://schemas.openxmlformats.org/drawingml/2006/main">
               <a:ext uri="{FF2B5EF4-FFF2-40B4-BE49-F238E27FC236}">
-                <a16:creationId xmlns:a16="http://schemas.microsoft.com/office/drawing/2014/main" id="{45B4B4E4-672D-4316-BDBC-09C306812615}"/>
+                <a16:creationId xmlns:a16="http://schemas.microsoft.com/office/drawing/2014/main" id="{84B7D268-79F1-4420-A34C-307C3D95DB6E}"/>
               </a:ext>
             </a:extLst>
           </p:cNvPr>
@@ -29292,7 +29196,7 @@
           <p:cNvPr id="14" name="">
             <a:extLst xmlns:a="http://schemas.openxmlformats.org/drawingml/2006/main">
               <a:ext uri="{FF2B5EF4-FFF2-40B4-BE49-F238E27FC236}">
-                <a16:creationId xmlns:a16="http://schemas.microsoft.com/office/drawing/2014/main" id="{6FEA51B5-E47C-4704-AFDA-43A535CC49D3}"/>
+                <a16:creationId xmlns:a16="http://schemas.microsoft.com/office/drawing/2014/main" id="{849ED8E9-8429-4477-A853-B5EF70A344DA}"/>
               </a:ext>
             </a:extLst>
           </p:cNvPr>
@@ -29348,7 +29252,7 @@
           <p:cNvPr id="15" name="">
             <a:extLst xmlns:a="http://schemas.openxmlformats.org/drawingml/2006/main">
               <a:ext uri="{FF2B5EF4-FFF2-40B4-BE49-F238E27FC236}">
-                <a16:creationId xmlns:a16="http://schemas.microsoft.com/office/drawing/2014/main" id="{7A04CBC4-BFD8-40CF-831C-35E6236EFF65}"/>
+                <a16:creationId xmlns:a16="http://schemas.microsoft.com/office/drawing/2014/main" id="{01B3EC23-98CA-436B-A4E8-9A9C28551866}"/>
               </a:ext>
             </a:extLst>
           </p:cNvPr>
@@ -29402,7 +29306,7 @@
     </p:spTree>
     <p:extLst>
       <p:ext uri="{BB962C8B-B14F-4D97-AF65-F5344CB8AC3E}">
-        <p14:creationId xmlns:p14="http://schemas.microsoft.com/office/powerpoint/2010/main" val="1194074850"/>
+        <p14:creationId xmlns:p14="http://schemas.microsoft.com/office/powerpoint/2010/main" val="751336941"/>
       </p:ext>
     </p:extLst>
   </p:cSld>
@@ -29433,7 +29337,7 @@
           <p:cNvPr id="1" name="">
             <a:extLst xmlns:a="http://schemas.openxmlformats.org/drawingml/2006/main">
               <a:ext uri="{FF2B5EF4-FFF2-40B4-BE49-F238E27FC236}">
-                <a16:creationId xmlns:a16="http://schemas.microsoft.com/office/drawing/2014/main" id="{45BA673C-44A4-46E6-AF84-765027C0EEB6}"/>
+                <a16:creationId xmlns:a16="http://schemas.microsoft.com/office/drawing/2014/main" id="{AFFB769A-970E-4F84-884E-13AD1CBD5B3A}"/>
               </a:ext>
             </a:extLst>
           </p:cNvPr>
@@ -29466,7 +29370,7 @@
           <p:cNvPr id="2" name="">
             <a:extLst xmlns:a="http://schemas.openxmlformats.org/drawingml/2006/main">
               <a:ext uri="{FF2B5EF4-FFF2-40B4-BE49-F238E27FC236}">
-                <a16:creationId xmlns:a16="http://schemas.microsoft.com/office/drawing/2014/main" id="{CE3D31CE-67ED-4214-9C62-D67214E66199}"/>
+                <a16:creationId xmlns:a16="http://schemas.microsoft.com/office/drawing/2014/main" id="{864E1FD7-DF9C-4B42-9E27-3E700758DD2C}"/>
               </a:ext>
             </a:extLst>
           </p:cNvPr>
@@ -29522,7 +29426,7 @@
           <p:cNvPr id="3" name="">
             <a:extLst xmlns:a="http://schemas.openxmlformats.org/drawingml/2006/main">
               <a:ext uri="{FF2B5EF4-FFF2-40B4-BE49-F238E27FC236}">
-                <a16:creationId xmlns:a16="http://schemas.microsoft.com/office/drawing/2014/main" id="{0A713E23-D7DB-4C1D-AB3B-8589D8ED289C}"/>
+                <a16:creationId xmlns:a16="http://schemas.microsoft.com/office/drawing/2014/main" id="{6D4CCECD-02E0-4CA7-9D2E-E12C4259EB94}"/>
               </a:ext>
             </a:extLst>
           </p:cNvPr>
@@ -29578,7 +29482,7 @@
           <p:cNvPr id="4" name="">
             <a:extLst xmlns:a="http://schemas.openxmlformats.org/drawingml/2006/main">
               <a:ext uri="{FF2B5EF4-FFF2-40B4-BE49-F238E27FC236}">
-                <a16:creationId xmlns:a16="http://schemas.microsoft.com/office/drawing/2014/main" id="{0C7D627F-3CF4-4342-9A49-F4ABD26A4354}"/>
+                <a16:creationId xmlns:a16="http://schemas.microsoft.com/office/drawing/2014/main" id="{B4CC6C41-11F4-4DA4-B540-25226CE686A2}"/>
               </a:ext>
             </a:extLst>
           </p:cNvPr>
@@ -29613,7 +29517,7 @@
           <p:cNvPr id="5" name="">
             <a:extLst xmlns:a="http://schemas.openxmlformats.org/drawingml/2006/main">
               <a:ext uri="{FF2B5EF4-FFF2-40B4-BE49-F238E27FC236}">
-                <a16:creationId xmlns:a16="http://schemas.microsoft.com/office/drawing/2014/main" id="{0CE72F9F-04FE-4018-840A-3B9EAD00B659}"/>
+                <a16:creationId xmlns:a16="http://schemas.microsoft.com/office/drawing/2014/main" id="{13C78DCD-48BE-424E-A0B7-BDBBB8288E19}"/>
               </a:ext>
             </a:extLst>
           </p:cNvPr>
@@ -29669,7 +29573,7 @@
           <p:cNvPr id="6" name="">
             <a:extLst xmlns:a="http://schemas.openxmlformats.org/drawingml/2006/main">
               <a:ext uri="{FF2B5EF4-FFF2-40B4-BE49-F238E27FC236}">
-                <a16:creationId xmlns:a16="http://schemas.microsoft.com/office/drawing/2014/main" id="{F206B820-3E20-4A1D-8DCD-0E0B1823E751}"/>
+                <a16:creationId xmlns:a16="http://schemas.microsoft.com/office/drawing/2014/main" id="{25BA83CD-EADB-4831-BF04-F8CA83E0CE63}"/>
               </a:ext>
             </a:extLst>
           </p:cNvPr>
@@ -29704,7 +29608,7 @@
           <p:cNvPr id="7" name="">
             <a:extLst xmlns:a="http://schemas.openxmlformats.org/drawingml/2006/main">
               <a:ext uri="{FF2B5EF4-FFF2-40B4-BE49-F238E27FC236}">
-                <a16:creationId xmlns:a16="http://schemas.microsoft.com/office/drawing/2014/main" id="{CF2AB22C-4066-410F-8828-37128C7AE088}"/>
+                <a16:creationId xmlns:a16="http://schemas.microsoft.com/office/drawing/2014/main" id="{5416E747-E09A-476A-888D-A3436285398C}"/>
               </a:ext>
             </a:extLst>
           </p:cNvPr>
@@ -29760,7 +29664,7 @@
           <p:cNvPr id="8" name="">
             <a:extLst xmlns:a="http://schemas.openxmlformats.org/drawingml/2006/main">
               <a:ext uri="{FF2B5EF4-FFF2-40B4-BE49-F238E27FC236}">
-                <a16:creationId xmlns:a16="http://schemas.microsoft.com/office/drawing/2014/main" id="{F22C51D4-5A5E-405B-8B1E-1A3FC3343870}"/>
+                <a16:creationId xmlns:a16="http://schemas.microsoft.com/office/drawing/2014/main" id="{36F1E578-97B6-4FDC-9237-BDDBEF3CEFD4}"/>
               </a:ext>
             </a:extLst>
           </p:cNvPr>
@@ -29795,7 +29699,7 @@
           <p:cNvPr id="9" name="">
             <a:extLst xmlns:a="http://schemas.openxmlformats.org/drawingml/2006/main">
               <a:ext uri="{FF2B5EF4-FFF2-40B4-BE49-F238E27FC236}">
-                <a16:creationId xmlns:a16="http://schemas.microsoft.com/office/drawing/2014/main" id="{534E3AB5-800F-4943-81DF-7E2BEBC6E07E}"/>
+                <a16:creationId xmlns:a16="http://schemas.microsoft.com/office/drawing/2014/main" id="{FD9AD5CF-A10F-4A96-9F7C-9A2FB9F41B22}"/>
               </a:ext>
             </a:extLst>
           </p:cNvPr>
@@ -29851,7 +29755,7 @@
           <p:cNvPr id="10" name="">
             <a:extLst xmlns:a="http://schemas.openxmlformats.org/drawingml/2006/main">
               <a:ext uri="{FF2B5EF4-FFF2-40B4-BE49-F238E27FC236}">
-                <a16:creationId xmlns:a16="http://schemas.microsoft.com/office/drawing/2014/main" id="{046E116C-A4E4-43CF-A364-7E0FE401C99D}"/>
+                <a16:creationId xmlns:a16="http://schemas.microsoft.com/office/drawing/2014/main" id="{409E5F75-0905-450D-BBF4-EB597F8E4762}"/>
               </a:ext>
             </a:extLst>
           </p:cNvPr>
@@ -29886,7 +29790,7 @@
           <p:cNvPr id="11" name="">
             <a:extLst xmlns:a="http://schemas.openxmlformats.org/drawingml/2006/main">
               <a:ext uri="{FF2B5EF4-FFF2-40B4-BE49-F238E27FC236}">
-                <a16:creationId xmlns:a16="http://schemas.microsoft.com/office/drawing/2014/main" id="{089C2E33-3402-4B13-808C-1249A7B4A9AF}"/>
+                <a16:creationId xmlns:a16="http://schemas.microsoft.com/office/drawing/2014/main" id="{E4014392-1689-4841-9941-4FCEEBA1C302}"/>
               </a:ext>
             </a:extLst>
           </p:cNvPr>
@@ -29942,7 +29846,7 @@
           <p:cNvPr id="12" name="">
             <a:extLst xmlns:a="http://schemas.openxmlformats.org/drawingml/2006/main">
               <a:ext uri="{FF2B5EF4-FFF2-40B4-BE49-F238E27FC236}">
-                <a16:creationId xmlns:a16="http://schemas.microsoft.com/office/drawing/2014/main" id="{CE1D674B-6059-4ACE-A3F7-79C68FEAA119}"/>
+                <a16:creationId xmlns:a16="http://schemas.microsoft.com/office/drawing/2014/main" id="{ABD2EE63-AC02-447D-BE6D-577AF75AF330}"/>
               </a:ext>
             </a:extLst>
           </p:cNvPr>
@@ -29996,7 +29900,7 @@
     </p:spTree>
     <p:extLst>
       <p:ext uri="{BB962C8B-B14F-4D97-AF65-F5344CB8AC3E}">
-        <p14:creationId xmlns:p14="http://schemas.microsoft.com/office/powerpoint/2010/main" val="686951799"/>
+        <p14:creationId xmlns:p14="http://schemas.microsoft.com/office/powerpoint/2010/main" val="7932293"/>
       </p:ext>
     </p:extLst>
   </p:cSld>
@@ -30027,7 +29931,7 @@
           <p:cNvPr id="1" name="">
             <a:extLst xmlns:a="http://schemas.openxmlformats.org/drawingml/2006/main">
               <a:ext uri="{FF2B5EF4-FFF2-40B4-BE49-F238E27FC236}">
-                <a16:creationId xmlns:a16="http://schemas.microsoft.com/office/drawing/2014/main" id="{7D04B665-72EE-4B12-AF53-7D3DD183D878}"/>
+                <a16:creationId xmlns:a16="http://schemas.microsoft.com/office/drawing/2014/main" id="{DD61DCDC-F6C7-4964-B3EA-36965E43CFAB}"/>
               </a:ext>
             </a:extLst>
           </p:cNvPr>
@@ -30060,7 +29964,7 @@
           <p:cNvPr id="2" name="">
             <a:extLst xmlns:a="http://schemas.openxmlformats.org/drawingml/2006/main">
               <a:ext uri="{FF2B5EF4-FFF2-40B4-BE49-F238E27FC236}">
-                <a16:creationId xmlns:a16="http://schemas.microsoft.com/office/drawing/2014/main" id="{62760F8B-3B8B-45A2-9654-AA79F5E3E238}"/>
+                <a16:creationId xmlns:a16="http://schemas.microsoft.com/office/drawing/2014/main" id="{001AE0DA-2DB6-4C39-A495-E0A704249956}"/>
               </a:ext>
             </a:extLst>
           </p:cNvPr>
@@ -30116,7 +30020,7 @@
           <p:cNvPr id="3" name="">
             <a:extLst xmlns:a="http://schemas.openxmlformats.org/drawingml/2006/main">
               <a:ext uri="{FF2B5EF4-FFF2-40B4-BE49-F238E27FC236}">
-                <a16:creationId xmlns:a16="http://schemas.microsoft.com/office/drawing/2014/main" id="{545A576D-F38C-4583-B307-63D1C26DDC4E}"/>
+                <a16:creationId xmlns:a16="http://schemas.microsoft.com/office/drawing/2014/main" id="{79857240-3839-47B2-AE8A-035A8BAC43DC}"/>
               </a:ext>
             </a:extLst>
           </p:cNvPr>
@@ -30172,7 +30076,7 @@
           <p:cNvPr id="4" name="">
             <a:extLst xmlns:a="http://schemas.openxmlformats.org/drawingml/2006/main">
               <a:ext uri="{FF2B5EF4-FFF2-40B4-BE49-F238E27FC236}">
-                <a16:creationId xmlns:a16="http://schemas.microsoft.com/office/drawing/2014/main" id="{DC5B1353-3A27-4D16-A175-2B90E6B077BE}"/>
+                <a16:creationId xmlns:a16="http://schemas.microsoft.com/office/drawing/2014/main" id="{D40F24D4-A959-4E51-81EF-A5FF2E4088FF}"/>
               </a:ext>
             </a:extLst>
           </p:cNvPr>
@@ -30256,7 +30160,7 @@
           <p:cNvPr id="5" name="">
             <a:extLst xmlns:a="http://schemas.openxmlformats.org/drawingml/2006/main">
               <a:ext uri="{FF2B5EF4-FFF2-40B4-BE49-F238E27FC236}">
-                <a16:creationId xmlns:a16="http://schemas.microsoft.com/office/drawing/2014/main" id="{696B7432-06AE-448A-A39B-F48C2D186C61}"/>
+                <a16:creationId xmlns:a16="http://schemas.microsoft.com/office/drawing/2014/main" id="{8D604DA9-D82E-4047-A469-3F1ED60080AB}"/>
               </a:ext>
             </a:extLst>
           </p:cNvPr>
@@ -30291,7 +30195,7 @@
           <p:cNvPr id="6" name="">
             <a:extLst xmlns:a="http://schemas.openxmlformats.org/drawingml/2006/main">
               <a:ext uri="{FF2B5EF4-FFF2-40B4-BE49-F238E27FC236}">
-                <a16:creationId xmlns:a16="http://schemas.microsoft.com/office/drawing/2014/main" id="{C6CEB6AC-151F-4D13-A101-8576201697B1}"/>
+                <a16:creationId xmlns:a16="http://schemas.microsoft.com/office/drawing/2014/main" id="{8A2AF2B8-9FF2-4886-A65D-8CDDB13B24A7}"/>
               </a:ext>
             </a:extLst>
           </p:cNvPr>
@@ -30347,7 +30251,7 @@
           <p:cNvPr id="7" name="">
             <a:extLst xmlns:a="http://schemas.openxmlformats.org/drawingml/2006/main">
               <a:ext uri="{FF2B5EF4-FFF2-40B4-BE49-F238E27FC236}">
-                <a16:creationId xmlns:a16="http://schemas.microsoft.com/office/drawing/2014/main" id="{12C3E58D-695A-48D9-96DF-02D8AFA34860}"/>
+                <a16:creationId xmlns:a16="http://schemas.microsoft.com/office/drawing/2014/main" id="{9449734A-5BE0-4C32-B5A0-480A792F69F6}"/>
               </a:ext>
             </a:extLst>
           </p:cNvPr>
@@ -30401,7 +30305,7 @@
     </p:spTree>
     <p:extLst>
       <p:ext uri="{BB962C8B-B14F-4D97-AF65-F5344CB8AC3E}">
-        <p14:creationId xmlns:p14="http://schemas.microsoft.com/office/powerpoint/2010/main" val="1997352240"/>
+        <p14:creationId xmlns:p14="http://schemas.microsoft.com/office/powerpoint/2010/main" val="1161545682"/>
       </p:ext>
     </p:extLst>
   </p:cSld>
@@ -30432,7 +30336,7 @@
           <p:cNvPr id="1" name="">
             <a:extLst xmlns:a="http://schemas.openxmlformats.org/drawingml/2006/main">
               <a:ext uri="{FF2B5EF4-FFF2-40B4-BE49-F238E27FC236}">
-                <a16:creationId xmlns:a16="http://schemas.microsoft.com/office/drawing/2014/main" id="{C21219DF-1ED7-4C7A-A8AF-6C680DA37B18}"/>
+                <a16:creationId xmlns:a16="http://schemas.microsoft.com/office/drawing/2014/main" id="{7F969B6F-38E9-4A8C-9A66-C699CC430524}"/>
               </a:ext>
             </a:extLst>
           </p:cNvPr>
@@ -30465,7 +30369,7 @@
           <p:cNvPr id="2" name="">
             <a:extLst xmlns:a="http://schemas.openxmlformats.org/drawingml/2006/main">
               <a:ext uri="{FF2B5EF4-FFF2-40B4-BE49-F238E27FC236}">
-                <a16:creationId xmlns:a16="http://schemas.microsoft.com/office/drawing/2014/main" id="{E8A1DD3E-D311-421F-8C65-499EC29EB604}"/>
+                <a16:creationId xmlns:a16="http://schemas.microsoft.com/office/drawing/2014/main" id="{DF172565-955F-4891-B27B-71B7722FC442}"/>
               </a:ext>
             </a:extLst>
           </p:cNvPr>
@@ -30521,7 +30425,7 @@
           <p:cNvPr id="3" name="">
             <a:extLst xmlns:a="http://schemas.openxmlformats.org/drawingml/2006/main">
               <a:ext uri="{FF2B5EF4-FFF2-40B4-BE49-F238E27FC236}">
-                <a16:creationId xmlns:a16="http://schemas.microsoft.com/office/drawing/2014/main" id="{856A2ED9-4D81-4A36-AE8C-6833BF41A76B}"/>
+                <a16:creationId xmlns:a16="http://schemas.microsoft.com/office/drawing/2014/main" id="{9FE63DC9-2C0D-4918-8A48-A4F1651461EE}"/>
               </a:ext>
             </a:extLst>
           </p:cNvPr>
@@ -30581,19 +30485,13 @@
           <p:nvPr/>
         </p:nvPicPr>
         <p:blipFill>
-          <a:blip xmlns:r="http://schemas.openxmlformats.org/officeDocument/2006/relationships" xmlns:a="http://schemas.openxmlformats.org/drawingml/2006/main" r:embed="R4ad16d6e72054cd2">
-            <a:extLst>
-              <a:ext uri="{96DAC541-7B7A-43D3-8B79-37D633B846F1}">
-                <asvg:svgBlip xmlns:asvg="http://schemas.microsoft.com/office/drawing/2016/SVG/main" r:embed="R4802864c11f44383"/>
-              </a:ext>
-            </a:extLst>
-          </a:blip>
+          <a:blip xmlns:r="http://schemas.openxmlformats.org/officeDocument/2006/relationships" xmlns:a="http://schemas.openxmlformats.org/drawingml/2006/main" r:embed="R3dd0e22824cd4cba"/>
           <a:stretch xmlns:a="http://schemas.openxmlformats.org/drawingml/2006/main"/>
         </p:blipFill>
         <p:spPr>
           <a:xfrm xmlns:a="http://schemas.openxmlformats.org/drawingml/2006/main">
-            <a:off x="6858000" y="1352550"/>
-            <a:ext cx="4286250" cy="2000250"/>
+            <a:off x="6858000" y="1453676"/>
+            <a:ext cx="4286250" cy="1797998"/>
           </a:xfrm>
           <a:prstGeom xmlns:a="http://schemas.openxmlformats.org/drawingml/2006/main" prst="rect">
             <a:avLst/>
@@ -30605,7 +30503,7 @@
           <p:cNvPr id="5" name="">
             <a:extLst xmlns:a="http://schemas.openxmlformats.org/drawingml/2006/main">
               <a:ext uri="{FF2B5EF4-FFF2-40B4-BE49-F238E27FC236}">
-                <a16:creationId xmlns:a16="http://schemas.microsoft.com/office/drawing/2014/main" id="{50A9BDA5-4CCB-4FAF-B9FD-AC302CECB9E6}"/>
+                <a16:creationId xmlns:a16="http://schemas.microsoft.com/office/drawing/2014/main" id="{D0A37BD7-6538-48F4-9469-C4193C8E3857}"/>
               </a:ext>
             </a:extLst>
           </p:cNvPr>
@@ -30640,7 +30538,7 @@
           <p:cNvPr id="6" name="">
             <a:extLst xmlns:a="http://schemas.openxmlformats.org/drawingml/2006/main">
               <a:ext uri="{FF2B5EF4-FFF2-40B4-BE49-F238E27FC236}">
-                <a16:creationId xmlns:a16="http://schemas.microsoft.com/office/drawing/2014/main" id="{A5023316-447A-4153-A309-A52B22C90C3E}"/>
+                <a16:creationId xmlns:a16="http://schemas.microsoft.com/office/drawing/2014/main" id="{DCF211C9-B53B-4E10-8772-42C316DD2F68}"/>
               </a:ext>
             </a:extLst>
           </p:cNvPr>
@@ -30696,7 +30594,7 @@
           <p:cNvPr id="7" name="">
             <a:extLst xmlns:a="http://schemas.openxmlformats.org/drawingml/2006/main">
               <a:ext uri="{FF2B5EF4-FFF2-40B4-BE49-F238E27FC236}">
-                <a16:creationId xmlns:a16="http://schemas.microsoft.com/office/drawing/2014/main" id="{D70273FC-F222-4D8B-A2CF-5FA0A0AAB1A4}"/>
+                <a16:creationId xmlns:a16="http://schemas.microsoft.com/office/drawing/2014/main" id="{A1FF38A0-9597-4076-9D00-71A40FBFE717}"/>
               </a:ext>
             </a:extLst>
           </p:cNvPr>
@@ -30750,7 +30648,7 @@
     </p:spTree>
     <p:extLst>
       <p:ext uri="{BB962C8B-B14F-4D97-AF65-F5344CB8AC3E}">
-        <p14:creationId xmlns:p14="http://schemas.microsoft.com/office/powerpoint/2010/main" val="236582051"/>
+        <p14:creationId xmlns:p14="http://schemas.microsoft.com/office/powerpoint/2010/main" val="1533659195"/>
       </p:ext>
     </p:extLst>
   </p:cSld>
@@ -30781,7 +30679,7 @@
           <p:cNvPr id="1" name="">
             <a:extLst xmlns:a="http://schemas.openxmlformats.org/drawingml/2006/main">
               <a:ext uri="{FF2B5EF4-FFF2-40B4-BE49-F238E27FC236}">
-                <a16:creationId xmlns:a16="http://schemas.microsoft.com/office/drawing/2014/main" id="{4F7544B4-74DD-476A-95EB-5CABC458BF08}"/>
+                <a16:creationId xmlns:a16="http://schemas.microsoft.com/office/drawing/2014/main" id="{D1FAB3F8-CC39-48B7-B637-132E8258086D}"/>
               </a:ext>
             </a:extLst>
           </p:cNvPr>
@@ -30814,7 +30712,7 @@
           <p:cNvPr id="2" name="">
             <a:extLst xmlns:a="http://schemas.openxmlformats.org/drawingml/2006/main">
               <a:ext uri="{FF2B5EF4-FFF2-40B4-BE49-F238E27FC236}">
-                <a16:creationId xmlns:a16="http://schemas.microsoft.com/office/drawing/2014/main" id="{C4BDFFC3-C475-46AC-93DC-01C8584A47E2}"/>
+                <a16:creationId xmlns:a16="http://schemas.microsoft.com/office/drawing/2014/main" id="{C6FB3164-650C-4914-9120-F9A5D4238AAB}"/>
               </a:ext>
             </a:extLst>
           </p:cNvPr>
@@ -30870,7 +30768,7 @@
           <p:cNvPr id="3" name="">
             <a:extLst xmlns:a="http://schemas.openxmlformats.org/drawingml/2006/main">
               <a:ext uri="{FF2B5EF4-FFF2-40B4-BE49-F238E27FC236}">
-                <a16:creationId xmlns:a16="http://schemas.microsoft.com/office/drawing/2014/main" id="{5175C503-BB4A-490C-BC04-8BCC768B1896}"/>
+                <a16:creationId xmlns:a16="http://schemas.microsoft.com/office/drawing/2014/main" id="{9B40454D-CC4F-4302-A852-82C0446C7E4F}"/>
               </a:ext>
             </a:extLst>
           </p:cNvPr>
@@ -30926,7 +30824,7 @@
           <p:cNvPr id="4" name="">
             <a:extLst xmlns:a="http://schemas.openxmlformats.org/drawingml/2006/main">
               <a:ext uri="{FF2B5EF4-FFF2-40B4-BE49-F238E27FC236}">
-                <a16:creationId xmlns:a16="http://schemas.microsoft.com/office/drawing/2014/main" id="{13683AD0-3BCC-4D7E-995B-6EF21EEFCF8B}"/>
+                <a16:creationId xmlns:a16="http://schemas.microsoft.com/office/drawing/2014/main" id="{CEBAA8E9-D7B4-4AD9-96B9-AC1314C8A700}"/>
               </a:ext>
             </a:extLst>
           </p:cNvPr>
@@ -30961,7 +30859,7 @@
           <p:cNvPr id="5" name="">
             <a:extLst xmlns:a="http://schemas.openxmlformats.org/drawingml/2006/main">
               <a:ext uri="{FF2B5EF4-FFF2-40B4-BE49-F238E27FC236}">
-                <a16:creationId xmlns:a16="http://schemas.microsoft.com/office/drawing/2014/main" id="{08C3CCEC-4E6F-4BD9-9320-D0A821867448}"/>
+                <a16:creationId xmlns:a16="http://schemas.microsoft.com/office/drawing/2014/main" id="{41331740-61A2-47CC-9B2B-C41A4D7BC4DB}"/>
               </a:ext>
             </a:extLst>
           </p:cNvPr>
@@ -31017,7 +30915,7 @@
           <p:cNvPr id="6" name="">
             <a:extLst xmlns:a="http://schemas.openxmlformats.org/drawingml/2006/main">
               <a:ext uri="{FF2B5EF4-FFF2-40B4-BE49-F238E27FC236}">
-                <a16:creationId xmlns:a16="http://schemas.microsoft.com/office/drawing/2014/main" id="{A9E37416-ED9D-4891-BD47-FDBE2FB53152}"/>
+                <a16:creationId xmlns:a16="http://schemas.microsoft.com/office/drawing/2014/main" id="{04249799-8ED1-4781-80A8-70CD0843115F}"/>
               </a:ext>
             </a:extLst>
           </p:cNvPr>
@@ -31052,7 +30950,7 @@
           <p:cNvPr id="7" name="">
             <a:extLst xmlns:a="http://schemas.openxmlformats.org/drawingml/2006/main">
               <a:ext uri="{FF2B5EF4-FFF2-40B4-BE49-F238E27FC236}">
-                <a16:creationId xmlns:a16="http://schemas.microsoft.com/office/drawing/2014/main" id="{FA62A56B-0386-495B-904A-D9D57E73BD03}"/>
+                <a16:creationId xmlns:a16="http://schemas.microsoft.com/office/drawing/2014/main" id="{FC74DDD3-0240-41BE-893B-D6D245718193}"/>
               </a:ext>
             </a:extLst>
           </p:cNvPr>
@@ -31108,7 +31006,7 @@
           <p:cNvPr id="8" name="">
             <a:extLst xmlns:a="http://schemas.openxmlformats.org/drawingml/2006/main">
               <a:ext uri="{FF2B5EF4-FFF2-40B4-BE49-F238E27FC236}">
-                <a16:creationId xmlns:a16="http://schemas.microsoft.com/office/drawing/2014/main" id="{77DDC80F-9792-40A7-A468-3823088BEF1A}"/>
+                <a16:creationId xmlns:a16="http://schemas.microsoft.com/office/drawing/2014/main" id="{43945E80-C56B-4985-8CA1-9ED40EDBF0C2}"/>
               </a:ext>
             </a:extLst>
           </p:cNvPr>
@@ -31143,7 +31041,7 @@
           <p:cNvPr id="9" name="">
             <a:extLst xmlns:a="http://schemas.openxmlformats.org/drawingml/2006/main">
               <a:ext uri="{FF2B5EF4-FFF2-40B4-BE49-F238E27FC236}">
-                <a16:creationId xmlns:a16="http://schemas.microsoft.com/office/drawing/2014/main" id="{5F9E7628-02F0-4094-B100-E59DABDDC179}"/>
+                <a16:creationId xmlns:a16="http://schemas.microsoft.com/office/drawing/2014/main" id="{6253343E-C4B5-46BF-8882-D786CE48257E}"/>
               </a:ext>
             </a:extLst>
           </p:cNvPr>
@@ -31199,7 +31097,7 @@
           <p:cNvPr id="10" name="">
             <a:extLst xmlns:a="http://schemas.openxmlformats.org/drawingml/2006/main">
               <a:ext uri="{FF2B5EF4-FFF2-40B4-BE49-F238E27FC236}">
-                <a16:creationId xmlns:a16="http://schemas.microsoft.com/office/drawing/2014/main" id="{E64EC387-0ABA-4F9D-8D5A-B7F5462CA3F1}"/>
+                <a16:creationId xmlns:a16="http://schemas.microsoft.com/office/drawing/2014/main" id="{F1AE49EB-3EAC-4749-8A22-4159A1DF82F7}"/>
               </a:ext>
             </a:extLst>
           </p:cNvPr>
@@ -31234,7 +31132,7 @@
           <p:cNvPr id="11" name="">
             <a:extLst xmlns:a="http://schemas.openxmlformats.org/drawingml/2006/main">
               <a:ext uri="{FF2B5EF4-FFF2-40B4-BE49-F238E27FC236}">
-                <a16:creationId xmlns:a16="http://schemas.microsoft.com/office/drawing/2014/main" id="{53491F19-F94D-46F9-8A6E-A08EA01E5740}"/>
+                <a16:creationId xmlns:a16="http://schemas.microsoft.com/office/drawing/2014/main" id="{05A47A58-1E1D-47F1-83B1-1E923EF1A35F}"/>
               </a:ext>
             </a:extLst>
           </p:cNvPr>
@@ -31290,7 +31188,7 @@
           <p:cNvPr id="12" name="">
             <a:extLst xmlns:a="http://schemas.openxmlformats.org/drawingml/2006/main">
               <a:ext uri="{FF2B5EF4-FFF2-40B4-BE49-F238E27FC236}">
-                <a16:creationId xmlns:a16="http://schemas.microsoft.com/office/drawing/2014/main" id="{5807F9C7-7492-4159-8207-84F0579B9230}"/>
+                <a16:creationId xmlns:a16="http://schemas.microsoft.com/office/drawing/2014/main" id="{A00BD5C8-99F3-4147-9110-4CDBE4C84DB4}"/>
               </a:ext>
             </a:extLst>
           </p:cNvPr>
@@ -31344,7 +31242,7 @@
     </p:spTree>
     <p:extLst>
       <p:ext uri="{BB962C8B-B14F-4D97-AF65-F5344CB8AC3E}">
-        <p14:creationId xmlns:p14="http://schemas.microsoft.com/office/powerpoint/2010/main" val="1100205113"/>
+        <p14:creationId xmlns:p14="http://schemas.microsoft.com/office/powerpoint/2010/main" val="577539149"/>
       </p:ext>
     </p:extLst>
   </p:cSld>
@@ -31375,7 +31273,7 @@
           <p:cNvPr id="1" name="">
             <a:extLst xmlns:a="http://schemas.openxmlformats.org/drawingml/2006/main">
               <a:ext uri="{FF2B5EF4-FFF2-40B4-BE49-F238E27FC236}">
-                <a16:creationId xmlns:a16="http://schemas.microsoft.com/office/drawing/2014/main" id="{CEA09AC3-F6B8-4622-A114-7A7677043DA0}"/>
+                <a16:creationId xmlns:a16="http://schemas.microsoft.com/office/drawing/2014/main" id="{C004A7C5-6FEA-4E55-814D-D9409A77EBAE}"/>
               </a:ext>
             </a:extLst>
           </p:cNvPr>
@@ -31408,7 +31306,7 @@
           <p:cNvPr id="2" name="">
             <a:extLst xmlns:a="http://schemas.openxmlformats.org/drawingml/2006/main">
               <a:ext uri="{FF2B5EF4-FFF2-40B4-BE49-F238E27FC236}">
-                <a16:creationId xmlns:a16="http://schemas.microsoft.com/office/drawing/2014/main" id="{F48F69D6-CC28-4AD6-AA27-75CE4A895B53}"/>
+                <a16:creationId xmlns:a16="http://schemas.microsoft.com/office/drawing/2014/main" id="{9EAD15E1-08BD-4C03-A0D3-F3466FBBC772}"/>
               </a:ext>
             </a:extLst>
           </p:cNvPr>
@@ -31464,7 +31362,7 @@
           <p:cNvPr id="3" name="">
             <a:extLst xmlns:a="http://schemas.openxmlformats.org/drawingml/2006/main">
               <a:ext uri="{FF2B5EF4-FFF2-40B4-BE49-F238E27FC236}">
-                <a16:creationId xmlns:a16="http://schemas.microsoft.com/office/drawing/2014/main" id="{6D573A32-7C5C-43ED-B5ED-8195CB96F9B1}"/>
+                <a16:creationId xmlns:a16="http://schemas.microsoft.com/office/drawing/2014/main" id="{6D1B7506-A066-46C8-BAA5-C07581BA75F9}"/>
               </a:ext>
             </a:extLst>
           </p:cNvPr>
@@ -31520,7 +31418,7 @@
           <p:cNvPr id="4" name="">
             <a:extLst xmlns:a="http://schemas.openxmlformats.org/drawingml/2006/main">
               <a:ext uri="{FF2B5EF4-FFF2-40B4-BE49-F238E27FC236}">
-                <a16:creationId xmlns:a16="http://schemas.microsoft.com/office/drawing/2014/main" id="{D849C65E-F7E9-4FCE-A94C-D502900C40AE}"/>
+                <a16:creationId xmlns:a16="http://schemas.microsoft.com/office/drawing/2014/main" id="{B19AA6B8-C4BD-48A6-9990-BCB243202714}"/>
               </a:ext>
             </a:extLst>
           </p:cNvPr>
@@ -31555,7 +31453,7 @@
           <p:cNvPr id="5" name="">
             <a:extLst xmlns:a="http://schemas.openxmlformats.org/drawingml/2006/main">
               <a:ext uri="{FF2B5EF4-FFF2-40B4-BE49-F238E27FC236}">
-                <a16:creationId xmlns:a16="http://schemas.microsoft.com/office/drawing/2014/main" id="{7D003955-D377-4B2F-A30B-A365122CD661}"/>
+                <a16:creationId xmlns:a16="http://schemas.microsoft.com/office/drawing/2014/main" id="{CC9C422C-F514-400A-9A0A-873595AC5149}"/>
               </a:ext>
             </a:extLst>
           </p:cNvPr>
@@ -31611,7 +31509,7 @@
           <p:cNvPr id="6" name="">
             <a:extLst xmlns:a="http://schemas.openxmlformats.org/drawingml/2006/main">
               <a:ext uri="{FF2B5EF4-FFF2-40B4-BE49-F238E27FC236}">
-                <a16:creationId xmlns:a16="http://schemas.microsoft.com/office/drawing/2014/main" id="{5EBB26C6-CA12-4902-82BA-8060D22D7DC6}"/>
+                <a16:creationId xmlns:a16="http://schemas.microsoft.com/office/drawing/2014/main" id="{2E9A364D-9477-40E9-8E86-C8C5387932A6}"/>
               </a:ext>
             </a:extLst>
           </p:cNvPr>
@@ -31646,7 +31544,7 @@
           <p:cNvPr id="7" name="">
             <a:extLst xmlns:a="http://schemas.openxmlformats.org/drawingml/2006/main">
               <a:ext uri="{FF2B5EF4-FFF2-40B4-BE49-F238E27FC236}">
-                <a16:creationId xmlns:a16="http://schemas.microsoft.com/office/drawing/2014/main" id="{F784C1BB-7E8C-4B65-AB0C-F3F11E80E7F8}"/>
+                <a16:creationId xmlns:a16="http://schemas.microsoft.com/office/drawing/2014/main" id="{6C8F2B6D-5D6C-4464-9FA7-57B209551569}"/>
               </a:ext>
             </a:extLst>
           </p:cNvPr>
@@ -31702,7 +31600,7 @@
           <p:cNvPr id="8" name="">
             <a:extLst xmlns:a="http://schemas.openxmlformats.org/drawingml/2006/main">
               <a:ext uri="{FF2B5EF4-FFF2-40B4-BE49-F238E27FC236}">
-                <a16:creationId xmlns:a16="http://schemas.microsoft.com/office/drawing/2014/main" id="{459C2CD3-D111-4E03-8ED2-E20FFC836B38}"/>
+                <a16:creationId xmlns:a16="http://schemas.microsoft.com/office/drawing/2014/main" id="{92FB0A14-8C0D-4910-8438-2BDFA8CF0915}"/>
               </a:ext>
             </a:extLst>
           </p:cNvPr>
@@ -31737,7 +31635,7 @@
           <p:cNvPr id="9" name="">
             <a:extLst xmlns:a="http://schemas.openxmlformats.org/drawingml/2006/main">
               <a:ext uri="{FF2B5EF4-FFF2-40B4-BE49-F238E27FC236}">
-                <a16:creationId xmlns:a16="http://schemas.microsoft.com/office/drawing/2014/main" id="{CDE9BC46-1C86-4147-88BC-F7666E0AF069}"/>
+                <a16:creationId xmlns:a16="http://schemas.microsoft.com/office/drawing/2014/main" id="{94D75F20-3341-4DF5-808E-DB47D0555D48}"/>
               </a:ext>
             </a:extLst>
           </p:cNvPr>
@@ -31793,7 +31691,7 @@
           <p:cNvPr id="10" name="">
             <a:extLst xmlns:a="http://schemas.openxmlformats.org/drawingml/2006/main">
               <a:ext uri="{FF2B5EF4-FFF2-40B4-BE49-F238E27FC236}">
-                <a16:creationId xmlns:a16="http://schemas.microsoft.com/office/drawing/2014/main" id="{3709B61A-FC8D-4C7F-A947-08EA2218CC27}"/>
+                <a16:creationId xmlns:a16="http://schemas.microsoft.com/office/drawing/2014/main" id="{1C3D18BA-DFD4-46B0-9294-336527D7FB4D}"/>
               </a:ext>
             </a:extLst>
           </p:cNvPr>
@@ -31828,7 +31726,7 @@
           <p:cNvPr id="11" name="">
             <a:extLst xmlns:a="http://schemas.openxmlformats.org/drawingml/2006/main">
               <a:ext uri="{FF2B5EF4-FFF2-40B4-BE49-F238E27FC236}">
-                <a16:creationId xmlns:a16="http://schemas.microsoft.com/office/drawing/2014/main" id="{9920F33B-3AEC-4885-ADFF-58AC401679DB}"/>
+                <a16:creationId xmlns:a16="http://schemas.microsoft.com/office/drawing/2014/main" id="{BDCC1104-5FAB-4379-A10C-107F52A6FDCC}"/>
               </a:ext>
             </a:extLst>
           </p:cNvPr>
@@ -31884,7 +31782,7 @@
           <p:cNvPr id="12" name="">
             <a:extLst xmlns:a="http://schemas.openxmlformats.org/drawingml/2006/main">
               <a:ext uri="{FF2B5EF4-FFF2-40B4-BE49-F238E27FC236}">
-                <a16:creationId xmlns:a16="http://schemas.microsoft.com/office/drawing/2014/main" id="{56FD99D6-6FC1-4064-8FA7-A0539D3D11A6}"/>
+                <a16:creationId xmlns:a16="http://schemas.microsoft.com/office/drawing/2014/main" id="{7F706C4A-DA63-4E3A-9AC5-851CB6F5046F}"/>
               </a:ext>
             </a:extLst>
           </p:cNvPr>
@@ -31919,7 +31817,7 @@
           <p:cNvPr id="13" name="">
             <a:extLst xmlns:a="http://schemas.openxmlformats.org/drawingml/2006/main">
               <a:ext uri="{FF2B5EF4-FFF2-40B4-BE49-F238E27FC236}">
-                <a16:creationId xmlns:a16="http://schemas.microsoft.com/office/drawing/2014/main" id="{A05FD7B1-F85B-436A-AC8A-092C4D18C959}"/>
+                <a16:creationId xmlns:a16="http://schemas.microsoft.com/office/drawing/2014/main" id="{9CD110FE-C0F1-47AE-9538-89CE9170FAE3}"/>
               </a:ext>
             </a:extLst>
           </p:cNvPr>
@@ -31975,7 +31873,7 @@
           <p:cNvPr id="14" name="">
             <a:extLst xmlns:a="http://schemas.openxmlformats.org/drawingml/2006/main">
               <a:ext uri="{FF2B5EF4-FFF2-40B4-BE49-F238E27FC236}">
-                <a16:creationId xmlns:a16="http://schemas.microsoft.com/office/drawing/2014/main" id="{7991F575-6C08-4176-819B-EEDF38B79E22}"/>
+                <a16:creationId xmlns:a16="http://schemas.microsoft.com/office/drawing/2014/main" id="{32FA4F10-3992-44BE-BCC6-087385F564BD}"/>
               </a:ext>
             </a:extLst>
           </p:cNvPr>
@@ -32010,7 +31908,7 @@
           <p:cNvPr id="15" name="">
             <a:extLst xmlns:a="http://schemas.openxmlformats.org/drawingml/2006/main">
               <a:ext uri="{FF2B5EF4-FFF2-40B4-BE49-F238E27FC236}">
-                <a16:creationId xmlns:a16="http://schemas.microsoft.com/office/drawing/2014/main" id="{E5E52908-C1B3-4D58-B01E-E17A0F397822}"/>
+                <a16:creationId xmlns:a16="http://schemas.microsoft.com/office/drawing/2014/main" id="{AC3484C4-C117-4D61-A7B3-6CDD05029DC4}"/>
               </a:ext>
             </a:extLst>
           </p:cNvPr>
@@ -32066,7 +31964,7 @@
           <p:cNvPr id="16" name="">
             <a:extLst xmlns:a="http://schemas.openxmlformats.org/drawingml/2006/main">
               <a:ext uri="{FF2B5EF4-FFF2-40B4-BE49-F238E27FC236}">
-                <a16:creationId xmlns:a16="http://schemas.microsoft.com/office/drawing/2014/main" id="{9AD3027C-767C-497C-825C-FFFAEBFE4A81}"/>
+                <a16:creationId xmlns:a16="http://schemas.microsoft.com/office/drawing/2014/main" id="{6919D805-3571-4CC5-A4CB-33FD8715F24C}"/>
               </a:ext>
             </a:extLst>
           </p:cNvPr>
@@ -32101,7 +31999,7 @@
           <p:cNvPr id="17" name="">
             <a:extLst xmlns:a="http://schemas.openxmlformats.org/drawingml/2006/main">
               <a:ext uri="{FF2B5EF4-FFF2-40B4-BE49-F238E27FC236}">
-                <a16:creationId xmlns:a16="http://schemas.microsoft.com/office/drawing/2014/main" id="{DFDB534F-D988-4CD3-BD51-FE68F382597B}"/>
+                <a16:creationId xmlns:a16="http://schemas.microsoft.com/office/drawing/2014/main" id="{779EE0DE-DB08-4685-A71F-8C627DCB72FA}"/>
               </a:ext>
             </a:extLst>
           </p:cNvPr>
@@ -32157,7 +32055,7 @@
           <p:cNvPr id="18" name="">
             <a:extLst xmlns:a="http://schemas.openxmlformats.org/drawingml/2006/main">
               <a:ext uri="{FF2B5EF4-FFF2-40B4-BE49-F238E27FC236}">
-                <a16:creationId xmlns:a16="http://schemas.microsoft.com/office/drawing/2014/main" id="{F4AA83F0-92EF-4C0E-8878-48301478D325}"/>
+                <a16:creationId xmlns:a16="http://schemas.microsoft.com/office/drawing/2014/main" id="{9C5D08BC-DF97-4614-85A8-4AB898452595}"/>
               </a:ext>
             </a:extLst>
           </p:cNvPr>
@@ -32211,7 +32109,7 @@
     </p:spTree>
     <p:extLst>
       <p:ext uri="{BB962C8B-B14F-4D97-AF65-F5344CB8AC3E}">
-        <p14:creationId xmlns:p14="http://schemas.microsoft.com/office/powerpoint/2010/main" val="1849111341"/>
+        <p14:creationId xmlns:p14="http://schemas.microsoft.com/office/powerpoint/2010/main" val="2075151562"/>
       </p:ext>
     </p:extLst>
   </p:cSld>
@@ -32242,7 +32140,7 @@
           <p:cNvPr id="1" name="">
             <a:extLst xmlns:a="http://schemas.openxmlformats.org/drawingml/2006/main">
               <a:ext uri="{FF2B5EF4-FFF2-40B4-BE49-F238E27FC236}">
-                <a16:creationId xmlns:a16="http://schemas.microsoft.com/office/drawing/2014/main" id="{6B9F8F7B-D693-4175-9BFE-91201575AB11}"/>
+                <a16:creationId xmlns:a16="http://schemas.microsoft.com/office/drawing/2014/main" id="{2CFE4C71-C0CB-4378-8B26-11B5C646498D}"/>
               </a:ext>
             </a:extLst>
           </p:cNvPr>
@@ -32275,7 +32173,7 @@
           <p:cNvPr id="2" name="">
             <a:extLst xmlns:a="http://schemas.openxmlformats.org/drawingml/2006/main">
               <a:ext uri="{FF2B5EF4-FFF2-40B4-BE49-F238E27FC236}">
-                <a16:creationId xmlns:a16="http://schemas.microsoft.com/office/drawing/2014/main" id="{BB87015E-7391-476B-916B-E90272923E1F}"/>
+                <a16:creationId xmlns:a16="http://schemas.microsoft.com/office/drawing/2014/main" id="{DA8497C3-FE5B-4C5A-9066-8AEC521207F2}"/>
               </a:ext>
             </a:extLst>
           </p:cNvPr>
@@ -32331,7 +32229,7 @@
           <p:cNvPr id="3" name="">
             <a:extLst xmlns:a="http://schemas.openxmlformats.org/drawingml/2006/main">
               <a:ext uri="{FF2B5EF4-FFF2-40B4-BE49-F238E27FC236}">
-                <a16:creationId xmlns:a16="http://schemas.microsoft.com/office/drawing/2014/main" id="{F6639B40-7066-4AE1-81DD-4CDC6F163649}"/>
+                <a16:creationId xmlns:a16="http://schemas.microsoft.com/office/drawing/2014/main" id="{D83E47FC-E770-4A99-98F7-A4CA906A116D}"/>
               </a:ext>
             </a:extLst>
           </p:cNvPr>
@@ -32387,7 +32285,7 @@
           <p:cNvPr id="4" name="">
             <a:extLst xmlns:a="http://schemas.openxmlformats.org/drawingml/2006/main">
               <a:ext uri="{FF2B5EF4-FFF2-40B4-BE49-F238E27FC236}">
-                <a16:creationId xmlns:a16="http://schemas.microsoft.com/office/drawing/2014/main" id="{1D7026CC-3521-4CD0-B923-3A59C93D0F29}"/>
+                <a16:creationId xmlns:a16="http://schemas.microsoft.com/office/drawing/2014/main" id="{20097705-8A78-488F-A3F6-5C76A68A5CE2}"/>
               </a:ext>
             </a:extLst>
           </p:cNvPr>
@@ -32512,7 +32410,7 @@
           <p:cNvPr id="5" name="">
             <a:extLst xmlns:a="http://schemas.openxmlformats.org/drawingml/2006/main">
               <a:ext uri="{FF2B5EF4-FFF2-40B4-BE49-F238E27FC236}">
-                <a16:creationId xmlns:a16="http://schemas.microsoft.com/office/drawing/2014/main" id="{149E1E66-7D43-4E6A-BBF3-15F213BD233F}"/>
+                <a16:creationId xmlns:a16="http://schemas.microsoft.com/office/drawing/2014/main" id="{2BC0134F-B211-4234-9D40-3651141E729A}"/>
               </a:ext>
             </a:extLst>
           </p:cNvPr>
@@ -32547,7 +32445,7 @@
           <p:cNvPr id="6" name="">
             <a:extLst xmlns:a="http://schemas.openxmlformats.org/drawingml/2006/main">
               <a:ext uri="{FF2B5EF4-FFF2-40B4-BE49-F238E27FC236}">
-                <a16:creationId xmlns:a16="http://schemas.microsoft.com/office/drawing/2014/main" id="{24823546-30A4-4DDB-BDA9-C80477E4DFFF}"/>
+                <a16:creationId xmlns:a16="http://schemas.microsoft.com/office/drawing/2014/main" id="{111C9072-37C0-4A0E-87C5-AF2A5C09502F}"/>
               </a:ext>
             </a:extLst>
           </p:cNvPr>
@@ -32603,7 +32501,7 @@
           <p:cNvPr id="7" name="">
             <a:extLst xmlns:a="http://schemas.openxmlformats.org/drawingml/2006/main">
               <a:ext uri="{FF2B5EF4-FFF2-40B4-BE49-F238E27FC236}">
-                <a16:creationId xmlns:a16="http://schemas.microsoft.com/office/drawing/2014/main" id="{58A4D101-8C0E-4D02-B283-811426438288}"/>
+                <a16:creationId xmlns:a16="http://schemas.microsoft.com/office/drawing/2014/main" id="{2D447470-D921-4912-9B5C-47651B4B7015}"/>
               </a:ext>
             </a:extLst>
           </p:cNvPr>
@@ -32657,7 +32555,7 @@
     </p:spTree>
     <p:extLst>
       <p:ext uri="{BB962C8B-B14F-4D97-AF65-F5344CB8AC3E}">
-        <p14:creationId xmlns:p14="http://schemas.microsoft.com/office/powerpoint/2010/main" val="589216902"/>
+        <p14:creationId xmlns:p14="http://schemas.microsoft.com/office/powerpoint/2010/main" val="2024748207"/>
       </p:ext>
     </p:extLst>
   </p:cSld>
@@ -32688,7 +32586,7 @@
           <p:cNvPr id="1" name="">
             <a:extLst xmlns:a="http://schemas.openxmlformats.org/drawingml/2006/main">
               <a:ext uri="{FF2B5EF4-FFF2-40B4-BE49-F238E27FC236}">
-                <a16:creationId xmlns:a16="http://schemas.microsoft.com/office/drawing/2014/main" id="{17A3BC12-3040-4079-A335-4F13E56A14DA}"/>
+                <a16:creationId xmlns:a16="http://schemas.microsoft.com/office/drawing/2014/main" id="{530CA7FC-D668-46B9-8C14-117D2A0C53FA}"/>
               </a:ext>
             </a:extLst>
           </p:cNvPr>
@@ -32721,7 +32619,7 @@
           <p:cNvPr id="2" name="">
             <a:extLst xmlns:a="http://schemas.openxmlformats.org/drawingml/2006/main">
               <a:ext uri="{FF2B5EF4-FFF2-40B4-BE49-F238E27FC236}">
-                <a16:creationId xmlns:a16="http://schemas.microsoft.com/office/drawing/2014/main" id="{BF683B7E-69F3-4D2D-A332-7320B5906733}"/>
+                <a16:creationId xmlns:a16="http://schemas.microsoft.com/office/drawing/2014/main" id="{B2D4EB73-AFC6-4311-A875-100C77C700E9}"/>
               </a:ext>
             </a:extLst>
           </p:cNvPr>
@@ -32777,7 +32675,7 @@
           <p:cNvPr id="3" name="">
             <a:extLst xmlns:a="http://schemas.openxmlformats.org/drawingml/2006/main">
               <a:ext uri="{FF2B5EF4-FFF2-40B4-BE49-F238E27FC236}">
-                <a16:creationId xmlns:a16="http://schemas.microsoft.com/office/drawing/2014/main" id="{93B3D9A8-3869-44AA-A89C-CD3E67C094EC}"/>
+                <a16:creationId xmlns:a16="http://schemas.microsoft.com/office/drawing/2014/main" id="{EE0CC304-317E-4AC0-BBE7-95BA0EC4740C}"/>
               </a:ext>
             </a:extLst>
           </p:cNvPr>
@@ -32833,7 +32731,7 @@
           <p:cNvPr id="4" name="">
             <a:extLst xmlns:a="http://schemas.openxmlformats.org/drawingml/2006/main">
               <a:ext uri="{FF2B5EF4-FFF2-40B4-BE49-F238E27FC236}">
-                <a16:creationId xmlns:a16="http://schemas.microsoft.com/office/drawing/2014/main" id="{1BCCD618-E6F2-41D3-B810-8A5C50FE090B}"/>
+                <a16:creationId xmlns:a16="http://schemas.microsoft.com/office/drawing/2014/main" id="{2A8EF085-6418-4C73-BF48-65E422F1F112}"/>
               </a:ext>
             </a:extLst>
           </p:cNvPr>
@@ -32868,7 +32766,7 @@
           <p:cNvPr id="5" name="">
             <a:extLst xmlns:a="http://schemas.openxmlformats.org/drawingml/2006/main">
               <a:ext uri="{FF2B5EF4-FFF2-40B4-BE49-F238E27FC236}">
-                <a16:creationId xmlns:a16="http://schemas.microsoft.com/office/drawing/2014/main" id="{1A2B6280-B946-44CA-BA56-C06696C1816A}"/>
+                <a16:creationId xmlns:a16="http://schemas.microsoft.com/office/drawing/2014/main" id="{53204BE0-D42E-4E9D-8862-385D166A2A02}"/>
               </a:ext>
             </a:extLst>
           </p:cNvPr>
@@ -32924,7 +32822,7 @@
           <p:cNvPr id="6" name="">
             <a:extLst xmlns:a="http://schemas.openxmlformats.org/drawingml/2006/main">
               <a:ext uri="{FF2B5EF4-FFF2-40B4-BE49-F238E27FC236}">
-                <a16:creationId xmlns:a16="http://schemas.microsoft.com/office/drawing/2014/main" id="{FC6BDCA1-A0B6-40D2-B439-267C5D8ED657}"/>
+                <a16:creationId xmlns:a16="http://schemas.microsoft.com/office/drawing/2014/main" id="{ED60B4E1-4ECE-4C5B-AAEF-9D8A8D796DCB}"/>
               </a:ext>
             </a:extLst>
           </p:cNvPr>
@@ -32959,7 +32857,7 @@
           <p:cNvPr id="7" name="">
             <a:extLst xmlns:a="http://schemas.openxmlformats.org/drawingml/2006/main">
               <a:ext uri="{FF2B5EF4-FFF2-40B4-BE49-F238E27FC236}">
-                <a16:creationId xmlns:a16="http://schemas.microsoft.com/office/drawing/2014/main" id="{05C63A02-00B1-47DD-B4DA-15CB2A3395D5}"/>
+                <a16:creationId xmlns:a16="http://schemas.microsoft.com/office/drawing/2014/main" id="{8E05F147-5003-40CB-9FEA-5601D036C318}"/>
               </a:ext>
             </a:extLst>
           </p:cNvPr>
@@ -33015,7 +32913,7 @@
           <p:cNvPr id="8" name="">
             <a:extLst xmlns:a="http://schemas.openxmlformats.org/drawingml/2006/main">
               <a:ext uri="{FF2B5EF4-FFF2-40B4-BE49-F238E27FC236}">
-                <a16:creationId xmlns:a16="http://schemas.microsoft.com/office/drawing/2014/main" id="{1F650703-AA61-4914-8F2E-17E3774AA565}"/>
+                <a16:creationId xmlns:a16="http://schemas.microsoft.com/office/drawing/2014/main" id="{D3C16663-0E5B-4423-B836-176DCCD0A31D}"/>
               </a:ext>
             </a:extLst>
           </p:cNvPr>
@@ -33050,7 +32948,7 @@
           <p:cNvPr id="9" name="">
             <a:extLst xmlns:a="http://schemas.openxmlformats.org/drawingml/2006/main">
               <a:ext uri="{FF2B5EF4-FFF2-40B4-BE49-F238E27FC236}">
-                <a16:creationId xmlns:a16="http://schemas.microsoft.com/office/drawing/2014/main" id="{422CA667-595F-41C0-8DC5-09112B7FCE69}"/>
+                <a16:creationId xmlns:a16="http://schemas.microsoft.com/office/drawing/2014/main" id="{471F78C2-EB4C-4863-9545-C36C609F0882}"/>
               </a:ext>
             </a:extLst>
           </p:cNvPr>
@@ -33106,7 +33004,7 @@
           <p:cNvPr id="10" name="">
             <a:extLst xmlns:a="http://schemas.openxmlformats.org/drawingml/2006/main">
               <a:ext uri="{FF2B5EF4-FFF2-40B4-BE49-F238E27FC236}">
-                <a16:creationId xmlns:a16="http://schemas.microsoft.com/office/drawing/2014/main" id="{D9DA2148-1D1D-4DFC-84F1-8034ABBC90B3}"/>
+                <a16:creationId xmlns:a16="http://schemas.microsoft.com/office/drawing/2014/main" id="{4B1F395E-74D8-437E-9916-4AF0D2F6EA3E}"/>
               </a:ext>
             </a:extLst>
           </p:cNvPr>
@@ -33141,7 +33039,7 @@
           <p:cNvPr id="11" name="">
             <a:extLst xmlns:a="http://schemas.openxmlformats.org/drawingml/2006/main">
               <a:ext uri="{FF2B5EF4-FFF2-40B4-BE49-F238E27FC236}">
-                <a16:creationId xmlns:a16="http://schemas.microsoft.com/office/drawing/2014/main" id="{22A41256-303E-42BC-A14B-F257395C7480}"/>
+                <a16:creationId xmlns:a16="http://schemas.microsoft.com/office/drawing/2014/main" id="{F5C7146F-50BB-4EE5-9601-9D41191C7474}"/>
               </a:ext>
             </a:extLst>
           </p:cNvPr>
@@ -33197,7 +33095,7 @@
           <p:cNvPr id="12" name="">
             <a:extLst xmlns:a="http://schemas.openxmlformats.org/drawingml/2006/main">
               <a:ext uri="{FF2B5EF4-FFF2-40B4-BE49-F238E27FC236}">
-                <a16:creationId xmlns:a16="http://schemas.microsoft.com/office/drawing/2014/main" id="{12BDA192-DE43-4E8D-B195-AF11B855BB96}"/>
+                <a16:creationId xmlns:a16="http://schemas.microsoft.com/office/drawing/2014/main" id="{EFA633DA-BE23-4FA6-A94D-B1D7A59F198D}"/>
               </a:ext>
             </a:extLst>
           </p:cNvPr>
@@ -33232,7 +33130,7 @@
           <p:cNvPr id="13" name="">
             <a:extLst xmlns:a="http://schemas.openxmlformats.org/drawingml/2006/main">
               <a:ext uri="{FF2B5EF4-FFF2-40B4-BE49-F238E27FC236}">
-                <a16:creationId xmlns:a16="http://schemas.microsoft.com/office/drawing/2014/main" id="{3739C1C4-4DAD-44F5-ABAD-336CE078267E}"/>
+                <a16:creationId xmlns:a16="http://schemas.microsoft.com/office/drawing/2014/main" id="{33008300-F77F-471D-B375-DC68BFFE2C1B}"/>
               </a:ext>
             </a:extLst>
           </p:cNvPr>
@@ -33288,7 +33186,7 @@
           <p:cNvPr id="14" name="">
             <a:extLst xmlns:a="http://schemas.openxmlformats.org/drawingml/2006/main">
               <a:ext uri="{FF2B5EF4-FFF2-40B4-BE49-F238E27FC236}">
-                <a16:creationId xmlns:a16="http://schemas.microsoft.com/office/drawing/2014/main" id="{883054B0-DAB0-4457-A3BF-86EBB984863A}"/>
+                <a16:creationId xmlns:a16="http://schemas.microsoft.com/office/drawing/2014/main" id="{9719F034-A43E-4C82-B2AE-25AFFFD122A2}"/>
               </a:ext>
             </a:extLst>
           </p:cNvPr>
@@ -33342,7 +33240,7 @@
     </p:spTree>
     <p:extLst>
       <p:ext uri="{BB962C8B-B14F-4D97-AF65-F5344CB8AC3E}">
-        <p14:creationId xmlns:p14="http://schemas.microsoft.com/office/powerpoint/2010/main" val="11947675"/>
+        <p14:creationId xmlns:p14="http://schemas.microsoft.com/office/powerpoint/2010/main" val="2106649084"/>
       </p:ext>
     </p:extLst>
   </p:cSld>
@@ -33373,7 +33271,7 @@
           <p:cNvPr id="1" name="">
             <a:extLst xmlns:a="http://schemas.openxmlformats.org/drawingml/2006/main">
               <a:ext uri="{FF2B5EF4-FFF2-40B4-BE49-F238E27FC236}">
-                <a16:creationId xmlns:a16="http://schemas.microsoft.com/office/drawing/2014/main" id="{47849AC9-66E3-447E-96CF-7672BC6736CB}"/>
+                <a16:creationId xmlns:a16="http://schemas.microsoft.com/office/drawing/2014/main" id="{ADDB09A0-55F3-449D-9891-4FD28C1ED0EF}"/>
               </a:ext>
             </a:extLst>
           </p:cNvPr>
@@ -33406,7 +33304,7 @@
           <p:cNvPr id="2" name="">
             <a:extLst xmlns:a="http://schemas.openxmlformats.org/drawingml/2006/main">
               <a:ext uri="{FF2B5EF4-FFF2-40B4-BE49-F238E27FC236}">
-                <a16:creationId xmlns:a16="http://schemas.microsoft.com/office/drawing/2014/main" id="{9808012C-C966-4E8A-AB59-257A2A371BE4}"/>
+                <a16:creationId xmlns:a16="http://schemas.microsoft.com/office/drawing/2014/main" id="{FA025D88-460E-461C-B923-52D900916E3B}"/>
               </a:ext>
             </a:extLst>
           </p:cNvPr>
@@ -33462,7 +33360,7 @@
           <p:cNvPr id="3" name="">
             <a:extLst xmlns:a="http://schemas.openxmlformats.org/drawingml/2006/main">
               <a:ext uri="{FF2B5EF4-FFF2-40B4-BE49-F238E27FC236}">
-                <a16:creationId xmlns:a16="http://schemas.microsoft.com/office/drawing/2014/main" id="{C74D7307-0520-4DD2-8A86-7F3FAF4366A8}"/>
+                <a16:creationId xmlns:a16="http://schemas.microsoft.com/office/drawing/2014/main" id="{8F352E5A-D1F4-4CE2-BC03-CEA1273515B4}"/>
               </a:ext>
             </a:extLst>
           </p:cNvPr>
@@ -33518,7 +33416,7 @@
           <p:cNvPr id="4" name="">
             <a:extLst xmlns:a="http://schemas.openxmlformats.org/drawingml/2006/main">
               <a:ext uri="{FF2B5EF4-FFF2-40B4-BE49-F238E27FC236}">
-                <a16:creationId xmlns:a16="http://schemas.microsoft.com/office/drawing/2014/main" id="{8331CBFD-B22C-4297-9657-B2B1A7745D8E}"/>
+                <a16:creationId xmlns:a16="http://schemas.microsoft.com/office/drawing/2014/main" id="{8630C8C2-F79D-4BA5-8528-485D450031A8}"/>
               </a:ext>
             </a:extLst>
           </p:cNvPr>
@@ -33553,7 +33451,7 @@
           <p:cNvPr id="5" name="">
             <a:extLst xmlns:a="http://schemas.openxmlformats.org/drawingml/2006/main">
               <a:ext uri="{FF2B5EF4-FFF2-40B4-BE49-F238E27FC236}">
-                <a16:creationId xmlns:a16="http://schemas.microsoft.com/office/drawing/2014/main" id="{09D7AE62-EBFF-4F1A-8209-4319BDD1605A}"/>
+                <a16:creationId xmlns:a16="http://schemas.microsoft.com/office/drawing/2014/main" id="{540F9C44-A7EB-472E-B1A5-D433AA7E6EB7}"/>
               </a:ext>
             </a:extLst>
           </p:cNvPr>
@@ -33609,7 +33507,7 @@
           <p:cNvPr id="6" name="">
             <a:extLst xmlns:a="http://schemas.openxmlformats.org/drawingml/2006/main">
               <a:ext uri="{FF2B5EF4-FFF2-40B4-BE49-F238E27FC236}">
-                <a16:creationId xmlns:a16="http://schemas.microsoft.com/office/drawing/2014/main" id="{DB739823-20A9-4899-92D6-AA29AD0DA30B}"/>
+                <a16:creationId xmlns:a16="http://schemas.microsoft.com/office/drawing/2014/main" id="{E7742C11-F2BE-4A17-BD38-0AC455A85A71}"/>
               </a:ext>
             </a:extLst>
           </p:cNvPr>
@@ -33644,7 +33542,7 @@
           <p:cNvPr id="7" name="">
             <a:extLst xmlns:a="http://schemas.openxmlformats.org/drawingml/2006/main">
               <a:ext uri="{FF2B5EF4-FFF2-40B4-BE49-F238E27FC236}">
-                <a16:creationId xmlns:a16="http://schemas.microsoft.com/office/drawing/2014/main" id="{090C6079-1306-4031-BA12-D7AAE226725E}"/>
+                <a16:creationId xmlns:a16="http://schemas.microsoft.com/office/drawing/2014/main" id="{4CDD96A1-BD6E-4237-B147-5727CA5F6B3E}"/>
               </a:ext>
             </a:extLst>
           </p:cNvPr>
@@ -33700,7 +33598,7 @@
           <p:cNvPr id="8" name="">
             <a:extLst xmlns:a="http://schemas.openxmlformats.org/drawingml/2006/main">
               <a:ext uri="{FF2B5EF4-FFF2-40B4-BE49-F238E27FC236}">
-                <a16:creationId xmlns:a16="http://schemas.microsoft.com/office/drawing/2014/main" id="{AD558532-890E-4707-8714-34E5DD5A20A4}"/>
+                <a16:creationId xmlns:a16="http://schemas.microsoft.com/office/drawing/2014/main" id="{D65FF50B-1792-4A25-BC7E-8CD350C124FA}"/>
               </a:ext>
             </a:extLst>
           </p:cNvPr>
@@ -33735,7 +33633,7 @@
           <p:cNvPr id="9" name="">
             <a:extLst xmlns:a="http://schemas.openxmlformats.org/drawingml/2006/main">
               <a:ext uri="{FF2B5EF4-FFF2-40B4-BE49-F238E27FC236}">
-                <a16:creationId xmlns:a16="http://schemas.microsoft.com/office/drawing/2014/main" id="{335C11B1-A0DE-47B8-99E6-769168246A3B}"/>
+                <a16:creationId xmlns:a16="http://schemas.microsoft.com/office/drawing/2014/main" id="{9A4F247D-62B8-4C35-8108-B0C134FFDCD7}"/>
               </a:ext>
             </a:extLst>
           </p:cNvPr>
@@ -33791,7 +33689,7 @@
           <p:cNvPr id="10" name="">
             <a:extLst xmlns:a="http://schemas.openxmlformats.org/drawingml/2006/main">
               <a:ext uri="{FF2B5EF4-FFF2-40B4-BE49-F238E27FC236}">
-                <a16:creationId xmlns:a16="http://schemas.microsoft.com/office/drawing/2014/main" id="{86D109BA-BF6E-4188-BD13-BEE91BE94960}"/>
+                <a16:creationId xmlns:a16="http://schemas.microsoft.com/office/drawing/2014/main" id="{9B7AD7FD-5D11-40F2-8307-6CB6ED02A529}"/>
               </a:ext>
             </a:extLst>
           </p:cNvPr>
@@ -33826,7 +33724,7 @@
           <p:cNvPr id="11" name="">
             <a:extLst xmlns:a="http://schemas.openxmlformats.org/drawingml/2006/main">
               <a:ext uri="{FF2B5EF4-FFF2-40B4-BE49-F238E27FC236}">
-                <a16:creationId xmlns:a16="http://schemas.microsoft.com/office/drawing/2014/main" id="{6EE674CF-A01C-487F-ACEE-F725C2DE48F4}"/>
+                <a16:creationId xmlns:a16="http://schemas.microsoft.com/office/drawing/2014/main" id="{D894A0C3-27B4-4AD5-98FE-03A5AF8B6ABA}"/>
               </a:ext>
             </a:extLst>
           </p:cNvPr>
@@ -33882,7 +33780,7 @@
           <p:cNvPr id="12" name="">
             <a:extLst xmlns:a="http://schemas.openxmlformats.org/drawingml/2006/main">
               <a:ext uri="{FF2B5EF4-FFF2-40B4-BE49-F238E27FC236}">
-                <a16:creationId xmlns:a16="http://schemas.microsoft.com/office/drawing/2014/main" id="{C3B1D9F3-2E05-444A-9211-86A774BD07FD}"/>
+                <a16:creationId xmlns:a16="http://schemas.microsoft.com/office/drawing/2014/main" id="{773E909A-E581-4861-99F5-F594308B6023}"/>
               </a:ext>
             </a:extLst>
           </p:cNvPr>
@@ -33936,7 +33834,7 @@
     </p:spTree>
     <p:extLst>
       <p:ext uri="{BB962C8B-B14F-4D97-AF65-F5344CB8AC3E}">
-        <p14:creationId xmlns:p14="http://schemas.microsoft.com/office/powerpoint/2010/main" val="1525994738"/>
+        <p14:creationId xmlns:p14="http://schemas.microsoft.com/office/powerpoint/2010/main" val="1108959629"/>
       </p:ext>
     </p:extLst>
   </p:cSld>
@@ -33967,7 +33865,7 @@
           <p:cNvPr id="1" name="">
             <a:extLst xmlns:a="http://schemas.openxmlformats.org/drawingml/2006/main">
               <a:ext uri="{FF2B5EF4-FFF2-40B4-BE49-F238E27FC236}">
-                <a16:creationId xmlns:a16="http://schemas.microsoft.com/office/drawing/2014/main" id="{C1498FA6-9392-4C47-BF8B-1C698DD9B8FC}"/>
+                <a16:creationId xmlns:a16="http://schemas.microsoft.com/office/drawing/2014/main" id="{F10BF78A-1A0B-435C-A9BA-ABE0BA88F4C7}"/>
               </a:ext>
             </a:extLst>
           </p:cNvPr>
@@ -34000,7 +33898,7 @@
           <p:cNvPr id="2" name="">
             <a:extLst xmlns:a="http://schemas.openxmlformats.org/drawingml/2006/main">
               <a:ext uri="{FF2B5EF4-FFF2-40B4-BE49-F238E27FC236}">
-                <a16:creationId xmlns:a16="http://schemas.microsoft.com/office/drawing/2014/main" id="{02E7E0B1-A91E-4993-AE91-C0C74408B4C7}"/>
+                <a16:creationId xmlns:a16="http://schemas.microsoft.com/office/drawing/2014/main" id="{BF2A3D70-3CF3-4700-AB7A-90808E1BD7BB}"/>
               </a:ext>
             </a:extLst>
           </p:cNvPr>
@@ -34056,7 +33954,7 @@
           <p:cNvPr id="3" name="">
             <a:extLst xmlns:a="http://schemas.openxmlformats.org/drawingml/2006/main">
               <a:ext uri="{FF2B5EF4-FFF2-40B4-BE49-F238E27FC236}">
-                <a16:creationId xmlns:a16="http://schemas.microsoft.com/office/drawing/2014/main" id="{F5A6C482-1188-4144-B214-6B366EEC2149}"/>
+                <a16:creationId xmlns:a16="http://schemas.microsoft.com/office/drawing/2014/main" id="{A7BDAE80-A7FC-42DC-9C76-B5F89BF22228}"/>
               </a:ext>
             </a:extLst>
           </p:cNvPr>
@@ -34116,19 +34014,13 @@
           <p:nvPr/>
         </p:nvPicPr>
         <p:blipFill>
-          <a:blip xmlns:r="http://schemas.openxmlformats.org/officeDocument/2006/relationships" xmlns:a="http://schemas.openxmlformats.org/drawingml/2006/main" r:embed="Rad298cedfe5b4243">
-            <a:extLst>
-              <a:ext uri="{96DAC541-7B7A-43D3-8B79-37D633B846F1}">
-                <asvg:svgBlip xmlns:asvg="http://schemas.microsoft.com/office/drawing/2016/SVG/main" r:embed="R10206e6b5dd641a6"/>
-              </a:ext>
-            </a:extLst>
-          </a:blip>
+          <a:blip xmlns:r="http://schemas.openxmlformats.org/officeDocument/2006/relationships" xmlns:a="http://schemas.openxmlformats.org/drawingml/2006/main" r:embed="R5325d7d0a9324032"/>
           <a:stretch xmlns:a="http://schemas.openxmlformats.org/drawingml/2006/main"/>
         </p:blipFill>
         <p:spPr>
           <a:xfrm xmlns:a="http://schemas.openxmlformats.org/drawingml/2006/main">
-            <a:off x="6858000" y="1352550"/>
-            <a:ext cx="4286250" cy="2000250"/>
+            <a:off x="6858000" y="1949263"/>
+            <a:ext cx="4286250" cy="806824"/>
           </a:xfrm>
           <a:prstGeom xmlns:a="http://schemas.openxmlformats.org/drawingml/2006/main" prst="rect">
             <a:avLst/>
@@ -34140,7 +34032,7 @@
           <p:cNvPr id="5" name="">
             <a:extLst xmlns:a="http://schemas.openxmlformats.org/drawingml/2006/main">
               <a:ext uri="{FF2B5EF4-FFF2-40B4-BE49-F238E27FC236}">
-                <a16:creationId xmlns:a16="http://schemas.microsoft.com/office/drawing/2014/main" id="{D388B2B1-4A79-46C3-96AE-4CB09460E885}"/>
+                <a16:creationId xmlns:a16="http://schemas.microsoft.com/office/drawing/2014/main" id="{AC1FE8AC-212C-4077-86FA-2C12C855CC03}"/>
               </a:ext>
             </a:extLst>
           </p:cNvPr>
@@ -34175,7 +34067,7 @@
           <p:cNvPr id="6" name="">
             <a:extLst xmlns:a="http://schemas.openxmlformats.org/drawingml/2006/main">
               <a:ext uri="{FF2B5EF4-FFF2-40B4-BE49-F238E27FC236}">
-                <a16:creationId xmlns:a16="http://schemas.microsoft.com/office/drawing/2014/main" id="{F038C7D1-D1B7-475A-95E6-D5539CEBEF84}"/>
+                <a16:creationId xmlns:a16="http://schemas.microsoft.com/office/drawing/2014/main" id="{6C764245-D594-4BD1-921C-B8626CFB0B82}"/>
               </a:ext>
             </a:extLst>
           </p:cNvPr>
@@ -34231,7 +34123,7 @@
           <p:cNvPr id="7" name="">
             <a:extLst xmlns:a="http://schemas.openxmlformats.org/drawingml/2006/main">
               <a:ext uri="{FF2B5EF4-FFF2-40B4-BE49-F238E27FC236}">
-                <a16:creationId xmlns:a16="http://schemas.microsoft.com/office/drawing/2014/main" id="{2A727BD8-BF19-4CC7-959D-109879F4109A}"/>
+                <a16:creationId xmlns:a16="http://schemas.microsoft.com/office/drawing/2014/main" id="{31D7F0A6-0641-4A92-8791-28A22793BC42}"/>
               </a:ext>
             </a:extLst>
           </p:cNvPr>
@@ -34266,7 +34158,7 @@
           <p:cNvPr id="8" name="">
             <a:extLst xmlns:a="http://schemas.openxmlformats.org/drawingml/2006/main">
               <a:ext uri="{FF2B5EF4-FFF2-40B4-BE49-F238E27FC236}">
-                <a16:creationId xmlns:a16="http://schemas.microsoft.com/office/drawing/2014/main" id="{CC005B47-C5CE-4E43-A2C2-32229915B7D7}"/>
+                <a16:creationId xmlns:a16="http://schemas.microsoft.com/office/drawing/2014/main" id="{AC8BFA02-FD62-439E-A26E-F4709A297743}"/>
               </a:ext>
             </a:extLst>
           </p:cNvPr>
@@ -34322,7 +34214,7 @@
           <p:cNvPr id="9" name="">
             <a:extLst xmlns:a="http://schemas.openxmlformats.org/drawingml/2006/main">
               <a:ext uri="{FF2B5EF4-FFF2-40B4-BE49-F238E27FC236}">
-                <a16:creationId xmlns:a16="http://schemas.microsoft.com/office/drawing/2014/main" id="{FDB6409C-2662-4BEC-90D1-9A328AB052EA}"/>
+                <a16:creationId xmlns:a16="http://schemas.microsoft.com/office/drawing/2014/main" id="{FAF7B266-33B1-4050-BF6D-DEA6287807BC}"/>
               </a:ext>
             </a:extLst>
           </p:cNvPr>
@@ -34357,7 +34249,7 @@
           <p:cNvPr id="10" name="">
             <a:extLst xmlns:a="http://schemas.openxmlformats.org/drawingml/2006/main">
               <a:ext uri="{FF2B5EF4-FFF2-40B4-BE49-F238E27FC236}">
-                <a16:creationId xmlns:a16="http://schemas.microsoft.com/office/drawing/2014/main" id="{6F0687AB-7CC7-4FA6-8761-589491C80E48}"/>
+                <a16:creationId xmlns:a16="http://schemas.microsoft.com/office/drawing/2014/main" id="{4E5DCF17-5758-410B-91FD-6063725CDF1C}"/>
               </a:ext>
             </a:extLst>
           </p:cNvPr>
@@ -34413,7 +34305,7 @@
           <p:cNvPr id="11" name="">
             <a:extLst xmlns:a="http://schemas.openxmlformats.org/drawingml/2006/main">
               <a:ext uri="{FF2B5EF4-FFF2-40B4-BE49-F238E27FC236}">
-                <a16:creationId xmlns:a16="http://schemas.microsoft.com/office/drawing/2014/main" id="{A58CA719-E177-45EF-8968-69F21A5E8B5B}"/>
+                <a16:creationId xmlns:a16="http://schemas.microsoft.com/office/drawing/2014/main" id="{9DF551AA-1C90-420A-A68C-DF883417ED89}"/>
               </a:ext>
             </a:extLst>
           </p:cNvPr>
@@ -34448,7 +34340,7 @@
           <p:cNvPr id="12" name="">
             <a:extLst xmlns:a="http://schemas.openxmlformats.org/drawingml/2006/main">
               <a:ext uri="{FF2B5EF4-FFF2-40B4-BE49-F238E27FC236}">
-                <a16:creationId xmlns:a16="http://schemas.microsoft.com/office/drawing/2014/main" id="{4BA8CD05-66A9-45C9-BDE4-5AF17C7F0BCC}"/>
+                <a16:creationId xmlns:a16="http://schemas.microsoft.com/office/drawing/2014/main" id="{9EF5C9A3-45C5-4F5D-8E5F-EC9859B68AAD}"/>
               </a:ext>
             </a:extLst>
           </p:cNvPr>
@@ -34504,7 +34396,7 @@
           <p:cNvPr id="13" name="">
             <a:extLst xmlns:a="http://schemas.openxmlformats.org/drawingml/2006/main">
               <a:ext uri="{FF2B5EF4-FFF2-40B4-BE49-F238E27FC236}">
-                <a16:creationId xmlns:a16="http://schemas.microsoft.com/office/drawing/2014/main" id="{D5D6FFA5-3C2D-4BF5-9D7F-EEE64B2481B8}"/>
+                <a16:creationId xmlns:a16="http://schemas.microsoft.com/office/drawing/2014/main" id="{F2646BE0-08F0-408E-99EE-E008B9CAC656}"/>
               </a:ext>
             </a:extLst>
           </p:cNvPr>
@@ -34539,7 +34431,7 @@
           <p:cNvPr id="14" name="">
             <a:extLst xmlns:a="http://schemas.openxmlformats.org/drawingml/2006/main">
               <a:ext uri="{FF2B5EF4-FFF2-40B4-BE49-F238E27FC236}">
-                <a16:creationId xmlns:a16="http://schemas.microsoft.com/office/drawing/2014/main" id="{945E0B2E-1B08-4E8D-89DC-654DA2208803}"/>
+                <a16:creationId xmlns:a16="http://schemas.microsoft.com/office/drawing/2014/main" id="{76168D57-3552-4CAF-8D67-9940EB117161}"/>
               </a:ext>
             </a:extLst>
           </p:cNvPr>
@@ -34595,7 +34487,7 @@
           <p:cNvPr id="15" name="">
             <a:extLst xmlns:a="http://schemas.openxmlformats.org/drawingml/2006/main">
               <a:ext uri="{FF2B5EF4-FFF2-40B4-BE49-F238E27FC236}">
-                <a16:creationId xmlns:a16="http://schemas.microsoft.com/office/drawing/2014/main" id="{F962A181-6DC9-4821-A331-7D0999656D76}"/>
+                <a16:creationId xmlns:a16="http://schemas.microsoft.com/office/drawing/2014/main" id="{C3552BDE-8807-43AE-8743-ECCEC15615F6}"/>
               </a:ext>
             </a:extLst>
           </p:cNvPr>
@@ -34630,7 +34522,7 @@
           <p:cNvPr id="16" name="">
             <a:extLst xmlns:a="http://schemas.openxmlformats.org/drawingml/2006/main">
               <a:ext uri="{FF2B5EF4-FFF2-40B4-BE49-F238E27FC236}">
-                <a16:creationId xmlns:a16="http://schemas.microsoft.com/office/drawing/2014/main" id="{4EA75F8E-C62D-404A-8049-8E400D229CA6}"/>
+                <a16:creationId xmlns:a16="http://schemas.microsoft.com/office/drawing/2014/main" id="{D5F709B6-ABE0-4F6C-8C88-B20DB7CB7D45}"/>
               </a:ext>
             </a:extLst>
           </p:cNvPr>
@@ -34686,7 +34578,7 @@
           <p:cNvPr id="17" name="">
             <a:extLst xmlns:a="http://schemas.openxmlformats.org/drawingml/2006/main">
               <a:ext uri="{FF2B5EF4-FFF2-40B4-BE49-F238E27FC236}">
-                <a16:creationId xmlns:a16="http://schemas.microsoft.com/office/drawing/2014/main" id="{65674668-F833-4158-AB9B-224A5C277C93}"/>
+                <a16:creationId xmlns:a16="http://schemas.microsoft.com/office/drawing/2014/main" id="{89E5756E-2C01-4739-A6B8-F2283A5E86B2}"/>
               </a:ext>
             </a:extLst>
           </p:cNvPr>
@@ -34721,7 +34613,7 @@
           <p:cNvPr id="18" name="">
             <a:extLst xmlns:a="http://schemas.openxmlformats.org/drawingml/2006/main">
               <a:ext uri="{FF2B5EF4-FFF2-40B4-BE49-F238E27FC236}">
-                <a16:creationId xmlns:a16="http://schemas.microsoft.com/office/drawing/2014/main" id="{87C9E906-663F-40BA-940D-BC9252C32FEB}"/>
+                <a16:creationId xmlns:a16="http://schemas.microsoft.com/office/drawing/2014/main" id="{40F795A9-BB76-47A1-BD6C-73122F348455}"/>
               </a:ext>
             </a:extLst>
           </p:cNvPr>
@@ -34777,7 +34669,7 @@
           <p:cNvPr id="19" name="">
             <a:extLst xmlns:a="http://schemas.openxmlformats.org/drawingml/2006/main">
               <a:ext uri="{FF2B5EF4-FFF2-40B4-BE49-F238E27FC236}">
-                <a16:creationId xmlns:a16="http://schemas.microsoft.com/office/drawing/2014/main" id="{CC755D6A-08CE-4A6B-8FA3-4F2B859A211A}"/>
+                <a16:creationId xmlns:a16="http://schemas.microsoft.com/office/drawing/2014/main" id="{66863408-97F9-48D9-8A16-CF5DB5309000}"/>
               </a:ext>
             </a:extLst>
           </p:cNvPr>
@@ -34812,7 +34704,7 @@
           <p:cNvPr id="20" name="">
             <a:extLst xmlns:a="http://schemas.openxmlformats.org/drawingml/2006/main">
               <a:ext uri="{FF2B5EF4-FFF2-40B4-BE49-F238E27FC236}">
-                <a16:creationId xmlns:a16="http://schemas.microsoft.com/office/drawing/2014/main" id="{5F89E9E6-12A8-4EFF-A3DF-A9345A846B74}"/>
+                <a16:creationId xmlns:a16="http://schemas.microsoft.com/office/drawing/2014/main" id="{FEF3A7B1-4653-458B-A1DB-5C0047D21BED}"/>
               </a:ext>
             </a:extLst>
           </p:cNvPr>
@@ -34868,7 +34760,7 @@
           <p:cNvPr id="21" name="">
             <a:extLst xmlns:a="http://schemas.openxmlformats.org/drawingml/2006/main">
               <a:ext uri="{FF2B5EF4-FFF2-40B4-BE49-F238E27FC236}">
-                <a16:creationId xmlns:a16="http://schemas.microsoft.com/office/drawing/2014/main" id="{DF4BC4B4-7295-4882-B850-348786C6EA0F}"/>
+                <a16:creationId xmlns:a16="http://schemas.microsoft.com/office/drawing/2014/main" id="{59685BFB-769E-46A4-9447-88A68B22D2DC}"/>
               </a:ext>
             </a:extLst>
           </p:cNvPr>
@@ -34903,7 +34795,7 @@
           <p:cNvPr id="22" name="">
             <a:extLst xmlns:a="http://schemas.openxmlformats.org/drawingml/2006/main">
               <a:ext uri="{FF2B5EF4-FFF2-40B4-BE49-F238E27FC236}">
-                <a16:creationId xmlns:a16="http://schemas.microsoft.com/office/drawing/2014/main" id="{3DBF9336-7456-4A5B-8243-2CEFF5B08F6F}"/>
+                <a16:creationId xmlns:a16="http://schemas.microsoft.com/office/drawing/2014/main" id="{DBBA47F7-3BD4-41D8-BF2C-2B1061C5456A}"/>
               </a:ext>
             </a:extLst>
           </p:cNvPr>
@@ -34959,7 +34851,7 @@
           <p:cNvPr id="23" name="">
             <a:extLst xmlns:a="http://schemas.openxmlformats.org/drawingml/2006/main">
               <a:ext uri="{FF2B5EF4-FFF2-40B4-BE49-F238E27FC236}">
-                <a16:creationId xmlns:a16="http://schemas.microsoft.com/office/drawing/2014/main" id="{D14A9A29-CEFB-4E6A-B1A1-45F0922F68B2}"/>
+                <a16:creationId xmlns:a16="http://schemas.microsoft.com/office/drawing/2014/main" id="{01379566-8624-49D2-BC7D-19292E378C87}"/>
               </a:ext>
             </a:extLst>
           </p:cNvPr>
@@ -35013,7 +34905,7 @@
     </p:spTree>
     <p:extLst>
       <p:ext uri="{BB962C8B-B14F-4D97-AF65-F5344CB8AC3E}">
-        <p14:creationId xmlns:p14="http://schemas.microsoft.com/office/powerpoint/2010/main" val="1009158860"/>
+        <p14:creationId xmlns:p14="http://schemas.microsoft.com/office/powerpoint/2010/main" val="1028840453"/>
       </p:ext>
     </p:extLst>
   </p:cSld>
@@ -35044,7 +34936,7 @@
           <p:cNvPr id="1" name="">
             <a:extLst xmlns:a="http://schemas.openxmlformats.org/drawingml/2006/main">
               <a:ext uri="{FF2B5EF4-FFF2-40B4-BE49-F238E27FC236}">
-                <a16:creationId xmlns:a16="http://schemas.microsoft.com/office/drawing/2014/main" id="{64139B9E-DEAF-4083-8451-B0CB552F2A9A}"/>
+                <a16:creationId xmlns:a16="http://schemas.microsoft.com/office/drawing/2014/main" id="{C7C1CA5B-3AB5-4F01-AD31-B43EE7B7C2C7}"/>
               </a:ext>
             </a:extLst>
           </p:cNvPr>
@@ -35077,7 +34969,7 @@
           <p:cNvPr id="2" name="">
             <a:extLst xmlns:a="http://schemas.openxmlformats.org/drawingml/2006/main">
               <a:ext uri="{FF2B5EF4-FFF2-40B4-BE49-F238E27FC236}">
-                <a16:creationId xmlns:a16="http://schemas.microsoft.com/office/drawing/2014/main" id="{4B787195-6CBA-424C-9044-CFC70F4388FF}"/>
+                <a16:creationId xmlns:a16="http://schemas.microsoft.com/office/drawing/2014/main" id="{B22EECB1-89E3-4229-8632-2F16627AA5BE}"/>
               </a:ext>
             </a:extLst>
           </p:cNvPr>
@@ -35133,7 +35025,7 @@
           <p:cNvPr id="3" name="">
             <a:extLst xmlns:a="http://schemas.openxmlformats.org/drawingml/2006/main">
               <a:ext uri="{FF2B5EF4-FFF2-40B4-BE49-F238E27FC236}">
-                <a16:creationId xmlns:a16="http://schemas.microsoft.com/office/drawing/2014/main" id="{44B8ED0A-A8D5-451E-B83C-50020364BEB1}"/>
+                <a16:creationId xmlns:a16="http://schemas.microsoft.com/office/drawing/2014/main" id="{6E4F83CE-0562-40B0-AE6A-258A1668716B}"/>
               </a:ext>
             </a:extLst>
           </p:cNvPr>
@@ -35189,7 +35081,7 @@
           <p:cNvPr id="4" name="">
             <a:extLst xmlns:a="http://schemas.openxmlformats.org/drawingml/2006/main">
               <a:ext uri="{FF2B5EF4-FFF2-40B4-BE49-F238E27FC236}">
-                <a16:creationId xmlns:a16="http://schemas.microsoft.com/office/drawing/2014/main" id="{7BC457FE-0DE4-4823-A117-E5AB3D0B1474}"/>
+                <a16:creationId xmlns:a16="http://schemas.microsoft.com/office/drawing/2014/main" id="{39A7FB21-6D55-495C-AFFC-B020177D36E0}"/>
               </a:ext>
             </a:extLst>
           </p:cNvPr>
@@ -35224,7 +35116,7 @@
           <p:cNvPr id="5" name="">
             <a:extLst xmlns:a="http://schemas.openxmlformats.org/drawingml/2006/main">
               <a:ext uri="{FF2B5EF4-FFF2-40B4-BE49-F238E27FC236}">
-                <a16:creationId xmlns:a16="http://schemas.microsoft.com/office/drawing/2014/main" id="{7F457FCB-06EF-4056-81FE-146B1168E746}"/>
+                <a16:creationId xmlns:a16="http://schemas.microsoft.com/office/drawing/2014/main" id="{8AF3304D-D091-4D5A-BEB1-15D317E93DC3}"/>
               </a:ext>
             </a:extLst>
           </p:cNvPr>
@@ -35280,7 +35172,7 @@
           <p:cNvPr id="6" name="">
             <a:extLst xmlns:a="http://schemas.openxmlformats.org/drawingml/2006/main">
               <a:ext uri="{FF2B5EF4-FFF2-40B4-BE49-F238E27FC236}">
-                <a16:creationId xmlns:a16="http://schemas.microsoft.com/office/drawing/2014/main" id="{CC21D28F-4CCE-492E-A3D3-5F96631E8483}"/>
+                <a16:creationId xmlns:a16="http://schemas.microsoft.com/office/drawing/2014/main" id="{98577728-ECF3-4B50-BB0D-84420D71216A}"/>
               </a:ext>
             </a:extLst>
           </p:cNvPr>
@@ -35315,7 +35207,7 @@
           <p:cNvPr id="7" name="">
             <a:extLst xmlns:a="http://schemas.openxmlformats.org/drawingml/2006/main">
               <a:ext uri="{FF2B5EF4-FFF2-40B4-BE49-F238E27FC236}">
-                <a16:creationId xmlns:a16="http://schemas.microsoft.com/office/drawing/2014/main" id="{982C5854-6777-4403-90D4-AD81D4B5FD88}"/>
+                <a16:creationId xmlns:a16="http://schemas.microsoft.com/office/drawing/2014/main" id="{034B5945-AEA0-4686-A514-95A8702EA33A}"/>
               </a:ext>
             </a:extLst>
           </p:cNvPr>
@@ -35371,7 +35263,7 @@
           <p:cNvPr id="8" name="">
             <a:extLst xmlns:a="http://schemas.openxmlformats.org/drawingml/2006/main">
               <a:ext uri="{FF2B5EF4-FFF2-40B4-BE49-F238E27FC236}">
-                <a16:creationId xmlns:a16="http://schemas.microsoft.com/office/drawing/2014/main" id="{9CA2BE8D-D62C-4CA0-84BB-18C875AA505B}"/>
+                <a16:creationId xmlns:a16="http://schemas.microsoft.com/office/drawing/2014/main" id="{FE3FD935-6043-4EFF-9074-728217017FF9}"/>
               </a:ext>
             </a:extLst>
           </p:cNvPr>
@@ -35406,7 +35298,7 @@
           <p:cNvPr id="9" name="">
             <a:extLst xmlns:a="http://schemas.openxmlformats.org/drawingml/2006/main">
               <a:ext uri="{FF2B5EF4-FFF2-40B4-BE49-F238E27FC236}">
-                <a16:creationId xmlns:a16="http://schemas.microsoft.com/office/drawing/2014/main" id="{082EDBBA-D6B5-4628-8322-39AE26976692}"/>
+                <a16:creationId xmlns:a16="http://schemas.microsoft.com/office/drawing/2014/main" id="{7B000103-CA6F-44F5-87D1-691BA3237891}"/>
               </a:ext>
             </a:extLst>
           </p:cNvPr>
@@ -35462,7 +35354,7 @@
           <p:cNvPr id="10" name="">
             <a:extLst xmlns:a="http://schemas.openxmlformats.org/drawingml/2006/main">
               <a:ext uri="{FF2B5EF4-FFF2-40B4-BE49-F238E27FC236}">
-                <a16:creationId xmlns:a16="http://schemas.microsoft.com/office/drawing/2014/main" id="{304C70D9-265F-4026-80F0-2DD8D9DED2DD}"/>
+                <a16:creationId xmlns:a16="http://schemas.microsoft.com/office/drawing/2014/main" id="{E724F353-9DD6-48FD-B9EB-70276881D0E2}"/>
               </a:ext>
             </a:extLst>
           </p:cNvPr>
@@ -35497,7 +35389,7 @@
           <p:cNvPr id="11" name="">
             <a:extLst xmlns:a="http://schemas.openxmlformats.org/drawingml/2006/main">
               <a:ext uri="{FF2B5EF4-FFF2-40B4-BE49-F238E27FC236}">
-                <a16:creationId xmlns:a16="http://schemas.microsoft.com/office/drawing/2014/main" id="{4C4B0DD3-FE6B-4938-8392-E64CD840321C}"/>
+                <a16:creationId xmlns:a16="http://schemas.microsoft.com/office/drawing/2014/main" id="{32568D03-483A-4087-A653-08885572CB77}"/>
               </a:ext>
             </a:extLst>
           </p:cNvPr>
@@ -35553,7 +35445,7 @@
           <p:cNvPr id="12" name="">
             <a:extLst xmlns:a="http://schemas.openxmlformats.org/drawingml/2006/main">
               <a:ext uri="{FF2B5EF4-FFF2-40B4-BE49-F238E27FC236}">
-                <a16:creationId xmlns:a16="http://schemas.microsoft.com/office/drawing/2014/main" id="{CEAEBFB8-E062-4FFF-A0C4-C5B5EBE8F713}"/>
+                <a16:creationId xmlns:a16="http://schemas.microsoft.com/office/drawing/2014/main" id="{8A94C1D4-C066-4FCC-91C5-59E85C9A9E13}"/>
               </a:ext>
             </a:extLst>
           </p:cNvPr>
@@ -35607,7 +35499,7 @@
     </p:spTree>
     <p:extLst>
       <p:ext uri="{BB962C8B-B14F-4D97-AF65-F5344CB8AC3E}">
-        <p14:creationId xmlns:p14="http://schemas.microsoft.com/office/powerpoint/2010/main" val="995295418"/>
+        <p14:creationId xmlns:p14="http://schemas.microsoft.com/office/powerpoint/2010/main" val="1923122202"/>
       </p:ext>
     </p:extLst>
   </p:cSld>
@@ -35638,7 +35530,7 @@
           <p:cNvPr id="1" name="">
             <a:extLst xmlns:a="http://schemas.openxmlformats.org/drawingml/2006/main">
               <a:ext uri="{FF2B5EF4-FFF2-40B4-BE49-F238E27FC236}">
-                <a16:creationId xmlns:a16="http://schemas.microsoft.com/office/drawing/2014/main" id="{2FA7B867-D927-4486-9156-6288C557D6EA}"/>
+                <a16:creationId xmlns:a16="http://schemas.microsoft.com/office/drawing/2014/main" id="{75801230-E565-4648-91F4-9CC77EDD51AA}"/>
               </a:ext>
             </a:extLst>
           </p:cNvPr>
@@ -35671,7 +35563,7 @@
           <p:cNvPr id="2" name="">
             <a:extLst xmlns:a="http://schemas.openxmlformats.org/drawingml/2006/main">
               <a:ext uri="{FF2B5EF4-FFF2-40B4-BE49-F238E27FC236}">
-                <a16:creationId xmlns:a16="http://schemas.microsoft.com/office/drawing/2014/main" id="{162589EA-481D-40F6-9E01-0946F7539785}"/>
+                <a16:creationId xmlns:a16="http://schemas.microsoft.com/office/drawing/2014/main" id="{78EAD080-4589-46E7-9F9D-740BFE5F0616}"/>
               </a:ext>
             </a:extLst>
           </p:cNvPr>
@@ -35727,7 +35619,7 @@
           <p:cNvPr id="3" name="">
             <a:extLst xmlns:a="http://schemas.openxmlformats.org/drawingml/2006/main">
               <a:ext uri="{FF2B5EF4-FFF2-40B4-BE49-F238E27FC236}">
-                <a16:creationId xmlns:a16="http://schemas.microsoft.com/office/drawing/2014/main" id="{2B45408A-EE1B-4732-B575-7442D7311DCE}"/>
+                <a16:creationId xmlns:a16="http://schemas.microsoft.com/office/drawing/2014/main" id="{937D9BB7-AC6B-4259-94FE-4673DC0C1828}"/>
               </a:ext>
             </a:extLst>
           </p:cNvPr>
@@ -35783,7 +35675,7 @@
           <p:cNvPr id="4" name="">
             <a:extLst xmlns:a="http://schemas.openxmlformats.org/drawingml/2006/main">
               <a:ext uri="{FF2B5EF4-FFF2-40B4-BE49-F238E27FC236}">
-                <a16:creationId xmlns:a16="http://schemas.microsoft.com/office/drawing/2014/main" id="{DD44B3AB-CC07-4A80-A390-7EA797BD9A8D}"/>
+                <a16:creationId xmlns:a16="http://schemas.microsoft.com/office/drawing/2014/main" id="{EDBE8BA5-F05E-4888-BD58-CC06CD46B2B3}"/>
               </a:ext>
             </a:extLst>
           </p:cNvPr>
@@ -35954,7 +35846,7 @@
           <p:cNvPr id="5" name="">
             <a:extLst xmlns:a="http://schemas.openxmlformats.org/drawingml/2006/main">
               <a:ext uri="{FF2B5EF4-FFF2-40B4-BE49-F238E27FC236}">
-                <a16:creationId xmlns:a16="http://schemas.microsoft.com/office/drawing/2014/main" id="{41F3A85A-73F0-4AA2-BCA5-507E71E12772}"/>
+                <a16:creationId xmlns:a16="http://schemas.microsoft.com/office/drawing/2014/main" id="{5CFBB30B-07BC-4935-AB69-3B2004EA70BE}"/>
               </a:ext>
             </a:extLst>
           </p:cNvPr>
@@ -35989,7 +35881,7 @@
           <p:cNvPr id="6" name="">
             <a:extLst xmlns:a="http://schemas.openxmlformats.org/drawingml/2006/main">
               <a:ext uri="{FF2B5EF4-FFF2-40B4-BE49-F238E27FC236}">
-                <a16:creationId xmlns:a16="http://schemas.microsoft.com/office/drawing/2014/main" id="{20D74435-0D33-407F-943D-CB2EBD74FCF7}"/>
+                <a16:creationId xmlns:a16="http://schemas.microsoft.com/office/drawing/2014/main" id="{6EC57991-0814-4D82-8519-BD62829E59E0}"/>
               </a:ext>
             </a:extLst>
           </p:cNvPr>
@@ -36045,7 +35937,7 @@
           <p:cNvPr id="7" name="">
             <a:extLst xmlns:a="http://schemas.openxmlformats.org/drawingml/2006/main">
               <a:ext uri="{FF2B5EF4-FFF2-40B4-BE49-F238E27FC236}">
-                <a16:creationId xmlns:a16="http://schemas.microsoft.com/office/drawing/2014/main" id="{C80CBEFE-63BD-450F-964F-6883BB8A4774}"/>
+                <a16:creationId xmlns:a16="http://schemas.microsoft.com/office/drawing/2014/main" id="{2FBE58E0-9C93-4BA6-B35E-395427003130}"/>
               </a:ext>
             </a:extLst>
           </p:cNvPr>
@@ -36099,7 +35991,7 @@
     </p:spTree>
     <p:extLst>
       <p:ext uri="{BB962C8B-B14F-4D97-AF65-F5344CB8AC3E}">
-        <p14:creationId xmlns:p14="http://schemas.microsoft.com/office/powerpoint/2010/main" val="780831059"/>
+        <p14:creationId xmlns:p14="http://schemas.microsoft.com/office/powerpoint/2010/main" val="1096080412"/>
       </p:ext>
     </p:extLst>
   </p:cSld>
@@ -36130,7 +36022,7 @@
           <p:cNvPr id="1" name="">
             <a:extLst xmlns:a="http://schemas.openxmlformats.org/drawingml/2006/main">
               <a:ext uri="{FF2B5EF4-FFF2-40B4-BE49-F238E27FC236}">
-                <a16:creationId xmlns:a16="http://schemas.microsoft.com/office/drawing/2014/main" id="{B527EF92-8862-42F7-9A40-504E406DC77E}"/>
+                <a16:creationId xmlns:a16="http://schemas.microsoft.com/office/drawing/2014/main" id="{B0443BEE-B693-44BB-A348-F29907560DDD}"/>
               </a:ext>
             </a:extLst>
           </p:cNvPr>
@@ -36163,7 +36055,7 @@
           <p:cNvPr id="2" name="">
             <a:extLst xmlns:a="http://schemas.openxmlformats.org/drawingml/2006/main">
               <a:ext uri="{FF2B5EF4-FFF2-40B4-BE49-F238E27FC236}">
-                <a16:creationId xmlns:a16="http://schemas.microsoft.com/office/drawing/2014/main" id="{B2FFA97D-DE52-48EA-AAD6-D6E411739097}"/>
+                <a16:creationId xmlns:a16="http://schemas.microsoft.com/office/drawing/2014/main" id="{59824F31-913F-41F4-9F9F-34EB9DA62717}"/>
               </a:ext>
             </a:extLst>
           </p:cNvPr>
@@ -36219,7 +36111,7 @@
           <p:cNvPr id="3" name="">
             <a:extLst xmlns:a="http://schemas.openxmlformats.org/drawingml/2006/main">
               <a:ext uri="{FF2B5EF4-FFF2-40B4-BE49-F238E27FC236}">
-                <a16:creationId xmlns:a16="http://schemas.microsoft.com/office/drawing/2014/main" id="{E863C715-DEFB-455F-9B2A-8B1C85BB3740}"/>
+                <a16:creationId xmlns:a16="http://schemas.microsoft.com/office/drawing/2014/main" id="{295372BC-CC79-432E-8178-1BD71D0F97DF}"/>
               </a:ext>
             </a:extLst>
           </p:cNvPr>
@@ -36275,7 +36167,7 @@
           <p:cNvPr id="4" name="">
             <a:extLst xmlns:a="http://schemas.openxmlformats.org/drawingml/2006/main">
               <a:ext uri="{FF2B5EF4-FFF2-40B4-BE49-F238E27FC236}">
-                <a16:creationId xmlns:a16="http://schemas.microsoft.com/office/drawing/2014/main" id="{7793419A-3853-4264-9B15-6194660F3E5A}"/>
+                <a16:creationId xmlns:a16="http://schemas.microsoft.com/office/drawing/2014/main" id="{EA9260F6-93CD-49A3-88E9-84B77510CE0D}"/>
               </a:ext>
             </a:extLst>
           </p:cNvPr>
@@ -36310,7 +36202,7 @@
           <p:cNvPr id="5" name="">
             <a:extLst xmlns:a="http://schemas.openxmlformats.org/drawingml/2006/main">
               <a:ext uri="{FF2B5EF4-FFF2-40B4-BE49-F238E27FC236}">
-                <a16:creationId xmlns:a16="http://schemas.microsoft.com/office/drawing/2014/main" id="{0C46B278-9423-450D-9ECB-385B42390E15}"/>
+                <a16:creationId xmlns:a16="http://schemas.microsoft.com/office/drawing/2014/main" id="{2375870C-6177-4AF8-8A78-CE26418FB2DF}"/>
               </a:ext>
             </a:extLst>
           </p:cNvPr>
@@ -36366,7 +36258,7 @@
           <p:cNvPr id="6" name="">
             <a:extLst xmlns:a="http://schemas.openxmlformats.org/drawingml/2006/main">
               <a:ext uri="{FF2B5EF4-FFF2-40B4-BE49-F238E27FC236}">
-                <a16:creationId xmlns:a16="http://schemas.microsoft.com/office/drawing/2014/main" id="{51577F5D-9831-4F5D-B1D5-5D047AF1A505}"/>
+                <a16:creationId xmlns:a16="http://schemas.microsoft.com/office/drawing/2014/main" id="{232252D8-6E82-4869-A7A7-AC0A5ED85DD0}"/>
               </a:ext>
             </a:extLst>
           </p:cNvPr>
@@ -36401,7 +36293,7 @@
           <p:cNvPr id="7" name="">
             <a:extLst xmlns:a="http://schemas.openxmlformats.org/drawingml/2006/main">
               <a:ext uri="{FF2B5EF4-FFF2-40B4-BE49-F238E27FC236}">
-                <a16:creationId xmlns:a16="http://schemas.microsoft.com/office/drawing/2014/main" id="{F9E9A63A-9F5B-45E5-A95F-BA51B67CC16D}"/>
+                <a16:creationId xmlns:a16="http://schemas.microsoft.com/office/drawing/2014/main" id="{F5C16118-F87F-4689-AD2F-73AE827794ED}"/>
               </a:ext>
             </a:extLst>
           </p:cNvPr>
@@ -36457,7 +36349,7 @@
           <p:cNvPr id="8" name="">
             <a:extLst xmlns:a="http://schemas.openxmlformats.org/drawingml/2006/main">
               <a:ext uri="{FF2B5EF4-FFF2-40B4-BE49-F238E27FC236}">
-                <a16:creationId xmlns:a16="http://schemas.microsoft.com/office/drawing/2014/main" id="{1BAB1F38-D421-4AB8-A1B2-B4B251928E0D}"/>
+                <a16:creationId xmlns:a16="http://schemas.microsoft.com/office/drawing/2014/main" id="{E8596034-7096-46D5-9233-2F7D57DAF2B0}"/>
               </a:ext>
             </a:extLst>
           </p:cNvPr>
@@ -36492,7 +36384,7 @@
           <p:cNvPr id="9" name="">
             <a:extLst xmlns:a="http://schemas.openxmlformats.org/drawingml/2006/main">
               <a:ext uri="{FF2B5EF4-FFF2-40B4-BE49-F238E27FC236}">
-                <a16:creationId xmlns:a16="http://schemas.microsoft.com/office/drawing/2014/main" id="{077043E6-DEAB-4FDC-8C42-DAA0C08362A9}"/>
+                <a16:creationId xmlns:a16="http://schemas.microsoft.com/office/drawing/2014/main" id="{04D183AF-CAEF-4A77-9FB7-F46E2982ED0A}"/>
               </a:ext>
             </a:extLst>
           </p:cNvPr>
@@ -36548,7 +36440,7 @@
           <p:cNvPr id="10" name="">
             <a:extLst xmlns:a="http://schemas.openxmlformats.org/drawingml/2006/main">
               <a:ext uri="{FF2B5EF4-FFF2-40B4-BE49-F238E27FC236}">
-                <a16:creationId xmlns:a16="http://schemas.microsoft.com/office/drawing/2014/main" id="{D337EF84-02E5-4D59-9C63-AE64BF570046}"/>
+                <a16:creationId xmlns:a16="http://schemas.microsoft.com/office/drawing/2014/main" id="{CE05BA07-E98B-4708-B74A-CD2E9ADA4F62}"/>
               </a:ext>
             </a:extLst>
           </p:cNvPr>
@@ -36583,7 +36475,7 @@
           <p:cNvPr id="11" name="">
             <a:extLst xmlns:a="http://schemas.openxmlformats.org/drawingml/2006/main">
               <a:ext uri="{FF2B5EF4-FFF2-40B4-BE49-F238E27FC236}">
-                <a16:creationId xmlns:a16="http://schemas.microsoft.com/office/drawing/2014/main" id="{0B7715B7-E349-4098-8544-D4B59C9AC0FA}"/>
+                <a16:creationId xmlns:a16="http://schemas.microsoft.com/office/drawing/2014/main" id="{BE1D7A54-B06E-403B-B61B-0A70C1203430}"/>
               </a:ext>
             </a:extLst>
           </p:cNvPr>
@@ -36639,7 +36531,7 @@
           <p:cNvPr id="12" name="">
             <a:extLst xmlns:a="http://schemas.openxmlformats.org/drawingml/2006/main">
               <a:ext uri="{FF2B5EF4-FFF2-40B4-BE49-F238E27FC236}">
-                <a16:creationId xmlns:a16="http://schemas.microsoft.com/office/drawing/2014/main" id="{5C625CE4-EFAE-480A-8E6F-CFD1CD0E225A}"/>
+                <a16:creationId xmlns:a16="http://schemas.microsoft.com/office/drawing/2014/main" id="{94421959-3A7C-4973-B45C-7BFE25CE99D2}"/>
               </a:ext>
             </a:extLst>
           </p:cNvPr>
@@ -36674,7 +36566,7 @@
           <p:cNvPr id="13" name="">
             <a:extLst xmlns:a="http://schemas.openxmlformats.org/drawingml/2006/main">
               <a:ext uri="{FF2B5EF4-FFF2-40B4-BE49-F238E27FC236}">
-                <a16:creationId xmlns:a16="http://schemas.microsoft.com/office/drawing/2014/main" id="{C9ADE4BB-17AE-473A-901A-70A0A57C8E4F}"/>
+                <a16:creationId xmlns:a16="http://schemas.microsoft.com/office/drawing/2014/main" id="{EDF81F54-52AD-4828-881A-292A8AE580AB}"/>
               </a:ext>
             </a:extLst>
           </p:cNvPr>
@@ -36730,7 +36622,7 @@
           <p:cNvPr id="14" name="">
             <a:extLst xmlns:a="http://schemas.openxmlformats.org/drawingml/2006/main">
               <a:ext uri="{FF2B5EF4-FFF2-40B4-BE49-F238E27FC236}">
-                <a16:creationId xmlns:a16="http://schemas.microsoft.com/office/drawing/2014/main" id="{CF04BBC4-05C1-4EC0-A8CF-ABAA352AC89C}"/>
+                <a16:creationId xmlns:a16="http://schemas.microsoft.com/office/drawing/2014/main" id="{396D4D5E-272A-4EEC-9647-B60A18AB70CC}"/>
               </a:ext>
             </a:extLst>
           </p:cNvPr>
@@ -36784,7 +36676,7 @@
     </p:spTree>
     <p:extLst>
       <p:ext uri="{BB962C8B-B14F-4D97-AF65-F5344CB8AC3E}">
-        <p14:creationId xmlns:p14="http://schemas.microsoft.com/office/powerpoint/2010/main" val="1298324656"/>
+        <p14:creationId xmlns:p14="http://schemas.microsoft.com/office/powerpoint/2010/main" val="2005378183"/>
       </p:ext>
     </p:extLst>
   </p:cSld>
@@ -36815,7 +36707,7 @@
           <p:cNvPr id="1" name="">
             <a:extLst xmlns:a="http://schemas.openxmlformats.org/drawingml/2006/main">
               <a:ext uri="{FF2B5EF4-FFF2-40B4-BE49-F238E27FC236}">
-                <a16:creationId xmlns:a16="http://schemas.microsoft.com/office/drawing/2014/main" id="{6AF70C15-FDAD-4F65-B220-D28345C983EE}"/>
+                <a16:creationId xmlns:a16="http://schemas.microsoft.com/office/drawing/2014/main" id="{1177587A-F656-4CC4-AAA1-E1F3D4EC1ADA}"/>
               </a:ext>
             </a:extLst>
           </p:cNvPr>
@@ -36848,7 +36740,7 @@
           <p:cNvPr id="2" name="">
             <a:extLst xmlns:a="http://schemas.openxmlformats.org/drawingml/2006/main">
               <a:ext uri="{FF2B5EF4-FFF2-40B4-BE49-F238E27FC236}">
-                <a16:creationId xmlns:a16="http://schemas.microsoft.com/office/drawing/2014/main" id="{044D122D-47DF-4B1D-9F7D-095A6F84B3E3}"/>
+                <a16:creationId xmlns:a16="http://schemas.microsoft.com/office/drawing/2014/main" id="{D3E71CA1-3FA9-4C68-BAB6-F59D4AAB6536}"/>
               </a:ext>
             </a:extLst>
           </p:cNvPr>
@@ -36904,7 +36796,7 @@
           <p:cNvPr id="3" name="">
             <a:extLst xmlns:a="http://schemas.openxmlformats.org/drawingml/2006/main">
               <a:ext uri="{FF2B5EF4-FFF2-40B4-BE49-F238E27FC236}">
-                <a16:creationId xmlns:a16="http://schemas.microsoft.com/office/drawing/2014/main" id="{93E92CA5-0623-423A-A837-3AB4C8EE1D94}"/>
+                <a16:creationId xmlns:a16="http://schemas.microsoft.com/office/drawing/2014/main" id="{CD4437F9-91B1-4711-B1B0-BCE52DAA7459}"/>
               </a:ext>
             </a:extLst>
           </p:cNvPr>
@@ -36960,7 +36852,7 @@
           <p:cNvPr id="4" name="">
             <a:extLst xmlns:a="http://schemas.openxmlformats.org/drawingml/2006/main">
               <a:ext uri="{FF2B5EF4-FFF2-40B4-BE49-F238E27FC236}">
-                <a16:creationId xmlns:a16="http://schemas.microsoft.com/office/drawing/2014/main" id="{65E2AA34-918B-47C5-B902-16DA6677985E}"/>
+                <a16:creationId xmlns:a16="http://schemas.microsoft.com/office/drawing/2014/main" id="{E6DD4FE7-E61E-4ED7-971B-E3138AC9F8BE}"/>
               </a:ext>
             </a:extLst>
           </p:cNvPr>
@@ -36995,7 +36887,7 @@
           <p:cNvPr id="5" name="">
             <a:extLst xmlns:a="http://schemas.openxmlformats.org/drawingml/2006/main">
               <a:ext uri="{FF2B5EF4-FFF2-40B4-BE49-F238E27FC236}">
-                <a16:creationId xmlns:a16="http://schemas.microsoft.com/office/drawing/2014/main" id="{FF088402-D375-4991-BF73-12ECE2FF06FB}"/>
+                <a16:creationId xmlns:a16="http://schemas.microsoft.com/office/drawing/2014/main" id="{A2968C41-C61C-4C27-9208-832FF7C53A1E}"/>
               </a:ext>
             </a:extLst>
           </p:cNvPr>
@@ -37051,7 +36943,7 @@
           <p:cNvPr id="6" name="">
             <a:extLst xmlns:a="http://schemas.openxmlformats.org/drawingml/2006/main">
               <a:ext uri="{FF2B5EF4-FFF2-40B4-BE49-F238E27FC236}">
-                <a16:creationId xmlns:a16="http://schemas.microsoft.com/office/drawing/2014/main" id="{CE12ED85-2026-4150-8E66-A72774A8BD4A}"/>
+                <a16:creationId xmlns:a16="http://schemas.microsoft.com/office/drawing/2014/main" id="{FC71EB3A-E4F5-4747-9F5E-0E93619CF6DF}"/>
               </a:ext>
             </a:extLst>
           </p:cNvPr>
@@ -37086,7 +36978,7 @@
           <p:cNvPr id="7" name="">
             <a:extLst xmlns:a="http://schemas.openxmlformats.org/drawingml/2006/main">
               <a:ext uri="{FF2B5EF4-FFF2-40B4-BE49-F238E27FC236}">
-                <a16:creationId xmlns:a16="http://schemas.microsoft.com/office/drawing/2014/main" id="{EEED21EC-A835-4A86-976A-03CB30912413}"/>
+                <a16:creationId xmlns:a16="http://schemas.microsoft.com/office/drawing/2014/main" id="{8D584466-9AC5-4B8D-ADDD-6073EBC14675}"/>
               </a:ext>
             </a:extLst>
           </p:cNvPr>
@@ -37142,7 +37034,7 @@
           <p:cNvPr id="8" name="">
             <a:extLst xmlns:a="http://schemas.openxmlformats.org/drawingml/2006/main">
               <a:ext uri="{FF2B5EF4-FFF2-40B4-BE49-F238E27FC236}">
-                <a16:creationId xmlns:a16="http://schemas.microsoft.com/office/drawing/2014/main" id="{3AFC0B0D-54A6-4192-B13D-9D39533940C4}"/>
+                <a16:creationId xmlns:a16="http://schemas.microsoft.com/office/drawing/2014/main" id="{3D4D7807-BEA2-4482-9B50-BCC19967C14E}"/>
               </a:ext>
             </a:extLst>
           </p:cNvPr>
@@ -37177,7 +37069,7 @@
           <p:cNvPr id="9" name="">
             <a:extLst xmlns:a="http://schemas.openxmlformats.org/drawingml/2006/main">
               <a:ext uri="{FF2B5EF4-FFF2-40B4-BE49-F238E27FC236}">
-                <a16:creationId xmlns:a16="http://schemas.microsoft.com/office/drawing/2014/main" id="{60302640-3F9F-4690-91B2-D2C0E1F460A8}"/>
+                <a16:creationId xmlns:a16="http://schemas.microsoft.com/office/drawing/2014/main" id="{4CF6CDB7-43F3-4472-9BED-3DA5C601315A}"/>
               </a:ext>
             </a:extLst>
           </p:cNvPr>
@@ -37233,7 +37125,7 @@
           <p:cNvPr id="10" name="">
             <a:extLst xmlns:a="http://schemas.openxmlformats.org/drawingml/2006/main">
               <a:ext uri="{FF2B5EF4-FFF2-40B4-BE49-F238E27FC236}">
-                <a16:creationId xmlns:a16="http://schemas.microsoft.com/office/drawing/2014/main" id="{497A42C9-C2C1-4DC5-A7CF-1FDE48D99C99}"/>
+                <a16:creationId xmlns:a16="http://schemas.microsoft.com/office/drawing/2014/main" id="{5F3B199C-753F-4343-8867-24C72DEDE03D}"/>
               </a:ext>
             </a:extLst>
           </p:cNvPr>
@@ -37268,7 +37160,7 @@
           <p:cNvPr id="11" name="">
             <a:extLst xmlns:a="http://schemas.openxmlformats.org/drawingml/2006/main">
               <a:ext uri="{FF2B5EF4-FFF2-40B4-BE49-F238E27FC236}">
-                <a16:creationId xmlns:a16="http://schemas.microsoft.com/office/drawing/2014/main" id="{6DF161B3-D996-4CBD-85EC-FBBF7B3320FE}"/>
+                <a16:creationId xmlns:a16="http://schemas.microsoft.com/office/drawing/2014/main" id="{D8EC70D5-1301-4C57-A9D0-65505D0C79F2}"/>
               </a:ext>
             </a:extLst>
           </p:cNvPr>
@@ -37324,7 +37216,7 @@
           <p:cNvPr id="12" name="">
             <a:extLst xmlns:a="http://schemas.openxmlformats.org/drawingml/2006/main">
               <a:ext uri="{FF2B5EF4-FFF2-40B4-BE49-F238E27FC236}">
-                <a16:creationId xmlns:a16="http://schemas.microsoft.com/office/drawing/2014/main" id="{A8F348B2-4A11-46B3-A94E-47D301EB0326}"/>
+                <a16:creationId xmlns:a16="http://schemas.microsoft.com/office/drawing/2014/main" id="{64BEAC22-5062-4A7D-A1A7-2DCECD5C4784}"/>
               </a:ext>
             </a:extLst>
           </p:cNvPr>
@@ -37359,7 +37251,7 @@
           <p:cNvPr id="13" name="">
             <a:extLst xmlns:a="http://schemas.openxmlformats.org/drawingml/2006/main">
               <a:ext uri="{FF2B5EF4-FFF2-40B4-BE49-F238E27FC236}">
-                <a16:creationId xmlns:a16="http://schemas.microsoft.com/office/drawing/2014/main" id="{A9538580-5C13-4576-9608-4F21DCDBB75C}"/>
+                <a16:creationId xmlns:a16="http://schemas.microsoft.com/office/drawing/2014/main" id="{5E0667A0-7476-437A-8595-AA01483AB840}"/>
               </a:ext>
             </a:extLst>
           </p:cNvPr>
@@ -37415,7 +37307,7 @@
           <p:cNvPr id="14" name="">
             <a:extLst xmlns:a="http://schemas.openxmlformats.org/drawingml/2006/main">
               <a:ext uri="{FF2B5EF4-FFF2-40B4-BE49-F238E27FC236}">
-                <a16:creationId xmlns:a16="http://schemas.microsoft.com/office/drawing/2014/main" id="{B0274DC0-F23D-412C-8C58-08394830DAD6}"/>
+                <a16:creationId xmlns:a16="http://schemas.microsoft.com/office/drawing/2014/main" id="{8557EF34-6016-453D-A336-712FFAACF6BC}"/>
               </a:ext>
             </a:extLst>
           </p:cNvPr>
@@ -37450,7 +37342,7 @@
           <p:cNvPr id="15" name="">
             <a:extLst xmlns:a="http://schemas.openxmlformats.org/drawingml/2006/main">
               <a:ext uri="{FF2B5EF4-FFF2-40B4-BE49-F238E27FC236}">
-                <a16:creationId xmlns:a16="http://schemas.microsoft.com/office/drawing/2014/main" id="{05667241-0044-4FA2-B98F-61CC7BE52F41}"/>
+                <a16:creationId xmlns:a16="http://schemas.microsoft.com/office/drawing/2014/main" id="{B0742F6D-805D-4F62-8DAD-EAADB51FD106}"/>
               </a:ext>
             </a:extLst>
           </p:cNvPr>
@@ -37506,7 +37398,7 @@
           <p:cNvPr id="16" name="">
             <a:extLst xmlns:a="http://schemas.openxmlformats.org/drawingml/2006/main">
               <a:ext uri="{FF2B5EF4-FFF2-40B4-BE49-F238E27FC236}">
-                <a16:creationId xmlns:a16="http://schemas.microsoft.com/office/drawing/2014/main" id="{23BC24FB-0492-4C9B-8503-3B58CC3ED3FD}"/>
+                <a16:creationId xmlns:a16="http://schemas.microsoft.com/office/drawing/2014/main" id="{7A703FB2-56A1-4C88-8C42-E798F5143FC4}"/>
               </a:ext>
             </a:extLst>
           </p:cNvPr>
@@ -37541,7 +37433,7 @@
           <p:cNvPr id="17" name="">
             <a:extLst xmlns:a="http://schemas.openxmlformats.org/drawingml/2006/main">
               <a:ext uri="{FF2B5EF4-FFF2-40B4-BE49-F238E27FC236}">
-                <a16:creationId xmlns:a16="http://schemas.microsoft.com/office/drawing/2014/main" id="{64328CFF-CC6E-43DB-B0D1-3BECB6451A5D}"/>
+                <a16:creationId xmlns:a16="http://schemas.microsoft.com/office/drawing/2014/main" id="{F3B3617D-DC67-4FE5-AE0D-CF0C58F3EC8F}"/>
               </a:ext>
             </a:extLst>
           </p:cNvPr>
@@ -37597,7 +37489,7 @@
           <p:cNvPr id="18" name="">
             <a:extLst xmlns:a="http://schemas.openxmlformats.org/drawingml/2006/main">
               <a:ext uri="{FF2B5EF4-FFF2-40B4-BE49-F238E27FC236}">
-                <a16:creationId xmlns:a16="http://schemas.microsoft.com/office/drawing/2014/main" id="{3C71249E-A7EE-4F98-8F4C-4D333F868476}"/>
+                <a16:creationId xmlns:a16="http://schemas.microsoft.com/office/drawing/2014/main" id="{086613D5-043B-4645-9597-4F9F6875589B}"/>
               </a:ext>
             </a:extLst>
           </p:cNvPr>
@@ -37651,7 +37543,7 @@
     </p:spTree>
     <p:extLst>
       <p:ext uri="{BB962C8B-B14F-4D97-AF65-F5344CB8AC3E}">
-        <p14:creationId xmlns:p14="http://schemas.microsoft.com/office/powerpoint/2010/main" val="19497413"/>
+        <p14:creationId xmlns:p14="http://schemas.microsoft.com/office/powerpoint/2010/main" val="1890281868"/>
       </p:ext>
     </p:extLst>
   </p:cSld>
@@ -37682,7 +37574,7 @@
           <p:cNvPr id="1" name="">
             <a:extLst xmlns:a="http://schemas.openxmlformats.org/drawingml/2006/main">
               <a:ext uri="{FF2B5EF4-FFF2-40B4-BE49-F238E27FC236}">
-                <a16:creationId xmlns:a16="http://schemas.microsoft.com/office/drawing/2014/main" id="{F6A354A9-413F-41E7-972D-C92CCCDFF948}"/>
+                <a16:creationId xmlns:a16="http://schemas.microsoft.com/office/drawing/2014/main" id="{38910B6A-967D-429E-B1EA-932AFAB3C51E}"/>
               </a:ext>
             </a:extLst>
           </p:cNvPr>
@@ -37715,7 +37607,7 @@
           <p:cNvPr id="2" name="">
             <a:extLst xmlns:a="http://schemas.openxmlformats.org/drawingml/2006/main">
               <a:ext uri="{FF2B5EF4-FFF2-40B4-BE49-F238E27FC236}">
-                <a16:creationId xmlns:a16="http://schemas.microsoft.com/office/drawing/2014/main" id="{D6063975-C687-4C23-A1CF-C95E3A85AF4B}"/>
+                <a16:creationId xmlns:a16="http://schemas.microsoft.com/office/drawing/2014/main" id="{B2B69F3E-0185-402D-A621-33E3A333899A}"/>
               </a:ext>
             </a:extLst>
           </p:cNvPr>
@@ -37771,7 +37663,7 @@
           <p:cNvPr id="3" name="">
             <a:extLst xmlns:a="http://schemas.openxmlformats.org/drawingml/2006/main">
               <a:ext uri="{FF2B5EF4-FFF2-40B4-BE49-F238E27FC236}">
-                <a16:creationId xmlns:a16="http://schemas.microsoft.com/office/drawing/2014/main" id="{E1888789-7A3D-4E47-B64A-DDA217EB84DF}"/>
+                <a16:creationId xmlns:a16="http://schemas.microsoft.com/office/drawing/2014/main" id="{FB0EDE64-160F-4272-8DC9-CB230456CA37}"/>
               </a:ext>
             </a:extLst>
           </p:cNvPr>
@@ -37827,7 +37719,7 @@
           <p:cNvPr id="4" name="">
             <a:extLst xmlns:a="http://schemas.openxmlformats.org/drawingml/2006/main">
               <a:ext uri="{FF2B5EF4-FFF2-40B4-BE49-F238E27FC236}">
-                <a16:creationId xmlns:a16="http://schemas.microsoft.com/office/drawing/2014/main" id="{3C713EE0-BF1D-48F4-9D46-8B1FC96A46CC}"/>
+                <a16:creationId xmlns:a16="http://schemas.microsoft.com/office/drawing/2014/main" id="{40E3DE9B-EB6A-4CDA-B791-12B5A5A4854F}"/>
               </a:ext>
             </a:extLst>
           </p:cNvPr>
@@ -38044,7 +37936,7 @@
           <p:cNvPr id="5" name="">
             <a:extLst xmlns:a="http://schemas.openxmlformats.org/drawingml/2006/main">
               <a:ext uri="{FF2B5EF4-FFF2-40B4-BE49-F238E27FC236}">
-                <a16:creationId xmlns:a16="http://schemas.microsoft.com/office/drawing/2014/main" id="{D05F051F-BA75-4184-A85A-A4D5D42067A7}"/>
+                <a16:creationId xmlns:a16="http://schemas.microsoft.com/office/drawing/2014/main" id="{3F9FFA75-59A7-4C8D-9A8F-8788AFD1B9A5}"/>
               </a:ext>
             </a:extLst>
           </p:cNvPr>
@@ -38079,7 +37971,7 @@
           <p:cNvPr id="6" name="">
             <a:extLst xmlns:a="http://schemas.openxmlformats.org/drawingml/2006/main">
               <a:ext uri="{FF2B5EF4-FFF2-40B4-BE49-F238E27FC236}">
-                <a16:creationId xmlns:a16="http://schemas.microsoft.com/office/drawing/2014/main" id="{0B01DDBD-DF07-4CD2-8B1F-5817B1256F86}"/>
+                <a16:creationId xmlns:a16="http://schemas.microsoft.com/office/drawing/2014/main" id="{352EF457-A870-482D-BB38-F33FB3D10046}"/>
               </a:ext>
             </a:extLst>
           </p:cNvPr>
@@ -38135,7 +38027,7 @@
           <p:cNvPr id="7" name="">
             <a:extLst xmlns:a="http://schemas.openxmlformats.org/drawingml/2006/main">
               <a:ext uri="{FF2B5EF4-FFF2-40B4-BE49-F238E27FC236}">
-                <a16:creationId xmlns:a16="http://schemas.microsoft.com/office/drawing/2014/main" id="{A968FEDA-0808-4743-AB19-D68DBDF6DE65}"/>
+                <a16:creationId xmlns:a16="http://schemas.microsoft.com/office/drawing/2014/main" id="{0F30724E-05B9-43B1-AB73-EBF2327C39CC}"/>
               </a:ext>
             </a:extLst>
           </p:cNvPr>
@@ -38189,7 +38081,7 @@
     </p:spTree>
     <p:extLst>
       <p:ext uri="{BB962C8B-B14F-4D97-AF65-F5344CB8AC3E}">
-        <p14:creationId xmlns:p14="http://schemas.microsoft.com/office/powerpoint/2010/main" val="1736557910"/>
+        <p14:creationId xmlns:p14="http://schemas.microsoft.com/office/powerpoint/2010/main" val="386363168"/>
       </p:ext>
     </p:extLst>
   </p:cSld>
@@ -38220,7 +38112,7 @@
           <p:cNvPr id="1" name="">
             <a:extLst xmlns:a="http://schemas.openxmlformats.org/drawingml/2006/main">
               <a:ext uri="{FF2B5EF4-FFF2-40B4-BE49-F238E27FC236}">
-                <a16:creationId xmlns:a16="http://schemas.microsoft.com/office/drawing/2014/main" id="{24A9393B-378E-4179-B1AB-2FFB931A6EF3}"/>
+                <a16:creationId xmlns:a16="http://schemas.microsoft.com/office/drawing/2014/main" id="{EB2B9719-7516-41FF-963E-15BA61E0F110}"/>
               </a:ext>
             </a:extLst>
           </p:cNvPr>
@@ -38253,7 +38145,7 @@
           <p:cNvPr id="2" name="">
             <a:extLst xmlns:a="http://schemas.openxmlformats.org/drawingml/2006/main">
               <a:ext uri="{FF2B5EF4-FFF2-40B4-BE49-F238E27FC236}">
-                <a16:creationId xmlns:a16="http://schemas.microsoft.com/office/drawing/2014/main" id="{8051E1AF-99FF-4005-A823-DE2D026E3D4E}"/>
+                <a16:creationId xmlns:a16="http://schemas.microsoft.com/office/drawing/2014/main" id="{AE5BD70F-9D3D-4F25-9617-8E557A19D52F}"/>
               </a:ext>
             </a:extLst>
           </p:cNvPr>
@@ -38309,7 +38201,7 @@
           <p:cNvPr id="3" name="">
             <a:extLst xmlns:a="http://schemas.openxmlformats.org/drawingml/2006/main">
               <a:ext uri="{FF2B5EF4-FFF2-40B4-BE49-F238E27FC236}">
-                <a16:creationId xmlns:a16="http://schemas.microsoft.com/office/drawing/2014/main" id="{89BB132F-9C02-412F-8854-24A51A90C731}"/>
+                <a16:creationId xmlns:a16="http://schemas.microsoft.com/office/drawing/2014/main" id="{40FC44BF-81C9-45E4-8D60-1A75D3994A1C}"/>
               </a:ext>
             </a:extLst>
           </p:cNvPr>
@@ -38369,19 +38261,13 @@
           <p:nvPr/>
         </p:nvPicPr>
         <p:blipFill>
-          <a:blip xmlns:r="http://schemas.openxmlformats.org/officeDocument/2006/relationships" xmlns:a="http://schemas.openxmlformats.org/drawingml/2006/main" r:embed="R55f75460eb8f43e3">
-            <a:extLst>
-              <a:ext uri="{96DAC541-7B7A-43D3-8B79-37D633B846F1}">
-                <asvg:svgBlip xmlns:asvg="http://schemas.microsoft.com/office/drawing/2016/SVG/main" r:embed="R0a7516ed52824073"/>
-              </a:ext>
-            </a:extLst>
-          </a:blip>
+          <a:blip xmlns:r="http://schemas.openxmlformats.org/officeDocument/2006/relationships" xmlns:a="http://schemas.openxmlformats.org/drawingml/2006/main" r:embed="R866d23b7ac86411c"/>
           <a:stretch xmlns:a="http://schemas.openxmlformats.org/drawingml/2006/main"/>
         </p:blipFill>
         <p:spPr>
           <a:xfrm xmlns:a="http://schemas.openxmlformats.org/drawingml/2006/main">
-            <a:off x="6858000" y="1352550"/>
-            <a:ext cx="4286250" cy="2000250"/>
+            <a:off x="6863761" y="1352550"/>
+            <a:ext cx="4274728" cy="2000250"/>
           </a:xfrm>
           <a:prstGeom xmlns:a="http://schemas.openxmlformats.org/drawingml/2006/main" prst="rect">
             <a:avLst/>
@@ -38393,7 +38279,7 @@
           <p:cNvPr id="5" name="">
             <a:extLst xmlns:a="http://schemas.openxmlformats.org/drawingml/2006/main">
               <a:ext uri="{FF2B5EF4-FFF2-40B4-BE49-F238E27FC236}">
-                <a16:creationId xmlns:a16="http://schemas.microsoft.com/office/drawing/2014/main" id="{240BD561-432D-4050-9A0D-B1FDC920E00A}"/>
+                <a16:creationId xmlns:a16="http://schemas.microsoft.com/office/drawing/2014/main" id="{E388B678-5F3A-4814-9E31-09B376C1CB20}"/>
               </a:ext>
             </a:extLst>
           </p:cNvPr>
@@ -38428,7 +38314,7 @@
           <p:cNvPr id="6" name="">
             <a:extLst xmlns:a="http://schemas.openxmlformats.org/drawingml/2006/main">
               <a:ext uri="{FF2B5EF4-FFF2-40B4-BE49-F238E27FC236}">
-                <a16:creationId xmlns:a16="http://schemas.microsoft.com/office/drawing/2014/main" id="{A7D420BA-AF0B-4FD1-A70B-1CCD30F068BD}"/>
+                <a16:creationId xmlns:a16="http://schemas.microsoft.com/office/drawing/2014/main" id="{2A6E0CD8-972B-41F1-BEBE-CCC86BC11454}"/>
               </a:ext>
             </a:extLst>
           </p:cNvPr>
@@ -38484,7 +38370,7 @@
           <p:cNvPr id="7" name="">
             <a:extLst xmlns:a="http://schemas.openxmlformats.org/drawingml/2006/main">
               <a:ext uri="{FF2B5EF4-FFF2-40B4-BE49-F238E27FC236}">
-                <a16:creationId xmlns:a16="http://schemas.microsoft.com/office/drawing/2014/main" id="{C8378794-6C0B-44D6-8370-09E88B1425DF}"/>
+                <a16:creationId xmlns:a16="http://schemas.microsoft.com/office/drawing/2014/main" id="{1ED044E7-29E6-40B8-9F2C-1B64B855657E}"/>
               </a:ext>
             </a:extLst>
           </p:cNvPr>
@@ -38519,7 +38405,7 @@
           <p:cNvPr id="8" name="">
             <a:extLst xmlns:a="http://schemas.openxmlformats.org/drawingml/2006/main">
               <a:ext uri="{FF2B5EF4-FFF2-40B4-BE49-F238E27FC236}">
-                <a16:creationId xmlns:a16="http://schemas.microsoft.com/office/drawing/2014/main" id="{13BA6E4D-4E55-4C91-AF12-0DE777BE3F8C}"/>
+                <a16:creationId xmlns:a16="http://schemas.microsoft.com/office/drawing/2014/main" id="{C65F5F04-1D97-47F8-8ADE-422BB6B8D903}"/>
               </a:ext>
             </a:extLst>
           </p:cNvPr>
@@ -38575,7 +38461,7 @@
           <p:cNvPr id="9" name="">
             <a:extLst xmlns:a="http://schemas.openxmlformats.org/drawingml/2006/main">
               <a:ext uri="{FF2B5EF4-FFF2-40B4-BE49-F238E27FC236}">
-                <a16:creationId xmlns:a16="http://schemas.microsoft.com/office/drawing/2014/main" id="{C0EF3BD4-6AD4-4554-86C7-FA856170D0D9}"/>
+                <a16:creationId xmlns:a16="http://schemas.microsoft.com/office/drawing/2014/main" id="{9DFF0EED-4C69-41ED-A014-9B843226E2BF}"/>
               </a:ext>
             </a:extLst>
           </p:cNvPr>
@@ -38610,7 +38496,7 @@
           <p:cNvPr id="10" name="">
             <a:extLst xmlns:a="http://schemas.openxmlformats.org/drawingml/2006/main">
               <a:ext uri="{FF2B5EF4-FFF2-40B4-BE49-F238E27FC236}">
-                <a16:creationId xmlns:a16="http://schemas.microsoft.com/office/drawing/2014/main" id="{D6D3A800-F092-4E6F-A232-BD84011EA917}"/>
+                <a16:creationId xmlns:a16="http://schemas.microsoft.com/office/drawing/2014/main" id="{AE3DB69A-D80E-4C86-B29A-7FA68D56E1E1}"/>
               </a:ext>
             </a:extLst>
           </p:cNvPr>
@@ -38666,7 +38552,7 @@
           <p:cNvPr id="11" name="">
             <a:extLst xmlns:a="http://schemas.openxmlformats.org/drawingml/2006/main">
               <a:ext uri="{FF2B5EF4-FFF2-40B4-BE49-F238E27FC236}">
-                <a16:creationId xmlns:a16="http://schemas.microsoft.com/office/drawing/2014/main" id="{7556A249-ED55-4C40-9B6A-4F8286A0B75D}"/>
+                <a16:creationId xmlns:a16="http://schemas.microsoft.com/office/drawing/2014/main" id="{F9E1D74A-2E04-4187-9889-40F2E6A5EF44}"/>
               </a:ext>
             </a:extLst>
           </p:cNvPr>
@@ -38701,7 +38587,7 @@
           <p:cNvPr id="12" name="">
             <a:extLst xmlns:a="http://schemas.openxmlformats.org/drawingml/2006/main">
               <a:ext uri="{FF2B5EF4-FFF2-40B4-BE49-F238E27FC236}">
-                <a16:creationId xmlns:a16="http://schemas.microsoft.com/office/drawing/2014/main" id="{E5842176-56E8-4113-B751-EEF1B1293AF2}"/>
+                <a16:creationId xmlns:a16="http://schemas.microsoft.com/office/drawing/2014/main" id="{BEF61854-305D-4E17-AE96-7063AF2CC15D}"/>
               </a:ext>
             </a:extLst>
           </p:cNvPr>
@@ -38757,7 +38643,7 @@
           <p:cNvPr id="13" name="">
             <a:extLst xmlns:a="http://schemas.openxmlformats.org/drawingml/2006/main">
               <a:ext uri="{FF2B5EF4-FFF2-40B4-BE49-F238E27FC236}">
-                <a16:creationId xmlns:a16="http://schemas.microsoft.com/office/drawing/2014/main" id="{30A9D6E7-F467-4157-8B98-1777D777F3EE}"/>
+                <a16:creationId xmlns:a16="http://schemas.microsoft.com/office/drawing/2014/main" id="{B5CAB551-A890-4214-967A-6328602B5E4A}"/>
               </a:ext>
             </a:extLst>
           </p:cNvPr>
@@ -38792,7 +38678,7 @@
           <p:cNvPr id="14" name="">
             <a:extLst xmlns:a="http://schemas.openxmlformats.org/drawingml/2006/main">
               <a:ext uri="{FF2B5EF4-FFF2-40B4-BE49-F238E27FC236}">
-                <a16:creationId xmlns:a16="http://schemas.microsoft.com/office/drawing/2014/main" id="{FBBECBBF-446F-4E95-B7CE-D6920FAD87E8}"/>
+                <a16:creationId xmlns:a16="http://schemas.microsoft.com/office/drawing/2014/main" id="{98C21DF3-B0D9-403A-A1B9-9216D9D9B94D}"/>
               </a:ext>
             </a:extLst>
           </p:cNvPr>
@@ -38848,7 +38734,7 @@
           <p:cNvPr id="15" name="">
             <a:extLst xmlns:a="http://schemas.openxmlformats.org/drawingml/2006/main">
               <a:ext uri="{FF2B5EF4-FFF2-40B4-BE49-F238E27FC236}">
-                <a16:creationId xmlns:a16="http://schemas.microsoft.com/office/drawing/2014/main" id="{B2C24F47-B711-4745-9938-C419249A6EE4}"/>
+                <a16:creationId xmlns:a16="http://schemas.microsoft.com/office/drawing/2014/main" id="{42DF6857-052A-4BE0-B351-8C16210B1498}"/>
               </a:ext>
             </a:extLst>
           </p:cNvPr>
@@ -38883,7 +38769,7 @@
           <p:cNvPr id="16" name="">
             <a:extLst xmlns:a="http://schemas.openxmlformats.org/drawingml/2006/main">
               <a:ext uri="{FF2B5EF4-FFF2-40B4-BE49-F238E27FC236}">
-                <a16:creationId xmlns:a16="http://schemas.microsoft.com/office/drawing/2014/main" id="{9ECE2277-4BC6-44D7-A550-1390BAA128D6}"/>
+                <a16:creationId xmlns:a16="http://schemas.microsoft.com/office/drawing/2014/main" id="{91B0F69D-974A-4199-852B-8F2DB2BA7614}"/>
               </a:ext>
             </a:extLst>
           </p:cNvPr>
@@ -38939,7 +38825,7 @@
           <p:cNvPr id="17" name="">
             <a:extLst xmlns:a="http://schemas.openxmlformats.org/drawingml/2006/main">
               <a:ext uri="{FF2B5EF4-FFF2-40B4-BE49-F238E27FC236}">
-                <a16:creationId xmlns:a16="http://schemas.microsoft.com/office/drawing/2014/main" id="{04B387BA-F965-41E7-9765-412DC28066F3}"/>
+                <a16:creationId xmlns:a16="http://schemas.microsoft.com/office/drawing/2014/main" id="{4EB8ABF0-4E77-4300-B526-C24CE7106ED5}"/>
               </a:ext>
             </a:extLst>
           </p:cNvPr>
@@ -38974,7 +38860,7 @@
           <p:cNvPr id="18" name="">
             <a:extLst xmlns:a="http://schemas.openxmlformats.org/drawingml/2006/main">
               <a:ext uri="{FF2B5EF4-FFF2-40B4-BE49-F238E27FC236}">
-                <a16:creationId xmlns:a16="http://schemas.microsoft.com/office/drawing/2014/main" id="{2AFF690E-6D42-480E-B702-55E2C1FC687B}"/>
+                <a16:creationId xmlns:a16="http://schemas.microsoft.com/office/drawing/2014/main" id="{F86F17F5-B3C2-4AB3-BFBE-E78911157EB7}"/>
               </a:ext>
             </a:extLst>
           </p:cNvPr>
@@ -39030,7 +38916,7 @@
           <p:cNvPr id="19" name="">
             <a:extLst xmlns:a="http://schemas.openxmlformats.org/drawingml/2006/main">
               <a:ext uri="{FF2B5EF4-FFF2-40B4-BE49-F238E27FC236}">
-                <a16:creationId xmlns:a16="http://schemas.microsoft.com/office/drawing/2014/main" id="{F0E9FE42-E92D-4AA4-AA70-702285508047}"/>
+                <a16:creationId xmlns:a16="http://schemas.microsoft.com/office/drawing/2014/main" id="{9BDFB00C-A767-4F7C-9129-AF5BF58B9D11}"/>
               </a:ext>
             </a:extLst>
           </p:cNvPr>
@@ -39084,7 +38970,7 @@
     </p:spTree>
     <p:extLst>
       <p:ext uri="{BB962C8B-B14F-4D97-AF65-F5344CB8AC3E}">
-        <p14:creationId xmlns:p14="http://schemas.microsoft.com/office/powerpoint/2010/main" val="1405315123"/>
+        <p14:creationId xmlns:p14="http://schemas.microsoft.com/office/powerpoint/2010/main" val="1836974824"/>
       </p:ext>
     </p:extLst>
   </p:cSld>
@@ -39115,7 +39001,7 @@
           <p:cNvPr id="1" name="">
             <a:extLst xmlns:a="http://schemas.openxmlformats.org/drawingml/2006/main">
               <a:ext uri="{FF2B5EF4-FFF2-40B4-BE49-F238E27FC236}">
-                <a16:creationId xmlns:a16="http://schemas.microsoft.com/office/drawing/2014/main" id="{357A6375-FCAA-4E16-8E05-4FEEA7AF7296}"/>
+                <a16:creationId xmlns:a16="http://schemas.microsoft.com/office/drawing/2014/main" id="{99F56E54-7748-471B-8816-0182545AC94A}"/>
               </a:ext>
             </a:extLst>
           </p:cNvPr>
@@ -39148,7 +39034,7 @@
           <p:cNvPr id="2" name="">
             <a:extLst xmlns:a="http://schemas.openxmlformats.org/drawingml/2006/main">
               <a:ext uri="{FF2B5EF4-FFF2-40B4-BE49-F238E27FC236}">
-                <a16:creationId xmlns:a16="http://schemas.microsoft.com/office/drawing/2014/main" id="{7900734D-DF9C-4008-9D80-2D83FD134C52}"/>
+                <a16:creationId xmlns:a16="http://schemas.microsoft.com/office/drawing/2014/main" id="{86BEE19C-7A1A-4826-930B-9DCBE0FDF568}"/>
               </a:ext>
             </a:extLst>
           </p:cNvPr>
@@ -39204,7 +39090,7 @@
           <p:cNvPr id="3" name="">
             <a:extLst xmlns:a="http://schemas.openxmlformats.org/drawingml/2006/main">
               <a:ext uri="{FF2B5EF4-FFF2-40B4-BE49-F238E27FC236}">
-                <a16:creationId xmlns:a16="http://schemas.microsoft.com/office/drawing/2014/main" id="{4744D468-33B6-426B-A582-8A7BC434A4BF}"/>
+                <a16:creationId xmlns:a16="http://schemas.microsoft.com/office/drawing/2014/main" id="{53E9CF42-AE20-4419-A1E2-F19FCFD80BBA}"/>
               </a:ext>
             </a:extLst>
           </p:cNvPr>
@@ -39260,7 +39146,7 @@
           <p:cNvPr id="4" name="">
             <a:extLst xmlns:a="http://schemas.openxmlformats.org/drawingml/2006/main">
               <a:ext uri="{FF2B5EF4-FFF2-40B4-BE49-F238E27FC236}">
-                <a16:creationId xmlns:a16="http://schemas.microsoft.com/office/drawing/2014/main" id="{B6554E9F-C81E-4ADF-8BC7-1159F449F23B}"/>
+                <a16:creationId xmlns:a16="http://schemas.microsoft.com/office/drawing/2014/main" id="{9EEF65DB-FEAF-423C-9095-6363BE3BB918}"/>
               </a:ext>
             </a:extLst>
           </p:cNvPr>
@@ -39295,7 +39181,7 @@
           <p:cNvPr id="5" name="">
             <a:extLst xmlns:a="http://schemas.openxmlformats.org/drawingml/2006/main">
               <a:ext uri="{FF2B5EF4-FFF2-40B4-BE49-F238E27FC236}">
-                <a16:creationId xmlns:a16="http://schemas.microsoft.com/office/drawing/2014/main" id="{A1D47DA5-88FD-4456-8E62-B6894EE05D13}"/>
+                <a16:creationId xmlns:a16="http://schemas.microsoft.com/office/drawing/2014/main" id="{18AF9008-F36A-4DEC-8A05-67908DF05709}"/>
               </a:ext>
             </a:extLst>
           </p:cNvPr>
@@ -39351,7 +39237,7 @@
           <p:cNvPr id="6" name="">
             <a:extLst xmlns:a="http://schemas.openxmlformats.org/drawingml/2006/main">
               <a:ext uri="{FF2B5EF4-FFF2-40B4-BE49-F238E27FC236}">
-                <a16:creationId xmlns:a16="http://schemas.microsoft.com/office/drawing/2014/main" id="{FBA231CC-CD53-46EE-AA32-9590429C88D1}"/>
+                <a16:creationId xmlns:a16="http://schemas.microsoft.com/office/drawing/2014/main" id="{E5D78371-8DE3-4D84-B3C9-B7E2ECC11344}"/>
               </a:ext>
             </a:extLst>
           </p:cNvPr>
@@ -39386,7 +39272,7 @@
           <p:cNvPr id="7" name="">
             <a:extLst xmlns:a="http://schemas.openxmlformats.org/drawingml/2006/main">
               <a:ext uri="{FF2B5EF4-FFF2-40B4-BE49-F238E27FC236}">
-                <a16:creationId xmlns:a16="http://schemas.microsoft.com/office/drawing/2014/main" id="{AF4CED13-306E-435A-994D-0A9599A7CAD4}"/>
+                <a16:creationId xmlns:a16="http://schemas.microsoft.com/office/drawing/2014/main" id="{22EBD249-C1D2-43CA-A1F2-BC03460BDE53}"/>
               </a:ext>
             </a:extLst>
           </p:cNvPr>
@@ -39442,7 +39328,7 @@
           <p:cNvPr id="8" name="">
             <a:extLst xmlns:a="http://schemas.openxmlformats.org/drawingml/2006/main">
               <a:ext uri="{FF2B5EF4-FFF2-40B4-BE49-F238E27FC236}">
-                <a16:creationId xmlns:a16="http://schemas.microsoft.com/office/drawing/2014/main" id="{F706733E-E6AF-4F53-A170-57EAC353297B}"/>
+                <a16:creationId xmlns:a16="http://schemas.microsoft.com/office/drawing/2014/main" id="{406CFA27-D4D2-4E91-BCC9-9782F7EC9C54}"/>
               </a:ext>
             </a:extLst>
           </p:cNvPr>
@@ -39477,7 +39363,7 @@
           <p:cNvPr id="9" name="">
             <a:extLst xmlns:a="http://schemas.openxmlformats.org/drawingml/2006/main">
               <a:ext uri="{FF2B5EF4-FFF2-40B4-BE49-F238E27FC236}">
-                <a16:creationId xmlns:a16="http://schemas.microsoft.com/office/drawing/2014/main" id="{C6BCFED1-0515-42AC-B741-38CE14447077}"/>
+                <a16:creationId xmlns:a16="http://schemas.microsoft.com/office/drawing/2014/main" id="{07C076A3-CE8E-43CF-9AB0-FE3B5DC628D2}"/>
               </a:ext>
             </a:extLst>
           </p:cNvPr>
@@ -39533,7 +39419,7 @@
           <p:cNvPr id="10" name="">
             <a:extLst xmlns:a="http://schemas.openxmlformats.org/drawingml/2006/main">
               <a:ext uri="{FF2B5EF4-FFF2-40B4-BE49-F238E27FC236}">
-                <a16:creationId xmlns:a16="http://schemas.microsoft.com/office/drawing/2014/main" id="{781B73C2-58E9-422B-B1A2-FE94A7D817B1}"/>
+                <a16:creationId xmlns:a16="http://schemas.microsoft.com/office/drawing/2014/main" id="{43838032-EB40-4DC5-955C-4EF85C9DA26B}"/>
               </a:ext>
             </a:extLst>
           </p:cNvPr>
@@ -39568,7 +39454,7 @@
           <p:cNvPr id="11" name="">
             <a:extLst xmlns:a="http://schemas.openxmlformats.org/drawingml/2006/main">
               <a:ext uri="{FF2B5EF4-FFF2-40B4-BE49-F238E27FC236}">
-                <a16:creationId xmlns:a16="http://schemas.microsoft.com/office/drawing/2014/main" id="{841B6711-6CCA-4CEF-899A-7800000D12D8}"/>
+                <a16:creationId xmlns:a16="http://schemas.microsoft.com/office/drawing/2014/main" id="{9014A79D-F563-4F5F-A38A-2D0FEFB7245A}"/>
               </a:ext>
             </a:extLst>
           </p:cNvPr>
@@ -39624,7 +39510,7 @@
           <p:cNvPr id="12" name="">
             <a:extLst xmlns:a="http://schemas.openxmlformats.org/drawingml/2006/main">
               <a:ext uri="{FF2B5EF4-FFF2-40B4-BE49-F238E27FC236}">
-                <a16:creationId xmlns:a16="http://schemas.microsoft.com/office/drawing/2014/main" id="{C7CA03F6-951B-40A8-A58F-37CE1B48DDF7}"/>
+                <a16:creationId xmlns:a16="http://schemas.microsoft.com/office/drawing/2014/main" id="{02D82E2F-D871-4079-98FE-510A37AA0339}"/>
               </a:ext>
             </a:extLst>
           </p:cNvPr>
@@ -39659,7 +39545,7 @@
           <p:cNvPr id="13" name="">
             <a:extLst xmlns:a="http://schemas.openxmlformats.org/drawingml/2006/main">
               <a:ext uri="{FF2B5EF4-FFF2-40B4-BE49-F238E27FC236}">
-                <a16:creationId xmlns:a16="http://schemas.microsoft.com/office/drawing/2014/main" id="{A8DF270F-8DAB-4F95-8B0E-E3A5C1359164}"/>
+                <a16:creationId xmlns:a16="http://schemas.microsoft.com/office/drawing/2014/main" id="{552229F1-6369-4F00-B9D7-739B5FDBEBBF}"/>
               </a:ext>
             </a:extLst>
           </p:cNvPr>
@@ -39715,7 +39601,7 @@
           <p:cNvPr id="14" name="">
             <a:extLst xmlns:a="http://schemas.openxmlformats.org/drawingml/2006/main">
               <a:ext uri="{FF2B5EF4-FFF2-40B4-BE49-F238E27FC236}">
-                <a16:creationId xmlns:a16="http://schemas.microsoft.com/office/drawing/2014/main" id="{DB7920F2-D6AA-447E-A197-08267D7B6AC3}"/>
+                <a16:creationId xmlns:a16="http://schemas.microsoft.com/office/drawing/2014/main" id="{8FB384E2-ADD8-4B3A-AF61-8924C48938BE}"/>
               </a:ext>
             </a:extLst>
           </p:cNvPr>
@@ -39769,7 +39655,7 @@
     </p:spTree>
     <p:extLst>
       <p:ext uri="{BB962C8B-B14F-4D97-AF65-F5344CB8AC3E}">
-        <p14:creationId xmlns:p14="http://schemas.microsoft.com/office/powerpoint/2010/main" val="1189708607"/>
+        <p14:creationId xmlns:p14="http://schemas.microsoft.com/office/powerpoint/2010/main" val="605219975"/>
       </p:ext>
     </p:extLst>
   </p:cSld>
@@ -39800,7 +39686,7 @@
           <p:cNvPr id="1" name="">
             <a:extLst xmlns:a="http://schemas.openxmlformats.org/drawingml/2006/main">
               <a:ext uri="{FF2B5EF4-FFF2-40B4-BE49-F238E27FC236}">
-                <a16:creationId xmlns:a16="http://schemas.microsoft.com/office/drawing/2014/main" id="{C0113685-A8A2-41F0-BD1E-0CEEA4F64644}"/>
+                <a16:creationId xmlns:a16="http://schemas.microsoft.com/office/drawing/2014/main" id="{45697C93-1F70-4F7F-990B-BE8B6FBD525D}"/>
               </a:ext>
             </a:extLst>
           </p:cNvPr>
@@ -39833,7 +39719,7 @@
           <p:cNvPr id="2" name="">
             <a:extLst xmlns:a="http://schemas.openxmlformats.org/drawingml/2006/main">
               <a:ext uri="{FF2B5EF4-FFF2-40B4-BE49-F238E27FC236}">
-                <a16:creationId xmlns:a16="http://schemas.microsoft.com/office/drawing/2014/main" id="{DC949BAF-06A0-4928-8F3E-88BF492094CE}"/>
+                <a16:creationId xmlns:a16="http://schemas.microsoft.com/office/drawing/2014/main" id="{F04DB43A-2A8E-4AC4-9D28-ADFCE76DB4FA}"/>
               </a:ext>
             </a:extLst>
           </p:cNvPr>
@@ -39889,7 +39775,7 @@
           <p:cNvPr id="3" name="">
             <a:extLst xmlns:a="http://schemas.openxmlformats.org/drawingml/2006/main">
               <a:ext uri="{FF2B5EF4-FFF2-40B4-BE49-F238E27FC236}">
-                <a16:creationId xmlns:a16="http://schemas.microsoft.com/office/drawing/2014/main" id="{851D8D50-EEE2-47F5-BD64-7956CF11F45E}"/>
+                <a16:creationId xmlns:a16="http://schemas.microsoft.com/office/drawing/2014/main" id="{2A3607D1-86E5-4CEB-892B-14AEA203266F}"/>
               </a:ext>
             </a:extLst>
           </p:cNvPr>
@@ -39945,7 +39831,7 @@
           <p:cNvPr id="4" name="">
             <a:extLst xmlns:a="http://schemas.openxmlformats.org/drawingml/2006/main">
               <a:ext uri="{FF2B5EF4-FFF2-40B4-BE49-F238E27FC236}">
-                <a16:creationId xmlns:a16="http://schemas.microsoft.com/office/drawing/2014/main" id="{B63ACB11-B4CB-4C9D-A5F2-5DAC65DF4238}"/>
+                <a16:creationId xmlns:a16="http://schemas.microsoft.com/office/drawing/2014/main" id="{2A081DB2-774E-40D2-99DC-5880A341B89B}"/>
               </a:ext>
             </a:extLst>
           </p:cNvPr>
@@ -40070,7 +39956,7 @@
           <p:cNvPr id="5" name="">
             <a:extLst xmlns:a="http://schemas.openxmlformats.org/drawingml/2006/main">
               <a:ext uri="{FF2B5EF4-FFF2-40B4-BE49-F238E27FC236}">
-                <a16:creationId xmlns:a16="http://schemas.microsoft.com/office/drawing/2014/main" id="{FA0E08DD-6A53-43D2-AA0C-D9CD25176690}"/>
+                <a16:creationId xmlns:a16="http://schemas.microsoft.com/office/drawing/2014/main" id="{1DC9B22F-5664-419E-BCCE-62BEFB3E4D49}"/>
               </a:ext>
             </a:extLst>
           </p:cNvPr>
@@ -40105,7 +39991,7 @@
           <p:cNvPr id="6" name="">
             <a:extLst xmlns:a="http://schemas.openxmlformats.org/drawingml/2006/main">
               <a:ext uri="{FF2B5EF4-FFF2-40B4-BE49-F238E27FC236}">
-                <a16:creationId xmlns:a16="http://schemas.microsoft.com/office/drawing/2014/main" id="{7A324162-46F2-430C-B68B-B102CCF1DFF4}"/>
+                <a16:creationId xmlns:a16="http://schemas.microsoft.com/office/drawing/2014/main" id="{F78D4F48-7F41-4E66-8FAD-9AC3B25A600F}"/>
               </a:ext>
             </a:extLst>
           </p:cNvPr>
@@ -40161,7 +40047,7 @@
           <p:cNvPr id="7" name="">
             <a:extLst xmlns:a="http://schemas.openxmlformats.org/drawingml/2006/main">
               <a:ext uri="{FF2B5EF4-FFF2-40B4-BE49-F238E27FC236}">
-                <a16:creationId xmlns:a16="http://schemas.microsoft.com/office/drawing/2014/main" id="{DD00162D-C47E-43DD-A417-22B28F4885FD}"/>
+                <a16:creationId xmlns:a16="http://schemas.microsoft.com/office/drawing/2014/main" id="{F7C6B00A-3C35-4B24-B6DE-B29661256A8A}"/>
               </a:ext>
             </a:extLst>
           </p:cNvPr>
@@ -40215,7 +40101,7 @@
     </p:spTree>
     <p:extLst>
       <p:ext uri="{BB962C8B-B14F-4D97-AF65-F5344CB8AC3E}">
-        <p14:creationId xmlns:p14="http://schemas.microsoft.com/office/powerpoint/2010/main" val="2084477403"/>
+        <p14:creationId xmlns:p14="http://schemas.microsoft.com/office/powerpoint/2010/main" val="996873960"/>
       </p:ext>
     </p:extLst>
   </p:cSld>
@@ -40246,7 +40132,7 @@
           <p:cNvPr id="1" name="">
             <a:extLst xmlns:a="http://schemas.openxmlformats.org/drawingml/2006/main">
               <a:ext uri="{FF2B5EF4-FFF2-40B4-BE49-F238E27FC236}">
-                <a16:creationId xmlns:a16="http://schemas.microsoft.com/office/drawing/2014/main" id="{9E38DFBA-24B2-437B-B2EB-E82D7BC53ECC}"/>
+                <a16:creationId xmlns:a16="http://schemas.microsoft.com/office/drawing/2014/main" id="{EC7561EC-9677-4255-BEC0-900DBEB0C96D}"/>
               </a:ext>
             </a:extLst>
           </p:cNvPr>
@@ -40279,7 +40165,7 @@
           <p:cNvPr id="2" name="">
             <a:extLst xmlns:a="http://schemas.openxmlformats.org/drawingml/2006/main">
               <a:ext uri="{FF2B5EF4-FFF2-40B4-BE49-F238E27FC236}">
-                <a16:creationId xmlns:a16="http://schemas.microsoft.com/office/drawing/2014/main" id="{2FA6C64D-0D2C-473E-A67F-6EDE664C50AD}"/>
+                <a16:creationId xmlns:a16="http://schemas.microsoft.com/office/drawing/2014/main" id="{DA5CBC39-8F5B-46D0-A4C0-1404621FDBD4}"/>
               </a:ext>
             </a:extLst>
           </p:cNvPr>
@@ -40335,7 +40221,7 @@
           <p:cNvPr id="3" name="">
             <a:extLst xmlns:a="http://schemas.openxmlformats.org/drawingml/2006/main">
               <a:ext uri="{FF2B5EF4-FFF2-40B4-BE49-F238E27FC236}">
-                <a16:creationId xmlns:a16="http://schemas.microsoft.com/office/drawing/2014/main" id="{3C0ECC59-2C53-4FCD-9299-FDCE442C200B}"/>
+                <a16:creationId xmlns:a16="http://schemas.microsoft.com/office/drawing/2014/main" id="{931F6526-64EE-471B-844E-00773CAC7999}"/>
               </a:ext>
             </a:extLst>
           </p:cNvPr>
@@ -40395,19 +40281,13 @@
           <p:nvPr/>
         </p:nvPicPr>
         <p:blipFill>
-          <a:blip xmlns:r="http://schemas.openxmlformats.org/officeDocument/2006/relationships" xmlns:a="http://schemas.openxmlformats.org/drawingml/2006/main" r:embed="R2943c6ab97794b95">
-            <a:extLst>
-              <a:ext uri="{96DAC541-7B7A-43D3-8B79-37D633B846F1}">
-                <asvg:svgBlip xmlns:asvg="http://schemas.microsoft.com/office/drawing/2016/SVG/main" r:embed="Rba11d23019c34e7d"/>
-              </a:ext>
-            </a:extLst>
-          </a:blip>
+          <a:blip xmlns:r="http://schemas.openxmlformats.org/officeDocument/2006/relationships" xmlns:a="http://schemas.openxmlformats.org/drawingml/2006/main" r:embed="Rcb379a6c7c894925"/>
           <a:stretch xmlns:a="http://schemas.openxmlformats.org/drawingml/2006/main"/>
         </p:blipFill>
         <p:spPr>
           <a:xfrm xmlns:a="http://schemas.openxmlformats.org/drawingml/2006/main">
-            <a:off x="6858000" y="1352550"/>
-            <a:ext cx="4286250" cy="2000250"/>
+            <a:off x="7102492" y="1352550"/>
+            <a:ext cx="3797266" cy="2000250"/>
           </a:xfrm>
           <a:prstGeom xmlns:a="http://schemas.openxmlformats.org/drawingml/2006/main" prst="rect">
             <a:avLst/>
@@ -40419,7 +40299,7 @@
           <p:cNvPr id="5" name="">
             <a:extLst xmlns:a="http://schemas.openxmlformats.org/drawingml/2006/main">
               <a:ext uri="{FF2B5EF4-FFF2-40B4-BE49-F238E27FC236}">
-                <a16:creationId xmlns:a16="http://schemas.microsoft.com/office/drawing/2014/main" id="{8B7DD76C-846D-4BE4-9DEF-D281F5F0483C}"/>
+                <a16:creationId xmlns:a16="http://schemas.microsoft.com/office/drawing/2014/main" id="{4AD5A061-17E4-41BB-8D32-799E3876AC9A}"/>
               </a:ext>
             </a:extLst>
           </p:cNvPr>
@@ -40454,7 +40334,7 @@
           <p:cNvPr id="6" name="">
             <a:extLst xmlns:a="http://schemas.openxmlformats.org/drawingml/2006/main">
               <a:ext uri="{FF2B5EF4-FFF2-40B4-BE49-F238E27FC236}">
-                <a16:creationId xmlns:a16="http://schemas.microsoft.com/office/drawing/2014/main" id="{7D4FC618-38D1-497D-9E3F-0E5490686E1F}"/>
+                <a16:creationId xmlns:a16="http://schemas.microsoft.com/office/drawing/2014/main" id="{01A89C98-02FA-48FB-84B4-60D06594DD0C}"/>
               </a:ext>
             </a:extLst>
           </p:cNvPr>
@@ -40510,7 +40390,7 @@
           <p:cNvPr id="7" name="">
             <a:extLst xmlns:a="http://schemas.openxmlformats.org/drawingml/2006/main">
               <a:ext uri="{FF2B5EF4-FFF2-40B4-BE49-F238E27FC236}">
-                <a16:creationId xmlns:a16="http://schemas.microsoft.com/office/drawing/2014/main" id="{3C716118-2EFE-4F8A-AEAA-D9139F7383EC}"/>
+                <a16:creationId xmlns:a16="http://schemas.microsoft.com/office/drawing/2014/main" id="{C77009E9-11C8-4541-98B2-6C2CDA6E3AC1}"/>
               </a:ext>
             </a:extLst>
           </p:cNvPr>
@@ -40545,7 +40425,7 @@
           <p:cNvPr id="8" name="">
             <a:extLst xmlns:a="http://schemas.openxmlformats.org/drawingml/2006/main">
               <a:ext uri="{FF2B5EF4-FFF2-40B4-BE49-F238E27FC236}">
-                <a16:creationId xmlns:a16="http://schemas.microsoft.com/office/drawing/2014/main" id="{3DF2276C-A24F-4396-8D5E-A069EF73B07D}"/>
+                <a16:creationId xmlns:a16="http://schemas.microsoft.com/office/drawing/2014/main" id="{63D85A13-380E-4A07-8DEE-5D4E84F62A64}"/>
               </a:ext>
             </a:extLst>
           </p:cNvPr>
@@ -40601,7 +40481,7 @@
           <p:cNvPr id="9" name="">
             <a:extLst xmlns:a="http://schemas.openxmlformats.org/drawingml/2006/main">
               <a:ext uri="{FF2B5EF4-FFF2-40B4-BE49-F238E27FC236}">
-                <a16:creationId xmlns:a16="http://schemas.microsoft.com/office/drawing/2014/main" id="{3A644AC8-D748-4521-BE81-7EFDAEAFE32E}"/>
+                <a16:creationId xmlns:a16="http://schemas.microsoft.com/office/drawing/2014/main" id="{2E350BE3-D0F8-4A42-B3C3-613B4C1F8F21}"/>
               </a:ext>
             </a:extLst>
           </p:cNvPr>
@@ -40636,7 +40516,7 @@
           <p:cNvPr id="10" name="">
             <a:extLst xmlns:a="http://schemas.openxmlformats.org/drawingml/2006/main">
               <a:ext uri="{FF2B5EF4-FFF2-40B4-BE49-F238E27FC236}">
-                <a16:creationId xmlns:a16="http://schemas.microsoft.com/office/drawing/2014/main" id="{0709B703-AA96-4412-82F6-D0A8340F5647}"/>
+                <a16:creationId xmlns:a16="http://schemas.microsoft.com/office/drawing/2014/main" id="{C40E0D70-C3D7-439D-A933-47C54599F1EA}"/>
               </a:ext>
             </a:extLst>
           </p:cNvPr>
@@ -40692,7 +40572,7 @@
           <p:cNvPr id="11" name="">
             <a:extLst xmlns:a="http://schemas.openxmlformats.org/drawingml/2006/main">
               <a:ext uri="{FF2B5EF4-FFF2-40B4-BE49-F238E27FC236}">
-                <a16:creationId xmlns:a16="http://schemas.microsoft.com/office/drawing/2014/main" id="{A25B2B36-EF4D-4F9F-839E-06CBACC23AE9}"/>
+                <a16:creationId xmlns:a16="http://schemas.microsoft.com/office/drawing/2014/main" id="{2492FB57-4299-48B9-803D-AD4556818DE3}"/>
               </a:ext>
             </a:extLst>
           </p:cNvPr>
@@ -40727,7 +40607,7 @@
           <p:cNvPr id="12" name="">
             <a:extLst xmlns:a="http://schemas.openxmlformats.org/drawingml/2006/main">
               <a:ext uri="{FF2B5EF4-FFF2-40B4-BE49-F238E27FC236}">
-                <a16:creationId xmlns:a16="http://schemas.microsoft.com/office/drawing/2014/main" id="{EE96B74C-8B84-4357-8F09-4FD99D2958BC}"/>
+                <a16:creationId xmlns:a16="http://schemas.microsoft.com/office/drawing/2014/main" id="{241E5D3C-CED1-46BE-BA82-38CDCB70FB04}"/>
               </a:ext>
             </a:extLst>
           </p:cNvPr>
@@ -40783,7 +40663,7 @@
           <p:cNvPr id="13" name="">
             <a:extLst xmlns:a="http://schemas.openxmlformats.org/drawingml/2006/main">
               <a:ext uri="{FF2B5EF4-FFF2-40B4-BE49-F238E27FC236}">
-                <a16:creationId xmlns:a16="http://schemas.microsoft.com/office/drawing/2014/main" id="{87542F14-2704-47B7-A095-D822101BF1D3}"/>
+                <a16:creationId xmlns:a16="http://schemas.microsoft.com/office/drawing/2014/main" id="{6CB89A43-A69C-462C-877C-8BB4BA434919}"/>
               </a:ext>
             </a:extLst>
           </p:cNvPr>
@@ -40818,7 +40698,7 @@
           <p:cNvPr id="14" name="">
             <a:extLst xmlns:a="http://schemas.openxmlformats.org/drawingml/2006/main">
               <a:ext uri="{FF2B5EF4-FFF2-40B4-BE49-F238E27FC236}">
-                <a16:creationId xmlns:a16="http://schemas.microsoft.com/office/drawing/2014/main" id="{8AF6A18D-2F0D-4D19-8938-4A245890CC85}"/>
+                <a16:creationId xmlns:a16="http://schemas.microsoft.com/office/drawing/2014/main" id="{814D702C-A296-4689-BBC0-7036C9BCF139}"/>
               </a:ext>
             </a:extLst>
           </p:cNvPr>
@@ -40874,7 +40754,7 @@
           <p:cNvPr id="15" name="">
             <a:extLst xmlns:a="http://schemas.openxmlformats.org/drawingml/2006/main">
               <a:ext uri="{FF2B5EF4-FFF2-40B4-BE49-F238E27FC236}">
-                <a16:creationId xmlns:a16="http://schemas.microsoft.com/office/drawing/2014/main" id="{2C8FE59A-56BE-4186-BA8E-0A15ACDEA96C}"/>
+                <a16:creationId xmlns:a16="http://schemas.microsoft.com/office/drawing/2014/main" id="{AC0E2A1A-B1F3-434D-B20A-BB9E95DA455F}"/>
               </a:ext>
             </a:extLst>
           </p:cNvPr>
@@ -40928,7 +40808,7 @@
     </p:spTree>
     <p:extLst>
       <p:ext uri="{BB962C8B-B14F-4D97-AF65-F5344CB8AC3E}">
-        <p14:creationId xmlns:p14="http://schemas.microsoft.com/office/powerpoint/2010/main" val="1343555583"/>
+        <p14:creationId xmlns:p14="http://schemas.microsoft.com/office/powerpoint/2010/main" val="473896852"/>
       </p:ext>
     </p:extLst>
   </p:cSld>
@@ -40959,7 +40839,7 @@
           <p:cNvPr id="1" name="">
             <a:extLst xmlns:a="http://schemas.openxmlformats.org/drawingml/2006/main">
               <a:ext uri="{FF2B5EF4-FFF2-40B4-BE49-F238E27FC236}">
-                <a16:creationId xmlns:a16="http://schemas.microsoft.com/office/drawing/2014/main" id="{06500D83-4AFE-487D-80E5-515397DB1010}"/>
+                <a16:creationId xmlns:a16="http://schemas.microsoft.com/office/drawing/2014/main" id="{0922A7F2-FEEA-41EE-AD55-C0F0CED37DB0}"/>
               </a:ext>
             </a:extLst>
           </p:cNvPr>
@@ -40992,7 +40872,7 @@
           <p:cNvPr id="2" name="">
             <a:extLst xmlns:a="http://schemas.openxmlformats.org/drawingml/2006/main">
               <a:ext uri="{FF2B5EF4-FFF2-40B4-BE49-F238E27FC236}">
-                <a16:creationId xmlns:a16="http://schemas.microsoft.com/office/drawing/2014/main" id="{C5DD9E28-DF1C-4A22-AF5E-50783D857B3E}"/>
+                <a16:creationId xmlns:a16="http://schemas.microsoft.com/office/drawing/2014/main" id="{2374C054-25AA-4905-89C1-EBB62770C510}"/>
               </a:ext>
             </a:extLst>
           </p:cNvPr>
@@ -41048,7 +40928,7 @@
           <p:cNvPr id="3" name="">
             <a:extLst xmlns:a="http://schemas.openxmlformats.org/drawingml/2006/main">
               <a:ext uri="{FF2B5EF4-FFF2-40B4-BE49-F238E27FC236}">
-                <a16:creationId xmlns:a16="http://schemas.microsoft.com/office/drawing/2014/main" id="{F047257F-74D8-4411-8CDD-AA8B21931EF9}"/>
+                <a16:creationId xmlns:a16="http://schemas.microsoft.com/office/drawing/2014/main" id="{60EA228D-B5CB-43A8-A5BA-B877D9E5CA3E}"/>
               </a:ext>
             </a:extLst>
           </p:cNvPr>
@@ -41104,7 +40984,7 @@
           <p:cNvPr id="4" name="">
             <a:extLst xmlns:a="http://schemas.openxmlformats.org/drawingml/2006/main">
               <a:ext uri="{FF2B5EF4-FFF2-40B4-BE49-F238E27FC236}">
-                <a16:creationId xmlns:a16="http://schemas.microsoft.com/office/drawing/2014/main" id="{36DC5B62-07B6-42CD-AE35-D467D517CC2F}"/>
+                <a16:creationId xmlns:a16="http://schemas.microsoft.com/office/drawing/2014/main" id="{A0325841-E570-44DE-A80F-BEC2D52CEB70}"/>
               </a:ext>
             </a:extLst>
           </p:cNvPr>
@@ -41229,7 +41109,7 @@
           <p:cNvPr id="5" name="">
             <a:extLst xmlns:a="http://schemas.openxmlformats.org/drawingml/2006/main">
               <a:ext uri="{FF2B5EF4-FFF2-40B4-BE49-F238E27FC236}">
-                <a16:creationId xmlns:a16="http://schemas.microsoft.com/office/drawing/2014/main" id="{0BC29D62-6E84-4D1F-8A3B-0939423F7B29}"/>
+                <a16:creationId xmlns:a16="http://schemas.microsoft.com/office/drawing/2014/main" id="{B8439BD9-6C6D-40BE-9F0C-4DA0C7471449}"/>
               </a:ext>
             </a:extLst>
           </p:cNvPr>
@@ -41264,7 +41144,7 @@
           <p:cNvPr id="6" name="">
             <a:extLst xmlns:a="http://schemas.openxmlformats.org/drawingml/2006/main">
               <a:ext uri="{FF2B5EF4-FFF2-40B4-BE49-F238E27FC236}">
-                <a16:creationId xmlns:a16="http://schemas.microsoft.com/office/drawing/2014/main" id="{CB46AD7D-32A7-4C67-BC87-9A5C2D2C3379}"/>
+                <a16:creationId xmlns:a16="http://schemas.microsoft.com/office/drawing/2014/main" id="{408BDEF5-29F8-42B6-9DC0-3F202575E4D5}"/>
               </a:ext>
             </a:extLst>
           </p:cNvPr>
@@ -41320,7 +41200,7 @@
           <p:cNvPr id="7" name="">
             <a:extLst xmlns:a="http://schemas.openxmlformats.org/drawingml/2006/main">
               <a:ext uri="{FF2B5EF4-FFF2-40B4-BE49-F238E27FC236}">
-                <a16:creationId xmlns:a16="http://schemas.microsoft.com/office/drawing/2014/main" id="{EB78A7CA-5485-4E66-A298-646DBFF77BD4}"/>
+                <a16:creationId xmlns:a16="http://schemas.microsoft.com/office/drawing/2014/main" id="{B0E706F6-AEF6-4631-B8E5-6B333A02989E}"/>
               </a:ext>
             </a:extLst>
           </p:cNvPr>
@@ -41374,7 +41254,7 @@
     </p:spTree>
     <p:extLst>
       <p:ext uri="{BB962C8B-B14F-4D97-AF65-F5344CB8AC3E}">
-        <p14:creationId xmlns:p14="http://schemas.microsoft.com/office/powerpoint/2010/main" val="393983350"/>
+        <p14:creationId xmlns:p14="http://schemas.microsoft.com/office/powerpoint/2010/main" val="619188999"/>
       </p:ext>
     </p:extLst>
   </p:cSld>
